--- a/presentations/Tenneco_Robotics_Setter_Diego_de_Leon.pptx
+++ b/presentations/Tenneco_Robotics_Setter_Diego_de_Leon.pptx
@@ -25,7 +25,6 @@
     <p:sldId id="264" r:id="rId22"/>
     <p:sldId id="265" r:id="rId23"/>
     <p:sldId id="266" r:id="rId24"/>
-    <p:sldId id="267" r:id="rId25"/>
   </p:sldIdLst>
   <p:sldSz cx="12192000" cy="6858000"/>
   <p:notesSz cx="7010400" cy="9296400"/>
@@ -738,7 +737,22 @@
           <a:lstStyle/>
           <a:p>
             <a:r>
-              <a:t>Good morning. My name is Diego de León, and I study Mechatronics Engineering at the Universidad Politécnica de Aguascalientes. Since August I have been part of the Robotics Setter Technician program here in Aguascalientes, with Fernando Robledo as my plant tutor. In the next fifteen minutes I will show you what the program asks of me, what I have learned so far, and the improvement we already put on the floor.</a:t>
+              <a:t>• Name, UPA, Mechatronics, 9th term.</a:t>
+            </a:r>
+          </a:p>
+          <a:p>
+            <a:r>
+              <a:t>• Program: Robotics Setter Technician, since August 1.</a:t>
+            </a:r>
+          </a:p>
+          <a:p>
+            <a:r>
+              <a:t>• Plant tutor: Fernando Robledo.</a:t>
+            </a:r>
+          </a:p>
+          <a:p>
+            <a:r>
+              <a:t>• Today: what the program asks, what I learned, the improvement.</a:t>
             </a:r>
           </a:p>
         </p:txBody>
@@ -808,7 +822,22 @@
           <a:lstStyle/>
           <a:p>
             <a:r>
-              <a:t>This is how we did it, in four steps. First, we studied the part: which welds, how long they took, and what made them hard. Second, we moved the part into the 4M cell, which is an automatic welding cell. Third, we programmed the robot and adjusted the welding settings until the weld was right. And fourth, we checked the weld quality and released it to production. I did this together with my supervisor, from the idea to the release.</a:t>
+              <a:t>• Cycle time 174 s to 93 s: 47% less.</a:t>
+            </a:r>
+          </a:p>
+          <a:p>
+            <a:r>
+              <a:t>• Welding 146 s to 65 s: 56% less.</a:t>
+            </a:r>
+          </a:p>
+          <a:p>
+            <a:r>
+              <a:t>• Load and unload did not change (same fixture), so the gain is all welding.</a:t>
+            </a:r>
+          </a:p>
+          <a:p>
+            <a:r>
+              <a:t>• 81 s saved on every part, and less strain for the team member.</a:t>
             </a:r>
           </a:p>
         </p:txBody>
@@ -878,7 +907,22 @@
           <a:lstStyle/>
           <a:p>
             <a:r>
-              <a:t>And these are the results. Before, in the manual booth, each part took XX minutes. Now, in the 4M cell, it takes XX minutes. That is XX percent less process time. XX welds moved from a person to the robot, and the team member no longer spends XX minutes per shift in uncomfortable positions. For me, this is the part I am proudest of: the process got faster, and a person’s work got better at the same time.</a:t>
+              <a:t>• It is a proposal, not something already adopted.</a:t>
+            </a:r>
+          </a:p>
+          <a:p>
+            <a:r>
+              <a:t>• Example gap: 8 of 25 exam questions are TIG, and the matrix never names it.</a:t>
+            </a:r>
+          </a:p>
+          <a:p>
+            <a:r>
+              <a:t>• The error: the transfer mode table in the manual.</a:t>
+            </a:r>
+          </a:p>
+          <a:p>
+            <a:r>
+              <a:t>• The new schedule compares plan against reality, week by week.</a:t>
             </a:r>
           </a:p>
         </p:txBody>
@@ -948,7 +992,12 @@
           <a:lstStyle/>
           <a:p>
             <a:r>
-              <a:t>The second half of the final project is the training process. I read the full training material, more than six hundred pages including the customer standard, and compared it with what Level I asks. I found gaps: for example, the practice exam spends eight of its twenty five questions on TIG welding, which the skill matrix does not mention. I also found an error in one of the key tables. And I rebuilt the training schedule in the plant format, so we can compare the plan with what really happened. My proposal is to use both with the next group.</a:t>
+              <a:t>• L in November, U in December, O already started with 4M.</a:t>
+            </a:r>
+          </a:p>
+          <a:p>
+            <a:r>
+              <a:t>• Ask clearly: an exam date, supervised SKS time, feedback on the proposal.</a:t>
             </a:r>
           </a:p>
         </p:txBody>
@@ -1018,7 +1067,12 @@
           <a:lstStyle/>
           <a:p>
             <a:r>
-              <a:t>What comes next. In November, Level L: validating settings and finding defects at the cell, with support. In December, Level U: creating and setting up robot programs on my own. Level O, solving problems and improving, already started with 4M. To get there I need three things: a date for my Level I exam, supervised time programming robots, and your feedback on the training proposal.</a:t>
+              <a:t>• Close with the lime line.</a:t>
+            </a:r>
+          </a:p>
+          <a:p>
+            <a:r>
+              <a:t>• Pause, then open for questions.</a:t>
             </a:r>
           </a:p>
         </p:txBody>
@@ -1088,77 +1142,7 @@
           <a:lstStyle/>
           <a:p>
             <a:r>
-              <a:t>To close. In place today: Level I studied in full, four skills I do on my own, a manual weld moved to the 4M cell with less time and less strain, and a reviewed training path. Next: pass the Level I exam in October, reach Levels L and U before January, and keep measuring 4M while we look for the next weld to automate. I came here to learn robotic welding, and I am already improving it.</a:t>
-            </a:r>
-          </a:p>
-        </p:txBody>
-      </p:sp>
-      <p:sp>
-        <p:nvSpPr>
-          <p:cNvPr id="4" name="Slide Number Placeholder 3"/>
-          <p:cNvSpPr>
-            <a:spLocks noGrp="1"/>
-          </p:cNvSpPr>
-          <p:nvPr>
-            <p:ph type="sldNum" idx="5" sz="quarter"/>
-          </p:nvPr>
-        </p:nvSpPr>
-        <p:spPr/>
-      </p:sp>
-    </p:spTree>
-  </p:cSld>
-  <p:clrMapOvr>
-    <a:masterClrMapping/>
-  </p:clrMapOvr>
-</p:notes>
-</file>
-
-<file path=ppt/notesSlides/notesSlide15.xml><?xml version="1.0" encoding="utf-8"?>
-<p:notes xmlns:a="http://schemas.openxmlformats.org/drawingml/2006/main" xmlns:p="http://schemas.openxmlformats.org/presentationml/2006/main" xmlns:r="http://schemas.openxmlformats.org/officeDocument/2006/relationships">
-  <p:cSld>
-    <p:spTree>
-      <p:nvGrpSpPr>
-        <p:cNvPr id="1" name=""/>
-        <p:cNvGrpSpPr/>
-        <p:nvPr/>
-      </p:nvGrpSpPr>
-      <p:grpSpPr>
-        <a:xfrm>
-          <a:off x="0" y="0"/>
-          <a:ext cx="0" cy="0"/>
-          <a:chOff x="0" y="0"/>
-          <a:chExt cx="0" cy="0"/>
-        </a:xfrm>
-      </p:grpSpPr>
-      <p:sp>
-        <p:nvSpPr>
-          <p:cNvPr id="2" name="Slide Image Placeholder 1"/>
-          <p:cNvSpPr>
-            <a:spLocks noGrp="1"/>
-          </p:cNvSpPr>
-          <p:nvPr>
-            <p:ph type="sldImg" idx="2"/>
-          </p:nvPr>
-        </p:nvSpPr>
-        <p:spPr/>
-      </p:sp>
-      <p:sp>
-        <p:nvSpPr>
-          <p:cNvPr id="3" name="Notes Placeholder 2"/>
-          <p:cNvSpPr>
-            <a:spLocks noGrp="1"/>
-          </p:cNvSpPr>
-          <p:nvPr>
-            <p:ph type="body" idx="3" sz="quarter"/>
-          </p:nvPr>
-        </p:nvSpPr>
-        <p:spPr/>
-        <p:txBody>
-          <a:bodyPr/>
-          <a:lstStyle/>
-          <a:p>
-            <a:r>
-              <a:t>Thank you. I am happy to take any questions.</a:t>
+              <a:t>• Thank them. Take questions.</a:t>
             </a:r>
           </a:p>
         </p:txBody>
@@ -1228,7 +1212,17 @@
           <a:lstStyle/>
           <a:p>
             <a:r>
-              <a:t>The Tenneco value I identify with is Win. Win means earning the trust of our people and our customers. On the floor, trust is not given because of a title. You earn it by showing up when a robot stops, by learning the process properly, and by making someone else’s job better. The clearest moment for me was the improvement I will show you later: a long, uncomfortable weld that a team member did by hand now runs on a robot. That is what winning looks like to me.</a:t>
+              <a:t>• Win: earn the trust of our people and customers.</a:t>
+            </a:r>
+          </a:p>
+          <a:p>
+            <a:r>
+              <a:t>• Trust is earned on the floor, not given by a title.</a:t>
+            </a:r>
+          </a:p>
+          <a:p>
+            <a:r>
+              <a:t>• My example: the longest, hardest weld is now on a robot (4M).</a:t>
             </a:r>
           </a:p>
         </p:txBody>
@@ -1298,7 +1292,17 @@
           <a:lstStyle/>
           <a:p>
             <a:r>
-              <a:t>This is the program in one sentence: become a specialist in robotic welding and advanced technical support. It matters because when a welding robot stops, the line stops with it. The program closes with a final project in two parts. First, an improvement that is actually implemented, in quality, availability or productivity. Second, an update to the training process, so the next setters learn faster. I already have something real for both, and I will show you each one.</a:t>
+              <a:t>• Objective: specialist in robotic welding and technical support.</a:t>
+            </a:r>
+          </a:p>
+          <a:p>
+            <a:r>
+              <a:t>• Why: when a welding robot stops, the line stops.</a:t>
+            </a:r>
+          </a:p>
+          <a:p>
+            <a:r>
+              <a:t>• Final project has two halves, and I have both: 4M and the training update.</a:t>
             </a:r>
           </a:p>
         </p:txBody>
@@ -1368,7 +1372,17 @@
           <a:lstStyle/>
           <a:p>
             <a:r>
-              <a:t>The program follows four levels, the same ILUO path the plant uses for any skill. I is understanding: safety, how the welding process works, the approved procedure, defects and settings. L is doing it with support: adjustments, checking settings and changing consumables. U is doing it alone, which here means programming the robot. And O is the highest level: solving problems, teaching others and improving the process. Each level builds on the one before.</a:t>
+              <a:t>• ILUO: understand, do with support, do alone, improve and teach.</a:t>
+            </a:r>
+          </a:p>
+          <a:p>
+            <a:r>
+              <a:t>• Same path the plant uses for any skill.</a:t>
+            </a:r>
+          </a:p>
+          <a:p>
+            <a:r>
+              <a:t>• Each level builds on the one before.</a:t>
             </a:r>
           </a:p>
         </p:txBody>
@@ -1438,7 +1452,17 @@
           <a:lstStyle/>
           <a:p>
             <a:r>
-              <a:t>Here is where we are in time. The program started on August 1 and closes on January 1. Today I am eight weeks in, with fourteen to go. The next step is the Level I exam, planned for October. After that, November and December are for Levels L and U, where the work moves from knowing to doing: first with support, then on my own. One thing to keep in mind: there are no fixed training hours. Most of the learning happens while we attend real stops at the cells.</a:t>
+              <a:t>• 8 weeks done, 14 to go.</a:t>
+            </a:r>
+          </a:p>
+          <a:p>
+            <a:r>
+              <a:t>• Level I exam in October.</a:t>
+            </a:r>
+          </a:p>
+          <a:p>
+            <a:r>
+              <a:t>• No fixed training hours: I learn while attending real stops.</a:t>
             </a:r>
           </a:p>
         </p:txBody>
@@ -1508,7 +1532,17 @@
           <a:lstStyle/>
           <a:p>
             <a:r>
-              <a:t>Level I is about understanding before touching anything. It has five topics. Safety, so nobody gets hurt around the cell. GMAW welding, which is how the robot joins steel with wire, gas and an electric arc. The WPS, the approved recipe every weld must follow. Defects, meaning how to recognize a bad weld and what caused it. And parameters, the settings that shape the weld and how far they are allowed to move. I learned it from six hundred pages of material, a practice exam, and every day at the cells.</a:t>
+              <a:t>• Five topics, in plain words: safety, GMAW, WPS, defects, parameters.</a:t>
+            </a:r>
+          </a:p>
+          <a:p>
+            <a:r>
+              <a:t>• WPS = the approved recipe for every weld.</a:t>
+            </a:r>
+          </a:p>
+          <a:p>
+            <a:r>
+              <a:t>• Learned from 616 pages, a practice exam and daily work at the cells.</a:t>
             </a:r>
           </a:p>
         </p:txBody>
@@ -1578,7 +1612,17 @@
           <a:lstStyle/>
           <a:p>
             <a:r>
-              <a:t>This is my honest status on the twenty three skills of the program. Four I already do on my own: changing consumables, adjusting the key welding settings, reading weld symbols on drawings, and closing ANDON calls. Thirteen are in progress, including all of Level I, which I have studied completely but still have to prove in the exam. Six have not started yet, most of them in the top level. The 4M improvement counts here too: it is my first step in the improvement skill.</a:t>
+              <a:t>• Name the four on my own: consumables, key settings, weld symbols, ANDON.</a:t>
+            </a:r>
+          </a:p>
+          <a:p>
+            <a:r>
+              <a:t>• Level I studied in full, but the exam is still pending.</a:t>
+            </a:r>
+          </a:p>
+          <a:p>
+            <a:r>
+              <a:t>• 4M counts as my first step in the improvement skill.</a:t>
             </a:r>
           </a:p>
         </p:txBody>
@@ -1648,7 +1692,17 @@
           <a:lstStyle/>
           <a:p>
             <a:r>
-              <a:t>About sixty percent of my time goes to an industrialization project with Engineering. Industrialization means getting a new process ready to run on the floor: the equipment, the programs, the trials and the release to production. [Add one or two sentences on the project and your role.] The other forty percent is support at the robotic cells, and that is where most of my hands-on learning comes from.</a:t>
+              <a:t>• 60% of my time: industrialization of the Cummins project.</a:t>
+            </a:r>
+          </a:p>
+          <a:p>
+            <a:r>
+              <a:t>• Industrialization = getting a new process ready for the floor.</a:t>
+            </a:r>
+          </a:p>
+          <a:p>
+            <a:r>
+              <a:t>• The other 40% at the cells is where the hands-on learning comes from.</a:t>
             </a:r>
           </a:p>
         </p:txBody>
@@ -1718,7 +1772,22 @@
           <a:lstStyle/>
           <a:p>
             <a:r>
-              <a:t>Now the improvement. It started with one process that ran in a manual welding booth. The welds on this part were long, so every part took a long time. And for the team member it was hard work: uncomfortable positions, held for a long time, part after part. My supervisor and I asked a simple question: why is a person doing the longest and hardest weld, when we have robots that can do it?</a:t>
+              <a:t>• Problem: 146 s of welding by hand, in uncomfortable positions.</a:t>
+            </a:r>
+          </a:p>
+          <a:p>
+            <a:r>
+              <a:t>• Idea: move it to 4M, same fixture.</a:t>
+            </a:r>
+          </a:p>
+          <a:p>
+            <a:r>
+              <a:t>• Done with my supervisor, and running today.</a:t>
+            </a:r>
+          </a:p>
+          <a:p>
+            <a:r>
+              <a:t>• The team member now only loads and unloads.</a:t>
             </a:r>
           </a:p>
         </p:txBody>
@@ -15774,7 +15843,7 @@
                 </a:solidFill>
                 <a:latin typeface="Segoe UI"/>
               </a:rPr>
-              <a:t>From the manual booth to the 4M robotic cell</a:t>
+              <a:t>Same part, 47% less cycle time</a:t>
             </a:r>
           </a:p>
         </p:txBody>
@@ -15801,14 +15870,14 @@
                 </a:solidFill>
                 <a:latin typeface="Segoe UI"/>
               </a:rPr>
-              <a:t>Improvement  |  What we did</a:t>
+              <a:t>Improvement  |  Results, in seconds per part</a:t>
             </a:r>
           </a:p>
         </p:txBody>
       </p:sp>
       <p:pic>
         <p:nvPicPr>
-          <p:cNvPr id="4" name="!! Card 1" descr="Decorative glass panel"/>
+          <p:cNvPr id="4" name="!! Glass A" descr="Decorative glass panel"/>
           <p:cNvPicPr>
             <a:picLocks noChangeAspect="1"/>
           </p:cNvPicPr>
@@ -15824,8 +15893,8 @@
         </p:blipFill>
         <p:spPr>
           <a:xfrm>
-            <a:off x="256032" y="1691640"/>
-            <a:ext cx="2715768" cy="2834640"/>
+            <a:off x="256032" y="1600200"/>
+            <a:ext cx="7543800" cy="3886200"/>
           </a:xfrm>
           <a:prstGeom prst="rect">
             <a:avLst/>
@@ -15834,14 +15903,14 @@
       </p:pic>
       <p:sp>
         <p:nvSpPr>
-          <p:cNvPr id="5" name="!! Card 1 rim"/>
+          <p:cNvPr id="5" name="!! Glass A rim"/>
           <p:cNvSpPr/>
           <p:nvPr/>
         </p:nvSpPr>
         <p:spPr>
           <a:xfrm>
-            <a:off x="256032" y="1691640"/>
-            <a:ext cx="2715768" cy="2834640"/>
+            <a:off x="256032" y="1600200"/>
+            <a:ext cx="7543800" cy="3886200"/>
           </a:xfrm>
           <a:prstGeom prst="rect">
             <a:avLst/>
@@ -15871,8 +15940,8 @@
         </p:nvSpPr>
         <p:spPr>
           <a:xfrm>
-            <a:off x="566928" y="1965960"/>
-            <a:ext cx="2167128" cy="502920"/>
+            <a:off x="621792" y="1901952"/>
+            <a:ext cx="5486400" cy="274320"/>
           </a:xfrm>
           <a:prstGeom prst="rect">
             <a:avLst/>
@@ -15894,13 +15963,13 @@
               </a:spcAft>
             </a:pPr>
             <a:r>
-              <a:rPr sz="3000" b="1" i="0">
+              <a:rPr sz="1600" b="1" i="0">
                 <a:solidFill>
                   <a:srgbClr val="D5FB00"/>
                 </a:solidFill>
                 <a:latin typeface="Segoe UI"/>
               </a:rPr>
-              <a:t>01</a:t>
+              <a:t>CYCLE TIME PER PART</a:t>
             </a:r>
           </a:p>
         </p:txBody>
@@ -15913,8 +15982,8 @@
         </p:nvSpPr>
         <p:spPr>
           <a:xfrm>
-            <a:off x="566928" y="2606040"/>
-            <a:ext cx="2167128" cy="640080"/>
+            <a:off x="621792" y="2395728"/>
+            <a:ext cx="3657600" cy="274320"/>
           </a:xfrm>
           <a:prstGeom prst="rect">
             <a:avLst/>
@@ -15936,27 +16005,168 @@
               </a:spcAft>
             </a:pPr>
             <a:r>
-              <a:rPr sz="1600" b="1" i="0">
+              <a:rPr sz="1400" b="1" i="0">
                 <a:solidFill>
                   <a:srgbClr val="FFFFFF"/>
                 </a:solidFill>
                 <a:latin typeface="Segoe UI"/>
               </a:rPr>
-              <a:t>Study the part</a:t>
-            </a:r>
-          </a:p>
-        </p:txBody>
-      </p:sp>
-      <p:sp>
-        <p:nvSpPr>
-          <p:cNvPr id="8" name="TextBox 7"/>
+              <a:t>Manual booth</a:t>
+            </a:r>
+          </a:p>
+        </p:txBody>
+      </p:sp>
+      <p:sp>
+        <p:nvSpPr>
+          <p:cNvPr id="8" name="Rectangle 7"/>
+          <p:cNvSpPr/>
+          <p:nvPr/>
+        </p:nvSpPr>
+        <p:spPr>
+          <a:xfrm>
+            <a:off x="621792" y="2743200"/>
+            <a:ext cx="603188" cy="420624"/>
+          </a:xfrm>
+          <a:prstGeom prst="rect">
+            <a:avLst/>
+          </a:prstGeom>
+          <a:solidFill>
+            <a:srgbClr val="C6CDD1">
+              <a:alpha val="30000"/>
+            </a:srgbClr>
+          </a:solidFill>
+          <a:ln>
+            <a:noFill/>
+          </a:ln>
+        </p:spPr>
+        <p:txBody>
+          <a:bodyPr rtlCol="0" anchor="ctr" wrap="square" lIns="0" rIns="0" tIns="0" bIns="0"/>
+          <a:lstStyle/>
+          <a:p>
+            <a:pPr algn="ctr">
+              <a:spcBef>
+                <a:spcPts val="0"/>
+              </a:spcBef>
+              <a:spcAft>
+                <a:spcPts val="0"/>
+              </a:spcAft>
+            </a:pPr>
+            <a:r>
+              <a:rPr sz="1200" b="1" i="0">
+                <a:solidFill>
+                  <a:srgbClr val="FFFFFF"/>
+                </a:solidFill>
+                <a:latin typeface="Segoe UI"/>
+              </a:rPr>
+              <a:t>20</a:t>
+            </a:r>
+          </a:p>
+        </p:txBody>
+      </p:sp>
+      <p:sp>
+        <p:nvSpPr>
+          <p:cNvPr id="9" name="Rectangle 8"/>
+          <p:cNvSpPr/>
+          <p:nvPr/>
+        </p:nvSpPr>
+        <p:spPr>
+          <a:xfrm>
+            <a:off x="1252412" y="2743200"/>
+            <a:ext cx="4576099" cy="420624"/>
+          </a:xfrm>
+          <a:prstGeom prst="rect">
+            <a:avLst/>
+          </a:prstGeom>
+          <a:solidFill>
+            <a:srgbClr val="C6CDD1">
+              <a:alpha val="70000"/>
+            </a:srgbClr>
+          </a:solidFill>
+          <a:ln>
+            <a:noFill/>
+          </a:ln>
+        </p:spPr>
+        <p:txBody>
+          <a:bodyPr rtlCol="0" anchor="ctr" wrap="square" lIns="0" rIns="0" tIns="0" bIns="0"/>
+          <a:lstStyle/>
+          <a:p>
+            <a:pPr algn="ctr">
+              <a:spcBef>
+                <a:spcPts val="0"/>
+              </a:spcBef>
+              <a:spcAft>
+                <a:spcPts val="0"/>
+              </a:spcAft>
+            </a:pPr>
+            <a:r>
+              <a:rPr sz="1200" b="1" i="0">
+                <a:solidFill>
+                  <a:srgbClr val="051C2C"/>
+                </a:solidFill>
+                <a:latin typeface="Segoe UI"/>
+              </a:rPr>
+              <a:t>146</a:t>
+            </a:r>
+          </a:p>
+        </p:txBody>
+      </p:sp>
+      <p:sp>
+        <p:nvSpPr>
+          <p:cNvPr id="10" name="Rectangle 9"/>
+          <p:cNvSpPr/>
+          <p:nvPr/>
+        </p:nvSpPr>
+        <p:spPr>
+          <a:xfrm>
+            <a:off x="5855943" y="2743200"/>
+            <a:ext cx="224816" cy="420624"/>
+          </a:xfrm>
+          <a:prstGeom prst="rect">
+            <a:avLst/>
+          </a:prstGeom>
+          <a:solidFill>
+            <a:srgbClr val="C6CDD1">
+              <a:alpha val="30000"/>
+            </a:srgbClr>
+          </a:solidFill>
+          <a:ln>
+            <a:noFill/>
+          </a:ln>
+        </p:spPr>
+        <p:txBody>
+          <a:bodyPr rtlCol="0" anchor="ctr" wrap="square" lIns="0" rIns="0" tIns="0" bIns="0"/>
+          <a:lstStyle/>
+          <a:p>
+            <a:pPr algn="ctr">
+              <a:spcBef>
+                <a:spcPts val="0"/>
+              </a:spcBef>
+              <a:spcAft>
+                <a:spcPts val="0"/>
+              </a:spcAft>
+            </a:pPr>
+            <a:r>
+              <a:rPr sz="1100" b="1" i="0">
+                <a:solidFill>
+                  <a:srgbClr val="FFFFFF"/>
+                </a:solidFill>
+                <a:latin typeface="Segoe UI"/>
+              </a:rPr>
+              <a:t>8</a:t>
+            </a:r>
+          </a:p>
+        </p:txBody>
+      </p:sp>
+      <p:sp>
+        <p:nvSpPr>
+          <p:cNvPr id="11" name="TextBox 10"/>
           <p:cNvSpPr txBox="1"/>
           <p:nvPr/>
         </p:nvSpPr>
         <p:spPr>
           <a:xfrm>
-            <a:off x="566928" y="3355848"/>
-            <a:ext cx="2148840" cy="1097280"/>
+            <a:off x="6217920" y="2779776"/>
+            <a:ext cx="1188720" cy="365760"/>
           </a:xfrm>
           <a:prstGeom prst="rect">
             <a:avLst/>
@@ -15970,9 +16180,6 @@
           <a:lstStyle/>
           <a:p>
             <a:pPr algn="l">
-              <a:lnSpc>
-                <a:spcPct val="110000"/>
-              </a:lnSpc>
               <a:spcBef>
                 <a:spcPts val="0"/>
               </a:spcBef>
@@ -15981,29 +16188,118 @@
               </a:spcAft>
             </a:pPr>
             <a:r>
-              <a:rPr sz="1200" b="0" i="0">
-                <a:solidFill>
-                  <a:srgbClr val="C6CDD1"/>
+              <a:rPr sz="2000" b="1" i="0">
+                <a:solidFill>
+                  <a:srgbClr val="FFFFFF"/>
                 </a:solidFill>
                 <a:latin typeface="Segoe UI"/>
               </a:rPr>
-              <a:t>Which welds, how long they take, and what made them hard.</a:t>
-            </a:r>
-          </a:p>
-        </p:txBody>
-      </p:sp>
-      <p:sp>
-        <p:nvSpPr>
-          <p:cNvPr id="9" name="Chevron 8"/>
+              <a:t>174 s</a:t>
+            </a:r>
+          </a:p>
+        </p:txBody>
+      </p:sp>
+      <p:sp>
+        <p:nvSpPr>
+          <p:cNvPr id="12" name="TextBox 11"/>
+          <p:cNvSpPr txBox="1"/>
+          <p:nvPr/>
+        </p:nvSpPr>
+        <p:spPr>
+          <a:xfrm>
+            <a:off x="621792" y="3511296"/>
+            <a:ext cx="3657600" cy="274320"/>
+          </a:xfrm>
+          <a:prstGeom prst="rect">
+            <a:avLst/>
+          </a:prstGeom>
+          <a:noFill/>
+        </p:spPr>
+        <p:txBody>
+          <a:bodyPr wrap="square" lIns="0" rIns="0" tIns="0" bIns="0" anchor="t">
+            <a:spAutoFit/>
+          </a:bodyPr>
+          <a:lstStyle/>
+          <a:p>
+            <a:pPr algn="l">
+              <a:spcBef>
+                <a:spcPts val="0"/>
+              </a:spcBef>
+              <a:spcAft>
+                <a:spcPts val="0"/>
+              </a:spcAft>
+            </a:pPr>
+            <a:r>
+              <a:rPr sz="1400" b="1" i="0">
+                <a:solidFill>
+                  <a:srgbClr val="FFFFFF"/>
+                </a:solidFill>
+                <a:latin typeface="Segoe UI"/>
+              </a:rPr>
+              <a:t>4M robotic cell</a:t>
+            </a:r>
+          </a:p>
+        </p:txBody>
+      </p:sp>
+      <p:sp>
+        <p:nvSpPr>
+          <p:cNvPr id="13" name="Rectangle 12"/>
           <p:cNvSpPr/>
           <p:nvPr/>
         </p:nvSpPr>
         <p:spPr>
           <a:xfrm>
-            <a:off x="3035808" y="3017520"/>
-            <a:ext cx="146304" cy="146304"/>
-          </a:xfrm>
-          <a:prstGeom prst="chevron">
+            <a:off x="621792" y="3858768"/>
+            <a:ext cx="603188" cy="420624"/>
+          </a:xfrm>
+          <a:prstGeom prst="rect">
+            <a:avLst/>
+          </a:prstGeom>
+          <a:solidFill>
+            <a:srgbClr val="C6CDD1">
+              <a:alpha val="30000"/>
+            </a:srgbClr>
+          </a:solidFill>
+          <a:ln>
+            <a:noFill/>
+          </a:ln>
+        </p:spPr>
+        <p:txBody>
+          <a:bodyPr rtlCol="0" anchor="ctr" wrap="square" lIns="0" rIns="0" tIns="0" bIns="0"/>
+          <a:lstStyle/>
+          <a:p>
+            <a:pPr algn="ctr">
+              <a:spcBef>
+                <a:spcPts val="0"/>
+              </a:spcBef>
+              <a:spcAft>
+                <a:spcPts val="0"/>
+              </a:spcAft>
+            </a:pPr>
+            <a:r>
+              <a:rPr sz="1200" b="1" i="0">
+                <a:solidFill>
+                  <a:srgbClr val="FFFFFF"/>
+                </a:solidFill>
+                <a:latin typeface="Segoe UI"/>
+              </a:rPr>
+              <a:t>20</a:t>
+            </a:r>
+          </a:p>
+        </p:txBody>
+      </p:sp>
+      <p:sp>
+        <p:nvSpPr>
+          <p:cNvPr id="14" name="Rectangle 13"/>
+          <p:cNvSpPr/>
+          <p:nvPr/>
+        </p:nvSpPr>
+        <p:spPr>
+          <a:xfrm>
+            <a:off x="1252412" y="3858768"/>
+            <a:ext cx="2022085" cy="420624"/>
+          </a:xfrm>
+          <a:prstGeom prst="rect">
             <a:avLst/>
           </a:prstGeom>
           <a:solidFill>
@@ -16017,13 +16313,377 @@
           <a:bodyPr rtlCol="0" anchor="ctr" wrap="square" lIns="0" rIns="0" tIns="0" bIns="0"/>
           <a:lstStyle/>
           <a:p>
+            <a:pPr algn="ctr">
+              <a:spcBef>
+                <a:spcPts val="0"/>
+              </a:spcBef>
+              <a:spcAft>
+                <a:spcPts val="0"/>
+              </a:spcAft>
+            </a:pPr>
+            <a:r>
+              <a:rPr sz="1200" b="1" i="0">
+                <a:solidFill>
+                  <a:srgbClr val="051C2C"/>
+                </a:solidFill>
+                <a:latin typeface="Segoe UI"/>
+              </a:rPr>
+              <a:t>65</a:t>
+            </a:r>
+          </a:p>
+        </p:txBody>
+      </p:sp>
+      <p:sp>
+        <p:nvSpPr>
+          <p:cNvPr id="15" name="Rectangle 14"/>
+          <p:cNvSpPr/>
+          <p:nvPr/>
+        </p:nvSpPr>
+        <p:spPr>
+          <a:xfrm>
+            <a:off x="3301929" y="3858768"/>
+            <a:ext cx="224816" cy="420624"/>
+          </a:xfrm>
+          <a:prstGeom prst="rect">
+            <a:avLst/>
+          </a:prstGeom>
+          <a:solidFill>
+            <a:srgbClr val="C6CDD1">
+              <a:alpha val="30000"/>
+            </a:srgbClr>
+          </a:solidFill>
+          <a:ln>
+            <a:noFill/>
+          </a:ln>
+        </p:spPr>
+        <p:txBody>
+          <a:bodyPr rtlCol="0" anchor="ctr" wrap="square" lIns="0" rIns="0" tIns="0" bIns="0"/>
+          <a:lstStyle/>
+          <a:p>
+            <a:pPr algn="ctr">
+              <a:spcBef>
+                <a:spcPts val="0"/>
+              </a:spcBef>
+              <a:spcAft>
+                <a:spcPts val="0"/>
+              </a:spcAft>
+            </a:pPr>
+            <a:r>
+              <a:rPr sz="1100" b="1" i="0">
+                <a:solidFill>
+                  <a:srgbClr val="FFFFFF"/>
+                </a:solidFill>
+                <a:latin typeface="Segoe UI"/>
+              </a:rPr>
+              <a:t>8</a:t>
+            </a:r>
+          </a:p>
+        </p:txBody>
+      </p:sp>
+      <p:sp>
+        <p:nvSpPr>
+          <p:cNvPr id="16" name="TextBox 15"/>
+          <p:cNvSpPr txBox="1"/>
+          <p:nvPr/>
+        </p:nvSpPr>
+        <p:spPr>
+          <a:xfrm>
+            <a:off x="3663906" y="3895344"/>
+            <a:ext cx="1188720" cy="365760"/>
+          </a:xfrm>
+          <a:prstGeom prst="rect">
+            <a:avLst/>
+          </a:prstGeom>
+          <a:noFill/>
+        </p:spPr>
+        <p:txBody>
+          <a:bodyPr wrap="square" lIns="0" rIns="0" tIns="0" bIns="0" anchor="t">
+            <a:spAutoFit/>
+          </a:bodyPr>
+          <a:lstStyle/>
+          <a:p>
+            <a:pPr algn="l">
+              <a:spcBef>
+                <a:spcPts val="0"/>
+              </a:spcBef>
+              <a:spcAft>
+                <a:spcPts val="0"/>
+              </a:spcAft>
+            </a:pPr>
+            <a:r>
+              <a:rPr sz="2000" b="1" i="0">
+                <a:solidFill>
+                  <a:srgbClr val="D5FB00"/>
+                </a:solidFill>
+                <a:latin typeface="Segoe UI"/>
+              </a:rPr>
+              <a:t>93 s</a:t>
+            </a:r>
+          </a:p>
+        </p:txBody>
+      </p:sp>
+      <p:sp>
+        <p:nvSpPr>
+          <p:cNvPr id="17" name="Rectangle 16"/>
+          <p:cNvSpPr/>
+          <p:nvPr/>
+        </p:nvSpPr>
+        <p:spPr>
+          <a:xfrm>
+            <a:off x="621792" y="4681728"/>
+            <a:ext cx="164592" cy="164592"/>
+          </a:xfrm>
+          <a:prstGeom prst="rect">
+            <a:avLst/>
+          </a:prstGeom>
+          <a:solidFill>
+            <a:srgbClr val="C6CDD1">
+              <a:alpha val="30000"/>
+            </a:srgbClr>
+          </a:solidFill>
+          <a:ln>
+            <a:noFill/>
+          </a:ln>
+        </p:spPr>
+        <p:txBody>
+          <a:bodyPr rtlCol="0" anchor="ctr" wrap="square" lIns="0" rIns="0" tIns="0" bIns="0"/>
+          <a:lstStyle/>
+          <a:p>
             <a:pPr algn="ctr"/>
+          </a:p>
+        </p:txBody>
+      </p:sp>
+      <p:sp>
+        <p:nvSpPr>
+          <p:cNvPr id="18" name="TextBox 17"/>
+          <p:cNvSpPr txBox="1"/>
+          <p:nvPr/>
+        </p:nvSpPr>
+        <p:spPr>
+          <a:xfrm>
+            <a:off x="877824" y="4654296"/>
+            <a:ext cx="1645920" cy="228600"/>
+          </a:xfrm>
+          <a:prstGeom prst="rect">
+            <a:avLst/>
+          </a:prstGeom>
+          <a:noFill/>
+        </p:spPr>
+        <p:txBody>
+          <a:bodyPr wrap="square" lIns="0" rIns="0" tIns="0" bIns="0" anchor="t">
+            <a:spAutoFit/>
+          </a:bodyPr>
+          <a:lstStyle/>
+          <a:p>
+            <a:pPr algn="l">
+              <a:spcBef>
+                <a:spcPts val="0"/>
+              </a:spcBef>
+              <a:spcAft>
+                <a:spcPts val="0"/>
+              </a:spcAft>
+            </a:pPr>
+            <a:r>
+              <a:rPr sz="1100" b="0" i="0">
+                <a:solidFill>
+                  <a:srgbClr val="C6CDD1"/>
+                </a:solidFill>
+                <a:latin typeface="Segoe UI"/>
+              </a:rPr>
+              <a:t>Load and unload</a:t>
+            </a:r>
+          </a:p>
+        </p:txBody>
+      </p:sp>
+      <p:sp>
+        <p:nvSpPr>
+          <p:cNvPr id="19" name="Rectangle 18"/>
+          <p:cNvSpPr/>
+          <p:nvPr/>
+        </p:nvSpPr>
+        <p:spPr>
+          <a:xfrm>
+            <a:off x="2542032" y="4681728"/>
+            <a:ext cx="164592" cy="164592"/>
+          </a:xfrm>
+          <a:prstGeom prst="rect">
+            <a:avLst/>
+          </a:prstGeom>
+          <a:solidFill>
+            <a:srgbClr val="C6CDD1">
+              <a:alpha val="70000"/>
+            </a:srgbClr>
+          </a:solidFill>
+          <a:ln>
+            <a:noFill/>
+          </a:ln>
+        </p:spPr>
+        <p:txBody>
+          <a:bodyPr rtlCol="0" anchor="ctr" wrap="square" lIns="0" rIns="0" tIns="0" bIns="0"/>
+          <a:lstStyle/>
+          <a:p>
+            <a:pPr algn="ctr"/>
+          </a:p>
+        </p:txBody>
+      </p:sp>
+      <p:sp>
+        <p:nvSpPr>
+          <p:cNvPr id="20" name="TextBox 19"/>
+          <p:cNvSpPr txBox="1"/>
+          <p:nvPr/>
+        </p:nvSpPr>
+        <p:spPr>
+          <a:xfrm>
+            <a:off x="2798064" y="4654296"/>
+            <a:ext cx="1645920" cy="228600"/>
+          </a:xfrm>
+          <a:prstGeom prst="rect">
+            <a:avLst/>
+          </a:prstGeom>
+          <a:noFill/>
+        </p:spPr>
+        <p:txBody>
+          <a:bodyPr wrap="square" lIns="0" rIns="0" tIns="0" bIns="0" anchor="t">
+            <a:spAutoFit/>
+          </a:bodyPr>
+          <a:lstStyle/>
+          <a:p>
+            <a:pPr algn="l">
+              <a:spcBef>
+                <a:spcPts val="0"/>
+              </a:spcBef>
+              <a:spcAft>
+                <a:spcPts val="0"/>
+              </a:spcAft>
+            </a:pPr>
+            <a:r>
+              <a:rPr sz="1100" b="0" i="0">
+                <a:solidFill>
+                  <a:srgbClr val="C6CDD1"/>
+                </a:solidFill>
+                <a:latin typeface="Segoe UI"/>
+              </a:rPr>
+              <a:t>Welding by hand</a:t>
+            </a:r>
+          </a:p>
+        </p:txBody>
+      </p:sp>
+      <p:sp>
+        <p:nvSpPr>
+          <p:cNvPr id="21" name="Rectangle 20"/>
+          <p:cNvSpPr/>
+          <p:nvPr/>
+        </p:nvSpPr>
+        <p:spPr>
+          <a:xfrm>
+            <a:off x="4462272" y="4681728"/>
+            <a:ext cx="164592" cy="164592"/>
+          </a:xfrm>
+          <a:prstGeom prst="rect">
+            <a:avLst/>
+          </a:prstGeom>
+          <a:solidFill>
+            <a:srgbClr val="D5FB00"/>
+          </a:solidFill>
+          <a:ln>
+            <a:noFill/>
+          </a:ln>
+        </p:spPr>
+        <p:txBody>
+          <a:bodyPr rtlCol="0" anchor="ctr" wrap="square" lIns="0" rIns="0" tIns="0" bIns="0"/>
+          <a:lstStyle/>
+          <a:p>
+            <a:pPr algn="ctr"/>
+          </a:p>
+        </p:txBody>
+      </p:sp>
+      <p:sp>
+        <p:nvSpPr>
+          <p:cNvPr id="22" name="TextBox 21"/>
+          <p:cNvSpPr txBox="1"/>
+          <p:nvPr/>
+        </p:nvSpPr>
+        <p:spPr>
+          <a:xfrm>
+            <a:off x="4718304" y="4654296"/>
+            <a:ext cx="1645920" cy="228600"/>
+          </a:xfrm>
+          <a:prstGeom prst="rect">
+            <a:avLst/>
+          </a:prstGeom>
+          <a:noFill/>
+        </p:spPr>
+        <p:txBody>
+          <a:bodyPr wrap="square" lIns="0" rIns="0" tIns="0" bIns="0" anchor="t">
+            <a:spAutoFit/>
+          </a:bodyPr>
+          <a:lstStyle/>
+          <a:p>
+            <a:pPr algn="l">
+              <a:spcBef>
+                <a:spcPts val="0"/>
+              </a:spcBef>
+              <a:spcAft>
+                <a:spcPts val="0"/>
+              </a:spcAft>
+            </a:pPr>
+            <a:r>
+              <a:rPr sz="1100" b="0" i="0">
+                <a:solidFill>
+                  <a:srgbClr val="C6CDD1"/>
+                </a:solidFill>
+                <a:latin typeface="Segoe UI"/>
+              </a:rPr>
+              <a:t>Welding by robot</a:t>
+            </a:r>
+          </a:p>
+        </p:txBody>
+      </p:sp>
+      <p:sp>
+        <p:nvSpPr>
+          <p:cNvPr id="23" name="TextBox 22"/>
+          <p:cNvSpPr txBox="1"/>
+          <p:nvPr/>
+        </p:nvSpPr>
+        <p:spPr>
+          <a:xfrm>
+            <a:off x="621792" y="5010912"/>
+            <a:ext cx="6858000" cy="274320"/>
+          </a:xfrm>
+          <a:prstGeom prst="rect">
+            <a:avLst/>
+          </a:prstGeom>
+          <a:noFill/>
+        </p:spPr>
+        <p:txBody>
+          <a:bodyPr wrap="square" lIns="0" rIns="0" tIns="0" bIns="0" anchor="t">
+            <a:spAutoFit/>
+          </a:bodyPr>
+          <a:lstStyle/>
+          <a:p>
+            <a:pPr algn="l">
+              <a:spcBef>
+                <a:spcPts val="0"/>
+              </a:spcBef>
+              <a:spcAft>
+                <a:spcPts val="0"/>
+              </a:spcAft>
+            </a:pPr>
+            <a:r>
+              <a:rPr sz="1100" b="0" i="0">
+                <a:solidFill>
+                  <a:srgbClr val="8A9BA8"/>
+                </a:solidFill>
+                <a:latin typeface="Segoe UI"/>
+              </a:rPr>
+              <a:t>Same fixture, so loading and unloading take the same time. The gain is all in the welding.</a:t>
+            </a:r>
           </a:p>
         </p:txBody>
       </p:sp>
       <p:pic>
         <p:nvPicPr>
-          <p:cNvPr id="10" name="!! Card 2" descr="Decorative glass panel"/>
+          <p:cNvPr id="24" name="!! Glass B" descr="Decorative glass panel"/>
           <p:cNvPicPr>
             <a:picLocks noChangeAspect="1"/>
           </p:cNvPicPr>
@@ -16039,8 +16699,8 @@
         </p:blipFill>
         <p:spPr>
           <a:xfrm>
-            <a:off x="3246120" y="1691640"/>
-            <a:ext cx="2715768" cy="2834640"/>
+            <a:off x="8092440" y="1600200"/>
+            <a:ext cx="3840480" cy="3886200"/>
           </a:xfrm>
           <a:prstGeom prst="rect">
             <a:avLst/>
@@ -16049,14 +16709,14 @@
       </p:pic>
       <p:sp>
         <p:nvSpPr>
-          <p:cNvPr id="11" name="!! Card 2 rim"/>
+          <p:cNvPr id="25" name="!! Glass B rim"/>
           <p:cNvSpPr/>
           <p:nvPr/>
         </p:nvSpPr>
         <p:spPr>
           <a:xfrm>
-            <a:off x="3246120" y="1691640"/>
-            <a:ext cx="2715768" cy="2834640"/>
+            <a:off x="8092440" y="1600200"/>
+            <a:ext cx="3840480" cy="3886200"/>
           </a:xfrm>
           <a:prstGeom prst="rect">
             <a:avLst/>
@@ -16080,14 +16740,14 @@
       </p:sp>
       <p:sp>
         <p:nvSpPr>
-          <p:cNvPr id="12" name="TextBox 11"/>
+          <p:cNvPr id="26" name="TextBox 25"/>
           <p:cNvSpPr txBox="1"/>
           <p:nvPr/>
         </p:nvSpPr>
         <p:spPr>
           <a:xfrm>
-            <a:off x="3557015" y="1965960"/>
-            <a:ext cx="2167128" cy="502920"/>
+            <a:off x="8458200" y="1847088"/>
+            <a:ext cx="3291840" cy="548640"/>
           </a:xfrm>
           <a:prstGeom prst="rect">
             <a:avLst/>
@@ -16109,27 +16769,27 @@
               </a:spcAft>
             </a:pPr>
             <a:r>
-              <a:rPr sz="3000" b="1" i="0">
+              <a:rPr sz="3200" b="1" i="0">
                 <a:solidFill>
                   <a:srgbClr val="D5FB00"/>
                 </a:solidFill>
                 <a:latin typeface="Segoe UI"/>
               </a:rPr>
-              <a:t>02</a:t>
-            </a:r>
-          </a:p>
-        </p:txBody>
-      </p:sp>
-      <p:sp>
-        <p:nvSpPr>
-          <p:cNvPr id="13" name="TextBox 12"/>
+              <a:t>−47%</a:t>
+            </a:r>
+          </a:p>
+        </p:txBody>
+      </p:sp>
+      <p:sp>
+        <p:nvSpPr>
+          <p:cNvPr id="27" name="TextBox 26"/>
           <p:cNvSpPr txBox="1"/>
           <p:nvPr/>
         </p:nvSpPr>
         <p:spPr>
           <a:xfrm>
-            <a:off x="3557015" y="2606040"/>
-            <a:ext cx="2167128" cy="640080"/>
+            <a:off x="8458200" y="2450592"/>
+            <a:ext cx="3291840" cy="274320"/>
           </a:xfrm>
           <a:prstGeom prst="rect">
             <a:avLst/>
@@ -16151,27 +16811,27 @@
               </a:spcAft>
             </a:pPr>
             <a:r>
-              <a:rPr sz="1600" b="1" i="0">
-                <a:solidFill>
-                  <a:srgbClr val="FFFFFF"/>
+              <a:rPr sz="1200" b="0" i="0">
+                <a:solidFill>
+                  <a:srgbClr val="C6CDD1"/>
                 </a:solidFill>
                 <a:latin typeface="Segoe UI"/>
               </a:rPr>
-              <a:t>Move it to 4M</a:t>
-            </a:r>
-          </a:p>
-        </p:txBody>
-      </p:sp>
-      <p:sp>
-        <p:nvSpPr>
-          <p:cNvPr id="14" name="TextBox 13"/>
+              <a:t>cycle time, 174 s to 93 s</a:t>
+            </a:r>
+          </a:p>
+        </p:txBody>
+      </p:sp>
+      <p:sp>
+        <p:nvSpPr>
+          <p:cNvPr id="28" name="TextBox 27"/>
           <p:cNvSpPr txBox="1"/>
           <p:nvPr/>
         </p:nvSpPr>
         <p:spPr>
           <a:xfrm>
-            <a:off x="3557015" y="3355848"/>
-            <a:ext cx="2148840" cy="1097280"/>
+            <a:off x="8458200" y="3035808"/>
+            <a:ext cx="3291840" cy="548640"/>
           </a:xfrm>
           <a:prstGeom prst="rect">
             <a:avLst/>
@@ -16185,9 +16845,6 @@
           <a:lstStyle/>
           <a:p>
             <a:pPr algn="l">
-              <a:lnSpc>
-                <a:spcPct val="110000"/>
-              </a:lnSpc>
               <a:spcBef>
                 <a:spcPts val="0"/>
               </a:spcBef>
@@ -16196,113 +16853,27 @@
               </a:spcAft>
             </a:pPr>
             <a:r>
-              <a:rPr sz="1200" b="0" i="0">
-                <a:solidFill>
-                  <a:srgbClr val="C6CDD1"/>
+              <a:rPr sz="3200" b="1" i="0">
+                <a:solidFill>
+                  <a:srgbClr val="D5FB00"/>
                 </a:solidFill>
                 <a:latin typeface="Segoe UI"/>
               </a:rPr>
-              <a:t>Bring the part into the automatic cell.</a:t>
-            </a:r>
-          </a:p>
-        </p:txBody>
-      </p:sp>
-      <p:sp>
-        <p:nvSpPr>
-          <p:cNvPr id="15" name="Chevron 14"/>
-          <p:cNvSpPr/>
-          <p:nvPr/>
-        </p:nvSpPr>
-        <p:spPr>
-          <a:xfrm>
-            <a:off x="6025896" y="3017520"/>
-            <a:ext cx="146304" cy="146304"/>
-          </a:xfrm>
-          <a:prstGeom prst="chevron">
-            <a:avLst/>
-          </a:prstGeom>
-          <a:solidFill>
-            <a:srgbClr val="D5FB00"/>
-          </a:solidFill>
-          <a:ln>
-            <a:noFill/>
-          </a:ln>
-        </p:spPr>
-        <p:txBody>
-          <a:bodyPr rtlCol="0" anchor="ctr" wrap="square" lIns="0" rIns="0" tIns="0" bIns="0"/>
-          <a:lstStyle/>
-          <a:p>
-            <a:pPr algn="ctr"/>
-          </a:p>
-        </p:txBody>
-      </p:sp>
-      <p:pic>
-        <p:nvPicPr>
-          <p:cNvPr id="16" name="!! Card 3" descr="Decorative glass panel"/>
-          <p:cNvPicPr>
-            <a:picLocks noChangeAspect="1"/>
-          </p:cNvPicPr>
-          <p:nvPr/>
-        </p:nvPicPr>
-        <p:blipFill>
-          <a:blip r:embed="rId4">
-            <a:alphaModFix amt="50000"/>
-          </a:blip>
-          <a:stretch>
-            <a:fillRect/>
-          </a:stretch>
-        </p:blipFill>
-        <p:spPr>
-          <a:xfrm>
-            <a:off x="6236208" y="1691640"/>
-            <a:ext cx="2715768" cy="2834640"/>
-          </a:xfrm>
-          <a:prstGeom prst="rect">
-            <a:avLst/>
-          </a:prstGeom>
-        </p:spPr>
-      </p:pic>
-      <p:sp>
-        <p:nvSpPr>
-          <p:cNvPr id="17" name="!! Card 3 rim"/>
-          <p:cNvSpPr/>
-          <p:nvPr/>
-        </p:nvSpPr>
-        <p:spPr>
-          <a:xfrm>
-            <a:off x="6236208" y="1691640"/>
-            <a:ext cx="2715768" cy="2834640"/>
-          </a:xfrm>
-          <a:prstGeom prst="rect">
-            <a:avLst/>
-          </a:prstGeom>
-          <a:noFill/>
-          <a:ln w="9525">
-            <a:solidFill>
-              <a:srgbClr val="FFFFFF">
-                <a:alpha val="16000"/>
-              </a:srgbClr>
-            </a:solidFill>
-          </a:ln>
-        </p:spPr>
-        <p:txBody>
-          <a:bodyPr rtlCol="0" anchor="ctr" wrap="square" lIns="0" rIns="0" tIns="0" bIns="0"/>
-          <a:lstStyle/>
-          <a:p>
-            <a:pPr algn="ctr"/>
-          </a:p>
-        </p:txBody>
-      </p:sp>
-      <p:sp>
-        <p:nvSpPr>
-          <p:cNvPr id="18" name="TextBox 17"/>
+              <a:t>−56%</a:t>
+            </a:r>
+          </a:p>
+        </p:txBody>
+      </p:sp>
+      <p:sp>
+        <p:nvSpPr>
+          <p:cNvPr id="29" name="TextBox 28"/>
           <p:cNvSpPr txBox="1"/>
           <p:nvPr/>
         </p:nvSpPr>
         <p:spPr>
           <a:xfrm>
-            <a:off x="6547104" y="1965960"/>
-            <a:ext cx="2167128" cy="502920"/>
+            <a:off x="8458200" y="3639312"/>
+            <a:ext cx="3291840" cy="274320"/>
           </a:xfrm>
           <a:prstGeom prst="rect">
             <a:avLst/>
@@ -16324,27 +16895,27 @@
               </a:spcAft>
             </a:pPr>
             <a:r>
-              <a:rPr sz="3000" b="1" i="0">
-                <a:solidFill>
-                  <a:srgbClr val="D5FB00"/>
+              <a:rPr sz="1200" b="0" i="0">
+                <a:solidFill>
+                  <a:srgbClr val="C6CDD1"/>
                 </a:solidFill>
                 <a:latin typeface="Segoe UI"/>
               </a:rPr>
-              <a:t>03</a:t>
-            </a:r>
-          </a:p>
-        </p:txBody>
-      </p:sp>
-      <p:sp>
-        <p:nvSpPr>
-          <p:cNvPr id="19" name="TextBox 18"/>
+              <a:t>welding time, 146 s to 65 s</a:t>
+            </a:r>
+          </a:p>
+        </p:txBody>
+      </p:sp>
+      <p:sp>
+        <p:nvSpPr>
+          <p:cNvPr id="30" name="TextBox 29"/>
           <p:cNvSpPr txBox="1"/>
           <p:nvPr/>
         </p:nvSpPr>
         <p:spPr>
           <a:xfrm>
-            <a:off x="6547104" y="2606040"/>
-            <a:ext cx="2167128" cy="640080"/>
+            <a:off x="8458200" y="4224528"/>
+            <a:ext cx="3291840" cy="548640"/>
           </a:xfrm>
           <a:prstGeom prst="rect">
             <a:avLst/>
@@ -16366,27 +16937,27 @@
               </a:spcAft>
             </a:pPr>
             <a:r>
-              <a:rPr sz="1600" b="1" i="0">
-                <a:solidFill>
-                  <a:srgbClr val="FFFFFF"/>
+              <a:rPr sz="3200" b="1" i="0">
+                <a:solidFill>
+                  <a:srgbClr val="D5FB00"/>
                 </a:solidFill>
                 <a:latin typeface="Segoe UI"/>
               </a:rPr>
-              <a:t>Program and adjust</a:t>
-            </a:r>
-          </a:p>
-        </p:txBody>
-      </p:sp>
-      <p:sp>
-        <p:nvSpPr>
-          <p:cNvPr id="20" name="TextBox 19"/>
+              <a:t>81 s</a:t>
+            </a:r>
+          </a:p>
+        </p:txBody>
+      </p:sp>
+      <p:sp>
+        <p:nvSpPr>
+          <p:cNvPr id="31" name="TextBox 30"/>
           <p:cNvSpPr txBox="1"/>
           <p:nvPr/>
         </p:nvSpPr>
         <p:spPr>
           <a:xfrm>
-            <a:off x="6547104" y="3355848"/>
-            <a:ext cx="2148840" cy="1097280"/>
+            <a:off x="8458200" y="4828032"/>
+            <a:ext cx="3291840" cy="274320"/>
           </a:xfrm>
           <a:prstGeom prst="rect">
             <a:avLst/>
@@ -16400,9 +16971,6 @@
           <a:lstStyle/>
           <a:p>
             <a:pPr algn="l">
-              <a:lnSpc>
-                <a:spcPct val="110000"/>
-              </a:lnSpc>
               <a:spcBef>
                 <a:spcPts val="0"/>
               </a:spcBef>
@@ -16417,363 +16985,7 @@
                 </a:solidFill>
                 <a:latin typeface="Segoe UI"/>
               </a:rPr>
-              <a:t>Robot path and welding settings, until the weld is right.</a:t>
-            </a:r>
-          </a:p>
-        </p:txBody>
-      </p:sp>
-      <p:sp>
-        <p:nvSpPr>
-          <p:cNvPr id="21" name="Chevron 20"/>
-          <p:cNvSpPr/>
-          <p:nvPr/>
-        </p:nvSpPr>
-        <p:spPr>
-          <a:xfrm>
-            <a:off x="9015984" y="3017520"/>
-            <a:ext cx="146304" cy="146304"/>
-          </a:xfrm>
-          <a:prstGeom prst="chevron">
-            <a:avLst/>
-          </a:prstGeom>
-          <a:solidFill>
-            <a:srgbClr val="D5FB00"/>
-          </a:solidFill>
-          <a:ln>
-            <a:noFill/>
-          </a:ln>
-        </p:spPr>
-        <p:txBody>
-          <a:bodyPr rtlCol="0" anchor="ctr" wrap="square" lIns="0" rIns="0" tIns="0" bIns="0"/>
-          <a:lstStyle/>
-          <a:p>
-            <a:pPr algn="ctr"/>
-          </a:p>
-        </p:txBody>
-      </p:sp>
-      <p:pic>
-        <p:nvPicPr>
-          <p:cNvPr id="22" name="!! Card 4" descr="Decorative glass panel"/>
-          <p:cNvPicPr>
-            <a:picLocks noChangeAspect="1"/>
-          </p:cNvPicPr>
-          <p:nvPr/>
-        </p:nvPicPr>
-        <p:blipFill>
-          <a:blip r:embed="rId5">
-            <a:alphaModFix amt="50000"/>
-          </a:blip>
-          <a:stretch>
-            <a:fillRect/>
-          </a:stretch>
-        </p:blipFill>
-        <p:spPr>
-          <a:xfrm>
-            <a:off x="9226296" y="1691640"/>
-            <a:ext cx="2715768" cy="2834640"/>
-          </a:xfrm>
-          <a:prstGeom prst="rect">
-            <a:avLst/>
-          </a:prstGeom>
-        </p:spPr>
-      </p:pic>
-      <p:sp>
-        <p:nvSpPr>
-          <p:cNvPr id="23" name="!! Card 4 rim"/>
-          <p:cNvSpPr/>
-          <p:nvPr/>
-        </p:nvSpPr>
-        <p:spPr>
-          <a:xfrm>
-            <a:off x="9226296" y="1691640"/>
-            <a:ext cx="2715768" cy="2834640"/>
-          </a:xfrm>
-          <a:prstGeom prst="rect">
-            <a:avLst/>
-          </a:prstGeom>
-          <a:noFill/>
-          <a:ln w="9525">
-            <a:solidFill>
-              <a:srgbClr val="FFFFFF">
-                <a:alpha val="16000"/>
-              </a:srgbClr>
-            </a:solidFill>
-          </a:ln>
-        </p:spPr>
-        <p:txBody>
-          <a:bodyPr rtlCol="0" anchor="ctr" wrap="square" lIns="0" rIns="0" tIns="0" bIns="0"/>
-          <a:lstStyle/>
-          <a:p>
-            <a:pPr algn="ctr"/>
-          </a:p>
-        </p:txBody>
-      </p:sp>
-      <p:sp>
-        <p:nvSpPr>
-          <p:cNvPr id="24" name="TextBox 23"/>
-          <p:cNvSpPr txBox="1"/>
-          <p:nvPr/>
-        </p:nvSpPr>
-        <p:spPr>
-          <a:xfrm>
-            <a:off x="9537192" y="1965960"/>
-            <a:ext cx="2167128" cy="502920"/>
-          </a:xfrm>
-          <a:prstGeom prst="rect">
-            <a:avLst/>
-          </a:prstGeom>
-          <a:noFill/>
-        </p:spPr>
-        <p:txBody>
-          <a:bodyPr wrap="square" lIns="0" rIns="0" tIns="0" bIns="0" anchor="t">
-            <a:spAutoFit/>
-          </a:bodyPr>
-          <a:lstStyle/>
-          <a:p>
-            <a:pPr algn="l">
-              <a:spcBef>
-                <a:spcPts val="0"/>
-              </a:spcBef>
-              <a:spcAft>
-                <a:spcPts val="0"/>
-              </a:spcAft>
-            </a:pPr>
-            <a:r>
-              <a:rPr sz="3000" b="1" i="0">
-                <a:solidFill>
-                  <a:srgbClr val="D5FB00"/>
-                </a:solidFill>
-                <a:latin typeface="Segoe UI"/>
-              </a:rPr>
-              <a:t>04</a:t>
-            </a:r>
-          </a:p>
-        </p:txBody>
-      </p:sp>
-      <p:sp>
-        <p:nvSpPr>
-          <p:cNvPr id="25" name="TextBox 24"/>
-          <p:cNvSpPr txBox="1"/>
-          <p:nvPr/>
-        </p:nvSpPr>
-        <p:spPr>
-          <a:xfrm>
-            <a:off x="9537192" y="2606040"/>
-            <a:ext cx="2167128" cy="640080"/>
-          </a:xfrm>
-          <a:prstGeom prst="rect">
-            <a:avLst/>
-          </a:prstGeom>
-          <a:noFill/>
-        </p:spPr>
-        <p:txBody>
-          <a:bodyPr wrap="square" lIns="0" rIns="0" tIns="0" bIns="0" anchor="t">
-            <a:spAutoFit/>
-          </a:bodyPr>
-          <a:lstStyle/>
-          <a:p>
-            <a:pPr algn="l">
-              <a:spcBef>
-                <a:spcPts val="0"/>
-              </a:spcBef>
-              <a:spcAft>
-                <a:spcPts val="0"/>
-              </a:spcAft>
-            </a:pPr>
-            <a:r>
-              <a:rPr sz="1600" b="1" i="0">
-                <a:solidFill>
-                  <a:srgbClr val="FFFFFF"/>
-                </a:solidFill>
-                <a:latin typeface="Segoe UI"/>
-              </a:rPr>
-              <a:t>Validate and release</a:t>
-            </a:r>
-          </a:p>
-        </p:txBody>
-      </p:sp>
-      <p:sp>
-        <p:nvSpPr>
-          <p:cNvPr id="26" name="TextBox 25"/>
-          <p:cNvSpPr txBox="1"/>
-          <p:nvPr/>
-        </p:nvSpPr>
-        <p:spPr>
-          <a:xfrm>
-            <a:off x="9537192" y="3355848"/>
-            <a:ext cx="2148840" cy="1097280"/>
-          </a:xfrm>
-          <a:prstGeom prst="rect">
-            <a:avLst/>
-          </a:prstGeom>
-          <a:noFill/>
-        </p:spPr>
-        <p:txBody>
-          <a:bodyPr wrap="square" lIns="0" rIns="0" tIns="0" bIns="0" anchor="t">
-            <a:spAutoFit/>
-          </a:bodyPr>
-          <a:lstStyle/>
-          <a:p>
-            <a:pPr algn="l">
-              <a:lnSpc>
-                <a:spcPct val="110000"/>
-              </a:lnSpc>
-              <a:spcBef>
-                <a:spcPts val="0"/>
-              </a:spcBef>
-              <a:spcAft>
-                <a:spcPts val="0"/>
-              </a:spcAft>
-            </a:pPr>
-            <a:r>
-              <a:rPr sz="1200" b="0" i="0">
-                <a:solidFill>
-                  <a:srgbClr val="C6CDD1"/>
-                </a:solidFill>
-                <a:latin typeface="Segoe UI"/>
-              </a:rPr>
-              <a:t>Check weld quality, then hand it over to production.</a:t>
-            </a:r>
-          </a:p>
-        </p:txBody>
-      </p:sp>
-      <p:pic>
-        <p:nvPicPr>
-          <p:cNvPr id="27" name="!! Strip" descr="Decorative glass panel"/>
-          <p:cNvPicPr>
-            <a:picLocks noChangeAspect="1"/>
-          </p:cNvPicPr>
-          <p:nvPr/>
-        </p:nvPicPr>
-        <p:blipFill>
-          <a:blip r:embed="rId6">
-            <a:alphaModFix amt="50000"/>
-          </a:blip>
-          <a:stretch>
-            <a:fillRect/>
-          </a:stretch>
-        </p:blipFill>
-        <p:spPr>
-          <a:xfrm>
-            <a:off x="256032" y="4846320"/>
-            <a:ext cx="11676888" cy="603504"/>
-          </a:xfrm>
-          <a:prstGeom prst="rect">
-            <a:avLst/>
-          </a:prstGeom>
-        </p:spPr>
-      </p:pic>
-      <p:sp>
-        <p:nvSpPr>
-          <p:cNvPr id="28" name="!! Strip rim"/>
-          <p:cNvSpPr/>
-          <p:nvPr/>
-        </p:nvSpPr>
-        <p:spPr>
-          <a:xfrm>
-            <a:off x="256032" y="4846320"/>
-            <a:ext cx="11676888" cy="603504"/>
-          </a:xfrm>
-          <a:prstGeom prst="rect">
-            <a:avLst/>
-          </a:prstGeom>
-          <a:noFill/>
-          <a:ln w="9525">
-            <a:solidFill>
-              <a:srgbClr val="FFFFFF">
-                <a:alpha val="16000"/>
-              </a:srgbClr>
-            </a:solidFill>
-          </a:ln>
-        </p:spPr>
-        <p:txBody>
-          <a:bodyPr rtlCol="0" anchor="ctr" wrap="square" lIns="0" rIns="0" tIns="0" bIns="0"/>
-          <a:lstStyle/>
-          <a:p>
-            <a:pPr algn="ctr"/>
-          </a:p>
-        </p:txBody>
-      </p:sp>
-      <p:sp>
-        <p:nvSpPr>
-          <p:cNvPr id="29" name="TextBox 28"/>
-          <p:cNvSpPr txBox="1"/>
-          <p:nvPr/>
-        </p:nvSpPr>
-        <p:spPr>
-          <a:xfrm>
-            <a:off x="566928" y="5047488"/>
-            <a:ext cx="2011680" cy="228600"/>
-          </a:xfrm>
-          <a:prstGeom prst="rect">
-            <a:avLst/>
-          </a:prstGeom>
-          <a:noFill/>
-        </p:spPr>
-        <p:txBody>
-          <a:bodyPr wrap="square" lIns="0" rIns="0" tIns="0" bIns="0" anchor="t">
-            <a:spAutoFit/>
-          </a:bodyPr>
-          <a:lstStyle/>
-          <a:p>
-            <a:pPr algn="l">
-              <a:spcBef>
-                <a:spcPts val="0"/>
-              </a:spcBef>
-              <a:spcAft>
-                <a:spcPts val="0"/>
-              </a:spcAft>
-            </a:pPr>
-            <a:r>
-              <a:rPr sz="1100" b="1" i="0">
-                <a:solidFill>
-                  <a:srgbClr val="D5FB00"/>
-                </a:solidFill>
-                <a:latin typeface="Segoe UI"/>
-              </a:rPr>
-              <a:t>TEAMWORK</a:t>
-            </a:r>
-          </a:p>
-        </p:txBody>
-      </p:sp>
-      <p:sp>
-        <p:nvSpPr>
-          <p:cNvPr id="30" name="TextBox 29"/>
-          <p:cNvSpPr txBox="1"/>
-          <p:nvPr/>
-        </p:nvSpPr>
-        <p:spPr>
-          <a:xfrm>
-            <a:off x="2514600" y="5029200"/>
-            <a:ext cx="9144000" cy="274320"/>
-          </a:xfrm>
-          <a:prstGeom prst="rect">
-            <a:avLst/>
-          </a:prstGeom>
-          <a:noFill/>
-        </p:spPr>
-        <p:txBody>
-          <a:bodyPr wrap="square" lIns="0" rIns="0" tIns="0" bIns="0" anchor="t">
-            <a:spAutoFit/>
-          </a:bodyPr>
-          <a:lstStyle/>
-          <a:p>
-            <a:pPr algn="l">
-              <a:spcBef>
-                <a:spcPts val="0"/>
-              </a:spcBef>
-              <a:spcAft>
-                <a:spcPts val="0"/>
-              </a:spcAft>
-            </a:pPr>
-            <a:r>
-              <a:rPr sz="1200" b="0" i="0">
-                <a:solidFill>
-                  <a:srgbClr val="FFFFFF"/>
-                </a:solidFill>
-                <a:latin typeface="Segoe UI"/>
-              </a:rPr>
-              <a:t>Designed and implemented together with my supervisor, from the idea to the release.</a:t>
+              <a:t>saved on every part</a:t>
             </a:r>
           </a:p>
         </p:txBody>
@@ -16830,7 +17042,7 @@
                 </a:solidFill>
                 <a:latin typeface="Segoe UI"/>
               </a:rPr>
-              <a:t>Same part, less time, less strain</a:t>
+              <a:t>What I would change in how setters learn</a:t>
             </a:r>
           </a:p>
         </p:txBody>
@@ -16857,14 +17069,14 @@
                 </a:solidFill>
                 <a:latin typeface="Segoe UI"/>
               </a:rPr>
-              <a:t>Improvement  |  Results</a:t>
+              <a:t>Final project  |  Training process update, a proposal</a:t>
             </a:r>
           </a:p>
         </p:txBody>
       </p:sp>
       <p:pic>
         <p:nvPicPr>
-          <p:cNvPr id="4" name="!! Glass A" descr="Decorative glass panel"/>
+          <p:cNvPr id="4" name="!! Card 1" descr="Decorative glass panel"/>
           <p:cNvPicPr>
             <a:picLocks noChangeAspect="1"/>
           </p:cNvPicPr>
@@ -16880,8 +17092,8 @@
         </p:blipFill>
         <p:spPr>
           <a:xfrm>
-            <a:off x="256032" y="1645920"/>
-            <a:ext cx="5623560" cy="2514600"/>
+            <a:off x="256032" y="1691640"/>
+            <a:ext cx="3703320" cy="3063240"/>
           </a:xfrm>
           <a:prstGeom prst="rect">
             <a:avLst/>
@@ -16890,14 +17102,14 @@
       </p:pic>
       <p:sp>
         <p:nvSpPr>
-          <p:cNvPr id="5" name="!! Glass A rim"/>
+          <p:cNvPr id="5" name="!! Card 1 rim"/>
           <p:cNvSpPr/>
           <p:nvPr/>
         </p:nvSpPr>
         <p:spPr>
           <a:xfrm>
-            <a:off x="256032" y="1645920"/>
-            <a:ext cx="5623560" cy="2514600"/>
+            <a:off x="256032" y="1691640"/>
+            <a:ext cx="3703320" cy="3063240"/>
           </a:xfrm>
           <a:prstGeom prst="rect">
             <a:avLst/>
@@ -16927,8 +17139,8 @@
         </p:nvSpPr>
         <p:spPr>
           <a:xfrm>
-            <a:off x="640080" y="2011680"/>
-            <a:ext cx="4846320" cy="274320"/>
+            <a:off x="585216" y="1965960"/>
+            <a:ext cx="3017520" cy="502920"/>
           </a:xfrm>
           <a:prstGeom prst="rect">
             <a:avLst/>
@@ -16950,13 +17162,13 @@
               </a:spcAft>
             </a:pPr>
             <a:r>
-              <a:rPr sz="1100" b="1" i="0">
-                <a:solidFill>
-                  <a:srgbClr val="C6CDD1"/>
+              <a:rPr sz="3000" b="1" i="0">
+                <a:solidFill>
+                  <a:srgbClr val="D5FB00"/>
                 </a:solidFill>
                 <a:latin typeface="Segoe UI"/>
               </a:rPr>
-              <a:t>BEFORE  |  MANUAL BOOTH</a:t>
+              <a:t>01</a:t>
             </a:r>
           </a:p>
         </p:txBody>
@@ -16969,8 +17181,8 @@
         </p:nvSpPr>
         <p:spPr>
           <a:xfrm>
-            <a:off x="640080" y="2487168"/>
-            <a:ext cx="4846320" cy="731520"/>
+            <a:off x="585216" y="2651760"/>
+            <a:ext cx="3017520" cy="320040"/>
           </a:xfrm>
           <a:prstGeom prst="rect">
             <a:avLst/>
@@ -16992,13 +17204,13 @@
               </a:spcAft>
             </a:pPr>
             <a:r>
-              <a:rPr sz="3600" b="1" i="0">
+              <a:rPr sz="1600" b="1" i="0">
                 <a:solidFill>
                   <a:srgbClr val="FFFFFF"/>
                 </a:solidFill>
                 <a:latin typeface="Segoe UI"/>
               </a:rPr>
-              <a:t>XX min</a:t>
+              <a:t>Reviewed</a:t>
             </a:r>
           </a:p>
         </p:txBody>
@@ -17011,8 +17223,8 @@
         </p:nvSpPr>
         <p:spPr>
           <a:xfrm>
-            <a:off x="640080" y="3310128"/>
-            <a:ext cx="4846320" cy="274320"/>
+            <a:off x="585216" y="3108960"/>
+            <a:ext cx="3044952" cy="1463040"/>
           </a:xfrm>
           <a:prstGeom prst="rect">
             <a:avLst/>
@@ -17026,6 +17238,9 @@
           <a:lstStyle/>
           <a:p>
             <a:pPr algn="l">
+              <a:lnSpc>
+                <a:spcPct val="110000"/>
+              </a:lnSpc>
               <a:spcBef>
                 <a:spcPts val="0"/>
               </a:spcBef>
@@ -17040,34 +17255,58 @@
                 </a:solidFill>
                 <a:latin typeface="Segoe UI"/>
               </a:rPr>
-              <a:t>per part, welded by hand</a:t>
-            </a:r>
-          </a:p>
-        </p:txBody>
-      </p:sp>
-      <p:sp>
-        <p:nvSpPr>
-          <p:cNvPr id="9" name="!! Glass B"/>
+              <a:t>616 pages of training manual and customer standard, page by page, against what Level I asks.</a:t>
+            </a:r>
+          </a:p>
+        </p:txBody>
+      </p:sp>
+      <p:pic>
+        <p:nvPicPr>
+          <p:cNvPr id="9" name="!! Card 2" descr="Decorative glass panel"/>
+          <p:cNvPicPr>
+            <a:picLocks noChangeAspect="1"/>
+          </p:cNvPicPr>
+          <p:nvPr/>
+        </p:nvPicPr>
+        <p:blipFill>
+          <a:blip r:embed="rId3">
+            <a:alphaModFix amt="50000"/>
+          </a:blip>
+          <a:stretch>
+            <a:fillRect/>
+          </a:stretch>
+        </p:blipFill>
+        <p:spPr>
+          <a:xfrm>
+            <a:off x="4251960" y="1691640"/>
+            <a:ext cx="3703320" cy="3063240"/>
+          </a:xfrm>
+          <a:prstGeom prst="rect">
+            <a:avLst/>
+          </a:prstGeom>
+        </p:spPr>
+      </p:pic>
+      <p:sp>
+        <p:nvSpPr>
+          <p:cNvPr id="10" name="!! Card 2 rim"/>
           <p:cNvSpPr/>
           <p:nvPr/>
         </p:nvSpPr>
         <p:spPr>
           <a:xfrm>
-            <a:off x="6309360" y="1645920"/>
-            <a:ext cx="5623560" cy="2514600"/>
-          </a:xfrm>
-          <a:prstGeom prst="roundRect">
-            <a:avLst>
-              <a:gd name="adj" fmla="val 6000"/>
-            </a:avLst>
-          </a:prstGeom>
-          <a:solidFill>
-            <a:srgbClr val="D5FB00">
-              <a:alpha val="66000"/>
-            </a:srgbClr>
-          </a:solidFill>
-          <a:ln>
-            <a:noFill/>
+            <a:off x="4251960" y="1691640"/>
+            <a:ext cx="3703320" cy="3063240"/>
+          </a:xfrm>
+          <a:prstGeom prst="rect">
+            <a:avLst/>
+          </a:prstGeom>
+          <a:noFill/>
+          <a:ln w="9525">
+            <a:solidFill>
+              <a:srgbClr val="FFFFFF">
+                <a:alpha val="16000"/>
+              </a:srgbClr>
+            </a:solidFill>
           </a:ln>
         </p:spPr>
         <p:txBody>
@@ -17080,14 +17319,14 @@
       </p:sp>
       <p:sp>
         <p:nvSpPr>
-          <p:cNvPr id="10" name="TextBox 9"/>
+          <p:cNvPr id="11" name="TextBox 10"/>
           <p:cNvSpPr txBox="1"/>
           <p:nvPr/>
         </p:nvSpPr>
         <p:spPr>
           <a:xfrm>
-            <a:off x="6693408" y="2011680"/>
-            <a:ext cx="4846320" cy="274320"/>
+            <a:off x="4581144" y="1965960"/>
+            <a:ext cx="3017520" cy="502920"/>
           </a:xfrm>
           <a:prstGeom prst="rect">
             <a:avLst/>
@@ -17109,27 +17348,27 @@
               </a:spcAft>
             </a:pPr>
             <a:r>
-              <a:rPr sz="1100" b="1" i="0">
-                <a:solidFill>
-                  <a:srgbClr val="051C2C"/>
+              <a:rPr sz="3000" b="1" i="0">
+                <a:solidFill>
+                  <a:srgbClr val="D5FB00"/>
                 </a:solidFill>
                 <a:latin typeface="Segoe UI"/>
               </a:rPr>
-              <a:t>AFTER  |  4M ROBOTIC CELL</a:t>
-            </a:r>
-          </a:p>
-        </p:txBody>
-      </p:sp>
-      <p:sp>
-        <p:nvSpPr>
-          <p:cNvPr id="11" name="TextBox 10"/>
+              <a:t>02</a:t>
+            </a:r>
+          </a:p>
+        </p:txBody>
+      </p:sp>
+      <p:sp>
+        <p:nvSpPr>
+          <p:cNvPr id="12" name="TextBox 11"/>
           <p:cNvSpPr txBox="1"/>
           <p:nvPr/>
         </p:nvSpPr>
         <p:spPr>
           <a:xfrm>
-            <a:off x="6693408" y="2487168"/>
-            <a:ext cx="4846320" cy="731520"/>
+            <a:off x="4581144" y="2651760"/>
+            <a:ext cx="3017520" cy="320040"/>
           </a:xfrm>
           <a:prstGeom prst="rect">
             <a:avLst/>
@@ -17151,27 +17390,27 @@
               </a:spcAft>
             </a:pPr>
             <a:r>
-              <a:rPr sz="3600" b="1" i="0">
-                <a:solidFill>
-                  <a:srgbClr val="051C2C"/>
+              <a:rPr sz="1600" b="1" i="0">
+                <a:solidFill>
+                  <a:srgbClr val="FFFFFF"/>
                 </a:solidFill>
                 <a:latin typeface="Segoe UI"/>
               </a:rPr>
-              <a:t>XX min</a:t>
-            </a:r>
-          </a:p>
-        </p:txBody>
-      </p:sp>
-      <p:sp>
-        <p:nvSpPr>
-          <p:cNvPr id="12" name="TextBox 11"/>
+              <a:t>Found</a:t>
+            </a:r>
+          </a:p>
+        </p:txBody>
+      </p:sp>
+      <p:sp>
+        <p:nvSpPr>
+          <p:cNvPr id="13" name="TextBox 12"/>
           <p:cNvSpPr txBox="1"/>
           <p:nvPr/>
         </p:nvSpPr>
         <p:spPr>
           <a:xfrm>
-            <a:off x="6693408" y="3310128"/>
-            <a:ext cx="4846320" cy="274320"/>
+            <a:off x="4581144" y="3108960"/>
+            <a:ext cx="3044952" cy="1463040"/>
           </a:xfrm>
           <a:prstGeom prst="rect">
             <a:avLst/>
@@ -17185,6 +17424,9 @@
           <a:lstStyle/>
           <a:p>
             <a:pPr algn="l">
+              <a:lnSpc>
+                <a:spcPct val="110000"/>
+              </a:lnSpc>
               <a:spcBef>
                 <a:spcPts val="0"/>
               </a:spcBef>
@@ -17195,25 +17437,82 @@
             <a:r>
               <a:rPr sz="1200" b="0" i="0">
                 <a:solidFill>
-                  <a:srgbClr val="051C2C"/>
+                  <a:srgbClr val="C6CDD1"/>
                 </a:solidFill>
                 <a:latin typeface="Segoe UI"/>
               </a:rPr>
-              <a:t>per part, welded by the robot</a:t>
-            </a:r>
-          </a:p>
-        </p:txBody>
-      </p:sp>
-      <p:sp>
-        <p:nvSpPr>
-          <p:cNvPr id="13" name="TextBox 12"/>
+              <a:t>Gaps: topics the exam asks about that the material barely covers, and an error in one key table.</a:t>
+            </a:r>
+          </a:p>
+        </p:txBody>
+      </p:sp>
+      <p:pic>
+        <p:nvPicPr>
+          <p:cNvPr id="14" name="!! Card 3" descr="Decorative glass panel"/>
+          <p:cNvPicPr>
+            <a:picLocks noChangeAspect="1"/>
+          </p:cNvPicPr>
+          <p:nvPr/>
+        </p:nvPicPr>
+        <p:blipFill>
+          <a:blip r:embed="rId4">
+            <a:alphaModFix amt="50000"/>
+          </a:blip>
+          <a:stretch>
+            <a:fillRect/>
+          </a:stretch>
+        </p:blipFill>
+        <p:spPr>
+          <a:xfrm>
+            <a:off x="8247888" y="1691640"/>
+            <a:ext cx="3703320" cy="3063240"/>
+          </a:xfrm>
+          <a:prstGeom prst="rect">
+            <a:avLst/>
+          </a:prstGeom>
+        </p:spPr>
+      </p:pic>
+      <p:sp>
+        <p:nvSpPr>
+          <p:cNvPr id="15" name="!! Card 3 rim"/>
+          <p:cNvSpPr/>
+          <p:nvPr/>
+        </p:nvSpPr>
+        <p:spPr>
+          <a:xfrm>
+            <a:off x="8247888" y="1691640"/>
+            <a:ext cx="3703320" cy="3063240"/>
+          </a:xfrm>
+          <a:prstGeom prst="rect">
+            <a:avLst/>
+          </a:prstGeom>
+          <a:noFill/>
+          <a:ln w="9525">
+            <a:solidFill>
+              <a:srgbClr val="FFFFFF">
+                <a:alpha val="16000"/>
+              </a:srgbClr>
+            </a:solidFill>
+          </a:ln>
+        </p:spPr>
+        <p:txBody>
+          <a:bodyPr rtlCol="0" anchor="ctr" wrap="square" lIns="0" rIns="0" tIns="0" bIns="0"/>
+          <a:lstStyle/>
+          <a:p>
+            <a:pPr algn="ctr"/>
+          </a:p>
+        </p:txBody>
+      </p:sp>
+      <p:sp>
+        <p:nvSpPr>
+          <p:cNvPr id="16" name="TextBox 15"/>
           <p:cNvSpPr txBox="1"/>
           <p:nvPr/>
         </p:nvSpPr>
         <p:spPr>
           <a:xfrm>
-            <a:off x="256032" y="4526280"/>
-            <a:ext cx="3657600" cy="548640"/>
+            <a:off x="8577072" y="1965960"/>
+            <a:ext cx="3017520" cy="502920"/>
           </a:xfrm>
           <a:prstGeom prst="rect">
             <a:avLst/>
@@ -17235,27 +17534,27 @@
               </a:spcAft>
             </a:pPr>
             <a:r>
-              <a:rPr sz="3200" b="1" i="0">
+              <a:rPr sz="3000" b="1" i="0">
                 <a:solidFill>
                   <a:srgbClr val="D5FB00"/>
                 </a:solidFill>
                 <a:latin typeface="Segoe UI"/>
               </a:rPr>
-              <a:t>XX%</a:t>
-            </a:r>
-          </a:p>
-        </p:txBody>
-      </p:sp>
-      <p:sp>
-        <p:nvSpPr>
-          <p:cNvPr id="14" name="TextBox 13"/>
+              <a:t>03</a:t>
+            </a:r>
+          </a:p>
+        </p:txBody>
+      </p:sp>
+      <p:sp>
+        <p:nvSpPr>
+          <p:cNvPr id="17" name="TextBox 16"/>
           <p:cNvSpPr txBox="1"/>
           <p:nvPr/>
         </p:nvSpPr>
         <p:spPr>
           <a:xfrm>
-            <a:off x="256032" y="5138928"/>
-            <a:ext cx="3566160" cy="365760"/>
+            <a:off x="8577072" y="2651760"/>
+            <a:ext cx="3017520" cy="320040"/>
           </a:xfrm>
           <a:prstGeom prst="rect">
             <a:avLst/>
@@ -17277,27 +17576,27 @@
               </a:spcAft>
             </a:pPr>
             <a:r>
-              <a:rPr sz="1200" b="0" i="0">
-                <a:solidFill>
-                  <a:srgbClr val="C6CDD1"/>
+              <a:rPr sz="1600" b="1" i="0">
+                <a:solidFill>
+                  <a:srgbClr val="FFFFFF"/>
                 </a:solidFill>
                 <a:latin typeface="Segoe UI"/>
               </a:rPr>
-              <a:t>less process time per part</a:t>
-            </a:r>
-          </a:p>
-        </p:txBody>
-      </p:sp>
-      <p:sp>
-        <p:nvSpPr>
-          <p:cNvPr id="15" name="TextBox 14"/>
+              <a:t>Rebuilt</a:t>
+            </a:r>
+          </a:p>
+        </p:txBody>
+      </p:sp>
+      <p:sp>
+        <p:nvSpPr>
+          <p:cNvPr id="18" name="TextBox 17"/>
           <p:cNvSpPr txBox="1"/>
           <p:nvPr/>
         </p:nvSpPr>
         <p:spPr>
           <a:xfrm>
-            <a:off x="4251960" y="4526280"/>
-            <a:ext cx="3657600" cy="548640"/>
+            <a:off x="8577072" y="3108960"/>
+            <a:ext cx="3044952" cy="1463040"/>
           </a:xfrm>
           <a:prstGeom prst="rect">
             <a:avLst/>
@@ -17311,6 +17610,9 @@
           <a:lstStyle/>
           <a:p>
             <a:pPr algn="l">
+              <a:lnSpc>
+                <a:spcPct val="110000"/>
+              </a:lnSpc>
               <a:spcBef>
                 <a:spcPts val="0"/>
               </a:spcBef>
@@ -17319,27 +17621,84 @@
               </a:spcAft>
             </a:pPr>
             <a:r>
-              <a:rPr sz="3200" b="1" i="0">
-                <a:solidFill>
-                  <a:srgbClr val="D5FB00"/>
+              <a:rPr sz="1200" b="0" i="0">
+                <a:solidFill>
+                  <a:srgbClr val="C6CDD1"/>
                 </a:solidFill>
                 <a:latin typeface="Segoe UI"/>
               </a:rPr>
-              <a:t>XX</a:t>
-            </a:r>
-          </a:p>
-        </p:txBody>
-      </p:sp>
-      <p:sp>
-        <p:nvSpPr>
-          <p:cNvPr id="16" name="TextBox 15"/>
+              <a:t>The schedule, in the plant’s own format, so plan and reality can be compared week by week.</a:t>
+            </a:r>
+          </a:p>
+        </p:txBody>
+      </p:sp>
+      <p:pic>
+        <p:nvPicPr>
+          <p:cNvPr id="19" name="!! Strip" descr="Decorative glass panel"/>
+          <p:cNvPicPr>
+            <a:picLocks noChangeAspect="1"/>
+          </p:cNvPicPr>
+          <p:nvPr/>
+        </p:nvPicPr>
+        <p:blipFill>
+          <a:blip r:embed="rId5">
+            <a:alphaModFix amt="50000"/>
+          </a:blip>
+          <a:stretch>
+            <a:fillRect/>
+          </a:stretch>
+        </p:blipFill>
+        <p:spPr>
+          <a:xfrm>
+            <a:off x="256032" y="4956048"/>
+            <a:ext cx="11676888" cy="566928"/>
+          </a:xfrm>
+          <a:prstGeom prst="rect">
+            <a:avLst/>
+          </a:prstGeom>
+        </p:spPr>
+      </p:pic>
+      <p:sp>
+        <p:nvSpPr>
+          <p:cNvPr id="20" name="!! Strip rim"/>
+          <p:cNvSpPr/>
+          <p:nvPr/>
+        </p:nvSpPr>
+        <p:spPr>
+          <a:xfrm>
+            <a:off x="256032" y="4956048"/>
+            <a:ext cx="11676888" cy="566928"/>
+          </a:xfrm>
+          <a:prstGeom prst="rect">
+            <a:avLst/>
+          </a:prstGeom>
+          <a:noFill/>
+          <a:ln w="9525">
+            <a:solidFill>
+              <a:srgbClr val="FFFFFF">
+                <a:alpha val="16000"/>
+              </a:srgbClr>
+            </a:solidFill>
+          </a:ln>
+        </p:spPr>
+        <p:txBody>
+          <a:bodyPr rtlCol="0" anchor="ctr" wrap="square" lIns="0" rIns="0" tIns="0" bIns="0"/>
+          <a:lstStyle/>
+          <a:p>
+            <a:pPr algn="ctr"/>
+          </a:p>
+        </p:txBody>
+      </p:sp>
+      <p:sp>
+        <p:nvSpPr>
+          <p:cNvPr id="21" name="TextBox 20"/>
           <p:cNvSpPr txBox="1"/>
           <p:nvPr/>
         </p:nvSpPr>
         <p:spPr>
           <a:xfrm>
-            <a:off x="4251960" y="5138928"/>
-            <a:ext cx="3566160" cy="365760"/>
+            <a:off x="566928" y="5138928"/>
+            <a:ext cx="2011680" cy="228600"/>
           </a:xfrm>
           <a:prstGeom prst="rect">
             <a:avLst/>
@@ -17361,27 +17720,27 @@
               </a:spcAft>
             </a:pPr>
             <a:r>
-              <a:rPr sz="1200" b="0" i="0">
-                <a:solidFill>
-                  <a:srgbClr val="C6CDD1"/>
+              <a:rPr sz="1100" b="1" i="0">
+                <a:solidFill>
+                  <a:srgbClr val="D5FB00"/>
                 </a:solidFill>
                 <a:latin typeface="Segoe UI"/>
               </a:rPr>
-              <a:t>welds moved from the booth to the robot</a:t>
-            </a:r>
-          </a:p>
-        </p:txBody>
-      </p:sp>
-      <p:sp>
-        <p:nvSpPr>
-          <p:cNvPr id="17" name="TextBox 16"/>
+              <a:t>PROPOSAL</a:t>
+            </a:r>
+          </a:p>
+        </p:txBody>
+      </p:sp>
+      <p:sp>
+        <p:nvSpPr>
+          <p:cNvPr id="22" name="TextBox 21"/>
           <p:cNvSpPr txBox="1"/>
           <p:nvPr/>
         </p:nvSpPr>
         <p:spPr>
           <a:xfrm>
-            <a:off x="8247888" y="4526280"/>
-            <a:ext cx="3657600" cy="548640"/>
+            <a:off x="2514600" y="5120640"/>
+            <a:ext cx="9144000" cy="274320"/>
           </a:xfrm>
           <a:prstGeom prst="rect">
             <a:avLst/>
@@ -17403,55 +17762,13 @@
               </a:spcAft>
             </a:pPr>
             <a:r>
-              <a:rPr sz="3200" b="1" i="0">
-                <a:solidFill>
-                  <a:srgbClr val="D5FB00"/>
+              <a:rPr sz="1200" b="0" i="0">
+                <a:solidFill>
+                  <a:srgbClr val="FFFFFF"/>
                 </a:solidFill>
                 <a:latin typeface="Segoe UI"/>
               </a:rPr>
-              <a:t>XX min</a:t>
-            </a:r>
-          </a:p>
-        </p:txBody>
-      </p:sp>
-      <p:sp>
-        <p:nvSpPr>
-          <p:cNvPr id="18" name="TextBox 17"/>
-          <p:cNvSpPr txBox="1"/>
-          <p:nvPr/>
-        </p:nvSpPr>
-        <p:spPr>
-          <a:xfrm>
-            <a:off x="8247888" y="5138928"/>
-            <a:ext cx="3566160" cy="365760"/>
-          </a:xfrm>
-          <a:prstGeom prst="rect">
-            <a:avLst/>
-          </a:prstGeom>
-          <a:noFill/>
-        </p:spPr>
-        <p:txBody>
-          <a:bodyPr wrap="square" lIns="0" rIns="0" tIns="0" bIns="0" anchor="t">
-            <a:spAutoFit/>
-          </a:bodyPr>
-          <a:lstStyle/>
-          <a:p>
-            <a:pPr algn="l">
-              <a:spcBef>
-                <a:spcPts val="0"/>
-              </a:spcBef>
-              <a:spcAft>
-                <a:spcPts val="0"/>
-              </a:spcAft>
-            </a:pPr>
-            <a:r>
-              <a:rPr sz="1200" b="0" i="0">
-                <a:solidFill>
-                  <a:srgbClr val="C6CDD1"/>
-                </a:solidFill>
-                <a:latin typeface="Segoe UI"/>
-              </a:rPr>
-              <a:t>of uncomfortable welding removed per shift</a:t>
+              <a:t>Use the corrected material and the new schedule with the next group of setters.</a:t>
             </a:r>
           </a:p>
         </p:txBody>
@@ -17508,7 +17825,7 @@
                 </a:solidFill>
                 <a:latin typeface="Segoe UI"/>
               </a:rPr>
-              <a:t>What I would change in how setters learn</a:t>
+              <a:t>Next: from knowing it to doing it alone</a:t>
             </a:r>
           </a:p>
         </p:txBody>
@@ -17535,14 +17852,14 @@
                 </a:solidFill>
                 <a:latin typeface="Segoe UI"/>
               </a:rPr>
-              <a:t>Final project  |  Training process update, a proposal</a:t>
+              <a:t>What comes next, until January</a:t>
             </a:r>
           </a:p>
         </p:txBody>
       </p:sp>
       <p:pic>
         <p:nvPicPr>
-          <p:cNvPr id="4" name="!! Card 1" descr="Decorative glass panel"/>
+          <p:cNvPr id="4" name="!! Glass A" descr="Decorative glass panel"/>
           <p:cNvPicPr>
             <a:picLocks noChangeAspect="1"/>
           </p:cNvPicPr>
@@ -17558,8 +17875,8 @@
         </p:blipFill>
         <p:spPr>
           <a:xfrm>
-            <a:off x="256032" y="1691640"/>
-            <a:ext cx="3703320" cy="3063240"/>
+            <a:off x="256032" y="1600200"/>
+            <a:ext cx="7223760" cy="3886200"/>
           </a:xfrm>
           <a:prstGeom prst="rect">
             <a:avLst/>
@@ -17568,14 +17885,14 @@
       </p:pic>
       <p:sp>
         <p:nvSpPr>
-          <p:cNvPr id="5" name="!! Card 1 rim"/>
+          <p:cNvPr id="5" name="!! Glass A rim"/>
           <p:cNvSpPr/>
           <p:nvPr/>
         </p:nvSpPr>
         <p:spPr>
           <a:xfrm>
-            <a:off x="256032" y="1691640"/>
-            <a:ext cx="3703320" cy="3063240"/>
+            <a:off x="256032" y="1600200"/>
+            <a:ext cx="7223760" cy="3886200"/>
           </a:xfrm>
           <a:prstGeom prst="rect">
             <a:avLst/>
@@ -17605,8 +17922,8 @@
         </p:nvSpPr>
         <p:spPr>
           <a:xfrm>
-            <a:off x="585216" y="1965960"/>
-            <a:ext cx="3017520" cy="502920"/>
+            <a:off x="621792" y="1901952"/>
+            <a:ext cx="5486400" cy="274320"/>
           </a:xfrm>
           <a:prstGeom prst="rect">
             <a:avLst/>
@@ -17628,13 +17945,13 @@
               </a:spcAft>
             </a:pPr>
             <a:r>
-              <a:rPr sz="3000" b="1" i="0">
+              <a:rPr sz="1600" b="1" i="0">
                 <a:solidFill>
                   <a:srgbClr val="D5FB00"/>
                 </a:solidFill>
                 <a:latin typeface="Segoe UI"/>
               </a:rPr>
-              <a:t>01</a:t>
+              <a:t>NEXT LEVELS</a:t>
             </a:r>
           </a:p>
         </p:txBody>
@@ -17647,8 +17964,8 @@
         </p:nvSpPr>
         <p:spPr>
           <a:xfrm>
-            <a:off x="585216" y="2651760"/>
-            <a:ext cx="3017520" cy="320040"/>
+            <a:off x="621792" y="2359152"/>
+            <a:ext cx="457200" cy="457200"/>
           </a:xfrm>
           <a:prstGeom prst="rect">
             <a:avLst/>
@@ -17670,13 +17987,13 @@
               </a:spcAft>
             </a:pPr>
             <a:r>
-              <a:rPr sz="1600" b="1" i="0">
-                <a:solidFill>
-                  <a:srgbClr val="FFFFFF"/>
+              <a:rPr sz="2400" b="1" i="0">
+                <a:solidFill>
+                  <a:srgbClr val="D5FB00"/>
                 </a:solidFill>
                 <a:latin typeface="Segoe UI"/>
               </a:rPr>
-              <a:t>Reviewed</a:t>
+              <a:t>L</a:t>
             </a:r>
           </a:p>
         </p:txBody>
@@ -17689,8 +18006,8 @@
         </p:nvSpPr>
         <p:spPr>
           <a:xfrm>
-            <a:off x="585216" y="3108960"/>
-            <a:ext cx="3044952" cy="1463040"/>
+            <a:off x="1143000" y="2395728"/>
+            <a:ext cx="5943600" cy="320040"/>
           </a:xfrm>
           <a:prstGeom prst="rect">
             <a:avLst/>
@@ -17704,9 +18021,6 @@
           <a:lstStyle/>
           <a:p>
             <a:pPr algn="l">
-              <a:lnSpc>
-                <a:spcPct val="110000"/>
-              </a:lnSpc>
               <a:spcBef>
                 <a:spcPts val="0"/>
               </a:spcBef>
@@ -17715,20 +18029,376 @@
               </a:spcAft>
             </a:pPr>
             <a:r>
-              <a:rPr sz="1200" b="0" i="0">
-                <a:solidFill>
-                  <a:srgbClr val="C6CDD1"/>
+              <a:rPr sz="1400" b="0" i="0">
+                <a:solidFill>
+                  <a:srgbClr val="FFFFFF"/>
                 </a:solidFill>
                 <a:latin typeface="Segoe UI"/>
               </a:rPr>
-              <a:t>616 pages of training manual and customer standard, page by page, against what Level I asks.</a:t>
+              <a:t>Validate settings and find defects at the cell, with support.</a:t>
+            </a:r>
+          </a:p>
+        </p:txBody>
+      </p:sp>
+      <p:sp>
+        <p:nvSpPr>
+          <p:cNvPr id="9" name="TextBox 8"/>
+          <p:cNvSpPr txBox="1"/>
+          <p:nvPr/>
+        </p:nvSpPr>
+        <p:spPr>
+          <a:xfrm>
+            <a:off x="1143000" y="2724912"/>
+            <a:ext cx="5943600" cy="274320"/>
+          </a:xfrm>
+          <a:prstGeom prst="rect">
+            <a:avLst/>
+          </a:prstGeom>
+          <a:noFill/>
+        </p:spPr>
+        <p:txBody>
+          <a:bodyPr wrap="square" lIns="0" rIns="0" tIns="0" bIns="0" anchor="t">
+            <a:spAutoFit/>
+          </a:bodyPr>
+          <a:lstStyle/>
+          <a:p>
+            <a:pPr algn="l">
+              <a:spcBef>
+                <a:spcPts val="0"/>
+              </a:spcBef>
+              <a:spcAft>
+                <a:spcPts val="0"/>
+              </a:spcAft>
+            </a:pPr>
+            <a:r>
+              <a:rPr sz="1200" b="0" i="0">
+                <a:solidFill>
+                  <a:srgbClr val="C6CDD1"/>
+                </a:solidFill>
+                <a:latin typeface="Segoe UI"/>
+              </a:rPr>
+              <a:t>November</a:t>
+            </a:r>
+          </a:p>
+        </p:txBody>
+      </p:sp>
+      <p:sp>
+        <p:nvSpPr>
+          <p:cNvPr id="10" name="Rectangle 9"/>
+          <p:cNvSpPr/>
+          <p:nvPr/>
+        </p:nvSpPr>
+        <p:spPr>
+          <a:xfrm>
+            <a:off x="621792" y="3191256"/>
+            <a:ext cx="6492240" cy="9144"/>
+          </a:xfrm>
+          <a:prstGeom prst="rect">
+            <a:avLst/>
+          </a:prstGeom>
+          <a:solidFill>
+            <a:srgbClr val="FFFFFF">
+              <a:alpha val="14000"/>
+            </a:srgbClr>
+          </a:solidFill>
+          <a:ln>
+            <a:noFill/>
+          </a:ln>
+        </p:spPr>
+        <p:txBody>
+          <a:bodyPr rtlCol="0" anchor="ctr" wrap="square" lIns="0" rIns="0" tIns="0" bIns="0"/>
+          <a:lstStyle/>
+          <a:p>
+            <a:pPr algn="ctr"/>
+          </a:p>
+        </p:txBody>
+      </p:sp>
+      <p:sp>
+        <p:nvSpPr>
+          <p:cNvPr id="11" name="TextBox 10"/>
+          <p:cNvSpPr txBox="1"/>
+          <p:nvPr/>
+        </p:nvSpPr>
+        <p:spPr>
+          <a:xfrm>
+            <a:off x="621792" y="3319272"/>
+            <a:ext cx="457200" cy="457200"/>
+          </a:xfrm>
+          <a:prstGeom prst="rect">
+            <a:avLst/>
+          </a:prstGeom>
+          <a:noFill/>
+        </p:spPr>
+        <p:txBody>
+          <a:bodyPr wrap="square" lIns="0" rIns="0" tIns="0" bIns="0" anchor="t">
+            <a:spAutoFit/>
+          </a:bodyPr>
+          <a:lstStyle/>
+          <a:p>
+            <a:pPr algn="l">
+              <a:spcBef>
+                <a:spcPts val="0"/>
+              </a:spcBef>
+              <a:spcAft>
+                <a:spcPts val="0"/>
+              </a:spcAft>
+            </a:pPr>
+            <a:r>
+              <a:rPr sz="2400" b="1" i="0">
+                <a:solidFill>
+                  <a:srgbClr val="D5FB00"/>
+                </a:solidFill>
+                <a:latin typeface="Segoe UI"/>
+              </a:rPr>
+              <a:t>U</a:t>
+            </a:r>
+          </a:p>
+        </p:txBody>
+      </p:sp>
+      <p:sp>
+        <p:nvSpPr>
+          <p:cNvPr id="12" name="TextBox 11"/>
+          <p:cNvSpPr txBox="1"/>
+          <p:nvPr/>
+        </p:nvSpPr>
+        <p:spPr>
+          <a:xfrm>
+            <a:off x="1143000" y="3355848"/>
+            <a:ext cx="5943600" cy="320040"/>
+          </a:xfrm>
+          <a:prstGeom prst="rect">
+            <a:avLst/>
+          </a:prstGeom>
+          <a:noFill/>
+        </p:spPr>
+        <p:txBody>
+          <a:bodyPr wrap="square" lIns="0" rIns="0" tIns="0" bIns="0" anchor="t">
+            <a:spAutoFit/>
+          </a:bodyPr>
+          <a:lstStyle/>
+          <a:p>
+            <a:pPr algn="l">
+              <a:spcBef>
+                <a:spcPts val="0"/>
+              </a:spcBef>
+              <a:spcAft>
+                <a:spcPts val="0"/>
+              </a:spcAft>
+            </a:pPr>
+            <a:r>
+              <a:rPr sz="1400" b="0" i="0">
+                <a:solidFill>
+                  <a:srgbClr val="FFFFFF"/>
+                </a:solidFill>
+                <a:latin typeface="Segoe UI"/>
+              </a:rPr>
+              <a:t>Create and set up robot programs on my own (SKS).</a:t>
+            </a:r>
+          </a:p>
+        </p:txBody>
+      </p:sp>
+      <p:sp>
+        <p:nvSpPr>
+          <p:cNvPr id="13" name="TextBox 12"/>
+          <p:cNvSpPr txBox="1"/>
+          <p:nvPr/>
+        </p:nvSpPr>
+        <p:spPr>
+          <a:xfrm>
+            <a:off x="1143000" y="3685032"/>
+            <a:ext cx="5943600" cy="274320"/>
+          </a:xfrm>
+          <a:prstGeom prst="rect">
+            <a:avLst/>
+          </a:prstGeom>
+          <a:noFill/>
+        </p:spPr>
+        <p:txBody>
+          <a:bodyPr wrap="square" lIns="0" rIns="0" tIns="0" bIns="0" anchor="t">
+            <a:spAutoFit/>
+          </a:bodyPr>
+          <a:lstStyle/>
+          <a:p>
+            <a:pPr algn="l">
+              <a:spcBef>
+                <a:spcPts val="0"/>
+              </a:spcBef>
+              <a:spcAft>
+                <a:spcPts val="0"/>
+              </a:spcAft>
+            </a:pPr>
+            <a:r>
+              <a:rPr sz="1200" b="0" i="0">
+                <a:solidFill>
+                  <a:srgbClr val="C6CDD1"/>
+                </a:solidFill>
+                <a:latin typeface="Segoe UI"/>
+              </a:rPr>
+              <a:t>December</a:t>
+            </a:r>
+          </a:p>
+        </p:txBody>
+      </p:sp>
+      <p:sp>
+        <p:nvSpPr>
+          <p:cNvPr id="14" name="Rectangle 13"/>
+          <p:cNvSpPr/>
+          <p:nvPr/>
+        </p:nvSpPr>
+        <p:spPr>
+          <a:xfrm>
+            <a:off x="621792" y="4151376"/>
+            <a:ext cx="6492240" cy="9144"/>
+          </a:xfrm>
+          <a:prstGeom prst="rect">
+            <a:avLst/>
+          </a:prstGeom>
+          <a:solidFill>
+            <a:srgbClr val="FFFFFF">
+              <a:alpha val="14000"/>
+            </a:srgbClr>
+          </a:solidFill>
+          <a:ln>
+            <a:noFill/>
+          </a:ln>
+        </p:spPr>
+        <p:txBody>
+          <a:bodyPr rtlCol="0" anchor="ctr" wrap="square" lIns="0" rIns="0" tIns="0" bIns="0"/>
+          <a:lstStyle/>
+          <a:p>
+            <a:pPr algn="ctr"/>
+          </a:p>
+        </p:txBody>
+      </p:sp>
+      <p:sp>
+        <p:nvSpPr>
+          <p:cNvPr id="15" name="TextBox 14"/>
+          <p:cNvSpPr txBox="1"/>
+          <p:nvPr/>
+        </p:nvSpPr>
+        <p:spPr>
+          <a:xfrm>
+            <a:off x="621792" y="4279392"/>
+            <a:ext cx="457200" cy="457200"/>
+          </a:xfrm>
+          <a:prstGeom prst="rect">
+            <a:avLst/>
+          </a:prstGeom>
+          <a:noFill/>
+        </p:spPr>
+        <p:txBody>
+          <a:bodyPr wrap="square" lIns="0" rIns="0" tIns="0" bIns="0" anchor="t">
+            <a:spAutoFit/>
+          </a:bodyPr>
+          <a:lstStyle/>
+          <a:p>
+            <a:pPr algn="l">
+              <a:spcBef>
+                <a:spcPts val="0"/>
+              </a:spcBef>
+              <a:spcAft>
+                <a:spcPts val="0"/>
+              </a:spcAft>
+            </a:pPr>
+            <a:r>
+              <a:rPr sz="2400" b="1" i="0">
+                <a:solidFill>
+                  <a:srgbClr val="D5FB00"/>
+                </a:solidFill>
+                <a:latin typeface="Segoe UI"/>
+              </a:rPr>
+              <a:t>O</a:t>
+            </a:r>
+          </a:p>
+        </p:txBody>
+      </p:sp>
+      <p:sp>
+        <p:nvSpPr>
+          <p:cNvPr id="16" name="TextBox 15"/>
+          <p:cNvSpPr txBox="1"/>
+          <p:nvPr/>
+        </p:nvSpPr>
+        <p:spPr>
+          <a:xfrm>
+            <a:off x="1143000" y="4315968"/>
+            <a:ext cx="5943600" cy="320040"/>
+          </a:xfrm>
+          <a:prstGeom prst="rect">
+            <a:avLst/>
+          </a:prstGeom>
+          <a:noFill/>
+        </p:spPr>
+        <p:txBody>
+          <a:bodyPr wrap="square" lIns="0" rIns="0" tIns="0" bIns="0" anchor="t">
+            <a:spAutoFit/>
+          </a:bodyPr>
+          <a:lstStyle/>
+          <a:p>
+            <a:pPr algn="l">
+              <a:spcBef>
+                <a:spcPts val="0"/>
+              </a:spcBef>
+              <a:spcAft>
+                <a:spcPts val="0"/>
+              </a:spcAft>
+            </a:pPr>
+            <a:r>
+              <a:rPr sz="1400" b="0" i="0">
+                <a:solidFill>
+                  <a:srgbClr val="FFFFFF"/>
+                </a:solidFill>
+                <a:latin typeface="Segoe UI"/>
+              </a:rPr>
+              <a:t>Solve problems, share what I learn, keep improving.</a:t>
+            </a:r>
+          </a:p>
+        </p:txBody>
+      </p:sp>
+      <p:sp>
+        <p:nvSpPr>
+          <p:cNvPr id="17" name="TextBox 16"/>
+          <p:cNvSpPr txBox="1"/>
+          <p:nvPr/>
+        </p:nvSpPr>
+        <p:spPr>
+          <a:xfrm>
+            <a:off x="1143000" y="4645152"/>
+            <a:ext cx="5943600" cy="274320"/>
+          </a:xfrm>
+          <a:prstGeom prst="rect">
+            <a:avLst/>
+          </a:prstGeom>
+          <a:noFill/>
+        </p:spPr>
+        <p:txBody>
+          <a:bodyPr wrap="square" lIns="0" rIns="0" tIns="0" bIns="0" anchor="t">
+            <a:spAutoFit/>
+          </a:bodyPr>
+          <a:lstStyle/>
+          <a:p>
+            <a:pPr algn="l">
+              <a:spcBef>
+                <a:spcPts val="0"/>
+              </a:spcBef>
+              <a:spcAft>
+                <a:spcPts val="0"/>
+              </a:spcAft>
+            </a:pPr>
+            <a:r>
+              <a:rPr sz="1200" b="0" i="0">
+                <a:solidFill>
+                  <a:srgbClr val="C6CDD1"/>
+                </a:solidFill>
+                <a:latin typeface="Segoe UI"/>
+              </a:rPr>
+              <a:t>Already started with 4M</a:t>
             </a:r>
           </a:p>
         </p:txBody>
       </p:sp>
       <p:pic>
         <p:nvPicPr>
-          <p:cNvPr id="9" name="!! Card 2" descr="Decorative glass panel"/>
+          <p:cNvPr id="18" name="!! Glass B" descr="Decorative glass panel"/>
           <p:cNvPicPr>
             <a:picLocks noChangeAspect="1"/>
           </p:cNvPicPr>
@@ -17744,8 +18414,8 @@
         </p:blipFill>
         <p:spPr>
           <a:xfrm>
-            <a:off x="4251960" y="1691640"/>
-            <a:ext cx="3703320" cy="3063240"/>
+            <a:off x="7818120" y="1600200"/>
+            <a:ext cx="4114800" cy="3886200"/>
           </a:xfrm>
           <a:prstGeom prst="rect">
             <a:avLst/>
@@ -17754,14 +18424,14 @@
       </p:pic>
       <p:sp>
         <p:nvSpPr>
-          <p:cNvPr id="10" name="!! Card 2 rim"/>
+          <p:cNvPr id="19" name="!! Glass B rim"/>
           <p:cNvSpPr/>
           <p:nvPr/>
         </p:nvSpPr>
         <p:spPr>
           <a:xfrm>
-            <a:off x="4251960" y="1691640"/>
-            <a:ext cx="3703320" cy="3063240"/>
+            <a:off x="7818120" y="1600200"/>
+            <a:ext cx="4114800" cy="3886200"/>
           </a:xfrm>
           <a:prstGeom prst="rect">
             <a:avLst/>
@@ -17785,14 +18455,14 @@
       </p:sp>
       <p:sp>
         <p:nvSpPr>
-          <p:cNvPr id="11" name="TextBox 10"/>
+          <p:cNvPr id="20" name="TextBox 19"/>
           <p:cNvSpPr txBox="1"/>
           <p:nvPr/>
         </p:nvSpPr>
         <p:spPr>
           <a:xfrm>
-            <a:off x="4581144" y="1965960"/>
-            <a:ext cx="3017520" cy="502920"/>
+            <a:off x="8183879" y="1901952"/>
+            <a:ext cx="5486400" cy="274320"/>
           </a:xfrm>
           <a:prstGeom prst="rect">
             <a:avLst/>
@@ -17814,27 +18484,56 @@
               </a:spcAft>
             </a:pPr>
             <a:r>
-              <a:rPr sz="3000" b="1" i="0">
+              <a:rPr sz="1600" b="1" i="0">
                 <a:solidFill>
                   <a:srgbClr val="D5FB00"/>
                 </a:solidFill>
                 <a:latin typeface="Segoe UI"/>
               </a:rPr>
-              <a:t>02</a:t>
-            </a:r>
-          </a:p>
-        </p:txBody>
-      </p:sp>
-      <p:sp>
-        <p:nvSpPr>
-          <p:cNvPr id="12" name="TextBox 11"/>
+              <a:t>WHAT I NEED</a:t>
+            </a:r>
+          </a:p>
+        </p:txBody>
+      </p:sp>
+      <p:sp>
+        <p:nvSpPr>
+          <p:cNvPr id="21" name="Chevron 20"/>
+          <p:cNvSpPr/>
+          <p:nvPr/>
+        </p:nvSpPr>
+        <p:spPr>
+          <a:xfrm>
+            <a:off x="8183879" y="2478024"/>
+            <a:ext cx="128016" cy="128016"/>
+          </a:xfrm>
+          <a:prstGeom prst="chevron">
+            <a:avLst/>
+          </a:prstGeom>
+          <a:solidFill>
+            <a:srgbClr val="D5FB00"/>
+          </a:solidFill>
+          <a:ln>
+            <a:noFill/>
+          </a:ln>
+        </p:spPr>
+        <p:txBody>
+          <a:bodyPr rtlCol="0" anchor="ctr" wrap="square" lIns="0" rIns="0" tIns="0" bIns="0"/>
+          <a:lstStyle/>
+          <a:p>
+            <a:pPr algn="ctr"/>
+          </a:p>
+        </p:txBody>
+      </p:sp>
+      <p:sp>
+        <p:nvSpPr>
+          <p:cNvPr id="22" name="TextBox 21"/>
           <p:cNvSpPr txBox="1"/>
           <p:nvPr/>
         </p:nvSpPr>
         <p:spPr>
           <a:xfrm>
-            <a:off x="4581144" y="2651760"/>
-            <a:ext cx="3017520" cy="320040"/>
+            <a:off x="8458200" y="2395728"/>
+            <a:ext cx="3246120" cy="640080"/>
           </a:xfrm>
           <a:prstGeom prst="rect">
             <a:avLst/>
@@ -17856,27 +18555,56 @@
               </a:spcAft>
             </a:pPr>
             <a:r>
-              <a:rPr sz="1600" b="1" i="0">
+              <a:rPr sz="1400" b="0" i="0">
                 <a:solidFill>
                   <a:srgbClr val="FFFFFF"/>
                 </a:solidFill>
                 <a:latin typeface="Segoe UI"/>
               </a:rPr>
-              <a:t>Found</a:t>
-            </a:r>
-          </a:p>
-        </p:txBody>
-      </p:sp>
-      <p:sp>
-        <p:nvSpPr>
-          <p:cNvPr id="13" name="TextBox 12"/>
+              <a:t>A date for my Level I exam</a:t>
+            </a:r>
+          </a:p>
+        </p:txBody>
+      </p:sp>
+      <p:sp>
+        <p:nvSpPr>
+          <p:cNvPr id="23" name="Chevron 22"/>
+          <p:cNvSpPr/>
+          <p:nvPr/>
+        </p:nvSpPr>
+        <p:spPr>
+          <a:xfrm>
+            <a:off x="8183879" y="3209544"/>
+            <a:ext cx="128016" cy="128016"/>
+          </a:xfrm>
+          <a:prstGeom prst="chevron">
+            <a:avLst/>
+          </a:prstGeom>
+          <a:solidFill>
+            <a:srgbClr val="D5FB00"/>
+          </a:solidFill>
+          <a:ln>
+            <a:noFill/>
+          </a:ln>
+        </p:spPr>
+        <p:txBody>
+          <a:bodyPr rtlCol="0" anchor="ctr" wrap="square" lIns="0" rIns="0" tIns="0" bIns="0"/>
+          <a:lstStyle/>
+          <a:p>
+            <a:pPr algn="ctr"/>
+          </a:p>
+        </p:txBody>
+      </p:sp>
+      <p:sp>
+        <p:nvSpPr>
+          <p:cNvPr id="24" name="TextBox 23"/>
           <p:cNvSpPr txBox="1"/>
           <p:nvPr/>
         </p:nvSpPr>
         <p:spPr>
           <a:xfrm>
-            <a:off x="4581144" y="3108960"/>
-            <a:ext cx="3044952" cy="1463040"/>
+            <a:off x="8458200" y="3127248"/>
+            <a:ext cx="3246120" cy="640080"/>
           </a:xfrm>
           <a:prstGeom prst="rect">
             <a:avLst/>
@@ -17890,9 +18618,6 @@
           <a:lstStyle/>
           <a:p>
             <a:pPr algn="l">
-              <a:lnSpc>
-                <a:spcPct val="110000"/>
-              </a:lnSpc>
               <a:spcBef>
                 <a:spcPts val="0"/>
               </a:spcBef>
@@ -17901,64 +18626,36 @@
               </a:spcAft>
             </a:pPr>
             <a:r>
-              <a:rPr sz="1200" b="0" i="0">
-                <a:solidFill>
-                  <a:srgbClr val="C6CDD1"/>
+              <a:rPr sz="1400" b="0" i="0">
+                <a:solidFill>
+                  <a:srgbClr val="FFFFFF"/>
                 </a:solidFill>
                 <a:latin typeface="Segoe UI"/>
               </a:rPr>
-              <a:t>Gaps: topics the exam asks about that the material barely covers, and an error in one key table.</a:t>
-            </a:r>
-          </a:p>
-        </p:txBody>
-      </p:sp>
-      <p:pic>
-        <p:nvPicPr>
-          <p:cNvPr id="14" name="!! Card 3" descr="Decorative glass panel"/>
-          <p:cNvPicPr>
-            <a:picLocks noChangeAspect="1"/>
-          </p:cNvPicPr>
-          <p:nvPr/>
-        </p:nvPicPr>
-        <p:blipFill>
-          <a:blip r:embed="rId4">
-            <a:alphaModFix amt="50000"/>
-          </a:blip>
-          <a:stretch>
-            <a:fillRect/>
-          </a:stretch>
-        </p:blipFill>
-        <p:spPr>
-          <a:xfrm>
-            <a:off x="8247888" y="1691640"/>
-            <a:ext cx="3703320" cy="3063240"/>
-          </a:xfrm>
-          <a:prstGeom prst="rect">
-            <a:avLst/>
-          </a:prstGeom>
-        </p:spPr>
-      </p:pic>
-      <p:sp>
-        <p:nvSpPr>
-          <p:cNvPr id="15" name="!! Card 3 rim"/>
+              <a:t>Supervised time programming robots in SKS</a:t>
+            </a:r>
+          </a:p>
+        </p:txBody>
+      </p:sp>
+      <p:sp>
+        <p:nvSpPr>
+          <p:cNvPr id="25" name="Chevron 24"/>
           <p:cNvSpPr/>
           <p:nvPr/>
         </p:nvSpPr>
         <p:spPr>
           <a:xfrm>
-            <a:off x="8247888" y="1691640"/>
-            <a:ext cx="3703320" cy="3063240"/>
-          </a:xfrm>
-          <a:prstGeom prst="rect">
-            <a:avLst/>
-          </a:prstGeom>
-          <a:noFill/>
-          <a:ln w="9525">
-            <a:solidFill>
-              <a:srgbClr val="FFFFFF">
-                <a:alpha val="16000"/>
-              </a:srgbClr>
-            </a:solidFill>
+            <a:off x="8183879" y="3941064"/>
+            <a:ext cx="128016" cy="128016"/>
+          </a:xfrm>
+          <a:prstGeom prst="chevron">
+            <a:avLst/>
+          </a:prstGeom>
+          <a:solidFill>
+            <a:srgbClr val="D5FB00"/>
+          </a:solidFill>
+          <a:ln>
+            <a:noFill/>
           </a:ln>
         </p:spPr>
         <p:txBody>
@@ -17971,14 +18668,14 @@
       </p:sp>
       <p:sp>
         <p:nvSpPr>
-          <p:cNvPr id="16" name="TextBox 15"/>
+          <p:cNvPr id="26" name="TextBox 25"/>
           <p:cNvSpPr txBox="1"/>
           <p:nvPr/>
         </p:nvSpPr>
         <p:spPr>
           <a:xfrm>
-            <a:off x="8577072" y="1965960"/>
-            <a:ext cx="3017520" cy="502920"/>
+            <a:off x="8458200" y="3858768"/>
+            <a:ext cx="3246120" cy="640080"/>
           </a:xfrm>
           <a:prstGeom prst="rect">
             <a:avLst/>
@@ -18000,241 +18697,13 @@
               </a:spcAft>
             </a:pPr>
             <a:r>
-              <a:rPr sz="3000" b="1" i="0">
-                <a:solidFill>
-                  <a:srgbClr val="D5FB00"/>
+              <a:rPr sz="1400" b="0" i="0">
+                <a:solidFill>
+                  <a:srgbClr val="FFFFFF"/>
                 </a:solidFill>
                 <a:latin typeface="Segoe UI"/>
               </a:rPr>
-              <a:t>03</a:t>
-            </a:r>
-          </a:p>
-        </p:txBody>
-      </p:sp>
-      <p:sp>
-        <p:nvSpPr>
-          <p:cNvPr id="17" name="TextBox 16"/>
-          <p:cNvSpPr txBox="1"/>
-          <p:nvPr/>
-        </p:nvSpPr>
-        <p:spPr>
-          <a:xfrm>
-            <a:off x="8577072" y="2651760"/>
-            <a:ext cx="3017520" cy="320040"/>
-          </a:xfrm>
-          <a:prstGeom prst="rect">
-            <a:avLst/>
-          </a:prstGeom>
-          <a:noFill/>
-        </p:spPr>
-        <p:txBody>
-          <a:bodyPr wrap="square" lIns="0" rIns="0" tIns="0" bIns="0" anchor="t">
-            <a:spAutoFit/>
-          </a:bodyPr>
-          <a:lstStyle/>
-          <a:p>
-            <a:pPr algn="l">
-              <a:spcBef>
-                <a:spcPts val="0"/>
-              </a:spcBef>
-              <a:spcAft>
-                <a:spcPts val="0"/>
-              </a:spcAft>
-            </a:pPr>
-            <a:r>
-              <a:rPr sz="1600" b="1" i="0">
-                <a:solidFill>
-                  <a:srgbClr val="FFFFFF"/>
-                </a:solidFill>
-                <a:latin typeface="Segoe UI"/>
-              </a:rPr>
-              <a:t>Rebuilt</a:t>
-            </a:r>
-          </a:p>
-        </p:txBody>
-      </p:sp>
-      <p:sp>
-        <p:nvSpPr>
-          <p:cNvPr id="18" name="TextBox 17"/>
-          <p:cNvSpPr txBox="1"/>
-          <p:nvPr/>
-        </p:nvSpPr>
-        <p:spPr>
-          <a:xfrm>
-            <a:off x="8577072" y="3108960"/>
-            <a:ext cx="3044952" cy="1463040"/>
-          </a:xfrm>
-          <a:prstGeom prst="rect">
-            <a:avLst/>
-          </a:prstGeom>
-          <a:noFill/>
-        </p:spPr>
-        <p:txBody>
-          <a:bodyPr wrap="square" lIns="0" rIns="0" tIns="0" bIns="0" anchor="t">
-            <a:spAutoFit/>
-          </a:bodyPr>
-          <a:lstStyle/>
-          <a:p>
-            <a:pPr algn="l">
-              <a:lnSpc>
-                <a:spcPct val="110000"/>
-              </a:lnSpc>
-              <a:spcBef>
-                <a:spcPts val="0"/>
-              </a:spcBef>
-              <a:spcAft>
-                <a:spcPts val="0"/>
-              </a:spcAft>
-            </a:pPr>
-            <a:r>
-              <a:rPr sz="1200" b="0" i="0">
-                <a:solidFill>
-                  <a:srgbClr val="C6CDD1"/>
-                </a:solidFill>
-                <a:latin typeface="Segoe UI"/>
-              </a:rPr>
-              <a:t>The schedule, in the plant’s own format, so plan and reality can be compared week by week.</a:t>
-            </a:r>
-          </a:p>
-        </p:txBody>
-      </p:sp>
-      <p:pic>
-        <p:nvPicPr>
-          <p:cNvPr id="19" name="!! Strip" descr="Decorative glass panel"/>
-          <p:cNvPicPr>
-            <a:picLocks noChangeAspect="1"/>
-          </p:cNvPicPr>
-          <p:nvPr/>
-        </p:nvPicPr>
-        <p:blipFill>
-          <a:blip r:embed="rId5">
-            <a:alphaModFix amt="50000"/>
-          </a:blip>
-          <a:stretch>
-            <a:fillRect/>
-          </a:stretch>
-        </p:blipFill>
-        <p:spPr>
-          <a:xfrm>
-            <a:off x="256032" y="4956048"/>
-            <a:ext cx="11676888" cy="566928"/>
-          </a:xfrm>
-          <a:prstGeom prst="rect">
-            <a:avLst/>
-          </a:prstGeom>
-        </p:spPr>
-      </p:pic>
-      <p:sp>
-        <p:nvSpPr>
-          <p:cNvPr id="20" name="!! Strip rim"/>
-          <p:cNvSpPr/>
-          <p:nvPr/>
-        </p:nvSpPr>
-        <p:spPr>
-          <a:xfrm>
-            <a:off x="256032" y="4956048"/>
-            <a:ext cx="11676888" cy="566928"/>
-          </a:xfrm>
-          <a:prstGeom prst="rect">
-            <a:avLst/>
-          </a:prstGeom>
-          <a:noFill/>
-          <a:ln w="9525">
-            <a:solidFill>
-              <a:srgbClr val="FFFFFF">
-                <a:alpha val="16000"/>
-              </a:srgbClr>
-            </a:solidFill>
-          </a:ln>
-        </p:spPr>
-        <p:txBody>
-          <a:bodyPr rtlCol="0" anchor="ctr" wrap="square" lIns="0" rIns="0" tIns="0" bIns="0"/>
-          <a:lstStyle/>
-          <a:p>
-            <a:pPr algn="ctr"/>
-          </a:p>
-        </p:txBody>
-      </p:sp>
-      <p:sp>
-        <p:nvSpPr>
-          <p:cNvPr id="21" name="TextBox 20"/>
-          <p:cNvSpPr txBox="1"/>
-          <p:nvPr/>
-        </p:nvSpPr>
-        <p:spPr>
-          <a:xfrm>
-            <a:off x="566928" y="5138928"/>
-            <a:ext cx="2011680" cy="228600"/>
-          </a:xfrm>
-          <a:prstGeom prst="rect">
-            <a:avLst/>
-          </a:prstGeom>
-          <a:noFill/>
-        </p:spPr>
-        <p:txBody>
-          <a:bodyPr wrap="square" lIns="0" rIns="0" tIns="0" bIns="0" anchor="t">
-            <a:spAutoFit/>
-          </a:bodyPr>
-          <a:lstStyle/>
-          <a:p>
-            <a:pPr algn="l">
-              <a:spcBef>
-                <a:spcPts val="0"/>
-              </a:spcBef>
-              <a:spcAft>
-                <a:spcPts val="0"/>
-              </a:spcAft>
-            </a:pPr>
-            <a:r>
-              <a:rPr sz="1100" b="1" i="0">
-                <a:solidFill>
-                  <a:srgbClr val="D5FB00"/>
-                </a:solidFill>
-                <a:latin typeface="Segoe UI"/>
-              </a:rPr>
-              <a:t>PROPOSAL</a:t>
-            </a:r>
-          </a:p>
-        </p:txBody>
-      </p:sp>
-      <p:sp>
-        <p:nvSpPr>
-          <p:cNvPr id="22" name="TextBox 21"/>
-          <p:cNvSpPr txBox="1"/>
-          <p:nvPr/>
-        </p:nvSpPr>
-        <p:spPr>
-          <a:xfrm>
-            <a:off x="2514600" y="5120640"/>
-            <a:ext cx="9144000" cy="274320"/>
-          </a:xfrm>
-          <a:prstGeom prst="rect">
-            <a:avLst/>
-          </a:prstGeom>
-          <a:noFill/>
-        </p:spPr>
-        <p:txBody>
-          <a:bodyPr wrap="square" lIns="0" rIns="0" tIns="0" bIns="0" anchor="t">
-            <a:spAutoFit/>
-          </a:bodyPr>
-          <a:lstStyle/>
-          <a:p>
-            <a:pPr algn="l">
-              <a:spcBef>
-                <a:spcPts val="0"/>
-              </a:spcBef>
-              <a:spcAft>
-                <a:spcPts val="0"/>
-              </a:spcAft>
-            </a:pPr>
-            <a:r>
-              <a:rPr sz="1200" b="0" i="0">
-                <a:solidFill>
-                  <a:srgbClr val="FFFFFF"/>
-                </a:solidFill>
-                <a:latin typeface="Segoe UI"/>
-              </a:rPr>
-              <a:t>Use the corrected material and the new schedule with the next group of setters.</a:t>
+              <a:t>Your feedback on the training proposal</a:t>
             </a:r>
           </a:p>
         </p:txBody>
@@ -18291,7 +18760,7 @@
                 </a:solidFill>
                 <a:latin typeface="Segoe UI"/>
               </a:rPr>
-              <a:t>Next: from knowing it to doing it alone</a:t>
+              <a:t>Conclusions and next steps</a:t>
             </a:r>
           </a:p>
         </p:txBody>
@@ -18318,7 +18787,7 @@
                 </a:solidFill>
                 <a:latin typeface="Segoe UI"/>
               </a:rPr>
-              <a:t>What comes next, until January</a:t>
+              <a:t>What is in place, and what comes next</a:t>
             </a:r>
           </a:p>
         </p:txBody>
@@ -18342,7 +18811,7 @@
         <p:spPr>
           <a:xfrm>
             <a:off x="256032" y="1600200"/>
-            <a:ext cx="7223760" cy="3886200"/>
+            <a:ext cx="5806440" cy="3703320"/>
           </a:xfrm>
           <a:prstGeom prst="rect">
             <a:avLst/>
@@ -18358,7 +18827,7 @@
         <p:spPr>
           <a:xfrm>
             <a:off x="256032" y="1600200"/>
-            <a:ext cx="7223760" cy="3886200"/>
+            <a:ext cx="5806440" cy="3703320"/>
           </a:xfrm>
           <a:prstGeom prst="rect">
             <a:avLst/>
@@ -18417,454 +18886,14 @@
                 </a:solidFill>
                 <a:latin typeface="Segoe UI"/>
               </a:rPr>
-              <a:t>NEXT LEVELS</a:t>
-            </a:r>
-          </a:p>
-        </p:txBody>
-      </p:sp>
-      <p:sp>
-        <p:nvSpPr>
-          <p:cNvPr id="7" name="TextBox 6"/>
-          <p:cNvSpPr txBox="1"/>
-          <p:nvPr/>
-        </p:nvSpPr>
-        <p:spPr>
-          <a:xfrm>
-            <a:off x="621792" y="2359152"/>
-            <a:ext cx="457200" cy="457200"/>
-          </a:xfrm>
-          <a:prstGeom prst="rect">
-            <a:avLst/>
-          </a:prstGeom>
-          <a:noFill/>
-        </p:spPr>
-        <p:txBody>
-          <a:bodyPr wrap="square" lIns="0" rIns="0" tIns="0" bIns="0" anchor="t">
-            <a:spAutoFit/>
-          </a:bodyPr>
-          <a:lstStyle/>
-          <a:p>
-            <a:pPr algn="l">
-              <a:spcBef>
-                <a:spcPts val="0"/>
-              </a:spcBef>
-              <a:spcAft>
-                <a:spcPts val="0"/>
-              </a:spcAft>
-            </a:pPr>
-            <a:r>
-              <a:rPr sz="2400" b="1" i="0">
-                <a:solidFill>
-                  <a:srgbClr val="D5FB00"/>
-                </a:solidFill>
-                <a:latin typeface="Segoe UI"/>
-              </a:rPr>
-              <a:t>L</a:t>
-            </a:r>
-          </a:p>
-        </p:txBody>
-      </p:sp>
-      <p:sp>
-        <p:nvSpPr>
-          <p:cNvPr id="8" name="TextBox 7"/>
-          <p:cNvSpPr txBox="1"/>
-          <p:nvPr/>
-        </p:nvSpPr>
-        <p:spPr>
-          <a:xfrm>
-            <a:off x="1143000" y="2395728"/>
-            <a:ext cx="5943600" cy="320040"/>
-          </a:xfrm>
-          <a:prstGeom prst="rect">
-            <a:avLst/>
-          </a:prstGeom>
-          <a:noFill/>
-        </p:spPr>
-        <p:txBody>
-          <a:bodyPr wrap="square" lIns="0" rIns="0" tIns="0" bIns="0" anchor="t">
-            <a:spAutoFit/>
-          </a:bodyPr>
-          <a:lstStyle/>
-          <a:p>
-            <a:pPr algn="l">
-              <a:spcBef>
-                <a:spcPts val="0"/>
-              </a:spcBef>
-              <a:spcAft>
-                <a:spcPts val="0"/>
-              </a:spcAft>
-            </a:pPr>
-            <a:r>
-              <a:rPr sz="1400" b="0" i="0">
-                <a:solidFill>
-                  <a:srgbClr val="FFFFFF"/>
-                </a:solidFill>
-                <a:latin typeface="Segoe UI"/>
-              </a:rPr>
-              <a:t>Validate settings and find defects at the cell, with support.</a:t>
-            </a:r>
-          </a:p>
-        </p:txBody>
-      </p:sp>
-      <p:sp>
-        <p:nvSpPr>
-          <p:cNvPr id="9" name="TextBox 8"/>
-          <p:cNvSpPr txBox="1"/>
-          <p:nvPr/>
-        </p:nvSpPr>
-        <p:spPr>
-          <a:xfrm>
-            <a:off x="1143000" y="2724912"/>
-            <a:ext cx="5943600" cy="274320"/>
-          </a:xfrm>
-          <a:prstGeom prst="rect">
-            <a:avLst/>
-          </a:prstGeom>
-          <a:noFill/>
-        </p:spPr>
-        <p:txBody>
-          <a:bodyPr wrap="square" lIns="0" rIns="0" tIns="0" bIns="0" anchor="t">
-            <a:spAutoFit/>
-          </a:bodyPr>
-          <a:lstStyle/>
-          <a:p>
-            <a:pPr algn="l">
-              <a:spcBef>
-                <a:spcPts val="0"/>
-              </a:spcBef>
-              <a:spcAft>
-                <a:spcPts val="0"/>
-              </a:spcAft>
-            </a:pPr>
-            <a:r>
-              <a:rPr sz="1200" b="0" i="0">
-                <a:solidFill>
-                  <a:srgbClr val="C6CDD1"/>
-                </a:solidFill>
-                <a:latin typeface="Segoe UI"/>
-              </a:rPr>
-              <a:t>November</a:t>
-            </a:r>
-          </a:p>
-        </p:txBody>
-      </p:sp>
-      <p:sp>
-        <p:nvSpPr>
-          <p:cNvPr id="10" name="Rectangle 9"/>
-          <p:cNvSpPr/>
-          <p:nvPr/>
-        </p:nvSpPr>
-        <p:spPr>
-          <a:xfrm>
-            <a:off x="621792" y="3191256"/>
-            <a:ext cx="6492240" cy="9144"/>
-          </a:xfrm>
-          <a:prstGeom prst="rect">
-            <a:avLst/>
-          </a:prstGeom>
-          <a:solidFill>
-            <a:srgbClr val="FFFFFF">
-              <a:alpha val="14000"/>
-            </a:srgbClr>
-          </a:solidFill>
-          <a:ln>
-            <a:noFill/>
-          </a:ln>
-        </p:spPr>
-        <p:txBody>
-          <a:bodyPr rtlCol="0" anchor="ctr" wrap="square" lIns="0" rIns="0" tIns="0" bIns="0"/>
-          <a:lstStyle/>
-          <a:p>
-            <a:pPr algn="ctr"/>
-          </a:p>
-        </p:txBody>
-      </p:sp>
-      <p:sp>
-        <p:nvSpPr>
-          <p:cNvPr id="11" name="TextBox 10"/>
-          <p:cNvSpPr txBox="1"/>
-          <p:nvPr/>
-        </p:nvSpPr>
-        <p:spPr>
-          <a:xfrm>
-            <a:off x="621792" y="3319272"/>
-            <a:ext cx="457200" cy="457200"/>
-          </a:xfrm>
-          <a:prstGeom prst="rect">
-            <a:avLst/>
-          </a:prstGeom>
-          <a:noFill/>
-        </p:spPr>
-        <p:txBody>
-          <a:bodyPr wrap="square" lIns="0" rIns="0" tIns="0" bIns="0" anchor="t">
-            <a:spAutoFit/>
-          </a:bodyPr>
-          <a:lstStyle/>
-          <a:p>
-            <a:pPr algn="l">
-              <a:spcBef>
-                <a:spcPts val="0"/>
-              </a:spcBef>
-              <a:spcAft>
-                <a:spcPts val="0"/>
-              </a:spcAft>
-            </a:pPr>
-            <a:r>
-              <a:rPr sz="2400" b="1" i="0">
-                <a:solidFill>
-                  <a:srgbClr val="D5FB00"/>
-                </a:solidFill>
-                <a:latin typeface="Segoe UI"/>
-              </a:rPr>
-              <a:t>U</a:t>
-            </a:r>
-          </a:p>
-        </p:txBody>
-      </p:sp>
-      <p:sp>
-        <p:nvSpPr>
-          <p:cNvPr id="12" name="TextBox 11"/>
-          <p:cNvSpPr txBox="1"/>
-          <p:nvPr/>
-        </p:nvSpPr>
-        <p:spPr>
-          <a:xfrm>
-            <a:off x="1143000" y="3355848"/>
-            <a:ext cx="5943600" cy="320040"/>
-          </a:xfrm>
-          <a:prstGeom prst="rect">
-            <a:avLst/>
-          </a:prstGeom>
-          <a:noFill/>
-        </p:spPr>
-        <p:txBody>
-          <a:bodyPr wrap="square" lIns="0" rIns="0" tIns="0" bIns="0" anchor="t">
-            <a:spAutoFit/>
-          </a:bodyPr>
-          <a:lstStyle/>
-          <a:p>
-            <a:pPr algn="l">
-              <a:spcBef>
-                <a:spcPts val="0"/>
-              </a:spcBef>
-              <a:spcAft>
-                <a:spcPts val="0"/>
-              </a:spcAft>
-            </a:pPr>
-            <a:r>
-              <a:rPr sz="1400" b="0" i="0">
-                <a:solidFill>
-                  <a:srgbClr val="FFFFFF"/>
-                </a:solidFill>
-                <a:latin typeface="Segoe UI"/>
-              </a:rPr>
-              <a:t>Create and set up robot programs on my own (SKS).</a:t>
-            </a:r>
-          </a:p>
-        </p:txBody>
-      </p:sp>
-      <p:sp>
-        <p:nvSpPr>
-          <p:cNvPr id="13" name="TextBox 12"/>
-          <p:cNvSpPr txBox="1"/>
-          <p:nvPr/>
-        </p:nvSpPr>
-        <p:spPr>
-          <a:xfrm>
-            <a:off x="1143000" y="3685032"/>
-            <a:ext cx="5943600" cy="274320"/>
-          </a:xfrm>
-          <a:prstGeom prst="rect">
-            <a:avLst/>
-          </a:prstGeom>
-          <a:noFill/>
-        </p:spPr>
-        <p:txBody>
-          <a:bodyPr wrap="square" lIns="0" rIns="0" tIns="0" bIns="0" anchor="t">
-            <a:spAutoFit/>
-          </a:bodyPr>
-          <a:lstStyle/>
-          <a:p>
-            <a:pPr algn="l">
-              <a:spcBef>
-                <a:spcPts val="0"/>
-              </a:spcBef>
-              <a:spcAft>
-                <a:spcPts val="0"/>
-              </a:spcAft>
-            </a:pPr>
-            <a:r>
-              <a:rPr sz="1200" b="0" i="0">
-                <a:solidFill>
-                  <a:srgbClr val="C6CDD1"/>
-                </a:solidFill>
-                <a:latin typeface="Segoe UI"/>
-              </a:rPr>
-              <a:t>December</a:t>
-            </a:r>
-          </a:p>
-        </p:txBody>
-      </p:sp>
-      <p:sp>
-        <p:nvSpPr>
-          <p:cNvPr id="14" name="Rectangle 13"/>
-          <p:cNvSpPr/>
-          <p:nvPr/>
-        </p:nvSpPr>
-        <p:spPr>
-          <a:xfrm>
-            <a:off x="621792" y="4151376"/>
-            <a:ext cx="6492240" cy="9144"/>
-          </a:xfrm>
-          <a:prstGeom prst="rect">
-            <a:avLst/>
-          </a:prstGeom>
-          <a:solidFill>
-            <a:srgbClr val="FFFFFF">
-              <a:alpha val="14000"/>
-            </a:srgbClr>
-          </a:solidFill>
-          <a:ln>
-            <a:noFill/>
-          </a:ln>
-        </p:spPr>
-        <p:txBody>
-          <a:bodyPr rtlCol="0" anchor="ctr" wrap="square" lIns="0" rIns="0" tIns="0" bIns="0"/>
-          <a:lstStyle/>
-          <a:p>
-            <a:pPr algn="ctr"/>
-          </a:p>
-        </p:txBody>
-      </p:sp>
-      <p:sp>
-        <p:nvSpPr>
-          <p:cNvPr id="15" name="TextBox 14"/>
-          <p:cNvSpPr txBox="1"/>
-          <p:nvPr/>
-        </p:nvSpPr>
-        <p:spPr>
-          <a:xfrm>
-            <a:off x="621792" y="4279392"/>
-            <a:ext cx="457200" cy="457200"/>
-          </a:xfrm>
-          <a:prstGeom prst="rect">
-            <a:avLst/>
-          </a:prstGeom>
-          <a:noFill/>
-        </p:spPr>
-        <p:txBody>
-          <a:bodyPr wrap="square" lIns="0" rIns="0" tIns="0" bIns="0" anchor="t">
-            <a:spAutoFit/>
-          </a:bodyPr>
-          <a:lstStyle/>
-          <a:p>
-            <a:pPr algn="l">
-              <a:spcBef>
-                <a:spcPts val="0"/>
-              </a:spcBef>
-              <a:spcAft>
-                <a:spcPts val="0"/>
-              </a:spcAft>
-            </a:pPr>
-            <a:r>
-              <a:rPr sz="2400" b="1" i="0">
-                <a:solidFill>
-                  <a:srgbClr val="D5FB00"/>
-                </a:solidFill>
-                <a:latin typeface="Segoe UI"/>
-              </a:rPr>
-              <a:t>O</a:t>
-            </a:r>
-          </a:p>
-        </p:txBody>
-      </p:sp>
-      <p:sp>
-        <p:nvSpPr>
-          <p:cNvPr id="16" name="TextBox 15"/>
-          <p:cNvSpPr txBox="1"/>
-          <p:nvPr/>
-        </p:nvSpPr>
-        <p:spPr>
-          <a:xfrm>
-            <a:off x="1143000" y="4315968"/>
-            <a:ext cx="5943600" cy="320040"/>
-          </a:xfrm>
-          <a:prstGeom prst="rect">
-            <a:avLst/>
-          </a:prstGeom>
-          <a:noFill/>
-        </p:spPr>
-        <p:txBody>
-          <a:bodyPr wrap="square" lIns="0" rIns="0" tIns="0" bIns="0" anchor="t">
-            <a:spAutoFit/>
-          </a:bodyPr>
-          <a:lstStyle/>
-          <a:p>
-            <a:pPr algn="l">
-              <a:spcBef>
-                <a:spcPts val="0"/>
-              </a:spcBef>
-              <a:spcAft>
-                <a:spcPts val="0"/>
-              </a:spcAft>
-            </a:pPr>
-            <a:r>
-              <a:rPr sz="1400" b="0" i="0">
-                <a:solidFill>
-                  <a:srgbClr val="FFFFFF"/>
-                </a:solidFill>
-                <a:latin typeface="Segoe UI"/>
-              </a:rPr>
-              <a:t>Solve problems, share what I learn, keep improving.</a:t>
-            </a:r>
-          </a:p>
-        </p:txBody>
-      </p:sp>
-      <p:sp>
-        <p:nvSpPr>
-          <p:cNvPr id="17" name="TextBox 16"/>
-          <p:cNvSpPr txBox="1"/>
-          <p:nvPr/>
-        </p:nvSpPr>
-        <p:spPr>
-          <a:xfrm>
-            <a:off x="1143000" y="4645152"/>
-            <a:ext cx="5943600" cy="274320"/>
-          </a:xfrm>
-          <a:prstGeom prst="rect">
-            <a:avLst/>
-          </a:prstGeom>
-          <a:noFill/>
-        </p:spPr>
-        <p:txBody>
-          <a:bodyPr wrap="square" lIns="0" rIns="0" tIns="0" bIns="0" anchor="t">
-            <a:spAutoFit/>
-          </a:bodyPr>
-          <a:lstStyle/>
-          <a:p>
-            <a:pPr algn="l">
-              <a:spcBef>
-                <a:spcPts val="0"/>
-              </a:spcBef>
-              <a:spcAft>
-                <a:spcPts val="0"/>
-              </a:spcAft>
-            </a:pPr>
-            <a:r>
-              <a:rPr sz="1200" b="0" i="0">
-                <a:solidFill>
-                  <a:srgbClr val="C6CDD1"/>
-                </a:solidFill>
-                <a:latin typeface="Segoe UI"/>
-              </a:rPr>
-              <a:t>Already started with 4M</a:t>
+              <a:t>IN PLACE</a:t>
             </a:r>
           </a:p>
         </p:txBody>
       </p:sp>
       <p:pic>
         <p:nvPicPr>
-          <p:cNvPr id="18" name="!! Glass B" descr="Decorative glass panel"/>
+          <p:cNvPr id="7" name="!! Glass B" descr="Decorative glass panel"/>
           <p:cNvPicPr>
             <a:picLocks noChangeAspect="1"/>
           </p:cNvPicPr>
@@ -18880,8 +18909,8 @@
         </p:blipFill>
         <p:spPr>
           <a:xfrm>
-            <a:off x="7818120" y="1600200"/>
-            <a:ext cx="4114800" cy="3886200"/>
+            <a:off x="6382512" y="1600200"/>
+            <a:ext cx="5550408" cy="3703320"/>
           </a:xfrm>
           <a:prstGeom prst="rect">
             <a:avLst/>
@@ -18890,14 +18919,14 @@
       </p:pic>
       <p:sp>
         <p:nvSpPr>
-          <p:cNvPr id="19" name="!! Glass B rim"/>
+          <p:cNvPr id="8" name="!! Glass B rim"/>
           <p:cNvSpPr/>
           <p:nvPr/>
         </p:nvSpPr>
         <p:spPr>
           <a:xfrm>
-            <a:off x="7818120" y="1600200"/>
-            <a:ext cx="4114800" cy="3886200"/>
+            <a:off x="6382512" y="1600200"/>
+            <a:ext cx="5550408" cy="3703320"/>
           </a:xfrm>
           <a:prstGeom prst="rect">
             <a:avLst/>
@@ -18921,13 +18950,13 @@
       </p:sp>
       <p:sp>
         <p:nvSpPr>
-          <p:cNvPr id="20" name="TextBox 19"/>
+          <p:cNvPr id="9" name="TextBox 8"/>
           <p:cNvSpPr txBox="1"/>
           <p:nvPr/>
         </p:nvSpPr>
         <p:spPr>
           <a:xfrm>
-            <a:off x="8183879" y="1901952"/>
+            <a:off x="6748272" y="1901952"/>
             <a:ext cx="5486400" cy="274320"/>
           </a:xfrm>
           <a:prstGeom prst="rect">
@@ -18956,50 +18985,21 @@
                 </a:solidFill>
                 <a:latin typeface="Segoe UI"/>
               </a:rPr>
-              <a:t>WHAT I NEED</a:t>
-            </a:r>
-          </a:p>
-        </p:txBody>
-      </p:sp>
-      <p:sp>
-        <p:nvSpPr>
-          <p:cNvPr id="21" name="Chevron 20"/>
-          <p:cNvSpPr/>
-          <p:nvPr/>
-        </p:nvSpPr>
-        <p:spPr>
-          <a:xfrm>
-            <a:off x="8183879" y="2478024"/>
-            <a:ext cx="128016" cy="128016"/>
-          </a:xfrm>
-          <a:prstGeom prst="chevron">
-            <a:avLst/>
-          </a:prstGeom>
-          <a:solidFill>
-            <a:srgbClr val="D5FB00"/>
-          </a:solidFill>
-          <a:ln>
-            <a:noFill/>
-          </a:ln>
-        </p:spPr>
-        <p:txBody>
-          <a:bodyPr rtlCol="0" anchor="ctr" wrap="square" lIns="0" rIns="0" tIns="0" bIns="0"/>
-          <a:lstStyle/>
-          <a:p>
-            <a:pPr algn="ctr"/>
-          </a:p>
-        </p:txBody>
-      </p:sp>
-      <p:sp>
-        <p:nvSpPr>
-          <p:cNvPr id="22" name="TextBox 21"/>
+              <a:t>NEXT</a:t>
+            </a:r>
+          </a:p>
+        </p:txBody>
+      </p:sp>
+      <p:sp>
+        <p:nvSpPr>
+          <p:cNvPr id="10" name="TextBox 9"/>
           <p:cNvSpPr txBox="1"/>
           <p:nvPr/>
         </p:nvSpPr>
         <p:spPr>
           <a:xfrm>
-            <a:off x="8458200" y="2395728"/>
-            <a:ext cx="3246120" cy="640080"/>
+            <a:off x="621792" y="2395728"/>
+            <a:ext cx="5074920" cy="731520"/>
           </a:xfrm>
           <a:prstGeom prst="rect">
             <a:avLst/>
@@ -19027,50 +19027,21 @@
                 </a:solidFill>
                 <a:latin typeface="Segoe UI"/>
               </a:rPr>
-              <a:t>A date for my Level I exam</a:t>
-            </a:r>
-          </a:p>
-        </p:txBody>
-      </p:sp>
-      <p:sp>
-        <p:nvSpPr>
-          <p:cNvPr id="23" name="Chevron 22"/>
-          <p:cNvSpPr/>
-          <p:nvPr/>
-        </p:nvSpPr>
-        <p:spPr>
-          <a:xfrm>
-            <a:off x="8183879" y="3209544"/>
-            <a:ext cx="128016" cy="128016"/>
-          </a:xfrm>
-          <a:prstGeom prst="chevron">
-            <a:avLst/>
-          </a:prstGeom>
-          <a:solidFill>
-            <a:srgbClr val="D5FB00"/>
-          </a:solidFill>
-          <a:ln>
-            <a:noFill/>
-          </a:ln>
-        </p:spPr>
-        <p:txBody>
-          <a:bodyPr rtlCol="0" anchor="ctr" wrap="square" lIns="0" rIns="0" tIns="0" bIns="0"/>
-          <a:lstStyle/>
-          <a:p>
-            <a:pPr algn="ctr"/>
-          </a:p>
-        </p:txBody>
-      </p:sp>
-      <p:sp>
-        <p:nvSpPr>
-          <p:cNvPr id="24" name="TextBox 23"/>
+              <a:t>Level I studied in full, and four skills done on my own.</a:t>
+            </a:r>
+          </a:p>
+        </p:txBody>
+      </p:sp>
+      <p:sp>
+        <p:nvSpPr>
+          <p:cNvPr id="11" name="TextBox 10"/>
           <p:cNvSpPr txBox="1"/>
           <p:nvPr/>
         </p:nvSpPr>
         <p:spPr>
           <a:xfrm>
-            <a:off x="8458200" y="3127248"/>
-            <a:ext cx="3246120" cy="640080"/>
+            <a:off x="621792" y="3310128"/>
+            <a:ext cx="5074920" cy="731520"/>
           </a:xfrm>
           <a:prstGeom prst="rect">
             <a:avLst/>
@@ -19098,50 +19069,21 @@
                 </a:solidFill>
                 <a:latin typeface="Segoe UI"/>
               </a:rPr>
-              <a:t>Supervised time programming robots in SKS</a:t>
-            </a:r>
-          </a:p>
-        </p:txBody>
-      </p:sp>
-      <p:sp>
-        <p:nvSpPr>
-          <p:cNvPr id="25" name="Chevron 24"/>
-          <p:cNvSpPr/>
-          <p:nvPr/>
-        </p:nvSpPr>
-        <p:spPr>
-          <a:xfrm>
-            <a:off x="8183879" y="3941064"/>
-            <a:ext cx="128016" cy="128016"/>
-          </a:xfrm>
-          <a:prstGeom prst="chevron">
-            <a:avLst/>
-          </a:prstGeom>
-          <a:solidFill>
-            <a:srgbClr val="D5FB00"/>
-          </a:solidFill>
-          <a:ln>
-            <a:noFill/>
-          </a:ln>
-        </p:spPr>
-        <p:txBody>
-          <a:bodyPr rtlCol="0" anchor="ctr" wrap="square" lIns="0" rIns="0" tIns="0" bIns="0"/>
-          <a:lstStyle/>
-          <a:p>
-            <a:pPr algn="ctr"/>
-          </a:p>
-        </p:txBody>
-      </p:sp>
-      <p:sp>
-        <p:nvSpPr>
-          <p:cNvPr id="26" name="TextBox 25"/>
+              <a:t>A manual weld moved to the 4M robotic cell: 47% less cycle time, less strain.</a:t>
+            </a:r>
+          </a:p>
+        </p:txBody>
+      </p:sp>
+      <p:sp>
+        <p:nvSpPr>
+          <p:cNvPr id="12" name="TextBox 11"/>
           <p:cNvSpPr txBox="1"/>
           <p:nvPr/>
         </p:nvSpPr>
         <p:spPr>
           <a:xfrm>
-            <a:off x="8458200" y="3858768"/>
-            <a:ext cx="3246120" cy="640080"/>
+            <a:off x="621792" y="4224528"/>
+            <a:ext cx="5074920" cy="731520"/>
           </a:xfrm>
           <a:prstGeom prst="rect">
             <a:avLst/>
@@ -19169,7 +19111,175 @@
                 </a:solidFill>
                 <a:latin typeface="Segoe UI"/>
               </a:rPr>
-              <a:t>Your feedback on the training proposal</a:t>
+              <a:t>A reviewed study path, and a schedule that shows plan versus reality.</a:t>
+            </a:r>
+          </a:p>
+        </p:txBody>
+      </p:sp>
+      <p:sp>
+        <p:nvSpPr>
+          <p:cNvPr id="13" name="TextBox 12"/>
+          <p:cNvSpPr txBox="1"/>
+          <p:nvPr/>
+        </p:nvSpPr>
+        <p:spPr>
+          <a:xfrm>
+            <a:off x="6748272" y="2395728"/>
+            <a:ext cx="4818888" cy="731520"/>
+          </a:xfrm>
+          <a:prstGeom prst="rect">
+            <a:avLst/>
+          </a:prstGeom>
+          <a:noFill/>
+        </p:spPr>
+        <p:txBody>
+          <a:bodyPr wrap="square" lIns="0" rIns="0" tIns="0" bIns="0" anchor="t">
+            <a:spAutoFit/>
+          </a:bodyPr>
+          <a:lstStyle/>
+          <a:p>
+            <a:pPr algn="l">
+              <a:spcBef>
+                <a:spcPts val="0"/>
+              </a:spcBef>
+              <a:spcAft>
+                <a:spcPts val="0"/>
+              </a:spcAft>
+            </a:pPr>
+            <a:r>
+              <a:rPr sz="1400" b="0" i="0">
+                <a:solidFill>
+                  <a:srgbClr val="FFFFFF"/>
+                </a:solidFill>
+                <a:latin typeface="Segoe UI"/>
+              </a:rPr>
+              <a:t>Pass the Level I exam in October.</a:t>
+            </a:r>
+          </a:p>
+        </p:txBody>
+      </p:sp>
+      <p:sp>
+        <p:nvSpPr>
+          <p:cNvPr id="14" name="TextBox 13"/>
+          <p:cNvSpPr txBox="1"/>
+          <p:nvPr/>
+        </p:nvSpPr>
+        <p:spPr>
+          <a:xfrm>
+            <a:off x="6748272" y="3310128"/>
+            <a:ext cx="4818888" cy="731520"/>
+          </a:xfrm>
+          <a:prstGeom prst="rect">
+            <a:avLst/>
+          </a:prstGeom>
+          <a:noFill/>
+        </p:spPr>
+        <p:txBody>
+          <a:bodyPr wrap="square" lIns="0" rIns="0" tIns="0" bIns="0" anchor="t">
+            <a:spAutoFit/>
+          </a:bodyPr>
+          <a:lstStyle/>
+          <a:p>
+            <a:pPr algn="l">
+              <a:spcBef>
+                <a:spcPts val="0"/>
+              </a:spcBef>
+              <a:spcAft>
+                <a:spcPts val="0"/>
+              </a:spcAft>
+            </a:pPr>
+            <a:r>
+              <a:rPr sz="1400" b="0" i="0">
+                <a:solidFill>
+                  <a:srgbClr val="FFFFFF"/>
+                </a:solidFill>
+                <a:latin typeface="Segoe UI"/>
+              </a:rPr>
+              <a:t>Reach Levels L and U before January.</a:t>
+            </a:r>
+          </a:p>
+        </p:txBody>
+      </p:sp>
+      <p:sp>
+        <p:nvSpPr>
+          <p:cNvPr id="15" name="TextBox 14"/>
+          <p:cNvSpPr txBox="1"/>
+          <p:nvPr/>
+        </p:nvSpPr>
+        <p:spPr>
+          <a:xfrm>
+            <a:off x="6748272" y="4224528"/>
+            <a:ext cx="4818888" cy="731520"/>
+          </a:xfrm>
+          <a:prstGeom prst="rect">
+            <a:avLst/>
+          </a:prstGeom>
+          <a:noFill/>
+        </p:spPr>
+        <p:txBody>
+          <a:bodyPr wrap="square" lIns="0" rIns="0" tIns="0" bIns="0" anchor="t">
+            <a:spAutoFit/>
+          </a:bodyPr>
+          <a:lstStyle/>
+          <a:p>
+            <a:pPr algn="l">
+              <a:spcBef>
+                <a:spcPts val="0"/>
+              </a:spcBef>
+              <a:spcAft>
+                <a:spcPts val="0"/>
+              </a:spcAft>
+            </a:pPr>
+            <a:r>
+              <a:rPr sz="1400" b="0" i="0">
+                <a:solidFill>
+                  <a:srgbClr val="FFFFFF"/>
+                </a:solidFill>
+                <a:latin typeface="Segoe UI"/>
+              </a:rPr>
+              <a:t>Keep measuring 4M, and find the next weld to automate.</a:t>
+            </a:r>
+          </a:p>
+        </p:txBody>
+      </p:sp>
+      <p:sp>
+        <p:nvSpPr>
+          <p:cNvPr id="16" name="TextBox 15"/>
+          <p:cNvSpPr txBox="1"/>
+          <p:nvPr/>
+        </p:nvSpPr>
+        <p:spPr>
+          <a:xfrm>
+            <a:off x="3108960" y="5715000"/>
+            <a:ext cx="8778240" cy="365760"/>
+          </a:xfrm>
+          <a:prstGeom prst="rect">
+            <a:avLst/>
+          </a:prstGeom>
+          <a:noFill/>
+        </p:spPr>
+        <p:txBody>
+          <a:bodyPr wrap="square" lIns="0" rIns="0" tIns="0" bIns="0" anchor="t">
+            <a:spAutoFit/>
+          </a:bodyPr>
+          <a:lstStyle/>
+          <a:p>
+            <a:pPr algn="l">
+              <a:spcBef>
+                <a:spcPts val="0"/>
+              </a:spcBef>
+              <a:spcAft>
+                <a:spcPts val="0"/>
+              </a:spcAft>
+            </a:pPr>
+            <a:r>
+              <a:rPr sz="1500" b="1" i="0">
+                <a:solidFill>
+                  <a:srgbClr val="D5FB00"/>
+                </a:solidFill>
+                <a:latin typeface="Segoe UI"/>
+              </a:rPr>
+              <a:t>I came to learn robotic welding, and I am already improving it.</a:t>
             </a:r>
           </a:p>
         </p:txBody>
@@ -19195,582 +19305,6 @@
 </file>
 
 <file path=ppt/slides/slide14.xml><?xml version="1.0" encoding="utf-8"?>
-<p:sld xmlns:a="http://schemas.openxmlformats.org/drawingml/2006/main" xmlns:p="http://schemas.openxmlformats.org/presentationml/2006/main" xmlns:r="http://schemas.openxmlformats.org/officeDocument/2006/relationships">
-  <p:cSld>
-    <p:spTree>
-      <p:nvGrpSpPr>
-        <p:cNvPr id="1" name=""/>
-        <p:cNvGrpSpPr/>
-        <p:nvPr/>
-      </p:nvGrpSpPr>
-      <p:grpSpPr/>
-      <p:sp>
-        <p:nvSpPr>
-          <p:cNvPr id="2" name="!! Title 1"/>
-          <p:cNvSpPr>
-            <a:spLocks noGrp="1"/>
-          </p:cNvSpPr>
-          <p:nvPr>
-            <p:ph type="body" idx="20" sz="quarter"/>
-          </p:nvPr>
-        </p:nvSpPr>
-        <p:spPr/>
-        <p:txBody>
-          <a:bodyPr/>
-          <a:lstStyle/>
-          <a:p>
-            <a:r>
-              <a:rPr sz="2800" b="1">
-                <a:solidFill>
-                  <a:srgbClr val="FFFFFF"/>
-                </a:solidFill>
-                <a:latin typeface="Segoe UI"/>
-              </a:rPr>
-              <a:t>Conclusions and next steps</a:t>
-            </a:r>
-          </a:p>
-        </p:txBody>
-      </p:sp>
-      <p:sp>
-        <p:nvSpPr>
-          <p:cNvPr id="3" name="!! Subtitle 1"/>
-          <p:cNvSpPr>
-            <a:spLocks noGrp="1"/>
-          </p:cNvSpPr>
-          <p:nvPr>
-            <p:ph type="body" idx="21" sz="quarter"/>
-          </p:nvPr>
-        </p:nvSpPr>
-        <p:spPr/>
-        <p:txBody>
-          <a:bodyPr/>
-          <a:lstStyle/>
-          <a:p>
-            <a:r>
-              <a:rPr sz="1300" b="0">
-                <a:solidFill>
-                  <a:srgbClr val="D5FB00"/>
-                </a:solidFill>
-                <a:latin typeface="Segoe UI"/>
-              </a:rPr>
-              <a:t>What is in place, and what comes next</a:t>
-            </a:r>
-          </a:p>
-        </p:txBody>
-      </p:sp>
-      <p:pic>
-        <p:nvPicPr>
-          <p:cNvPr id="4" name="!! Glass A" descr="Decorative glass panel"/>
-          <p:cNvPicPr>
-            <a:picLocks noChangeAspect="1"/>
-          </p:cNvPicPr>
-          <p:nvPr/>
-        </p:nvPicPr>
-        <p:blipFill>
-          <a:blip r:embed="rId2">
-            <a:alphaModFix amt="50000"/>
-          </a:blip>
-          <a:stretch>
-            <a:fillRect/>
-          </a:stretch>
-        </p:blipFill>
-        <p:spPr>
-          <a:xfrm>
-            <a:off x="256032" y="1600200"/>
-            <a:ext cx="5806440" cy="3703320"/>
-          </a:xfrm>
-          <a:prstGeom prst="rect">
-            <a:avLst/>
-          </a:prstGeom>
-        </p:spPr>
-      </p:pic>
-      <p:sp>
-        <p:nvSpPr>
-          <p:cNvPr id="5" name="!! Glass A rim"/>
-          <p:cNvSpPr/>
-          <p:nvPr/>
-        </p:nvSpPr>
-        <p:spPr>
-          <a:xfrm>
-            <a:off x="256032" y="1600200"/>
-            <a:ext cx="5806440" cy="3703320"/>
-          </a:xfrm>
-          <a:prstGeom prst="rect">
-            <a:avLst/>
-          </a:prstGeom>
-          <a:noFill/>
-          <a:ln w="9525">
-            <a:solidFill>
-              <a:srgbClr val="FFFFFF">
-                <a:alpha val="16000"/>
-              </a:srgbClr>
-            </a:solidFill>
-          </a:ln>
-        </p:spPr>
-        <p:txBody>
-          <a:bodyPr rtlCol="0" anchor="ctr" wrap="square" lIns="0" rIns="0" tIns="0" bIns="0"/>
-          <a:lstStyle/>
-          <a:p>
-            <a:pPr algn="ctr"/>
-          </a:p>
-        </p:txBody>
-      </p:sp>
-      <p:sp>
-        <p:nvSpPr>
-          <p:cNvPr id="6" name="TextBox 5"/>
-          <p:cNvSpPr txBox="1"/>
-          <p:nvPr/>
-        </p:nvSpPr>
-        <p:spPr>
-          <a:xfrm>
-            <a:off x="621792" y="1901952"/>
-            <a:ext cx="5486400" cy="274320"/>
-          </a:xfrm>
-          <a:prstGeom prst="rect">
-            <a:avLst/>
-          </a:prstGeom>
-          <a:noFill/>
-        </p:spPr>
-        <p:txBody>
-          <a:bodyPr wrap="square" lIns="0" rIns="0" tIns="0" bIns="0" anchor="t">
-            <a:spAutoFit/>
-          </a:bodyPr>
-          <a:lstStyle/>
-          <a:p>
-            <a:pPr algn="l">
-              <a:spcBef>
-                <a:spcPts val="0"/>
-              </a:spcBef>
-              <a:spcAft>
-                <a:spcPts val="0"/>
-              </a:spcAft>
-            </a:pPr>
-            <a:r>
-              <a:rPr sz="1600" b="1" i="0">
-                <a:solidFill>
-                  <a:srgbClr val="D5FB00"/>
-                </a:solidFill>
-                <a:latin typeface="Segoe UI"/>
-              </a:rPr>
-              <a:t>IN PLACE</a:t>
-            </a:r>
-          </a:p>
-        </p:txBody>
-      </p:sp>
-      <p:pic>
-        <p:nvPicPr>
-          <p:cNvPr id="7" name="!! Glass B" descr="Decorative glass panel"/>
-          <p:cNvPicPr>
-            <a:picLocks noChangeAspect="1"/>
-          </p:cNvPicPr>
-          <p:nvPr/>
-        </p:nvPicPr>
-        <p:blipFill>
-          <a:blip r:embed="rId3">
-            <a:alphaModFix amt="50000"/>
-          </a:blip>
-          <a:stretch>
-            <a:fillRect/>
-          </a:stretch>
-        </p:blipFill>
-        <p:spPr>
-          <a:xfrm>
-            <a:off x="6382512" y="1600200"/>
-            <a:ext cx="5550408" cy="3703320"/>
-          </a:xfrm>
-          <a:prstGeom prst="rect">
-            <a:avLst/>
-          </a:prstGeom>
-        </p:spPr>
-      </p:pic>
-      <p:sp>
-        <p:nvSpPr>
-          <p:cNvPr id="8" name="!! Glass B rim"/>
-          <p:cNvSpPr/>
-          <p:nvPr/>
-        </p:nvSpPr>
-        <p:spPr>
-          <a:xfrm>
-            <a:off x="6382512" y="1600200"/>
-            <a:ext cx="5550408" cy="3703320"/>
-          </a:xfrm>
-          <a:prstGeom prst="rect">
-            <a:avLst/>
-          </a:prstGeom>
-          <a:noFill/>
-          <a:ln w="9525">
-            <a:solidFill>
-              <a:srgbClr val="FFFFFF">
-                <a:alpha val="16000"/>
-              </a:srgbClr>
-            </a:solidFill>
-          </a:ln>
-        </p:spPr>
-        <p:txBody>
-          <a:bodyPr rtlCol="0" anchor="ctr" wrap="square" lIns="0" rIns="0" tIns="0" bIns="0"/>
-          <a:lstStyle/>
-          <a:p>
-            <a:pPr algn="ctr"/>
-          </a:p>
-        </p:txBody>
-      </p:sp>
-      <p:sp>
-        <p:nvSpPr>
-          <p:cNvPr id="9" name="TextBox 8"/>
-          <p:cNvSpPr txBox="1"/>
-          <p:nvPr/>
-        </p:nvSpPr>
-        <p:spPr>
-          <a:xfrm>
-            <a:off x="6748272" y="1901952"/>
-            <a:ext cx="5486400" cy="274320"/>
-          </a:xfrm>
-          <a:prstGeom prst="rect">
-            <a:avLst/>
-          </a:prstGeom>
-          <a:noFill/>
-        </p:spPr>
-        <p:txBody>
-          <a:bodyPr wrap="square" lIns="0" rIns="0" tIns="0" bIns="0" anchor="t">
-            <a:spAutoFit/>
-          </a:bodyPr>
-          <a:lstStyle/>
-          <a:p>
-            <a:pPr algn="l">
-              <a:spcBef>
-                <a:spcPts val="0"/>
-              </a:spcBef>
-              <a:spcAft>
-                <a:spcPts val="0"/>
-              </a:spcAft>
-            </a:pPr>
-            <a:r>
-              <a:rPr sz="1600" b="1" i="0">
-                <a:solidFill>
-                  <a:srgbClr val="D5FB00"/>
-                </a:solidFill>
-                <a:latin typeface="Segoe UI"/>
-              </a:rPr>
-              <a:t>NEXT</a:t>
-            </a:r>
-          </a:p>
-        </p:txBody>
-      </p:sp>
-      <p:sp>
-        <p:nvSpPr>
-          <p:cNvPr id="10" name="TextBox 9"/>
-          <p:cNvSpPr txBox="1"/>
-          <p:nvPr/>
-        </p:nvSpPr>
-        <p:spPr>
-          <a:xfrm>
-            <a:off x="621792" y="2395728"/>
-            <a:ext cx="5074920" cy="731520"/>
-          </a:xfrm>
-          <a:prstGeom prst="rect">
-            <a:avLst/>
-          </a:prstGeom>
-          <a:noFill/>
-        </p:spPr>
-        <p:txBody>
-          <a:bodyPr wrap="square" lIns="0" rIns="0" tIns="0" bIns="0" anchor="t">
-            <a:spAutoFit/>
-          </a:bodyPr>
-          <a:lstStyle/>
-          <a:p>
-            <a:pPr algn="l">
-              <a:spcBef>
-                <a:spcPts val="0"/>
-              </a:spcBef>
-              <a:spcAft>
-                <a:spcPts val="0"/>
-              </a:spcAft>
-            </a:pPr>
-            <a:r>
-              <a:rPr sz="1400" b="0" i="0">
-                <a:solidFill>
-                  <a:srgbClr val="FFFFFF"/>
-                </a:solidFill>
-                <a:latin typeface="Segoe UI"/>
-              </a:rPr>
-              <a:t>Level I studied in full, and four skills done on my own.</a:t>
-            </a:r>
-          </a:p>
-        </p:txBody>
-      </p:sp>
-      <p:sp>
-        <p:nvSpPr>
-          <p:cNvPr id="11" name="TextBox 10"/>
-          <p:cNvSpPr txBox="1"/>
-          <p:nvPr/>
-        </p:nvSpPr>
-        <p:spPr>
-          <a:xfrm>
-            <a:off x="621792" y="3310128"/>
-            <a:ext cx="5074920" cy="731520"/>
-          </a:xfrm>
-          <a:prstGeom prst="rect">
-            <a:avLst/>
-          </a:prstGeom>
-          <a:noFill/>
-        </p:spPr>
-        <p:txBody>
-          <a:bodyPr wrap="square" lIns="0" rIns="0" tIns="0" bIns="0" anchor="t">
-            <a:spAutoFit/>
-          </a:bodyPr>
-          <a:lstStyle/>
-          <a:p>
-            <a:pPr algn="l">
-              <a:spcBef>
-                <a:spcPts val="0"/>
-              </a:spcBef>
-              <a:spcAft>
-                <a:spcPts val="0"/>
-              </a:spcAft>
-            </a:pPr>
-            <a:r>
-              <a:rPr sz="1400" b="0" i="0">
-                <a:solidFill>
-                  <a:srgbClr val="FFFFFF"/>
-                </a:solidFill>
-                <a:latin typeface="Segoe UI"/>
-              </a:rPr>
-              <a:t>A manual weld moved to the 4M robotic cell: less time, less strain.</a:t>
-            </a:r>
-          </a:p>
-        </p:txBody>
-      </p:sp>
-      <p:sp>
-        <p:nvSpPr>
-          <p:cNvPr id="12" name="TextBox 11"/>
-          <p:cNvSpPr txBox="1"/>
-          <p:nvPr/>
-        </p:nvSpPr>
-        <p:spPr>
-          <a:xfrm>
-            <a:off x="621792" y="4224528"/>
-            <a:ext cx="5074920" cy="731520"/>
-          </a:xfrm>
-          <a:prstGeom prst="rect">
-            <a:avLst/>
-          </a:prstGeom>
-          <a:noFill/>
-        </p:spPr>
-        <p:txBody>
-          <a:bodyPr wrap="square" lIns="0" rIns="0" tIns="0" bIns="0" anchor="t">
-            <a:spAutoFit/>
-          </a:bodyPr>
-          <a:lstStyle/>
-          <a:p>
-            <a:pPr algn="l">
-              <a:spcBef>
-                <a:spcPts val="0"/>
-              </a:spcBef>
-              <a:spcAft>
-                <a:spcPts val="0"/>
-              </a:spcAft>
-            </a:pPr>
-            <a:r>
-              <a:rPr sz="1400" b="0" i="0">
-                <a:solidFill>
-                  <a:srgbClr val="FFFFFF"/>
-                </a:solidFill>
-                <a:latin typeface="Segoe UI"/>
-              </a:rPr>
-              <a:t>A reviewed study path, and a schedule that shows plan versus reality.</a:t>
-            </a:r>
-          </a:p>
-        </p:txBody>
-      </p:sp>
-      <p:sp>
-        <p:nvSpPr>
-          <p:cNvPr id="13" name="TextBox 12"/>
-          <p:cNvSpPr txBox="1"/>
-          <p:nvPr/>
-        </p:nvSpPr>
-        <p:spPr>
-          <a:xfrm>
-            <a:off x="6748272" y="2395728"/>
-            <a:ext cx="4818888" cy="731520"/>
-          </a:xfrm>
-          <a:prstGeom prst="rect">
-            <a:avLst/>
-          </a:prstGeom>
-          <a:noFill/>
-        </p:spPr>
-        <p:txBody>
-          <a:bodyPr wrap="square" lIns="0" rIns="0" tIns="0" bIns="0" anchor="t">
-            <a:spAutoFit/>
-          </a:bodyPr>
-          <a:lstStyle/>
-          <a:p>
-            <a:pPr algn="l">
-              <a:spcBef>
-                <a:spcPts val="0"/>
-              </a:spcBef>
-              <a:spcAft>
-                <a:spcPts val="0"/>
-              </a:spcAft>
-            </a:pPr>
-            <a:r>
-              <a:rPr sz="1400" b="0" i="0">
-                <a:solidFill>
-                  <a:srgbClr val="FFFFFF"/>
-                </a:solidFill>
-                <a:latin typeface="Segoe UI"/>
-              </a:rPr>
-              <a:t>Pass the Level I exam in October.</a:t>
-            </a:r>
-          </a:p>
-        </p:txBody>
-      </p:sp>
-      <p:sp>
-        <p:nvSpPr>
-          <p:cNvPr id="14" name="TextBox 13"/>
-          <p:cNvSpPr txBox="1"/>
-          <p:nvPr/>
-        </p:nvSpPr>
-        <p:spPr>
-          <a:xfrm>
-            <a:off x="6748272" y="3310128"/>
-            <a:ext cx="4818888" cy="731520"/>
-          </a:xfrm>
-          <a:prstGeom prst="rect">
-            <a:avLst/>
-          </a:prstGeom>
-          <a:noFill/>
-        </p:spPr>
-        <p:txBody>
-          <a:bodyPr wrap="square" lIns="0" rIns="0" tIns="0" bIns="0" anchor="t">
-            <a:spAutoFit/>
-          </a:bodyPr>
-          <a:lstStyle/>
-          <a:p>
-            <a:pPr algn="l">
-              <a:spcBef>
-                <a:spcPts val="0"/>
-              </a:spcBef>
-              <a:spcAft>
-                <a:spcPts val="0"/>
-              </a:spcAft>
-            </a:pPr>
-            <a:r>
-              <a:rPr sz="1400" b="0" i="0">
-                <a:solidFill>
-                  <a:srgbClr val="FFFFFF"/>
-                </a:solidFill>
-                <a:latin typeface="Segoe UI"/>
-              </a:rPr>
-              <a:t>Reach Levels L and U before January.</a:t>
-            </a:r>
-          </a:p>
-        </p:txBody>
-      </p:sp>
-      <p:sp>
-        <p:nvSpPr>
-          <p:cNvPr id="15" name="TextBox 14"/>
-          <p:cNvSpPr txBox="1"/>
-          <p:nvPr/>
-        </p:nvSpPr>
-        <p:spPr>
-          <a:xfrm>
-            <a:off x="6748272" y="4224528"/>
-            <a:ext cx="4818888" cy="731520"/>
-          </a:xfrm>
-          <a:prstGeom prst="rect">
-            <a:avLst/>
-          </a:prstGeom>
-          <a:noFill/>
-        </p:spPr>
-        <p:txBody>
-          <a:bodyPr wrap="square" lIns="0" rIns="0" tIns="0" bIns="0" anchor="t">
-            <a:spAutoFit/>
-          </a:bodyPr>
-          <a:lstStyle/>
-          <a:p>
-            <a:pPr algn="l">
-              <a:spcBef>
-                <a:spcPts val="0"/>
-              </a:spcBef>
-              <a:spcAft>
-                <a:spcPts val="0"/>
-              </a:spcAft>
-            </a:pPr>
-            <a:r>
-              <a:rPr sz="1400" b="0" i="0">
-                <a:solidFill>
-                  <a:srgbClr val="FFFFFF"/>
-                </a:solidFill>
-                <a:latin typeface="Segoe UI"/>
-              </a:rPr>
-              <a:t>Keep measuring 4M, and find the next weld to automate.</a:t>
-            </a:r>
-          </a:p>
-        </p:txBody>
-      </p:sp>
-      <p:sp>
-        <p:nvSpPr>
-          <p:cNvPr id="16" name="TextBox 15"/>
-          <p:cNvSpPr txBox="1"/>
-          <p:nvPr/>
-        </p:nvSpPr>
-        <p:spPr>
-          <a:xfrm>
-            <a:off x="3108960" y="5715000"/>
-            <a:ext cx="8778240" cy="365760"/>
-          </a:xfrm>
-          <a:prstGeom prst="rect">
-            <a:avLst/>
-          </a:prstGeom>
-          <a:noFill/>
-        </p:spPr>
-        <p:txBody>
-          <a:bodyPr wrap="square" lIns="0" rIns="0" tIns="0" bIns="0" anchor="t">
-            <a:spAutoFit/>
-          </a:bodyPr>
-          <a:lstStyle/>
-          <a:p>
-            <a:pPr algn="l">
-              <a:spcBef>
-                <a:spcPts val="0"/>
-              </a:spcBef>
-              <a:spcAft>
-                <a:spcPts val="0"/>
-              </a:spcAft>
-            </a:pPr>
-            <a:r>
-              <a:rPr sz="1500" b="1" i="0">
-                <a:solidFill>
-                  <a:srgbClr val="D5FB00"/>
-                </a:solidFill>
-                <a:latin typeface="Segoe UI"/>
-              </a:rPr>
-              <a:t>I came to learn robotic welding, and I am already improving it.</a:t>
-            </a:r>
-          </a:p>
-        </p:txBody>
-      </p:sp>
-    </p:spTree>
-  </p:cSld>
-  <p:clrMapOvr>
-    <a:masterClrMapping/>
-  </p:clrMapOvr>
-  <mc:AlternateContent xmlns:mc="http://schemas.openxmlformats.org/markup-compatibility/2006">
-    <mc:Choice xmlns:p159="http://schemas.microsoft.com/office/powerpoint/2015/09/main" Requires="p159">
-      <p:transition xmlns:p14="http://schemas.microsoft.com/office/powerpoint/2010/main" spd="slow" p14:dur="1250">
-        <p159:morph option="byObject"/>
-      </p:transition>
-    </mc:Choice>
-    <mc:Fallback>
-      <p:transition xmlns:p14="http://schemas.microsoft.com/office/powerpoint/2010/main" spd="slow">
-        <p:fade/>
-      </p:transition>
-    </mc:Fallback>
-  </mc:AlternateContent>
-</p:sld>
-</file>
-
-<file path=ppt/slides/slide15.xml><?xml version="1.0" encoding="utf-8"?>
 <p:sld xmlns:a="http://schemas.openxmlformats.org/drawingml/2006/main" xmlns:p="http://schemas.openxmlformats.org/presentationml/2006/main" xmlns:r="http://schemas.openxmlformats.org/officeDocument/2006/relationships">
   <p:cSld>
     <p:spTree>
@@ -20640,7 +20174,7 @@
                 </a:solidFill>
                 <a:latin typeface="Segoe UI"/>
               </a:rPr>
-              <a:t>Mine: a manual weld moved to the 4M robotic cell.</a:t>
+              <a:t>Mine: 4M, implemented, with 47% less cycle time.</a:t>
             </a:r>
           </a:p>
           <a:p>
@@ -25755,7 +25289,7 @@
                 </a:solidFill>
                 <a:latin typeface="Segoe UI"/>
               </a:rPr>
-              <a:t>Industrialization project, with Engineering</a:t>
+              <a:t>Industrialization project</a:t>
             </a:r>
           </a:p>
         </p:txBody>
@@ -25998,7 +25532,7 @@
                 </a:solidFill>
                 <a:latin typeface="Segoe UI"/>
               </a:rPr>
-              <a:t>WHAT INDUSTRIALIZATION MEANS</a:t>
+              <a:t>THE PROJECT</a:t>
             </a:r>
           </a:p>
         </p:txBody>
@@ -26012,7 +25546,7 @@
         <p:spPr>
           <a:xfrm>
             <a:off x="5669280" y="2304288"/>
-            <a:ext cx="5897880" cy="1097280"/>
+            <a:ext cx="5897880" cy="914400"/>
           </a:xfrm>
           <a:prstGeom prst="rect">
             <a:avLst/>
@@ -26043,7 +25577,7 @@
                 </a:solidFill>
                 <a:latin typeface="Segoe UI"/>
               </a:rPr>
-              <a:t>Getting a new process ready to run on the floor: equipment, programs, trials and the release to production.</a:t>
+              <a:t>Industrialization of the new Cummins project, together with Engineering.</a:t>
             </a:r>
           </a:p>
         </p:txBody>
@@ -26056,7 +25590,7 @@
         </p:nvSpPr>
         <p:spPr>
           <a:xfrm>
-            <a:off x="5669280" y="3520440"/>
+            <a:off x="5669280" y="3310128"/>
             <a:ext cx="1097280" cy="27432"/>
           </a:xfrm>
           <a:prstGeom prst="rect">
@@ -26085,7 +25619,7 @@
         </p:nvSpPr>
         <p:spPr>
           <a:xfrm>
-            <a:off x="5669280" y="3730752"/>
+            <a:off x="5669280" y="3547872"/>
             <a:ext cx="5486400" cy="274320"/>
           </a:xfrm>
           <a:prstGeom prst="rect">
@@ -26114,7 +25648,7 @@
                 </a:solidFill>
                 <a:latin typeface="Segoe UI"/>
               </a:rPr>
-              <a:t>MY PART</a:t>
+              <a:t>WHAT INDUSTRIALIZATION MEANS</a:t>
             </a:r>
           </a:p>
         </p:txBody>
@@ -26127,7 +25661,7 @@
         </p:nvSpPr>
         <p:spPr>
           <a:xfrm>
-            <a:off x="5669280" y="4114800"/>
+            <a:off x="5669280" y="3950208"/>
             <a:ext cx="5897880" cy="1188720"/>
           </a:xfrm>
           <a:prstGeom prst="rect">
@@ -26142,6 +25676,9 @@
           <a:lstStyle/>
           <a:p>
             <a:pPr algn="l">
+              <a:lnSpc>
+                <a:spcPct val="110000"/>
+              </a:lnSpc>
               <a:spcBef>
                 <a:spcPts val="0"/>
               </a:spcBef>
@@ -26150,32 +25687,13 @@
               </a:spcAft>
             </a:pPr>
             <a:r>
-              <a:rPr sz="1300" b="0" i="1">
+              <a:rPr sz="1400" b="0" i="0">
                 <a:solidFill>
                   <a:srgbClr val="C6CDD1"/>
                 </a:solidFill>
                 <a:latin typeface="Segoe UI"/>
               </a:rPr>
-              <a:t>[Project in one line: the product or line being industrialized.]</a:t>
-            </a:r>
-          </a:p>
-          <a:p>
-            <a:pPr>
-              <a:spcBef>
-                <a:spcPts val="600"/>
-              </a:spcBef>
-              <a:spcAft>
-                <a:spcPts val="0"/>
-              </a:spcAft>
-            </a:pPr>
-            <a:r>
-              <a:rPr sz="1300" b="0" i="1">
-                <a:solidFill>
-                  <a:srgbClr val="C6CDD1"/>
-                </a:solidFill>
-                <a:latin typeface="Segoe UI"/>
-              </a:rPr>
-              <a:t>[What I do in it, in one or two short phrases.]</a:t>
+              <a:t>Getting a new process ready to run on the floor: equipment, programs, trials and the release to production.</a:t>
             </a:r>
           </a:p>
         </p:txBody>
@@ -26232,7 +25750,7 @@
                 </a:solidFill>
                 <a:latin typeface="Segoe UI"/>
               </a:rPr>
-              <a:t>A long, uncomfortable weld, done by hand</a:t>
+              <a:t>Improvement idea: from a manual booth to the 4M cell</a:t>
             </a:r>
           </a:p>
         </p:txBody>
@@ -26259,7 +25777,7 @@
                 </a:solidFill>
                 <a:latin typeface="Segoe UI"/>
               </a:rPr>
-              <a:t>Improvement  |  The starting point</a:t>
+              <a:t>Improvement idea and implementation  |  Done</a:t>
             </a:r>
           </a:p>
         </p:txBody>
@@ -26358,7 +25876,7 @@
                 </a:solidFill>
                 <a:latin typeface="Segoe UI"/>
               </a:rPr>
-              <a:t>THE STARTING POINT</a:t>
+              <a:t>THE PROBLEM</a:t>
             </a:r>
           </a:p>
         </p:txBody>
@@ -26371,8 +25889,8 @@
         </p:nvSpPr>
         <p:spPr>
           <a:xfrm>
-            <a:off x="621792" y="2304288"/>
-            <a:ext cx="5120640" cy="640080"/>
+            <a:off x="621792" y="2286000"/>
+            <a:ext cx="5120640" cy="731520"/>
           </a:xfrm>
           <a:prstGeom prst="rect">
             <a:avLst/>
@@ -26386,6 +25904,9 @@
           <a:lstStyle/>
           <a:p>
             <a:pPr algn="l">
+              <a:lnSpc>
+                <a:spcPct val="110000"/>
+              </a:lnSpc>
               <a:spcBef>
                 <a:spcPts val="0"/>
               </a:spcBef>
@@ -26394,29 +25915,116 @@
               </a:spcAft>
             </a:pPr>
             <a:r>
-              <a:rPr sz="1700" b="0" i="0">
+              <a:rPr sz="1400" b="0" i="0">
                 <a:solidFill>
                   <a:srgbClr val="FFFFFF"/>
                 </a:solidFill>
                 <a:latin typeface="Segoe UI"/>
               </a:rPr>
-              <a:t>One process ran in a manual welding booth.</a:t>
-            </a:r>
-          </a:p>
-        </p:txBody>
-      </p:sp>
-      <p:sp>
-        <p:nvSpPr>
-          <p:cNvPr id="8" name="Chevron 7"/>
+              <a:t>Long welds, done by hand in a manual booth: 146 s of welding per part, in uncomfortable positions.</a:t>
+            </a:r>
+          </a:p>
+        </p:txBody>
+      </p:sp>
+      <p:sp>
+        <p:nvSpPr>
+          <p:cNvPr id="8" name="TextBox 7"/>
+          <p:cNvSpPr txBox="1"/>
+          <p:nvPr/>
+        </p:nvSpPr>
+        <p:spPr>
+          <a:xfrm>
+            <a:off x="621792" y="3017520"/>
+            <a:ext cx="5486400" cy="274320"/>
+          </a:xfrm>
+          <a:prstGeom prst="rect">
+            <a:avLst/>
+          </a:prstGeom>
+          <a:noFill/>
+        </p:spPr>
+        <p:txBody>
+          <a:bodyPr wrap="square" lIns="0" rIns="0" tIns="0" bIns="0" anchor="t">
+            <a:spAutoFit/>
+          </a:bodyPr>
+          <a:lstStyle/>
+          <a:p>
+            <a:pPr algn="l">
+              <a:spcBef>
+                <a:spcPts val="0"/>
+              </a:spcBef>
+              <a:spcAft>
+                <a:spcPts val="0"/>
+              </a:spcAft>
+            </a:pPr>
+            <a:r>
+              <a:rPr sz="1600" b="1" i="0">
+                <a:solidFill>
+                  <a:srgbClr val="D5FB00"/>
+                </a:solidFill>
+                <a:latin typeface="Segoe UI"/>
+              </a:rPr>
+              <a:t>THE IDEA</a:t>
+            </a:r>
+          </a:p>
+        </p:txBody>
+      </p:sp>
+      <p:sp>
+        <p:nvSpPr>
+          <p:cNvPr id="9" name="TextBox 8"/>
+          <p:cNvSpPr txBox="1"/>
+          <p:nvPr/>
+        </p:nvSpPr>
+        <p:spPr>
+          <a:xfrm>
+            <a:off x="621792" y="3401568"/>
+            <a:ext cx="5120640" cy="731520"/>
+          </a:xfrm>
+          <a:prstGeom prst="rect">
+            <a:avLst/>
+          </a:prstGeom>
+          <a:noFill/>
+        </p:spPr>
+        <p:txBody>
+          <a:bodyPr wrap="square" lIns="0" rIns="0" tIns="0" bIns="0" anchor="t">
+            <a:spAutoFit/>
+          </a:bodyPr>
+          <a:lstStyle/>
+          <a:p>
+            <a:pPr algn="l">
+              <a:lnSpc>
+                <a:spcPct val="110000"/>
+              </a:lnSpc>
+              <a:spcBef>
+                <a:spcPts val="0"/>
+              </a:spcBef>
+              <a:spcAft>
+                <a:spcPts val="0"/>
+              </a:spcAft>
+            </a:pPr>
+            <a:r>
+              <a:rPr sz="1400" b="0" i="0">
+                <a:solidFill>
+                  <a:srgbClr val="FFFFFF"/>
+                </a:solidFill>
+                <a:latin typeface="Segoe UI"/>
+              </a:rPr>
+              <a:t>Move the process to 4M, an automatic robotic cell, with the same fixture.</a:t>
+            </a:r>
+          </a:p>
+        </p:txBody>
+      </p:sp>
+      <p:sp>
+        <p:nvSpPr>
+          <p:cNvPr id="10" name="Rectangle 9"/>
           <p:cNvSpPr/>
           <p:nvPr/>
         </p:nvSpPr>
         <p:spPr>
           <a:xfrm>
-            <a:off x="621792" y="3127248"/>
-            <a:ext cx="146304" cy="146304"/>
-          </a:xfrm>
-          <a:prstGeom prst="chevron">
+            <a:off x="621792" y="4206240"/>
+            <a:ext cx="1097280" cy="27432"/>
+          </a:xfrm>
+          <a:prstGeom prst="rect">
             <a:avLst/>
           </a:prstGeom>
           <a:solidFill>
@@ -26436,14 +26044,14 @@
       </p:sp>
       <p:sp>
         <p:nvSpPr>
-          <p:cNvPr id="9" name="TextBox 8"/>
+          <p:cNvPr id="11" name="TextBox 10"/>
           <p:cNvSpPr txBox="1"/>
           <p:nvPr/>
         </p:nvSpPr>
         <p:spPr>
           <a:xfrm>
-            <a:off x="914400" y="3063240"/>
-            <a:ext cx="4846320" cy="274320"/>
+            <a:off x="621792" y="4389120"/>
+            <a:ext cx="5486400" cy="274320"/>
           </a:xfrm>
           <a:prstGeom prst="rect">
             <a:avLst/>
@@ -26465,27 +26073,27 @@
               </a:spcAft>
             </a:pPr>
             <a:r>
-              <a:rPr sz="1400" b="1" i="0">
-                <a:solidFill>
-                  <a:srgbClr val="FFFFFF"/>
+              <a:rPr sz="1600" b="1" i="0">
+                <a:solidFill>
+                  <a:srgbClr val="D5FB00"/>
                 </a:solidFill>
                 <a:latin typeface="Segoe UI"/>
               </a:rPr>
-              <a:t>Time</a:t>
-            </a:r>
-          </a:p>
-        </p:txBody>
-      </p:sp>
-      <p:sp>
-        <p:nvSpPr>
-          <p:cNvPr id="10" name="TextBox 9"/>
+              <a:t>IMPLEMENTED</a:t>
+            </a:r>
+          </a:p>
+        </p:txBody>
+      </p:sp>
+      <p:sp>
+        <p:nvSpPr>
+          <p:cNvPr id="12" name="TextBox 11"/>
           <p:cNvSpPr txBox="1"/>
           <p:nvPr/>
         </p:nvSpPr>
         <p:spPr>
           <a:xfrm>
-            <a:off x="914400" y="3355848"/>
-            <a:ext cx="4846320" cy="457200"/>
+            <a:off x="621792" y="4754880"/>
+            <a:ext cx="5120640" cy="640080"/>
           </a:xfrm>
           <a:prstGeom prst="rect">
             <a:avLst/>
@@ -26499,6 +26107,9 @@
           <a:lstStyle/>
           <a:p>
             <a:pPr algn="l">
+              <a:lnSpc>
+                <a:spcPct val="110000"/>
+              </a:lnSpc>
               <a:spcBef>
                 <a:spcPts val="0"/>
               </a:spcBef>
@@ -26507,175 +26118,20 @@
               </a:spcAft>
             </a:pPr>
             <a:r>
-              <a:rPr sz="1300" b="0" i="0">
-                <a:solidFill>
-                  <a:srgbClr val="C6CDD1"/>
+              <a:rPr sz="1400" b="1" i="0">
+                <a:solidFill>
+                  <a:srgbClr val="D5FB00"/>
                 </a:solidFill>
                 <a:latin typeface="Segoe UI"/>
               </a:rPr>
-              <a:t>Long welds made every part slow to finish.</a:t>
-            </a:r>
-          </a:p>
-        </p:txBody>
-      </p:sp>
-      <p:sp>
-        <p:nvSpPr>
-          <p:cNvPr id="11" name="Chevron 10"/>
-          <p:cNvSpPr/>
-          <p:nvPr/>
-        </p:nvSpPr>
-        <p:spPr>
-          <a:xfrm>
-            <a:off x="621792" y="3968496"/>
-            <a:ext cx="146304" cy="146304"/>
-          </a:xfrm>
-          <a:prstGeom prst="chevron">
-            <a:avLst/>
-          </a:prstGeom>
-          <a:solidFill>
-            <a:srgbClr val="D5FB00"/>
-          </a:solidFill>
-          <a:ln>
-            <a:noFill/>
-          </a:ln>
-        </p:spPr>
-        <p:txBody>
-          <a:bodyPr rtlCol="0" anchor="ctr" wrap="square" lIns="0" rIns="0" tIns="0" bIns="0"/>
-          <a:lstStyle/>
-          <a:p>
-            <a:pPr algn="ctr"/>
-          </a:p>
-        </p:txBody>
-      </p:sp>
-      <p:sp>
-        <p:nvSpPr>
-          <p:cNvPr id="12" name="TextBox 11"/>
-          <p:cNvSpPr txBox="1"/>
-          <p:nvPr/>
-        </p:nvSpPr>
-        <p:spPr>
-          <a:xfrm>
-            <a:off x="914400" y="3904488"/>
-            <a:ext cx="4846320" cy="274320"/>
-          </a:xfrm>
-          <a:prstGeom prst="rect">
-            <a:avLst/>
-          </a:prstGeom>
-          <a:noFill/>
-        </p:spPr>
-        <p:txBody>
-          <a:bodyPr wrap="square" lIns="0" rIns="0" tIns="0" bIns="0" anchor="t">
-            <a:spAutoFit/>
-          </a:bodyPr>
-          <a:lstStyle/>
-          <a:p>
-            <a:pPr algn="l">
-              <a:spcBef>
-                <a:spcPts val="0"/>
-              </a:spcBef>
-              <a:spcAft>
-                <a:spcPts val="0"/>
-              </a:spcAft>
-            </a:pPr>
-            <a:r>
-              <a:rPr sz="1400" b="1" i="0">
-                <a:solidFill>
-                  <a:srgbClr val="FFFFFF"/>
-                </a:solidFill>
-                <a:latin typeface="Segoe UI"/>
-              </a:rPr>
-              <a:t>The team member</a:t>
-            </a:r>
-          </a:p>
-        </p:txBody>
-      </p:sp>
-      <p:sp>
-        <p:nvSpPr>
-          <p:cNvPr id="13" name="TextBox 12"/>
-          <p:cNvSpPr txBox="1"/>
-          <p:nvPr/>
-        </p:nvSpPr>
-        <p:spPr>
-          <a:xfrm>
-            <a:off x="914400" y="4197096"/>
-            <a:ext cx="4846320" cy="457200"/>
-          </a:xfrm>
-          <a:prstGeom prst="rect">
-            <a:avLst/>
-          </a:prstGeom>
-          <a:noFill/>
-        </p:spPr>
-        <p:txBody>
-          <a:bodyPr wrap="square" lIns="0" rIns="0" tIns="0" bIns="0" anchor="t">
-            <a:spAutoFit/>
-          </a:bodyPr>
-          <a:lstStyle/>
-          <a:p>
-            <a:pPr algn="l">
-              <a:spcBef>
-                <a:spcPts val="0"/>
-              </a:spcBef>
-              <a:spcAft>
-                <a:spcPts val="0"/>
-              </a:spcAft>
-            </a:pPr>
-            <a:r>
-              <a:rPr sz="1300" b="0" i="0">
-                <a:solidFill>
-                  <a:srgbClr val="C6CDD1"/>
-                </a:solidFill>
-                <a:latin typeface="Segoe UI"/>
-              </a:rPr>
-              <a:t>Uncomfortable positions, held for a long time, part after part.</a:t>
-            </a:r>
-          </a:p>
-        </p:txBody>
-      </p:sp>
-      <p:sp>
-        <p:nvSpPr>
-          <p:cNvPr id="14" name="TextBox 13"/>
-          <p:cNvSpPr txBox="1"/>
-          <p:nvPr/>
-        </p:nvSpPr>
-        <p:spPr>
-          <a:xfrm>
-            <a:off x="621792" y="4937760"/>
-            <a:ext cx="5120640" cy="320040"/>
-          </a:xfrm>
-          <a:prstGeom prst="rect">
-            <a:avLst/>
-          </a:prstGeom>
-          <a:noFill/>
-        </p:spPr>
-        <p:txBody>
-          <a:bodyPr wrap="square" lIns="0" rIns="0" tIns="0" bIns="0" anchor="t">
-            <a:spAutoFit/>
-          </a:bodyPr>
-          <a:lstStyle/>
-          <a:p>
-            <a:pPr algn="l">
-              <a:spcBef>
-                <a:spcPts val="0"/>
-              </a:spcBef>
-              <a:spcAft>
-                <a:spcPts val="0"/>
-              </a:spcAft>
-            </a:pPr>
-            <a:r>
-              <a:rPr sz="1500" b="1" i="0">
-                <a:solidFill>
-                  <a:srgbClr val="D5FB00"/>
-                </a:solidFill>
-                <a:latin typeface="Segoe UI"/>
-              </a:rPr>
-              <a:t>The idea: let a robot do it.</a:t>
+              <a:t>Running in 4M today. The robot welds, and the team member only loads and unloads.</a:t>
             </a:r>
           </a:p>
         </p:txBody>
       </p:sp>
       <p:pic>
         <p:nvPicPr>
-          <p:cNvPr id="15" name="!! Glass B" descr="Decorative glass panel"/>
+          <p:cNvPr id="13" name="!! Glass B" descr="Decorative glass panel"/>
           <p:cNvPicPr>
             <a:picLocks noChangeAspect="1"/>
           </p:cNvPicPr>
@@ -26692,7 +26148,7 @@
         <p:spPr>
           <a:xfrm>
             <a:off x="6382512" y="1600200"/>
-            <a:ext cx="5550408" cy="3886200"/>
+            <a:ext cx="5550408" cy="1847088"/>
           </a:xfrm>
           <a:prstGeom prst="rect">
             <a:avLst/>
@@ -26701,14 +26157,14 @@
       </p:pic>
       <p:sp>
         <p:nvSpPr>
-          <p:cNvPr id="16" name="!! Glass B rim"/>
+          <p:cNvPr id="14" name="!! Glass B rim"/>
           <p:cNvSpPr/>
           <p:nvPr/>
         </p:nvSpPr>
         <p:spPr>
           <a:xfrm>
             <a:off x="6382512" y="1600200"/>
-            <a:ext cx="5550408" cy="3886200"/>
+            <a:ext cx="5550408" cy="1847088"/>
           </a:xfrm>
           <a:prstGeom prst="rect">
             <a:avLst/>
@@ -26732,14 +26188,14 @@
       </p:sp>
       <p:sp>
         <p:nvSpPr>
-          <p:cNvPr id="17" name="Rectangle 16"/>
+          <p:cNvPr id="15" name="Rectangle 14"/>
           <p:cNvSpPr/>
           <p:nvPr/>
         </p:nvSpPr>
         <p:spPr>
           <a:xfrm>
             <a:off x="6547104" y="1764792"/>
-            <a:ext cx="5221224" cy="3557016"/>
+            <a:ext cx="5221224" cy="1517904"/>
           </a:xfrm>
           <a:prstGeom prst="rect">
             <a:avLst/>
@@ -26763,13 +26219,13 @@
       </p:sp>
       <p:sp>
         <p:nvSpPr>
-          <p:cNvPr id="18" name="TextBox 17"/>
+          <p:cNvPr id="16" name="TextBox 15"/>
           <p:cNvSpPr txBox="1"/>
           <p:nvPr/>
         </p:nvSpPr>
         <p:spPr>
           <a:xfrm>
-            <a:off x="6382512" y="3268980"/>
+            <a:off x="6382512" y="2249424"/>
             <a:ext cx="5550408" cy="548640"/>
           </a:xfrm>
           <a:prstGeom prst="rect">
@@ -26817,7 +26273,156 @@
                 </a:solidFill>
                 <a:latin typeface="Segoe UI"/>
               </a:rPr>
-              <a:t>Manual welding booth</a:t>
+              <a:t>Before: manual welding booth</a:t>
+            </a:r>
+          </a:p>
+        </p:txBody>
+      </p:sp>
+      <p:pic>
+        <p:nvPicPr>
+          <p:cNvPr id="17" name="!! Glass C" descr="Decorative glass panel"/>
+          <p:cNvPicPr>
+            <a:picLocks noChangeAspect="1"/>
+          </p:cNvPicPr>
+          <p:nvPr/>
+        </p:nvPicPr>
+        <p:blipFill>
+          <a:blip r:embed="rId4">
+            <a:alphaModFix amt="50000"/>
+          </a:blip>
+          <a:stretch>
+            <a:fillRect/>
+          </a:stretch>
+        </p:blipFill>
+        <p:spPr>
+          <a:xfrm>
+            <a:off x="6382512" y="3639312"/>
+            <a:ext cx="5550408" cy="1847088"/>
+          </a:xfrm>
+          <a:prstGeom prst="rect">
+            <a:avLst/>
+          </a:prstGeom>
+        </p:spPr>
+      </p:pic>
+      <p:sp>
+        <p:nvSpPr>
+          <p:cNvPr id="18" name="!! Glass C rim"/>
+          <p:cNvSpPr/>
+          <p:nvPr/>
+        </p:nvSpPr>
+        <p:spPr>
+          <a:xfrm>
+            <a:off x="6382512" y="3639312"/>
+            <a:ext cx="5550408" cy="1847088"/>
+          </a:xfrm>
+          <a:prstGeom prst="rect">
+            <a:avLst/>
+          </a:prstGeom>
+          <a:noFill/>
+          <a:ln w="9525">
+            <a:solidFill>
+              <a:srgbClr val="FFFFFF">
+                <a:alpha val="16000"/>
+              </a:srgbClr>
+            </a:solidFill>
+          </a:ln>
+        </p:spPr>
+        <p:txBody>
+          <a:bodyPr rtlCol="0" anchor="ctr" wrap="square" lIns="0" rIns="0" tIns="0" bIns="0"/>
+          <a:lstStyle/>
+          <a:p>
+            <a:pPr algn="ctr"/>
+          </a:p>
+        </p:txBody>
+      </p:sp>
+      <p:sp>
+        <p:nvSpPr>
+          <p:cNvPr id="19" name="Rectangle 18"/>
+          <p:cNvSpPr/>
+          <p:nvPr/>
+        </p:nvSpPr>
+        <p:spPr>
+          <a:xfrm>
+            <a:off x="6547104" y="3803904"/>
+            <a:ext cx="5221224" cy="1517904"/>
+          </a:xfrm>
+          <a:prstGeom prst="rect">
+            <a:avLst/>
+          </a:prstGeom>
+          <a:noFill/>
+          <a:ln w="9525">
+            <a:solidFill>
+              <a:srgbClr val="C6CDD1">
+                <a:alpha val="35000"/>
+              </a:srgbClr>
+            </a:solidFill>
+          </a:ln>
+        </p:spPr>
+        <p:txBody>
+          <a:bodyPr rtlCol="0" anchor="ctr" wrap="square" lIns="0" rIns="0" tIns="0" bIns="0"/>
+          <a:lstStyle/>
+          <a:p>
+            <a:pPr algn="ctr"/>
+          </a:p>
+        </p:txBody>
+      </p:sp>
+      <p:sp>
+        <p:nvSpPr>
+          <p:cNvPr id="20" name="TextBox 19"/>
+          <p:cNvSpPr txBox="1"/>
+          <p:nvPr/>
+        </p:nvSpPr>
+        <p:spPr>
+          <a:xfrm>
+            <a:off x="6382512" y="4288536"/>
+            <a:ext cx="5550408" cy="548640"/>
+          </a:xfrm>
+          <a:prstGeom prst="rect">
+            <a:avLst/>
+          </a:prstGeom>
+          <a:noFill/>
+        </p:spPr>
+        <p:txBody>
+          <a:bodyPr wrap="square" lIns="0" rIns="0" tIns="0" bIns="0" anchor="t">
+            <a:spAutoFit/>
+          </a:bodyPr>
+          <a:lstStyle/>
+          <a:p>
+            <a:pPr algn="ctr">
+              <a:spcBef>
+                <a:spcPts val="0"/>
+              </a:spcBef>
+              <a:spcAft>
+                <a:spcPts val="0"/>
+              </a:spcAft>
+            </a:pPr>
+            <a:r>
+              <a:rPr sz="1100" b="1" i="0">
+                <a:solidFill>
+                  <a:srgbClr val="D5FB00"/>
+                </a:solidFill>
+                <a:latin typeface="Segoe UI"/>
+              </a:rPr>
+              <a:t>PHOTO</a:t>
+            </a:r>
+          </a:p>
+          <a:p>
+            <a:pPr algn="ctr">
+              <a:spcBef>
+                <a:spcPts val="200"/>
+              </a:spcBef>
+              <a:spcAft>
+                <a:spcPts val="0"/>
+              </a:spcAft>
+            </a:pPr>
+            <a:r>
+              <a:rPr sz="1200" b="0" i="0">
+                <a:solidFill>
+                  <a:srgbClr val="C6CDD1"/>
+                </a:solidFill>
+                <a:latin typeface="Segoe UI"/>
+              </a:rPr>
+              <a:t>After: 4M robotic cell</a:t>
             </a:r>
           </a:p>
         </p:txBody>

--- a/presentations/Tenneco_Robotics_Setter_Diego_de_Leon.pptx
+++ b/presentations/Tenneco_Robotics_Setter_Diego_de_Leon.pptx
@@ -17038,7 +17038,7 @@
             <a:r>
               <a:rPr sz="2800" b="1">
                 <a:solidFill>
-                  <a:srgbClr val="FFFFFF"/>
+                  <a:srgbClr val="051C2C"/>
                 </a:solidFill>
                 <a:latin typeface="Segoe UI"/>
               </a:rPr>
@@ -17065,7 +17065,7 @@
             <a:r>
               <a:rPr sz="1300" b="0">
                 <a:solidFill>
-                  <a:srgbClr val="D5FB00"/>
+                  <a:srgbClr val="0033A0"/>
                 </a:solidFill>
                 <a:latin typeface="Segoe UI"/>
               </a:rPr>
@@ -17074,22 +17074,12 @@
           </a:p>
         </p:txBody>
       </p:sp>
-      <p:pic>
-        <p:nvPicPr>
-          <p:cNvPr id="4" name="!! Card 1" descr="Decorative glass panel"/>
-          <p:cNvPicPr>
-            <a:picLocks noChangeAspect="1"/>
-          </p:cNvPicPr>
+      <p:sp>
+        <p:nvSpPr>
+          <p:cNvPr id="4" name="!! Card 1"/>
+          <p:cNvSpPr/>
           <p:nvPr/>
-        </p:nvPicPr>
-        <p:blipFill>
-          <a:blip r:embed="rId2">
-            <a:alphaModFix amt="50000"/>
-          </a:blip>
-          <a:stretch>
-            <a:fillRect/>
-          </a:stretch>
-        </p:blipFill>
+        </p:nvSpPr>
         <p:spPr>
           <a:xfrm>
             <a:off x="256032" y="1691640"/>
@@ -17098,27 +17088,15 @@
           <a:prstGeom prst="rect">
             <a:avLst/>
           </a:prstGeom>
-        </p:spPr>
-      </p:pic>
-      <p:sp>
-        <p:nvSpPr>
-          <p:cNvPr id="5" name="!! Card 1 rim"/>
-          <p:cNvSpPr/>
-          <p:nvPr/>
-        </p:nvSpPr>
-        <p:spPr>
-          <a:xfrm>
-            <a:off x="256032" y="1691640"/>
-            <a:ext cx="3703320" cy="3063240"/>
-          </a:xfrm>
-          <a:prstGeom prst="rect">
-            <a:avLst/>
-          </a:prstGeom>
-          <a:noFill/>
+          <a:solidFill>
+            <a:srgbClr val="051C2C">
+              <a:alpha val="4000"/>
+            </a:srgbClr>
+          </a:solidFill>
           <a:ln w="9525">
             <a:solidFill>
-              <a:srgbClr val="FFFFFF">
-                <a:alpha val="16000"/>
+              <a:srgbClr val="051C2C">
+                <a:alpha val="12000"/>
               </a:srgbClr>
             </a:solidFill>
           </a:ln>
@@ -17133,14 +17111,56 @@
       </p:sp>
       <p:sp>
         <p:nvSpPr>
+          <p:cNvPr id="5" name="TextBox 4"/>
+          <p:cNvSpPr txBox="1"/>
+          <p:nvPr/>
+        </p:nvSpPr>
+        <p:spPr>
+          <a:xfrm>
+            <a:off x="585216" y="1965960"/>
+            <a:ext cx="3017520" cy="502920"/>
+          </a:xfrm>
+          <a:prstGeom prst="rect">
+            <a:avLst/>
+          </a:prstGeom>
+          <a:noFill/>
+        </p:spPr>
+        <p:txBody>
+          <a:bodyPr wrap="square" lIns="0" rIns="0" tIns="0" bIns="0" anchor="t">
+            <a:spAutoFit/>
+          </a:bodyPr>
+          <a:lstStyle/>
+          <a:p>
+            <a:pPr algn="l">
+              <a:spcBef>
+                <a:spcPts val="0"/>
+              </a:spcBef>
+              <a:spcAft>
+                <a:spcPts val="0"/>
+              </a:spcAft>
+            </a:pPr>
+            <a:r>
+              <a:rPr sz="3000" b="1" i="0">
+                <a:solidFill>
+                  <a:srgbClr val="0033A0"/>
+                </a:solidFill>
+                <a:latin typeface="Segoe UI"/>
+              </a:rPr>
+              <a:t>01</a:t>
+            </a:r>
+          </a:p>
+        </p:txBody>
+      </p:sp>
+      <p:sp>
+        <p:nvSpPr>
           <p:cNvPr id="6" name="TextBox 5"/>
           <p:cNvSpPr txBox="1"/>
           <p:nvPr/>
         </p:nvSpPr>
         <p:spPr>
           <a:xfrm>
-            <a:off x="585216" y="1965960"/>
-            <a:ext cx="3017520" cy="502920"/>
+            <a:off x="585216" y="2651760"/>
+            <a:ext cx="3017520" cy="320040"/>
           </a:xfrm>
           <a:prstGeom prst="rect">
             <a:avLst/>
@@ -17162,51 +17182,9 @@
               </a:spcAft>
             </a:pPr>
             <a:r>
-              <a:rPr sz="3000" b="1" i="0">
-                <a:solidFill>
-                  <a:srgbClr val="D5FB00"/>
-                </a:solidFill>
-                <a:latin typeface="Segoe UI"/>
-              </a:rPr>
-              <a:t>01</a:t>
-            </a:r>
-          </a:p>
-        </p:txBody>
-      </p:sp>
-      <p:sp>
-        <p:nvSpPr>
-          <p:cNvPr id="7" name="TextBox 6"/>
-          <p:cNvSpPr txBox="1"/>
-          <p:nvPr/>
-        </p:nvSpPr>
-        <p:spPr>
-          <a:xfrm>
-            <a:off x="585216" y="2651760"/>
-            <a:ext cx="3017520" cy="320040"/>
-          </a:xfrm>
-          <a:prstGeom prst="rect">
-            <a:avLst/>
-          </a:prstGeom>
-          <a:noFill/>
-        </p:spPr>
-        <p:txBody>
-          <a:bodyPr wrap="square" lIns="0" rIns="0" tIns="0" bIns="0" anchor="t">
-            <a:spAutoFit/>
-          </a:bodyPr>
-          <a:lstStyle/>
-          <a:p>
-            <a:pPr algn="l">
-              <a:spcBef>
-                <a:spcPts val="0"/>
-              </a:spcBef>
-              <a:spcAft>
-                <a:spcPts val="0"/>
-              </a:spcAft>
-            </a:pPr>
-            <a:r>
               <a:rPr sz="1600" b="1" i="0">
                 <a:solidFill>
-                  <a:srgbClr val="FFFFFF"/>
+                  <a:srgbClr val="051C2C"/>
                 </a:solidFill>
                 <a:latin typeface="Segoe UI"/>
               </a:rPr>
@@ -17217,7 +17195,7 @@
       </p:sp>
       <p:sp>
         <p:nvSpPr>
-          <p:cNvPr id="8" name="TextBox 7"/>
+          <p:cNvPr id="7" name="TextBox 6"/>
           <p:cNvSpPr txBox="1"/>
           <p:nvPr/>
         </p:nvSpPr>
@@ -17251,7 +17229,7 @@
             <a:r>
               <a:rPr sz="1200" b="0" i="0">
                 <a:solidFill>
-                  <a:srgbClr val="C6CDD1"/>
+                  <a:srgbClr val="6B7A83"/>
                 </a:solidFill>
                 <a:latin typeface="Segoe UI"/>
               </a:rPr>
@@ -17260,22 +17238,12 @@
           </a:p>
         </p:txBody>
       </p:sp>
-      <p:pic>
-        <p:nvPicPr>
-          <p:cNvPr id="9" name="!! Card 2" descr="Decorative glass panel"/>
-          <p:cNvPicPr>
-            <a:picLocks noChangeAspect="1"/>
-          </p:cNvPicPr>
+      <p:sp>
+        <p:nvSpPr>
+          <p:cNvPr id="8" name="!! Card 2"/>
+          <p:cNvSpPr/>
           <p:nvPr/>
-        </p:nvPicPr>
-        <p:blipFill>
-          <a:blip r:embed="rId3">
-            <a:alphaModFix amt="50000"/>
-          </a:blip>
-          <a:stretch>
-            <a:fillRect/>
-          </a:stretch>
-        </p:blipFill>
+        </p:nvSpPr>
         <p:spPr>
           <a:xfrm>
             <a:off x="4251960" y="1691640"/>
@@ -17284,27 +17252,15 @@
           <a:prstGeom prst="rect">
             <a:avLst/>
           </a:prstGeom>
-        </p:spPr>
-      </p:pic>
-      <p:sp>
-        <p:nvSpPr>
-          <p:cNvPr id="10" name="!! Card 2 rim"/>
-          <p:cNvSpPr/>
-          <p:nvPr/>
-        </p:nvSpPr>
-        <p:spPr>
-          <a:xfrm>
-            <a:off x="4251960" y="1691640"/>
-            <a:ext cx="3703320" cy="3063240"/>
-          </a:xfrm>
-          <a:prstGeom prst="rect">
-            <a:avLst/>
-          </a:prstGeom>
-          <a:noFill/>
+          <a:solidFill>
+            <a:srgbClr val="051C2C">
+              <a:alpha val="4000"/>
+            </a:srgbClr>
+          </a:solidFill>
           <a:ln w="9525">
             <a:solidFill>
-              <a:srgbClr val="FFFFFF">
-                <a:alpha val="16000"/>
+              <a:srgbClr val="051C2C">
+                <a:alpha val="12000"/>
               </a:srgbClr>
             </a:solidFill>
           </a:ln>
@@ -17319,7 +17275,7 @@
       </p:sp>
       <p:sp>
         <p:nvSpPr>
-          <p:cNvPr id="11" name="TextBox 10"/>
+          <p:cNvPr id="9" name="TextBox 8"/>
           <p:cNvSpPr txBox="1"/>
           <p:nvPr/>
         </p:nvSpPr>
@@ -17350,7 +17306,7 @@
             <a:r>
               <a:rPr sz="3000" b="1" i="0">
                 <a:solidFill>
-                  <a:srgbClr val="D5FB00"/>
+                  <a:srgbClr val="0033A0"/>
                 </a:solidFill>
                 <a:latin typeface="Segoe UI"/>
               </a:rPr>
@@ -17361,7 +17317,7 @@
       </p:sp>
       <p:sp>
         <p:nvSpPr>
-          <p:cNvPr id="12" name="TextBox 11"/>
+          <p:cNvPr id="10" name="TextBox 9"/>
           <p:cNvSpPr txBox="1"/>
           <p:nvPr/>
         </p:nvSpPr>
@@ -17392,7 +17348,7 @@
             <a:r>
               <a:rPr sz="1600" b="1" i="0">
                 <a:solidFill>
-                  <a:srgbClr val="FFFFFF"/>
+                  <a:srgbClr val="051C2C"/>
                 </a:solidFill>
                 <a:latin typeface="Segoe UI"/>
               </a:rPr>
@@ -17403,7 +17359,7 @@
       </p:sp>
       <p:sp>
         <p:nvSpPr>
-          <p:cNvPr id="13" name="TextBox 12"/>
+          <p:cNvPr id="11" name="TextBox 10"/>
           <p:cNvSpPr txBox="1"/>
           <p:nvPr/>
         </p:nvSpPr>
@@ -17437,7 +17393,7 @@
             <a:r>
               <a:rPr sz="1200" b="0" i="0">
                 <a:solidFill>
-                  <a:srgbClr val="C6CDD1"/>
+                  <a:srgbClr val="6B7A83"/>
                 </a:solidFill>
                 <a:latin typeface="Segoe UI"/>
               </a:rPr>
@@ -17446,22 +17402,12 @@
           </a:p>
         </p:txBody>
       </p:sp>
-      <p:pic>
-        <p:nvPicPr>
-          <p:cNvPr id="14" name="!! Card 3" descr="Decorative glass panel"/>
-          <p:cNvPicPr>
-            <a:picLocks noChangeAspect="1"/>
-          </p:cNvPicPr>
+      <p:sp>
+        <p:nvSpPr>
+          <p:cNvPr id="12" name="!! Card 3"/>
+          <p:cNvSpPr/>
           <p:nvPr/>
-        </p:nvPicPr>
-        <p:blipFill>
-          <a:blip r:embed="rId4">
-            <a:alphaModFix amt="50000"/>
-          </a:blip>
-          <a:stretch>
-            <a:fillRect/>
-          </a:stretch>
-        </p:blipFill>
+        </p:nvSpPr>
         <p:spPr>
           <a:xfrm>
             <a:off x="8247888" y="1691640"/>
@@ -17470,27 +17416,15 @@
           <a:prstGeom prst="rect">
             <a:avLst/>
           </a:prstGeom>
-        </p:spPr>
-      </p:pic>
-      <p:sp>
-        <p:nvSpPr>
-          <p:cNvPr id="15" name="!! Card 3 rim"/>
-          <p:cNvSpPr/>
-          <p:nvPr/>
-        </p:nvSpPr>
-        <p:spPr>
-          <a:xfrm>
-            <a:off x="8247888" y="1691640"/>
-            <a:ext cx="3703320" cy="3063240"/>
-          </a:xfrm>
-          <a:prstGeom prst="rect">
-            <a:avLst/>
-          </a:prstGeom>
-          <a:noFill/>
+          <a:solidFill>
+            <a:srgbClr val="051C2C">
+              <a:alpha val="4000"/>
+            </a:srgbClr>
+          </a:solidFill>
           <a:ln w="9525">
             <a:solidFill>
-              <a:srgbClr val="FFFFFF">
-                <a:alpha val="16000"/>
+              <a:srgbClr val="051C2C">
+                <a:alpha val="12000"/>
               </a:srgbClr>
             </a:solidFill>
           </a:ln>
@@ -17505,7 +17439,7 @@
       </p:sp>
       <p:sp>
         <p:nvSpPr>
-          <p:cNvPr id="16" name="TextBox 15"/>
+          <p:cNvPr id="13" name="TextBox 12"/>
           <p:cNvSpPr txBox="1"/>
           <p:nvPr/>
         </p:nvSpPr>
@@ -17536,7 +17470,7 @@
             <a:r>
               <a:rPr sz="3000" b="1" i="0">
                 <a:solidFill>
-                  <a:srgbClr val="D5FB00"/>
+                  <a:srgbClr val="0033A0"/>
                 </a:solidFill>
                 <a:latin typeface="Segoe UI"/>
               </a:rPr>
@@ -17547,7 +17481,7 @@
       </p:sp>
       <p:sp>
         <p:nvSpPr>
-          <p:cNvPr id="17" name="TextBox 16"/>
+          <p:cNvPr id="14" name="TextBox 13"/>
           <p:cNvSpPr txBox="1"/>
           <p:nvPr/>
         </p:nvSpPr>
@@ -17578,7 +17512,7 @@
             <a:r>
               <a:rPr sz="1600" b="1" i="0">
                 <a:solidFill>
-                  <a:srgbClr val="FFFFFF"/>
+                  <a:srgbClr val="051C2C"/>
                 </a:solidFill>
                 <a:latin typeface="Segoe UI"/>
               </a:rPr>
@@ -17589,7 +17523,7 @@
       </p:sp>
       <p:sp>
         <p:nvSpPr>
-          <p:cNvPr id="18" name="TextBox 17"/>
+          <p:cNvPr id="15" name="TextBox 14"/>
           <p:cNvSpPr txBox="1"/>
           <p:nvPr/>
         </p:nvSpPr>
@@ -17623,7 +17557,7 @@
             <a:r>
               <a:rPr sz="1200" b="0" i="0">
                 <a:solidFill>
-                  <a:srgbClr val="C6CDD1"/>
+                  <a:srgbClr val="6B7A83"/>
                 </a:solidFill>
                 <a:latin typeface="Segoe UI"/>
               </a:rPr>
@@ -17632,22 +17566,12 @@
           </a:p>
         </p:txBody>
       </p:sp>
-      <p:pic>
-        <p:nvPicPr>
-          <p:cNvPr id="19" name="!! Strip" descr="Decorative glass panel"/>
-          <p:cNvPicPr>
-            <a:picLocks noChangeAspect="1"/>
-          </p:cNvPicPr>
+      <p:sp>
+        <p:nvSpPr>
+          <p:cNvPr id="16" name="!! Strip"/>
+          <p:cNvSpPr/>
           <p:nvPr/>
-        </p:nvPicPr>
-        <p:blipFill>
-          <a:blip r:embed="rId5">
-            <a:alphaModFix amt="50000"/>
-          </a:blip>
-          <a:stretch>
-            <a:fillRect/>
-          </a:stretch>
-        </p:blipFill>
+        </p:nvSpPr>
         <p:spPr>
           <a:xfrm>
             <a:off x="256032" y="4956048"/>
@@ -17656,27 +17580,15 @@
           <a:prstGeom prst="rect">
             <a:avLst/>
           </a:prstGeom>
-        </p:spPr>
-      </p:pic>
-      <p:sp>
-        <p:nvSpPr>
-          <p:cNvPr id="20" name="!! Strip rim"/>
-          <p:cNvSpPr/>
-          <p:nvPr/>
-        </p:nvSpPr>
-        <p:spPr>
-          <a:xfrm>
-            <a:off x="256032" y="4956048"/>
-            <a:ext cx="11676888" cy="566928"/>
-          </a:xfrm>
-          <a:prstGeom prst="rect">
-            <a:avLst/>
-          </a:prstGeom>
-          <a:noFill/>
+          <a:solidFill>
+            <a:srgbClr val="051C2C">
+              <a:alpha val="4000"/>
+            </a:srgbClr>
+          </a:solidFill>
           <a:ln w="9525">
             <a:solidFill>
-              <a:srgbClr val="FFFFFF">
-                <a:alpha val="16000"/>
+              <a:srgbClr val="051C2C">
+                <a:alpha val="12000"/>
               </a:srgbClr>
             </a:solidFill>
           </a:ln>
@@ -17691,7 +17603,7 @@
       </p:sp>
       <p:sp>
         <p:nvSpPr>
-          <p:cNvPr id="21" name="TextBox 20"/>
+          <p:cNvPr id="17" name="TextBox 16"/>
           <p:cNvSpPr txBox="1"/>
           <p:nvPr/>
         </p:nvSpPr>
@@ -17722,7 +17634,7 @@
             <a:r>
               <a:rPr sz="1100" b="1" i="0">
                 <a:solidFill>
-                  <a:srgbClr val="D5FB00"/>
+                  <a:srgbClr val="0033A0"/>
                 </a:solidFill>
                 <a:latin typeface="Segoe UI"/>
               </a:rPr>
@@ -17733,7 +17645,7 @@
       </p:sp>
       <p:sp>
         <p:nvSpPr>
-          <p:cNvPr id="22" name="TextBox 21"/>
+          <p:cNvPr id="18" name="TextBox 17"/>
           <p:cNvSpPr txBox="1"/>
           <p:nvPr/>
         </p:nvSpPr>
@@ -17764,7 +17676,7 @@
             <a:r>
               <a:rPr sz="1200" b="0" i="0">
                 <a:solidFill>
-                  <a:srgbClr val="FFFFFF"/>
+                  <a:srgbClr val="051C2C"/>
                 </a:solidFill>
                 <a:latin typeface="Segoe UI"/>
               </a:rPr>
@@ -18756,7 +18668,7 @@
             <a:r>
               <a:rPr sz="2800" b="1">
                 <a:solidFill>
-                  <a:srgbClr val="FFFFFF"/>
+                  <a:srgbClr val="051C2C"/>
                 </a:solidFill>
                 <a:latin typeface="Segoe UI"/>
               </a:rPr>
@@ -18783,7 +18695,7 @@
             <a:r>
               <a:rPr sz="1300" b="0">
                 <a:solidFill>
-                  <a:srgbClr val="D5FB00"/>
+                  <a:srgbClr val="0033A0"/>
                 </a:solidFill>
                 <a:latin typeface="Segoe UI"/>
               </a:rPr>
@@ -18792,22 +18704,12 @@
           </a:p>
         </p:txBody>
       </p:sp>
-      <p:pic>
-        <p:nvPicPr>
-          <p:cNvPr id="4" name="!! Glass A" descr="Decorative glass panel"/>
-          <p:cNvPicPr>
-            <a:picLocks noChangeAspect="1"/>
-          </p:cNvPicPr>
+      <p:sp>
+        <p:nvSpPr>
+          <p:cNvPr id="4" name="!! Glass A"/>
+          <p:cNvSpPr/>
           <p:nvPr/>
-        </p:nvPicPr>
-        <p:blipFill>
-          <a:blip r:embed="rId2">
-            <a:alphaModFix amt="50000"/>
-          </a:blip>
-          <a:stretch>
-            <a:fillRect/>
-          </a:stretch>
-        </p:blipFill>
+        </p:nvSpPr>
         <p:spPr>
           <a:xfrm>
             <a:off x="256032" y="1600200"/>
@@ -18816,27 +18718,15 @@
           <a:prstGeom prst="rect">
             <a:avLst/>
           </a:prstGeom>
-        </p:spPr>
-      </p:pic>
-      <p:sp>
-        <p:nvSpPr>
-          <p:cNvPr id="5" name="!! Glass A rim"/>
-          <p:cNvSpPr/>
-          <p:nvPr/>
-        </p:nvSpPr>
-        <p:spPr>
-          <a:xfrm>
-            <a:off x="256032" y="1600200"/>
-            <a:ext cx="5806440" cy="3703320"/>
-          </a:xfrm>
-          <a:prstGeom prst="rect">
-            <a:avLst/>
-          </a:prstGeom>
-          <a:noFill/>
+          <a:solidFill>
+            <a:srgbClr val="051C2C">
+              <a:alpha val="4000"/>
+            </a:srgbClr>
+          </a:solidFill>
           <a:ln w="9525">
             <a:solidFill>
-              <a:srgbClr val="FFFFFF">
-                <a:alpha val="16000"/>
+              <a:srgbClr val="051C2C">
+                <a:alpha val="12000"/>
               </a:srgbClr>
             </a:solidFill>
           </a:ln>
@@ -18851,7 +18741,7 @@
       </p:sp>
       <p:sp>
         <p:nvSpPr>
-          <p:cNvPr id="6" name="TextBox 5"/>
+          <p:cNvPr id="5" name="TextBox 4"/>
           <p:cNvSpPr txBox="1"/>
           <p:nvPr/>
         </p:nvSpPr>
@@ -18882,7 +18772,7 @@
             <a:r>
               <a:rPr sz="1600" b="1" i="0">
                 <a:solidFill>
-                  <a:srgbClr val="D5FB00"/>
+                  <a:srgbClr val="0033A0"/>
                 </a:solidFill>
                 <a:latin typeface="Segoe UI"/>
               </a:rPr>
@@ -18891,22 +18781,12 @@
           </a:p>
         </p:txBody>
       </p:sp>
-      <p:pic>
-        <p:nvPicPr>
-          <p:cNvPr id="7" name="!! Glass B" descr="Decorative glass panel"/>
-          <p:cNvPicPr>
-            <a:picLocks noChangeAspect="1"/>
-          </p:cNvPicPr>
+      <p:sp>
+        <p:nvSpPr>
+          <p:cNvPr id="6" name="!! Glass B"/>
+          <p:cNvSpPr/>
           <p:nvPr/>
-        </p:nvPicPr>
-        <p:blipFill>
-          <a:blip r:embed="rId3">
-            <a:alphaModFix amt="50000"/>
-          </a:blip>
-          <a:stretch>
-            <a:fillRect/>
-          </a:stretch>
-        </p:blipFill>
+        </p:nvSpPr>
         <p:spPr>
           <a:xfrm>
             <a:off x="6382512" y="1600200"/>
@@ -18915,27 +18795,15 @@
           <a:prstGeom prst="rect">
             <a:avLst/>
           </a:prstGeom>
-        </p:spPr>
-      </p:pic>
-      <p:sp>
-        <p:nvSpPr>
-          <p:cNvPr id="8" name="!! Glass B rim"/>
-          <p:cNvSpPr/>
-          <p:nvPr/>
-        </p:nvSpPr>
-        <p:spPr>
-          <a:xfrm>
-            <a:off x="6382512" y="1600200"/>
-            <a:ext cx="5550408" cy="3703320"/>
-          </a:xfrm>
-          <a:prstGeom prst="rect">
-            <a:avLst/>
-          </a:prstGeom>
-          <a:noFill/>
+          <a:solidFill>
+            <a:srgbClr val="051C2C">
+              <a:alpha val="4000"/>
+            </a:srgbClr>
+          </a:solidFill>
           <a:ln w="9525">
             <a:solidFill>
-              <a:srgbClr val="FFFFFF">
-                <a:alpha val="16000"/>
+              <a:srgbClr val="051C2C">
+                <a:alpha val="12000"/>
               </a:srgbClr>
             </a:solidFill>
           </a:ln>
@@ -18950,14 +18818,98 @@
       </p:sp>
       <p:sp>
         <p:nvSpPr>
+          <p:cNvPr id="7" name="TextBox 6"/>
+          <p:cNvSpPr txBox="1"/>
+          <p:nvPr/>
+        </p:nvSpPr>
+        <p:spPr>
+          <a:xfrm>
+            <a:off x="6748272" y="1901952"/>
+            <a:ext cx="5486400" cy="274320"/>
+          </a:xfrm>
+          <a:prstGeom prst="rect">
+            <a:avLst/>
+          </a:prstGeom>
+          <a:noFill/>
+        </p:spPr>
+        <p:txBody>
+          <a:bodyPr wrap="square" lIns="0" rIns="0" tIns="0" bIns="0" anchor="t">
+            <a:spAutoFit/>
+          </a:bodyPr>
+          <a:lstStyle/>
+          <a:p>
+            <a:pPr algn="l">
+              <a:spcBef>
+                <a:spcPts val="0"/>
+              </a:spcBef>
+              <a:spcAft>
+                <a:spcPts val="0"/>
+              </a:spcAft>
+            </a:pPr>
+            <a:r>
+              <a:rPr sz="1600" b="1" i="0">
+                <a:solidFill>
+                  <a:srgbClr val="0033A0"/>
+                </a:solidFill>
+                <a:latin typeface="Segoe UI"/>
+              </a:rPr>
+              <a:t>NEXT</a:t>
+            </a:r>
+          </a:p>
+        </p:txBody>
+      </p:sp>
+      <p:sp>
+        <p:nvSpPr>
+          <p:cNvPr id="8" name="TextBox 7"/>
+          <p:cNvSpPr txBox="1"/>
+          <p:nvPr/>
+        </p:nvSpPr>
+        <p:spPr>
+          <a:xfrm>
+            <a:off x="621792" y="2395728"/>
+            <a:ext cx="5074920" cy="731520"/>
+          </a:xfrm>
+          <a:prstGeom prst="rect">
+            <a:avLst/>
+          </a:prstGeom>
+          <a:noFill/>
+        </p:spPr>
+        <p:txBody>
+          <a:bodyPr wrap="square" lIns="0" rIns="0" tIns="0" bIns="0" anchor="t">
+            <a:spAutoFit/>
+          </a:bodyPr>
+          <a:lstStyle/>
+          <a:p>
+            <a:pPr algn="l">
+              <a:spcBef>
+                <a:spcPts val="0"/>
+              </a:spcBef>
+              <a:spcAft>
+                <a:spcPts val="0"/>
+              </a:spcAft>
+            </a:pPr>
+            <a:r>
+              <a:rPr sz="1400" b="0" i="0">
+                <a:solidFill>
+                  <a:srgbClr val="051C2C"/>
+                </a:solidFill>
+                <a:latin typeface="Segoe UI"/>
+              </a:rPr>
+              <a:t>Level I studied in full, and four skills done on my own.</a:t>
+            </a:r>
+          </a:p>
+        </p:txBody>
+      </p:sp>
+      <p:sp>
+        <p:nvSpPr>
           <p:cNvPr id="9" name="TextBox 8"/>
           <p:cNvSpPr txBox="1"/>
           <p:nvPr/>
         </p:nvSpPr>
         <p:spPr>
           <a:xfrm>
-            <a:off x="6748272" y="1901952"/>
-            <a:ext cx="5486400" cy="274320"/>
+            <a:off x="621792" y="3310128"/>
+            <a:ext cx="5074920" cy="731520"/>
           </a:xfrm>
           <a:prstGeom prst="rect">
             <a:avLst/>
@@ -18979,13 +18931,13 @@
               </a:spcAft>
             </a:pPr>
             <a:r>
-              <a:rPr sz="1600" b="1" i="0">
-                <a:solidFill>
-                  <a:srgbClr val="D5FB00"/>
+              <a:rPr sz="1400" b="0" i="0">
+                <a:solidFill>
+                  <a:srgbClr val="051C2C"/>
                 </a:solidFill>
                 <a:latin typeface="Segoe UI"/>
               </a:rPr>
-              <a:t>NEXT</a:t>
+              <a:t>A manual weld moved to the 4M robotic cell: 47% less cycle time, less strain.</a:t>
             </a:r>
           </a:p>
         </p:txBody>
@@ -18998,7 +18950,7 @@
         </p:nvSpPr>
         <p:spPr>
           <a:xfrm>
-            <a:off x="621792" y="2395728"/>
+            <a:off x="621792" y="4224528"/>
             <a:ext cx="5074920" cy="731520"/>
           </a:xfrm>
           <a:prstGeom prst="rect">
@@ -19023,11 +18975,11 @@
             <a:r>
               <a:rPr sz="1400" b="0" i="0">
                 <a:solidFill>
-                  <a:srgbClr val="FFFFFF"/>
+                  <a:srgbClr val="051C2C"/>
                 </a:solidFill>
                 <a:latin typeface="Segoe UI"/>
               </a:rPr>
-              <a:t>Level I studied in full, and four skills done on my own.</a:t>
+              <a:t>A reviewed study path, and a schedule that shows plan versus reality.</a:t>
             </a:r>
           </a:p>
         </p:txBody>
@@ -19040,8 +18992,8 @@
         </p:nvSpPr>
         <p:spPr>
           <a:xfrm>
-            <a:off x="621792" y="3310128"/>
-            <a:ext cx="5074920" cy="731520"/>
+            <a:off x="6748272" y="2395728"/>
+            <a:ext cx="4818888" cy="731520"/>
           </a:xfrm>
           <a:prstGeom prst="rect">
             <a:avLst/>
@@ -19065,11 +19017,11 @@
             <a:r>
               <a:rPr sz="1400" b="0" i="0">
                 <a:solidFill>
-                  <a:srgbClr val="FFFFFF"/>
+                  <a:srgbClr val="051C2C"/>
                 </a:solidFill>
                 <a:latin typeface="Segoe UI"/>
               </a:rPr>
-              <a:t>A manual weld moved to the 4M robotic cell: 47% less cycle time, less strain.</a:t>
+              <a:t>Pass the Level I exam in October.</a:t>
             </a:r>
           </a:p>
         </p:txBody>
@@ -19082,8 +19034,8 @@
         </p:nvSpPr>
         <p:spPr>
           <a:xfrm>
-            <a:off x="621792" y="4224528"/>
-            <a:ext cx="5074920" cy="731520"/>
+            <a:off x="6748272" y="3310128"/>
+            <a:ext cx="4818888" cy="731520"/>
           </a:xfrm>
           <a:prstGeom prst="rect">
             <a:avLst/>
@@ -19107,11 +19059,11 @@
             <a:r>
               <a:rPr sz="1400" b="0" i="0">
                 <a:solidFill>
-                  <a:srgbClr val="FFFFFF"/>
+                  <a:srgbClr val="051C2C"/>
                 </a:solidFill>
                 <a:latin typeface="Segoe UI"/>
               </a:rPr>
-              <a:t>A reviewed study path, and a schedule that shows plan versus reality.</a:t>
+              <a:t>Reach Levels L and U before January.</a:t>
             </a:r>
           </a:p>
         </p:txBody>
@@ -19124,7 +19076,7 @@
         </p:nvSpPr>
         <p:spPr>
           <a:xfrm>
-            <a:off x="6748272" y="2395728"/>
+            <a:off x="6748272" y="4224528"/>
             <a:ext cx="4818888" cy="731520"/>
           </a:xfrm>
           <a:prstGeom prst="rect">
@@ -19149,11 +19101,11 @@
             <a:r>
               <a:rPr sz="1400" b="0" i="0">
                 <a:solidFill>
-                  <a:srgbClr val="FFFFFF"/>
+                  <a:srgbClr val="051C2C"/>
                 </a:solidFill>
                 <a:latin typeface="Segoe UI"/>
               </a:rPr>
-              <a:t>Pass the Level I exam in October.</a:t>
+              <a:t>Keep measuring 4M, and find the next weld to automate.</a:t>
             </a:r>
           </a:p>
         </p:txBody>
@@ -19166,8 +19118,8 @@
         </p:nvSpPr>
         <p:spPr>
           <a:xfrm>
-            <a:off x="6748272" y="3310128"/>
-            <a:ext cx="4818888" cy="731520"/>
+            <a:off x="621792" y="5715000"/>
+            <a:ext cx="8778240" cy="365760"/>
           </a:xfrm>
           <a:prstGeom prst="rect">
             <a:avLst/>
@@ -19189,93 +19141,9 @@
               </a:spcAft>
             </a:pPr>
             <a:r>
-              <a:rPr sz="1400" b="0" i="0">
-                <a:solidFill>
-                  <a:srgbClr val="FFFFFF"/>
-                </a:solidFill>
-                <a:latin typeface="Segoe UI"/>
-              </a:rPr>
-              <a:t>Reach Levels L and U before January.</a:t>
-            </a:r>
-          </a:p>
-        </p:txBody>
-      </p:sp>
-      <p:sp>
-        <p:nvSpPr>
-          <p:cNvPr id="15" name="TextBox 14"/>
-          <p:cNvSpPr txBox="1"/>
-          <p:nvPr/>
-        </p:nvSpPr>
-        <p:spPr>
-          <a:xfrm>
-            <a:off x="6748272" y="4224528"/>
-            <a:ext cx="4818888" cy="731520"/>
-          </a:xfrm>
-          <a:prstGeom prst="rect">
-            <a:avLst/>
-          </a:prstGeom>
-          <a:noFill/>
-        </p:spPr>
-        <p:txBody>
-          <a:bodyPr wrap="square" lIns="0" rIns="0" tIns="0" bIns="0" anchor="t">
-            <a:spAutoFit/>
-          </a:bodyPr>
-          <a:lstStyle/>
-          <a:p>
-            <a:pPr algn="l">
-              <a:spcBef>
-                <a:spcPts val="0"/>
-              </a:spcBef>
-              <a:spcAft>
-                <a:spcPts val="0"/>
-              </a:spcAft>
-            </a:pPr>
-            <a:r>
-              <a:rPr sz="1400" b="0" i="0">
-                <a:solidFill>
-                  <a:srgbClr val="FFFFFF"/>
-                </a:solidFill>
-                <a:latin typeface="Segoe UI"/>
-              </a:rPr>
-              <a:t>Keep measuring 4M, and find the next weld to automate.</a:t>
-            </a:r>
-          </a:p>
-        </p:txBody>
-      </p:sp>
-      <p:sp>
-        <p:nvSpPr>
-          <p:cNvPr id="16" name="TextBox 15"/>
-          <p:cNvSpPr txBox="1"/>
-          <p:nvPr/>
-        </p:nvSpPr>
-        <p:spPr>
-          <a:xfrm>
-            <a:off x="3108960" y="5715000"/>
-            <a:ext cx="8778240" cy="365760"/>
-          </a:xfrm>
-          <a:prstGeom prst="rect">
-            <a:avLst/>
-          </a:prstGeom>
-          <a:noFill/>
-        </p:spPr>
-        <p:txBody>
-          <a:bodyPr wrap="square" lIns="0" rIns="0" tIns="0" bIns="0" anchor="t">
-            <a:spAutoFit/>
-          </a:bodyPr>
-          <a:lstStyle/>
-          <a:p>
-            <a:pPr algn="l">
-              <a:spcBef>
-                <a:spcPts val="0"/>
-              </a:spcBef>
-              <a:spcAft>
-                <a:spcPts val="0"/>
-              </a:spcAft>
-            </a:pPr>
-            <a:r>
               <a:rPr sz="1500" b="1" i="0">
                 <a:solidFill>
-                  <a:srgbClr val="D5FB00"/>
+                  <a:srgbClr val="0033A0"/>
                 </a:solidFill>
                 <a:latin typeface="Segoe UI"/>
               </a:rPr>
@@ -19707,7 +19575,7 @@
             <a:r>
               <a:rPr sz="2800" b="1">
                 <a:solidFill>
-                  <a:srgbClr val="FFFFFF"/>
+                  <a:srgbClr val="051C2C"/>
                 </a:solidFill>
                 <a:latin typeface="Segoe UI"/>
               </a:rPr>
@@ -19734,7 +19602,7 @@
             <a:r>
               <a:rPr sz="1300" b="0">
                 <a:solidFill>
-                  <a:srgbClr val="D5FB00"/>
+                  <a:srgbClr val="0033A0"/>
                 </a:solidFill>
                 <a:latin typeface="Segoe UI"/>
               </a:rPr>
@@ -19743,22 +19611,12 @@
           </a:p>
         </p:txBody>
       </p:sp>
-      <p:pic>
-        <p:nvPicPr>
-          <p:cNvPr id="4" name="!! Glass A" descr="Decorative glass panel"/>
-          <p:cNvPicPr>
-            <a:picLocks noChangeAspect="1"/>
-          </p:cNvPicPr>
+      <p:sp>
+        <p:nvSpPr>
+          <p:cNvPr id="4" name="!! Glass A"/>
+          <p:cNvSpPr/>
           <p:nvPr/>
-        </p:nvPicPr>
-        <p:blipFill>
-          <a:blip r:embed="rId2">
-            <a:alphaModFix amt="50000"/>
-          </a:blip>
-          <a:stretch>
-            <a:fillRect/>
-          </a:stretch>
-        </p:blipFill>
+        </p:nvSpPr>
         <p:spPr>
           <a:xfrm>
             <a:off x="256032" y="1600200"/>
@@ -19767,27 +19625,15 @@
           <a:prstGeom prst="rect">
             <a:avLst/>
           </a:prstGeom>
-        </p:spPr>
-      </p:pic>
-      <p:sp>
-        <p:nvSpPr>
-          <p:cNvPr id="5" name="!! Glass A rim"/>
-          <p:cNvSpPr/>
-          <p:nvPr/>
-        </p:nvSpPr>
-        <p:spPr>
-          <a:xfrm>
-            <a:off x="256032" y="1600200"/>
-            <a:ext cx="7223760" cy="3886200"/>
-          </a:xfrm>
-          <a:prstGeom prst="rect">
-            <a:avLst/>
-          </a:prstGeom>
-          <a:noFill/>
+          <a:solidFill>
+            <a:srgbClr val="051C2C">
+              <a:alpha val="4000"/>
+            </a:srgbClr>
+          </a:solidFill>
           <a:ln w="9525">
             <a:solidFill>
-              <a:srgbClr val="FFFFFF">
-                <a:alpha val="16000"/>
+              <a:srgbClr val="051C2C">
+                <a:alpha val="12000"/>
               </a:srgbClr>
             </a:solidFill>
           </a:ln>
@@ -19802,14 +19648,56 @@
       </p:sp>
       <p:sp>
         <p:nvSpPr>
+          <p:cNvPr id="5" name="TextBox 4"/>
+          <p:cNvSpPr txBox="1"/>
+          <p:nvPr/>
+        </p:nvSpPr>
+        <p:spPr>
+          <a:xfrm>
+            <a:off x="621792" y="1938528"/>
+            <a:ext cx="5486400" cy="274320"/>
+          </a:xfrm>
+          <a:prstGeom prst="rect">
+            <a:avLst/>
+          </a:prstGeom>
+          <a:noFill/>
+        </p:spPr>
+        <p:txBody>
+          <a:bodyPr wrap="square" lIns="0" rIns="0" tIns="0" bIns="0" anchor="t">
+            <a:spAutoFit/>
+          </a:bodyPr>
+          <a:lstStyle/>
+          <a:p>
+            <a:pPr algn="l">
+              <a:spcBef>
+                <a:spcPts val="0"/>
+              </a:spcBef>
+              <a:spcAft>
+                <a:spcPts val="0"/>
+              </a:spcAft>
+            </a:pPr>
+            <a:r>
+              <a:rPr sz="1600" b="1" i="0">
+                <a:solidFill>
+                  <a:srgbClr val="0033A0"/>
+                </a:solidFill>
+                <a:latin typeface="Segoe UI"/>
+              </a:rPr>
+              <a:t>OBJECTIVE</a:t>
+            </a:r>
+          </a:p>
+        </p:txBody>
+      </p:sp>
+      <p:sp>
+        <p:nvSpPr>
           <p:cNvPr id="6" name="TextBox 5"/>
           <p:cNvSpPr txBox="1"/>
           <p:nvPr/>
         </p:nvSpPr>
         <p:spPr>
           <a:xfrm>
-            <a:off x="621792" y="1938528"/>
-            <a:ext cx="5486400" cy="274320"/>
+            <a:off x="621792" y="2331720"/>
+            <a:ext cx="6492240" cy="822960"/>
           </a:xfrm>
           <a:prstGeom prst="rect">
             <a:avLst/>
@@ -19831,51 +19719,9 @@
               </a:spcAft>
             </a:pPr>
             <a:r>
-              <a:rPr sz="1600" b="1" i="0">
-                <a:solidFill>
-                  <a:srgbClr val="D5FB00"/>
-                </a:solidFill>
-                <a:latin typeface="Segoe UI"/>
-              </a:rPr>
-              <a:t>OBJECTIVE</a:t>
-            </a:r>
-          </a:p>
-        </p:txBody>
-      </p:sp>
-      <p:sp>
-        <p:nvSpPr>
-          <p:cNvPr id="7" name="TextBox 6"/>
-          <p:cNvSpPr txBox="1"/>
-          <p:nvPr/>
-        </p:nvSpPr>
-        <p:spPr>
-          <a:xfrm>
-            <a:off x="621792" y="2331720"/>
-            <a:ext cx="6492240" cy="822960"/>
-          </a:xfrm>
-          <a:prstGeom prst="rect">
-            <a:avLst/>
-          </a:prstGeom>
-          <a:noFill/>
-        </p:spPr>
-        <p:txBody>
-          <a:bodyPr wrap="square" lIns="0" rIns="0" tIns="0" bIns="0" anchor="t">
-            <a:spAutoFit/>
-          </a:bodyPr>
-          <a:lstStyle/>
-          <a:p>
-            <a:pPr algn="l">
-              <a:spcBef>
-                <a:spcPts val="0"/>
-              </a:spcBef>
-              <a:spcAft>
-                <a:spcPts val="0"/>
-              </a:spcAft>
-            </a:pPr>
-            <a:r>
               <a:rPr sz="1700" b="0" i="0">
                 <a:solidFill>
-                  <a:srgbClr val="FFFFFF"/>
+                  <a:srgbClr val="051C2C"/>
                 </a:solidFill>
                 <a:latin typeface="Segoe UI"/>
               </a:rPr>
@@ -19886,7 +19732,7 @@
       </p:sp>
       <p:sp>
         <p:nvSpPr>
-          <p:cNvPr id="8" name="Rectangle 7"/>
+          <p:cNvPr id="7" name="Rectangle 6"/>
           <p:cNvSpPr/>
           <p:nvPr/>
         </p:nvSpPr>
@@ -19899,7 +19745,7 @@
             <a:avLst/>
           </a:prstGeom>
           <a:solidFill>
-            <a:srgbClr val="D5FB00"/>
+            <a:srgbClr val="0033A0"/>
           </a:solidFill>
           <a:ln>
             <a:noFill/>
@@ -19915,7 +19761,7 @@
       </p:sp>
       <p:sp>
         <p:nvSpPr>
-          <p:cNvPr id="9" name="TextBox 8"/>
+          <p:cNvPr id="8" name="TextBox 7"/>
           <p:cNvSpPr txBox="1"/>
           <p:nvPr/>
         </p:nvSpPr>
@@ -19946,7 +19792,7 @@
             <a:r>
               <a:rPr sz="1600" b="1" i="0">
                 <a:solidFill>
-                  <a:srgbClr val="D5FB00"/>
+                  <a:srgbClr val="0033A0"/>
                 </a:solidFill>
                 <a:latin typeface="Segoe UI"/>
               </a:rPr>
@@ -19957,7 +19803,7 @@
       </p:sp>
       <p:sp>
         <p:nvSpPr>
-          <p:cNvPr id="10" name="TextBox 9"/>
+          <p:cNvPr id="9" name="TextBox 8"/>
           <p:cNvSpPr txBox="1"/>
           <p:nvPr/>
         </p:nvSpPr>
@@ -19991,7 +19837,7 @@
             <a:r>
               <a:rPr sz="1400" b="0" i="0">
                 <a:solidFill>
-                  <a:srgbClr val="C6CDD1"/>
+                  <a:srgbClr val="6B7A83"/>
                 </a:solidFill>
                 <a:latin typeface="Segoe UI"/>
               </a:rPr>
@@ -20000,22 +19846,12 @@
           </a:p>
         </p:txBody>
       </p:sp>
-      <p:pic>
-        <p:nvPicPr>
-          <p:cNvPr id="11" name="!! Glass B" descr="Decorative glass panel"/>
-          <p:cNvPicPr>
-            <a:picLocks noChangeAspect="1"/>
-          </p:cNvPicPr>
+      <p:sp>
+        <p:nvSpPr>
+          <p:cNvPr id="10" name="!! Glass B"/>
+          <p:cNvSpPr/>
           <p:nvPr/>
-        </p:nvPicPr>
-        <p:blipFill>
-          <a:blip r:embed="rId3">
-            <a:alphaModFix amt="50000"/>
-          </a:blip>
-          <a:stretch>
-            <a:fillRect/>
-          </a:stretch>
-        </p:blipFill>
+        </p:nvSpPr>
         <p:spPr>
           <a:xfrm>
             <a:off x="7818120" y="1600200"/>
@@ -20024,27 +19860,15 @@
           <a:prstGeom prst="rect">
             <a:avLst/>
           </a:prstGeom>
-        </p:spPr>
-      </p:pic>
-      <p:sp>
-        <p:nvSpPr>
-          <p:cNvPr id="12" name="!! Glass B rim"/>
-          <p:cNvSpPr/>
-          <p:nvPr/>
-        </p:nvSpPr>
-        <p:spPr>
-          <a:xfrm>
-            <a:off x="7818120" y="1600200"/>
-            <a:ext cx="4114800" cy="3886200"/>
-          </a:xfrm>
-          <a:prstGeom prst="rect">
-            <a:avLst/>
-          </a:prstGeom>
-          <a:noFill/>
+          <a:solidFill>
+            <a:srgbClr val="051C2C">
+              <a:alpha val="4000"/>
+            </a:srgbClr>
+          </a:solidFill>
           <a:ln w="9525">
             <a:solidFill>
-              <a:srgbClr val="FFFFFF">
-                <a:alpha val="16000"/>
+              <a:srgbClr val="051C2C">
+                <a:alpha val="12000"/>
               </a:srgbClr>
             </a:solidFill>
           </a:ln>
@@ -20059,7 +19883,7 @@
       </p:sp>
       <p:sp>
         <p:nvSpPr>
-          <p:cNvPr id="13" name="TextBox 12"/>
+          <p:cNvPr id="11" name="TextBox 10"/>
           <p:cNvSpPr txBox="1"/>
           <p:nvPr/>
         </p:nvSpPr>
@@ -20090,7 +19914,7 @@
             <a:r>
               <a:rPr sz="1600" b="1" i="0">
                 <a:solidFill>
-                  <a:srgbClr val="D5FB00"/>
+                  <a:srgbClr val="0033A0"/>
                 </a:solidFill>
                 <a:latin typeface="Segoe UI"/>
               </a:rPr>
@@ -20101,7 +19925,7 @@
       </p:sp>
       <p:sp>
         <p:nvSpPr>
-          <p:cNvPr id="14" name="TextBox 13"/>
+          <p:cNvPr id="12" name="TextBox 11"/>
           <p:cNvSpPr txBox="1"/>
           <p:nvPr/>
         </p:nvSpPr>
@@ -20132,7 +19956,7 @@
             <a:r>
               <a:rPr sz="1400" b="1" i="0">
                 <a:solidFill>
-                  <a:srgbClr val="FFFFFF"/>
+                  <a:srgbClr val="051C2C"/>
                 </a:solidFill>
                 <a:latin typeface="Segoe UI"/>
               </a:rPr>
@@ -20151,7 +19975,7 @@
             <a:r>
               <a:rPr sz="1200" b="0" i="0">
                 <a:solidFill>
-                  <a:srgbClr val="C6CDD1"/>
+                  <a:srgbClr val="6B7A83"/>
                 </a:solidFill>
                 <a:latin typeface="Segoe UI"/>
               </a:rPr>
@@ -20170,7 +19994,7 @@
             <a:r>
               <a:rPr sz="1200" b="0" i="0">
                 <a:solidFill>
-                  <a:srgbClr val="D5FB00"/>
+                  <a:srgbClr val="0033A0"/>
                 </a:solidFill>
                 <a:latin typeface="Segoe UI"/>
               </a:rPr>
@@ -20189,7 +20013,7 @@
             <a:r>
               <a:rPr sz="1400" b="1" i="0">
                 <a:solidFill>
-                  <a:srgbClr val="FFFFFF"/>
+                  <a:srgbClr val="051C2C"/>
                 </a:solidFill>
                 <a:latin typeface="Segoe UI"/>
               </a:rPr>
@@ -20208,7 +20032,7 @@
             <a:r>
               <a:rPr sz="1200" b="0" i="0">
                 <a:solidFill>
-                  <a:srgbClr val="C6CDD1"/>
+                  <a:srgbClr val="6B7A83"/>
                 </a:solidFill>
                 <a:latin typeface="Segoe UI"/>
               </a:rPr>
@@ -20227,7 +20051,7 @@
             <a:r>
               <a:rPr sz="1200" b="0" i="0">
                 <a:solidFill>
-                  <a:srgbClr val="D5FB00"/>
+                  <a:srgbClr val="0033A0"/>
                 </a:solidFill>
                 <a:latin typeface="Segoe UI"/>
               </a:rPr>
@@ -21253,7 +21077,7 @@
             <a:r>
               <a:rPr sz="2800" b="1">
                 <a:solidFill>
-                  <a:srgbClr val="FFFFFF"/>
+                  <a:srgbClr val="051C2C"/>
                 </a:solidFill>
                 <a:latin typeface="Segoe UI"/>
               </a:rPr>
@@ -21280,7 +21104,7 @@
             <a:r>
               <a:rPr sz="1300" b="0">
                 <a:solidFill>
-                  <a:srgbClr val="D5FB00"/>
+                  <a:srgbClr val="0033A0"/>
                 </a:solidFill>
                 <a:latin typeface="Segoe UI"/>
               </a:rPr>
@@ -21289,22 +21113,12 @@
           </a:p>
         </p:txBody>
       </p:sp>
-      <p:pic>
-        <p:nvPicPr>
-          <p:cNvPr id="4" name="!! Glass A" descr="Decorative glass panel"/>
-          <p:cNvPicPr>
-            <a:picLocks noChangeAspect="1"/>
-          </p:cNvPicPr>
+      <p:sp>
+        <p:nvSpPr>
+          <p:cNvPr id="4" name="!! Glass A"/>
+          <p:cNvSpPr/>
           <p:nvPr/>
-        </p:nvPicPr>
-        <p:blipFill>
-          <a:blip r:embed="rId2">
-            <a:alphaModFix amt="50000"/>
-          </a:blip>
-          <a:stretch>
-            <a:fillRect/>
-          </a:stretch>
-        </p:blipFill>
+        </p:nvSpPr>
         <p:spPr>
           <a:xfrm>
             <a:off x="603504" y="2157984"/>
@@ -21313,27 +21127,15 @@
           <a:prstGeom prst="rect">
             <a:avLst/>
           </a:prstGeom>
-        </p:spPr>
-      </p:pic>
-      <p:sp>
-        <p:nvSpPr>
-          <p:cNvPr id="5" name="!! Glass A rim"/>
-          <p:cNvSpPr/>
-          <p:nvPr/>
-        </p:nvSpPr>
-        <p:spPr>
-          <a:xfrm>
-            <a:off x="603504" y="2157984"/>
-            <a:ext cx="11210544" cy="2542032"/>
-          </a:xfrm>
-          <a:prstGeom prst="rect">
-            <a:avLst/>
-          </a:prstGeom>
-          <a:noFill/>
+          <a:solidFill>
+            <a:srgbClr val="051C2C">
+              <a:alpha val="4000"/>
+            </a:srgbClr>
+          </a:solidFill>
           <a:ln w="9525">
             <a:solidFill>
-              <a:srgbClr val="FFFFFF">
-                <a:alpha val="16000"/>
+              <a:srgbClr val="051C2C">
+                <a:alpha val="12000"/>
               </a:srgbClr>
             </a:solidFill>
           </a:ln>
@@ -21348,7 +21150,7 @@
       </p:sp>
       <p:sp>
         <p:nvSpPr>
-          <p:cNvPr id="6" name="Rectangle 5"/>
+          <p:cNvPr id="5" name="Rectangle 4"/>
           <p:cNvSpPr/>
           <p:nvPr/>
         </p:nvSpPr>
@@ -21361,7 +21163,7 @@
             <a:avLst/>
           </a:prstGeom>
           <a:solidFill>
-            <a:srgbClr val="C6CDD1">
+            <a:srgbClr val="6B7A83">
               <a:alpha val="45000"/>
             </a:srgbClr>
           </a:solidFill>
@@ -21379,7 +21181,7 @@
       </p:sp>
       <p:sp>
         <p:nvSpPr>
-          <p:cNvPr id="7" name="Rectangle 6"/>
+          <p:cNvPr id="6" name="Rectangle 5"/>
           <p:cNvSpPr/>
           <p:nvPr/>
         </p:nvSpPr>
@@ -21392,7 +21194,7 @@
             <a:avLst/>
           </a:prstGeom>
           <a:solidFill>
-            <a:srgbClr val="D5FB00"/>
+            <a:srgbClr val="0033A0"/>
           </a:solidFill>
           <a:ln>
             <a:noFill/>
@@ -21408,7 +21210,7 @@
       </p:sp>
       <p:sp>
         <p:nvSpPr>
-          <p:cNvPr id="8" name="Oval 7"/>
+          <p:cNvPr id="7" name="Oval 6"/>
           <p:cNvSpPr/>
           <p:nvPr/>
         </p:nvSpPr>
@@ -21421,7 +21223,7 @@
             <a:avLst/>
           </a:prstGeom>
           <a:solidFill>
-            <a:srgbClr val="D5FB00"/>
+            <a:srgbClr val="0033A0"/>
           </a:solidFill>
           <a:ln>
             <a:noFill/>
@@ -21437,14 +21239,56 @@
       </p:sp>
       <p:sp>
         <p:nvSpPr>
+          <p:cNvPr id="8" name="TextBox 7"/>
+          <p:cNvSpPr txBox="1"/>
+          <p:nvPr/>
+        </p:nvSpPr>
+        <p:spPr>
+          <a:xfrm>
+            <a:off x="731520" y="2596896"/>
+            <a:ext cx="2103120" cy="411480"/>
+          </a:xfrm>
+          <a:prstGeom prst="rect">
+            <a:avLst/>
+          </a:prstGeom>
+          <a:noFill/>
+        </p:spPr>
+        <p:txBody>
+          <a:bodyPr wrap="square" lIns="0" rIns="0" tIns="0" bIns="0" anchor="t">
+            <a:spAutoFit/>
+          </a:bodyPr>
+          <a:lstStyle/>
+          <a:p>
+            <a:pPr algn="ctr">
+              <a:spcBef>
+                <a:spcPts val="0"/>
+              </a:spcBef>
+              <a:spcAft>
+                <a:spcPts val="0"/>
+              </a:spcAft>
+            </a:pPr>
+            <a:r>
+              <a:rPr sz="1900" b="1" i="0">
+                <a:solidFill>
+                  <a:srgbClr val="051C2C"/>
+                </a:solidFill>
+                <a:latin typeface="Segoe UI"/>
+              </a:rPr>
+              <a:t>Program start</a:t>
+            </a:r>
+          </a:p>
+        </p:txBody>
+      </p:sp>
+      <p:sp>
+        <p:nvSpPr>
           <p:cNvPr id="9" name="TextBox 8"/>
           <p:cNvSpPr txBox="1"/>
           <p:nvPr/>
         </p:nvSpPr>
         <p:spPr>
           <a:xfrm>
-            <a:off x="731520" y="2596896"/>
-            <a:ext cx="2103120" cy="411480"/>
+            <a:off x="731520" y="4087368"/>
+            <a:ext cx="2103120" cy="274320"/>
           </a:xfrm>
           <a:prstGeom prst="rect">
             <a:avLst/>
@@ -21466,51 +21310,9 @@
               </a:spcAft>
             </a:pPr>
             <a:r>
-              <a:rPr sz="1900" b="1" i="0">
-                <a:solidFill>
-                  <a:srgbClr val="FFFFFF"/>
-                </a:solidFill>
-                <a:latin typeface="Segoe UI"/>
-              </a:rPr>
-              <a:t>Program start</a:t>
-            </a:r>
-          </a:p>
-        </p:txBody>
-      </p:sp>
-      <p:sp>
-        <p:nvSpPr>
-          <p:cNvPr id="10" name="TextBox 9"/>
-          <p:cNvSpPr txBox="1"/>
-          <p:nvPr/>
-        </p:nvSpPr>
-        <p:spPr>
-          <a:xfrm>
-            <a:off x="731520" y="4087368"/>
-            <a:ext cx="2103120" cy="274320"/>
-          </a:xfrm>
-          <a:prstGeom prst="rect">
-            <a:avLst/>
-          </a:prstGeom>
-          <a:noFill/>
-        </p:spPr>
-        <p:txBody>
-          <a:bodyPr wrap="square" lIns="0" rIns="0" tIns="0" bIns="0" anchor="t">
-            <a:spAutoFit/>
-          </a:bodyPr>
-          <a:lstStyle/>
-          <a:p>
-            <a:pPr algn="ctr">
-              <a:spcBef>
-                <a:spcPts val="0"/>
-              </a:spcBef>
-              <a:spcAft>
-                <a:spcPts val="0"/>
-              </a:spcAft>
-            </a:pPr>
-            <a:r>
               <a:rPr sz="1400" b="0" i="0">
                 <a:solidFill>
-                  <a:srgbClr val="C6CDD1"/>
+                  <a:srgbClr val="6B7A83"/>
                 </a:solidFill>
                 <a:latin typeface="Segoe UI"/>
               </a:rPr>
@@ -21521,7 +21323,7 @@
       </p:sp>
       <p:sp>
         <p:nvSpPr>
-          <p:cNvPr id="11" name="Oval 10"/>
+          <p:cNvPr id="10" name="Oval 9"/>
           <p:cNvSpPr/>
           <p:nvPr/>
         </p:nvSpPr>
@@ -21534,7 +21336,7 @@
             <a:avLst/>
           </a:prstGeom>
           <a:solidFill>
-            <a:srgbClr val="D5FB00"/>
+            <a:srgbClr val="0033A0"/>
           </a:solidFill>
           <a:ln>
             <a:noFill/>
@@ -21550,14 +21352,56 @@
       </p:sp>
       <p:sp>
         <p:nvSpPr>
+          <p:cNvPr id="11" name="TextBox 10"/>
+          <p:cNvSpPr txBox="1"/>
+          <p:nvPr/>
+        </p:nvSpPr>
+        <p:spPr>
+          <a:xfrm>
+            <a:off x="2926079" y="2596896"/>
+            <a:ext cx="2103120" cy="411480"/>
+          </a:xfrm>
+          <a:prstGeom prst="rect">
+            <a:avLst/>
+          </a:prstGeom>
+          <a:noFill/>
+        </p:spPr>
+        <p:txBody>
+          <a:bodyPr wrap="square" lIns="0" rIns="0" tIns="0" bIns="0" anchor="t">
+            <a:spAutoFit/>
+          </a:bodyPr>
+          <a:lstStyle/>
+          <a:p>
+            <a:pPr algn="ctr">
+              <a:spcBef>
+                <a:spcPts val="0"/>
+              </a:spcBef>
+              <a:spcAft>
+                <a:spcPts val="0"/>
+              </a:spcAft>
+            </a:pPr>
+            <a:r>
+              <a:rPr sz="2400" b="1" i="0">
+                <a:solidFill>
+                  <a:srgbClr val="0033A0"/>
+                </a:solidFill>
+                <a:latin typeface="Segoe UI"/>
+              </a:rPr>
+              <a:t>Today</a:t>
+            </a:r>
+          </a:p>
+        </p:txBody>
+      </p:sp>
+      <p:sp>
+        <p:nvSpPr>
           <p:cNvPr id="12" name="TextBox 11"/>
           <p:cNvSpPr txBox="1"/>
           <p:nvPr/>
         </p:nvSpPr>
         <p:spPr>
           <a:xfrm>
-            <a:off x="2926079" y="2596896"/>
-            <a:ext cx="2103120" cy="411480"/>
+            <a:off x="2926079" y="4087368"/>
+            <a:ext cx="2103120" cy="274320"/>
           </a:xfrm>
           <a:prstGeom prst="rect">
             <a:avLst/>
@@ -21579,51 +21423,9 @@
               </a:spcAft>
             </a:pPr>
             <a:r>
-              <a:rPr sz="2400" b="1" i="0">
-                <a:solidFill>
-                  <a:srgbClr val="D5FB00"/>
-                </a:solidFill>
-                <a:latin typeface="Segoe UI"/>
-              </a:rPr>
-              <a:t>Today</a:t>
-            </a:r>
-          </a:p>
-        </p:txBody>
-      </p:sp>
-      <p:sp>
-        <p:nvSpPr>
-          <p:cNvPr id="13" name="TextBox 12"/>
-          <p:cNvSpPr txBox="1"/>
-          <p:nvPr/>
-        </p:nvSpPr>
-        <p:spPr>
-          <a:xfrm>
-            <a:off x="2926079" y="4087368"/>
-            <a:ext cx="2103120" cy="274320"/>
-          </a:xfrm>
-          <a:prstGeom prst="rect">
-            <a:avLst/>
-          </a:prstGeom>
-          <a:noFill/>
-        </p:spPr>
-        <p:txBody>
-          <a:bodyPr wrap="square" lIns="0" rIns="0" tIns="0" bIns="0" anchor="t">
-            <a:spAutoFit/>
-          </a:bodyPr>
-          <a:lstStyle/>
-          <a:p>
-            <a:pPr algn="ctr">
-              <a:spcBef>
-                <a:spcPts val="0"/>
-              </a:spcBef>
-              <a:spcAft>
-                <a:spcPts val="0"/>
-              </a:spcAft>
-            </a:pPr>
-            <a:r>
               <a:rPr sz="1400" b="1" i="0">
                 <a:solidFill>
-                  <a:srgbClr val="D5FB00"/>
+                  <a:srgbClr val="0033A0"/>
                 </a:solidFill>
                 <a:latin typeface="Segoe UI"/>
               </a:rPr>
@@ -21634,7 +21436,7 @@
       </p:sp>
       <p:sp>
         <p:nvSpPr>
-          <p:cNvPr id="14" name="Oval 13"/>
+          <p:cNvPr id="13" name="Oval 12"/>
           <p:cNvSpPr/>
           <p:nvPr/>
         </p:nvSpPr>
@@ -21647,7 +21449,7 @@
             <a:avLst/>
           </a:prstGeom>
           <a:solidFill>
-            <a:srgbClr val="FFFFFF"/>
+            <a:srgbClr val="051C2C"/>
           </a:solidFill>
           <a:ln>
             <a:noFill/>
@@ -21663,14 +21465,56 @@
       </p:sp>
       <p:sp>
         <p:nvSpPr>
+          <p:cNvPr id="14" name="TextBox 13"/>
+          <p:cNvSpPr txBox="1"/>
+          <p:nvPr/>
+        </p:nvSpPr>
+        <p:spPr>
+          <a:xfrm>
+            <a:off x="5120640" y="2596896"/>
+            <a:ext cx="2103120" cy="411480"/>
+          </a:xfrm>
+          <a:prstGeom prst="rect">
+            <a:avLst/>
+          </a:prstGeom>
+          <a:noFill/>
+        </p:spPr>
+        <p:txBody>
+          <a:bodyPr wrap="square" lIns="0" rIns="0" tIns="0" bIns="0" anchor="t">
+            <a:spAutoFit/>
+          </a:bodyPr>
+          <a:lstStyle/>
+          <a:p>
+            <a:pPr algn="ctr">
+              <a:spcBef>
+                <a:spcPts val="0"/>
+              </a:spcBef>
+              <a:spcAft>
+                <a:spcPts val="0"/>
+              </a:spcAft>
+            </a:pPr>
+            <a:r>
+              <a:rPr sz="1900" b="1" i="0">
+                <a:solidFill>
+                  <a:srgbClr val="051C2C"/>
+                </a:solidFill>
+                <a:latin typeface="Segoe UI"/>
+              </a:rPr>
+              <a:t>Level I exam</a:t>
+            </a:r>
+          </a:p>
+        </p:txBody>
+      </p:sp>
+      <p:sp>
+        <p:nvSpPr>
           <p:cNvPr id="15" name="TextBox 14"/>
           <p:cNvSpPr txBox="1"/>
           <p:nvPr/>
         </p:nvSpPr>
         <p:spPr>
           <a:xfrm>
-            <a:off x="5120640" y="2596896"/>
-            <a:ext cx="2103120" cy="411480"/>
+            <a:off x="5120640" y="4087368"/>
+            <a:ext cx="2103120" cy="274320"/>
           </a:xfrm>
           <a:prstGeom prst="rect">
             <a:avLst/>
@@ -21692,51 +21536,9 @@
               </a:spcAft>
             </a:pPr>
             <a:r>
-              <a:rPr sz="1900" b="1" i="0">
-                <a:solidFill>
-                  <a:srgbClr val="FFFFFF"/>
-                </a:solidFill>
-                <a:latin typeface="Segoe UI"/>
-              </a:rPr>
-              <a:t>Level I exam</a:t>
-            </a:r>
-          </a:p>
-        </p:txBody>
-      </p:sp>
-      <p:sp>
-        <p:nvSpPr>
-          <p:cNvPr id="16" name="TextBox 15"/>
-          <p:cNvSpPr txBox="1"/>
-          <p:nvPr/>
-        </p:nvSpPr>
-        <p:spPr>
-          <a:xfrm>
-            <a:off x="5120640" y="4087368"/>
-            <a:ext cx="2103120" cy="274320"/>
-          </a:xfrm>
-          <a:prstGeom prst="rect">
-            <a:avLst/>
-          </a:prstGeom>
-          <a:noFill/>
-        </p:spPr>
-        <p:txBody>
-          <a:bodyPr wrap="square" lIns="0" rIns="0" tIns="0" bIns="0" anchor="t">
-            <a:spAutoFit/>
-          </a:bodyPr>
-          <a:lstStyle/>
-          <a:p>
-            <a:pPr algn="ctr">
-              <a:spcBef>
-                <a:spcPts val="0"/>
-              </a:spcBef>
-              <a:spcAft>
-                <a:spcPts val="0"/>
-              </a:spcAft>
-            </a:pPr>
-            <a:r>
               <a:rPr sz="1400" b="0" i="0">
                 <a:solidFill>
-                  <a:srgbClr val="C6CDD1"/>
+                  <a:srgbClr val="6B7A83"/>
                 </a:solidFill>
                 <a:latin typeface="Segoe UI"/>
               </a:rPr>
@@ -21747,7 +21549,7 @@
       </p:sp>
       <p:sp>
         <p:nvSpPr>
-          <p:cNvPr id="17" name="Oval 16"/>
+          <p:cNvPr id="16" name="Oval 15"/>
           <p:cNvSpPr/>
           <p:nvPr/>
         </p:nvSpPr>
@@ -21760,7 +21562,7 @@
             <a:avLst/>
           </a:prstGeom>
           <a:solidFill>
-            <a:srgbClr val="FFFFFF"/>
+            <a:srgbClr val="051C2C"/>
           </a:solidFill>
           <a:ln>
             <a:noFill/>
@@ -21776,14 +21578,56 @@
       </p:sp>
       <p:sp>
         <p:nvSpPr>
+          <p:cNvPr id="17" name="TextBox 16"/>
+          <p:cNvSpPr txBox="1"/>
+          <p:nvPr/>
+        </p:nvSpPr>
+        <p:spPr>
+          <a:xfrm>
+            <a:off x="7315199" y="2596896"/>
+            <a:ext cx="2103120" cy="411480"/>
+          </a:xfrm>
+          <a:prstGeom prst="rect">
+            <a:avLst/>
+          </a:prstGeom>
+          <a:noFill/>
+        </p:spPr>
+        <p:txBody>
+          <a:bodyPr wrap="square" lIns="0" rIns="0" tIns="0" bIns="0" anchor="t">
+            <a:spAutoFit/>
+          </a:bodyPr>
+          <a:lstStyle/>
+          <a:p>
+            <a:pPr algn="ctr">
+              <a:spcBef>
+                <a:spcPts val="0"/>
+              </a:spcBef>
+              <a:spcAft>
+                <a:spcPts val="0"/>
+              </a:spcAft>
+            </a:pPr>
+            <a:r>
+              <a:rPr sz="1900" b="1" i="0">
+                <a:solidFill>
+                  <a:srgbClr val="051C2C"/>
+                </a:solidFill>
+                <a:latin typeface="Segoe UI"/>
+              </a:rPr>
+              <a:t>Levels L and U</a:t>
+            </a:r>
+          </a:p>
+        </p:txBody>
+      </p:sp>
+      <p:sp>
+        <p:nvSpPr>
           <p:cNvPr id="18" name="TextBox 17"/>
           <p:cNvSpPr txBox="1"/>
           <p:nvPr/>
         </p:nvSpPr>
         <p:spPr>
           <a:xfrm>
-            <a:off x="7315199" y="2596896"/>
-            <a:ext cx="2103120" cy="411480"/>
+            <a:off x="7315199" y="4087368"/>
+            <a:ext cx="2103120" cy="274320"/>
           </a:xfrm>
           <a:prstGeom prst="rect">
             <a:avLst/>
@@ -21805,51 +21649,9 @@
               </a:spcAft>
             </a:pPr>
             <a:r>
-              <a:rPr sz="1900" b="1" i="0">
-                <a:solidFill>
-                  <a:srgbClr val="FFFFFF"/>
-                </a:solidFill>
-                <a:latin typeface="Segoe UI"/>
-              </a:rPr>
-              <a:t>Levels L and U</a:t>
-            </a:r>
-          </a:p>
-        </p:txBody>
-      </p:sp>
-      <p:sp>
-        <p:nvSpPr>
-          <p:cNvPr id="19" name="TextBox 18"/>
-          <p:cNvSpPr txBox="1"/>
-          <p:nvPr/>
-        </p:nvSpPr>
-        <p:spPr>
-          <a:xfrm>
-            <a:off x="7315199" y="4087368"/>
-            <a:ext cx="2103120" cy="274320"/>
-          </a:xfrm>
-          <a:prstGeom prst="rect">
-            <a:avLst/>
-          </a:prstGeom>
-          <a:noFill/>
-        </p:spPr>
-        <p:txBody>
-          <a:bodyPr wrap="square" lIns="0" rIns="0" tIns="0" bIns="0" anchor="t">
-            <a:spAutoFit/>
-          </a:bodyPr>
-          <a:lstStyle/>
-          <a:p>
-            <a:pPr algn="ctr">
-              <a:spcBef>
-                <a:spcPts val="0"/>
-              </a:spcBef>
-              <a:spcAft>
-                <a:spcPts val="0"/>
-              </a:spcAft>
-            </a:pPr>
-            <a:r>
               <a:rPr sz="1400" b="0" i="0">
                 <a:solidFill>
-                  <a:srgbClr val="C6CDD1"/>
+                  <a:srgbClr val="6B7A83"/>
                 </a:solidFill>
                 <a:latin typeface="Segoe UI"/>
               </a:rPr>
@@ -21860,7 +21662,7 @@
       </p:sp>
       <p:sp>
         <p:nvSpPr>
-          <p:cNvPr id="20" name="Oval 19"/>
+          <p:cNvPr id="19" name="Oval 18"/>
           <p:cNvSpPr/>
           <p:nvPr/>
         </p:nvSpPr>
@@ -21873,7 +21675,7 @@
             <a:avLst/>
           </a:prstGeom>
           <a:solidFill>
-            <a:srgbClr val="FFFFFF"/>
+            <a:srgbClr val="051C2C"/>
           </a:solidFill>
           <a:ln>
             <a:noFill/>
@@ -21889,14 +21691,56 @@
       </p:sp>
       <p:sp>
         <p:nvSpPr>
+          <p:cNvPr id="20" name="TextBox 19"/>
+          <p:cNvSpPr txBox="1"/>
+          <p:nvPr/>
+        </p:nvSpPr>
+        <p:spPr>
+          <a:xfrm>
+            <a:off x="9509759" y="2596896"/>
+            <a:ext cx="2103120" cy="411480"/>
+          </a:xfrm>
+          <a:prstGeom prst="rect">
+            <a:avLst/>
+          </a:prstGeom>
+          <a:noFill/>
+        </p:spPr>
+        <p:txBody>
+          <a:bodyPr wrap="square" lIns="0" rIns="0" tIns="0" bIns="0" anchor="t">
+            <a:spAutoFit/>
+          </a:bodyPr>
+          <a:lstStyle/>
+          <a:p>
+            <a:pPr algn="ctr">
+              <a:spcBef>
+                <a:spcPts val="0"/>
+              </a:spcBef>
+              <a:spcAft>
+                <a:spcPts val="0"/>
+              </a:spcAft>
+            </a:pPr>
+            <a:r>
+              <a:rPr sz="1900" b="1" i="0">
+                <a:solidFill>
+                  <a:srgbClr val="051C2C"/>
+                </a:solidFill>
+                <a:latin typeface="Segoe UI"/>
+              </a:rPr>
+              <a:t>Program close</a:t>
+            </a:r>
+          </a:p>
+        </p:txBody>
+      </p:sp>
+      <p:sp>
+        <p:nvSpPr>
           <p:cNvPr id="21" name="TextBox 20"/>
           <p:cNvSpPr txBox="1"/>
           <p:nvPr/>
         </p:nvSpPr>
         <p:spPr>
           <a:xfrm>
-            <a:off x="9509759" y="2596896"/>
-            <a:ext cx="2103120" cy="411480"/>
+            <a:off x="9509759" y="4087368"/>
+            <a:ext cx="2103120" cy="274320"/>
           </a:xfrm>
           <a:prstGeom prst="rect">
             <a:avLst/>
@@ -21918,51 +21762,9 @@
               </a:spcAft>
             </a:pPr>
             <a:r>
-              <a:rPr sz="1900" b="1" i="0">
-                <a:solidFill>
-                  <a:srgbClr val="FFFFFF"/>
-                </a:solidFill>
-                <a:latin typeface="Segoe UI"/>
-              </a:rPr>
-              <a:t>Program close</a:t>
-            </a:r>
-          </a:p>
-        </p:txBody>
-      </p:sp>
-      <p:sp>
-        <p:nvSpPr>
-          <p:cNvPr id="22" name="TextBox 21"/>
-          <p:cNvSpPr txBox="1"/>
-          <p:nvPr/>
-        </p:nvSpPr>
-        <p:spPr>
-          <a:xfrm>
-            <a:off x="9509759" y="4087368"/>
-            <a:ext cx="2103120" cy="274320"/>
-          </a:xfrm>
-          <a:prstGeom prst="rect">
-            <a:avLst/>
-          </a:prstGeom>
-          <a:noFill/>
-        </p:spPr>
-        <p:txBody>
-          <a:bodyPr wrap="square" lIns="0" rIns="0" tIns="0" bIns="0" anchor="t">
-            <a:spAutoFit/>
-          </a:bodyPr>
-          <a:lstStyle/>
-          <a:p>
-            <a:pPr algn="ctr">
-              <a:spcBef>
-                <a:spcPts val="0"/>
-              </a:spcBef>
-              <a:spcAft>
-                <a:spcPts val="0"/>
-              </a:spcAft>
-            </a:pPr>
-            <a:r>
               <a:rPr sz="1400" b="0" i="0">
                 <a:solidFill>
-                  <a:srgbClr val="C6CDD1"/>
+                  <a:srgbClr val="6B7A83"/>
                 </a:solidFill>
                 <a:latin typeface="Segoe UI"/>
               </a:rPr>
@@ -23097,7 +22899,7 @@
             <a:r>
               <a:rPr sz="2800" b="1">
                 <a:solidFill>
-                  <a:srgbClr val="FFFFFF"/>
+                  <a:srgbClr val="051C2C"/>
                 </a:solidFill>
                 <a:latin typeface="Segoe UI"/>
               </a:rPr>
@@ -23124,7 +22926,7 @@
             <a:r>
               <a:rPr sz="1300" b="0">
                 <a:solidFill>
-                  <a:srgbClr val="D5FB00"/>
+                  <a:srgbClr val="0033A0"/>
                 </a:solidFill>
                 <a:latin typeface="Segoe UI"/>
               </a:rPr>
@@ -23133,22 +22935,12 @@
           </a:p>
         </p:txBody>
       </p:sp>
-      <p:pic>
-        <p:nvPicPr>
-          <p:cNvPr id="4" name="!! Glass A" descr="Decorative glass panel"/>
-          <p:cNvPicPr>
-            <a:picLocks noChangeAspect="1"/>
-          </p:cNvPicPr>
+      <p:sp>
+        <p:nvSpPr>
+          <p:cNvPr id="4" name="!! Glass A"/>
+          <p:cNvSpPr/>
           <p:nvPr/>
-        </p:nvPicPr>
-        <p:blipFill>
-          <a:blip r:embed="rId2">
-            <a:alphaModFix amt="50000"/>
-          </a:blip>
-          <a:stretch>
-            <a:fillRect/>
-          </a:stretch>
-        </p:blipFill>
+        </p:nvSpPr>
         <p:spPr>
           <a:xfrm>
             <a:off x="256032" y="1600200"/>
@@ -23157,27 +22949,15 @@
           <a:prstGeom prst="rect">
             <a:avLst/>
           </a:prstGeom>
-        </p:spPr>
-      </p:pic>
-      <p:sp>
-        <p:nvSpPr>
-          <p:cNvPr id="5" name="!! Glass A rim"/>
-          <p:cNvSpPr/>
-          <p:nvPr/>
-        </p:nvSpPr>
-        <p:spPr>
-          <a:xfrm>
-            <a:off x="256032" y="1600200"/>
-            <a:ext cx="7543800" cy="3886200"/>
-          </a:xfrm>
-          <a:prstGeom prst="rect">
-            <a:avLst/>
-          </a:prstGeom>
-          <a:noFill/>
+          <a:solidFill>
+            <a:srgbClr val="051C2C">
+              <a:alpha val="4000"/>
+            </a:srgbClr>
+          </a:solidFill>
           <a:ln w="9525">
             <a:solidFill>
-              <a:srgbClr val="FFFFFF">
-                <a:alpha val="16000"/>
+              <a:srgbClr val="051C2C">
+                <a:alpha val="12000"/>
               </a:srgbClr>
             </a:solidFill>
           </a:ln>
@@ -23192,14 +22972,56 @@
       </p:sp>
       <p:sp>
         <p:nvSpPr>
+          <p:cNvPr id="5" name="TextBox 4"/>
+          <p:cNvSpPr txBox="1"/>
+          <p:nvPr/>
+        </p:nvSpPr>
+        <p:spPr>
+          <a:xfrm>
+            <a:off x="621792" y="1883664"/>
+            <a:ext cx="457200" cy="457200"/>
+          </a:xfrm>
+          <a:prstGeom prst="rect">
+            <a:avLst/>
+          </a:prstGeom>
+          <a:noFill/>
+        </p:spPr>
+        <p:txBody>
+          <a:bodyPr wrap="square" lIns="0" rIns="0" tIns="0" bIns="0" anchor="t">
+            <a:spAutoFit/>
+          </a:bodyPr>
+          <a:lstStyle/>
+          <a:p>
+            <a:pPr algn="l">
+              <a:spcBef>
+                <a:spcPts val="0"/>
+              </a:spcBef>
+              <a:spcAft>
+                <a:spcPts val="0"/>
+              </a:spcAft>
+            </a:pPr>
+            <a:r>
+              <a:rPr sz="2400" b="1" i="0">
+                <a:solidFill>
+                  <a:srgbClr val="0033A0"/>
+                </a:solidFill>
+                <a:latin typeface="Segoe UI"/>
+              </a:rPr>
+              <a:t>I</a:t>
+            </a:r>
+          </a:p>
+        </p:txBody>
+      </p:sp>
+      <p:sp>
+        <p:nvSpPr>
           <p:cNvPr id="6" name="TextBox 5"/>
           <p:cNvSpPr txBox="1"/>
           <p:nvPr/>
         </p:nvSpPr>
         <p:spPr>
           <a:xfrm>
-            <a:off x="621792" y="1883664"/>
-            <a:ext cx="457200" cy="457200"/>
+            <a:off x="1115568" y="1929384"/>
+            <a:ext cx="2011680" cy="274320"/>
           </a:xfrm>
           <a:prstGeom prst="rect">
             <a:avLst/>
@@ -23221,13 +23043,13 @@
               </a:spcAft>
             </a:pPr>
             <a:r>
-              <a:rPr sz="2400" b="1" i="0">
-                <a:solidFill>
-                  <a:srgbClr val="D5FB00"/>
+              <a:rPr sz="1300" b="1" i="0">
+                <a:solidFill>
+                  <a:srgbClr val="051C2C"/>
                 </a:solidFill>
                 <a:latin typeface="Segoe UI"/>
               </a:rPr>
-              <a:t>I</a:t>
+              <a:t>Understands</a:t>
             </a:r>
           </a:p>
         </p:txBody>
@@ -23240,7 +23062,7 @@
         </p:nvSpPr>
         <p:spPr>
           <a:xfrm>
-            <a:off x="1115568" y="1929384"/>
+            <a:off x="1115568" y="2176272"/>
             <a:ext cx="2011680" cy="274320"/>
           </a:xfrm>
           <a:prstGeom prst="rect">
@@ -23263,51 +23085,9 @@
               </a:spcAft>
             </a:pPr>
             <a:r>
-              <a:rPr sz="1300" b="1" i="0">
-                <a:solidFill>
-                  <a:srgbClr val="FFFFFF"/>
-                </a:solidFill>
-                <a:latin typeface="Segoe UI"/>
-              </a:rPr>
-              <a:t>Understands</a:t>
-            </a:r>
-          </a:p>
-        </p:txBody>
-      </p:sp>
-      <p:sp>
-        <p:nvSpPr>
-          <p:cNvPr id="8" name="TextBox 7"/>
-          <p:cNvSpPr txBox="1"/>
-          <p:nvPr/>
-        </p:nvSpPr>
-        <p:spPr>
-          <a:xfrm>
-            <a:off x="1115568" y="2176272"/>
-            <a:ext cx="2011680" cy="274320"/>
-          </a:xfrm>
-          <a:prstGeom prst="rect">
-            <a:avLst/>
-          </a:prstGeom>
-          <a:noFill/>
-        </p:spPr>
-        <p:txBody>
-          <a:bodyPr wrap="square" lIns="0" rIns="0" tIns="0" bIns="0" anchor="t">
-            <a:spAutoFit/>
-          </a:bodyPr>
-          <a:lstStyle/>
-          <a:p>
-            <a:pPr algn="l">
-              <a:spcBef>
-                <a:spcPts val="0"/>
-              </a:spcBef>
-              <a:spcAft>
-                <a:spcPts val="0"/>
-              </a:spcAft>
-            </a:pPr>
-            <a:r>
               <a:rPr sz="1100" b="0" i="0">
                 <a:solidFill>
-                  <a:srgbClr val="8A9BA8"/>
+                  <a:srgbClr val="6B7A83"/>
                 </a:solidFill>
                 <a:latin typeface="Segoe UI"/>
               </a:rPr>
@@ -23318,7 +23098,7 @@
       </p:sp>
       <p:sp>
         <p:nvSpPr>
-          <p:cNvPr id="9" name="Oval 8"/>
+          <p:cNvPr id="8" name="Oval 7"/>
           <p:cNvSpPr/>
           <p:nvPr/>
         </p:nvSpPr>
@@ -23331,13 +23111,13 @@
             <a:avLst/>
           </a:prstGeom>
           <a:solidFill>
-            <a:srgbClr val="D5FB00">
+            <a:srgbClr val="0033A0">
               <a:alpha val="35000"/>
             </a:srgbClr>
           </a:solidFill>
           <a:ln w="15875">
             <a:solidFill>
-              <a:srgbClr val="D5FB00"/>
+              <a:srgbClr val="0033A0"/>
             </a:solidFill>
           </a:ln>
         </p:spPr>
@@ -23351,7 +23131,7 @@
       </p:sp>
       <p:sp>
         <p:nvSpPr>
-          <p:cNvPr id="10" name="Oval 9"/>
+          <p:cNvPr id="9" name="Oval 8"/>
           <p:cNvSpPr/>
           <p:nvPr/>
         </p:nvSpPr>
@@ -23364,13 +23144,13 @@
             <a:avLst/>
           </a:prstGeom>
           <a:solidFill>
-            <a:srgbClr val="D5FB00">
+            <a:srgbClr val="0033A0">
               <a:alpha val="35000"/>
             </a:srgbClr>
           </a:solidFill>
           <a:ln w="15875">
             <a:solidFill>
-              <a:srgbClr val="D5FB00"/>
+              <a:srgbClr val="0033A0"/>
             </a:solidFill>
           </a:ln>
         </p:spPr>
@@ -23384,7 +23164,7 @@
       </p:sp>
       <p:sp>
         <p:nvSpPr>
-          <p:cNvPr id="11" name="Oval 10"/>
+          <p:cNvPr id="10" name="Oval 9"/>
           <p:cNvSpPr/>
           <p:nvPr/>
         </p:nvSpPr>
@@ -23397,13 +23177,13 @@
             <a:avLst/>
           </a:prstGeom>
           <a:solidFill>
-            <a:srgbClr val="D5FB00">
+            <a:srgbClr val="0033A0">
               <a:alpha val="35000"/>
             </a:srgbClr>
           </a:solidFill>
           <a:ln w="15875">
             <a:solidFill>
-              <a:srgbClr val="D5FB00"/>
+              <a:srgbClr val="0033A0"/>
             </a:solidFill>
           </a:ln>
         </p:spPr>
@@ -23417,7 +23197,7 @@
       </p:sp>
       <p:sp>
         <p:nvSpPr>
-          <p:cNvPr id="12" name="Oval 11"/>
+          <p:cNvPr id="11" name="Oval 10"/>
           <p:cNvSpPr/>
           <p:nvPr/>
         </p:nvSpPr>
@@ -23430,13 +23210,13 @@
             <a:avLst/>
           </a:prstGeom>
           <a:solidFill>
-            <a:srgbClr val="D5FB00">
+            <a:srgbClr val="0033A0">
               <a:alpha val="35000"/>
             </a:srgbClr>
           </a:solidFill>
           <a:ln w="15875">
             <a:solidFill>
-              <a:srgbClr val="D5FB00"/>
+              <a:srgbClr val="0033A0"/>
             </a:solidFill>
           </a:ln>
         </p:spPr>
@@ -23450,7 +23230,7 @@
       </p:sp>
       <p:sp>
         <p:nvSpPr>
-          <p:cNvPr id="13" name="Oval 12"/>
+          <p:cNvPr id="12" name="Oval 11"/>
           <p:cNvSpPr/>
           <p:nvPr/>
         </p:nvSpPr>
@@ -23463,13 +23243,13 @@
             <a:avLst/>
           </a:prstGeom>
           <a:solidFill>
-            <a:srgbClr val="D5FB00">
+            <a:srgbClr val="0033A0">
               <a:alpha val="35000"/>
             </a:srgbClr>
           </a:solidFill>
           <a:ln w="15875">
             <a:solidFill>
-              <a:srgbClr val="D5FB00"/>
+              <a:srgbClr val="0033A0"/>
             </a:solidFill>
           </a:ln>
         </p:spPr>
@@ -23483,7 +23263,7 @@
       </p:sp>
       <p:sp>
         <p:nvSpPr>
-          <p:cNvPr id="14" name="Oval 13"/>
+          <p:cNvPr id="13" name="Oval 12"/>
           <p:cNvSpPr/>
           <p:nvPr/>
         </p:nvSpPr>
@@ -23496,13 +23276,13 @@
             <a:avLst/>
           </a:prstGeom>
           <a:solidFill>
-            <a:srgbClr val="D5FB00">
+            <a:srgbClr val="0033A0">
               <a:alpha val="35000"/>
             </a:srgbClr>
           </a:solidFill>
           <a:ln w="15875">
             <a:solidFill>
-              <a:srgbClr val="D5FB00"/>
+              <a:srgbClr val="0033A0"/>
             </a:solidFill>
           </a:ln>
         </p:spPr>
@@ -23516,7 +23296,7 @@
       </p:sp>
       <p:sp>
         <p:nvSpPr>
-          <p:cNvPr id="15" name="Oval 14"/>
+          <p:cNvPr id="14" name="Oval 13"/>
           <p:cNvSpPr/>
           <p:nvPr/>
         </p:nvSpPr>
@@ -23529,13 +23309,13 @@
             <a:avLst/>
           </a:prstGeom>
           <a:solidFill>
-            <a:srgbClr val="D5FB00">
+            <a:srgbClr val="0033A0">
               <a:alpha val="35000"/>
             </a:srgbClr>
           </a:solidFill>
           <a:ln w="15875">
             <a:solidFill>
-              <a:srgbClr val="D5FB00"/>
+              <a:srgbClr val="0033A0"/>
             </a:solidFill>
           </a:ln>
         </p:spPr>
@@ -23549,7 +23329,7 @@
       </p:sp>
       <p:sp>
         <p:nvSpPr>
-          <p:cNvPr id="16" name="Oval 15"/>
+          <p:cNvPr id="15" name="Oval 14"/>
           <p:cNvSpPr/>
           <p:nvPr/>
         </p:nvSpPr>
@@ -23562,13 +23342,13 @@
             <a:avLst/>
           </a:prstGeom>
           <a:solidFill>
-            <a:srgbClr val="D5FB00">
+            <a:srgbClr val="0033A0">
               <a:alpha val="35000"/>
             </a:srgbClr>
           </a:solidFill>
           <a:ln w="15875">
             <a:solidFill>
-              <a:srgbClr val="D5FB00"/>
+              <a:srgbClr val="0033A0"/>
             </a:solidFill>
           </a:ln>
         </p:spPr>
@@ -23582,7 +23362,7 @@
       </p:sp>
       <p:sp>
         <p:nvSpPr>
-          <p:cNvPr id="17" name="Oval 16"/>
+          <p:cNvPr id="16" name="Oval 15"/>
           <p:cNvSpPr/>
           <p:nvPr/>
         </p:nvSpPr>
@@ -23595,13 +23375,13 @@
             <a:avLst/>
           </a:prstGeom>
           <a:solidFill>
-            <a:srgbClr val="D5FB00">
+            <a:srgbClr val="0033A0">
               <a:alpha val="35000"/>
             </a:srgbClr>
           </a:solidFill>
           <a:ln w="15875">
             <a:solidFill>
-              <a:srgbClr val="D5FB00"/>
+              <a:srgbClr val="0033A0"/>
             </a:solidFill>
           </a:ln>
         </p:spPr>
@@ -23610,6 +23390,48 @@
           <a:lstStyle/>
           <a:p>
             <a:pPr algn="ctr"/>
+          </a:p>
+        </p:txBody>
+      </p:sp>
+      <p:sp>
+        <p:nvSpPr>
+          <p:cNvPr id="17" name="TextBox 16"/>
+          <p:cNvSpPr txBox="1"/>
+          <p:nvPr/>
+        </p:nvSpPr>
+        <p:spPr>
+          <a:xfrm>
+            <a:off x="621792" y="2651760"/>
+            <a:ext cx="457200" cy="457200"/>
+          </a:xfrm>
+          <a:prstGeom prst="rect">
+            <a:avLst/>
+          </a:prstGeom>
+          <a:noFill/>
+        </p:spPr>
+        <p:txBody>
+          <a:bodyPr wrap="square" lIns="0" rIns="0" tIns="0" bIns="0" anchor="t">
+            <a:spAutoFit/>
+          </a:bodyPr>
+          <a:lstStyle/>
+          <a:p>
+            <a:pPr algn="l">
+              <a:spcBef>
+                <a:spcPts val="0"/>
+              </a:spcBef>
+              <a:spcAft>
+                <a:spcPts val="0"/>
+              </a:spcAft>
+            </a:pPr>
+            <a:r>
+              <a:rPr sz="2400" b="1" i="0">
+                <a:solidFill>
+                  <a:srgbClr val="0033A0"/>
+                </a:solidFill>
+                <a:latin typeface="Segoe UI"/>
+              </a:rPr>
+              <a:t>L</a:t>
+            </a:r>
           </a:p>
         </p:txBody>
       </p:sp>
@@ -23621,8 +23443,8 @@
         </p:nvSpPr>
         <p:spPr>
           <a:xfrm>
-            <a:off x="621792" y="2651760"/>
-            <a:ext cx="457200" cy="457200"/>
+            <a:off x="1115568" y="2697480"/>
+            <a:ext cx="2011680" cy="274320"/>
           </a:xfrm>
           <a:prstGeom prst="rect">
             <a:avLst/>
@@ -23644,13 +23466,13 @@
               </a:spcAft>
             </a:pPr>
             <a:r>
-              <a:rPr sz="2400" b="1" i="0">
-                <a:solidFill>
-                  <a:srgbClr val="D5FB00"/>
+              <a:rPr sz="1300" b="1" i="0">
+                <a:solidFill>
+                  <a:srgbClr val="051C2C"/>
                 </a:solidFill>
                 <a:latin typeface="Segoe UI"/>
               </a:rPr>
-              <a:t>L</a:t>
+              <a:t>With support</a:t>
             </a:r>
           </a:p>
         </p:txBody>
@@ -23663,7 +23485,7 @@
         </p:nvSpPr>
         <p:spPr>
           <a:xfrm>
-            <a:off x="1115568" y="2697480"/>
+            <a:off x="1115568" y="2944368"/>
             <a:ext cx="2011680" cy="274320"/>
           </a:xfrm>
           <a:prstGeom prst="rect">
@@ -23686,51 +23508,9 @@
               </a:spcAft>
             </a:pPr>
             <a:r>
-              <a:rPr sz="1300" b="1" i="0">
-                <a:solidFill>
-                  <a:srgbClr val="FFFFFF"/>
-                </a:solidFill>
-                <a:latin typeface="Segoe UI"/>
-              </a:rPr>
-              <a:t>With support</a:t>
-            </a:r>
-          </a:p>
-        </p:txBody>
-      </p:sp>
-      <p:sp>
-        <p:nvSpPr>
-          <p:cNvPr id="20" name="TextBox 19"/>
-          <p:cNvSpPr txBox="1"/>
-          <p:nvPr/>
-        </p:nvSpPr>
-        <p:spPr>
-          <a:xfrm>
-            <a:off x="1115568" y="2944368"/>
-            <a:ext cx="2011680" cy="274320"/>
-          </a:xfrm>
-          <a:prstGeom prst="rect">
-            <a:avLst/>
-          </a:prstGeom>
-          <a:noFill/>
-        </p:spPr>
-        <p:txBody>
-          <a:bodyPr wrap="square" lIns="0" rIns="0" tIns="0" bIns="0" anchor="t">
-            <a:spAutoFit/>
-          </a:bodyPr>
-          <a:lstStyle/>
-          <a:p>
-            <a:pPr algn="l">
-              <a:spcBef>
-                <a:spcPts val="0"/>
-              </a:spcBef>
-              <a:spcAft>
-                <a:spcPts val="0"/>
-              </a:spcAft>
-            </a:pPr>
-            <a:r>
               <a:rPr sz="1100" b="0" i="0">
                 <a:solidFill>
-                  <a:srgbClr val="8A9BA8"/>
+                  <a:srgbClr val="6B7A83"/>
                 </a:solidFill>
                 <a:latin typeface="Segoe UI"/>
               </a:rPr>
@@ -23741,7 +23521,7 @@
       </p:sp>
       <p:sp>
         <p:nvSpPr>
-          <p:cNvPr id="21" name="Oval 20"/>
+          <p:cNvPr id="20" name="Oval 19"/>
           <p:cNvSpPr/>
           <p:nvPr/>
         </p:nvSpPr>
@@ -23754,7 +23534,7 @@
             <a:avLst/>
           </a:prstGeom>
           <a:solidFill>
-            <a:srgbClr val="D5FB00"/>
+            <a:srgbClr val="0033A0"/>
           </a:solidFill>
           <a:ln>
             <a:noFill/>
@@ -23770,7 +23550,7 @@
       </p:sp>
       <p:sp>
         <p:nvSpPr>
-          <p:cNvPr id="22" name="Oval 21"/>
+          <p:cNvPr id="21" name="Oval 20"/>
           <p:cNvSpPr/>
           <p:nvPr/>
         </p:nvSpPr>
@@ -23783,7 +23563,7 @@
             <a:avLst/>
           </a:prstGeom>
           <a:solidFill>
-            <a:srgbClr val="D5FB00"/>
+            <a:srgbClr val="0033A0"/>
           </a:solidFill>
           <a:ln>
             <a:noFill/>
@@ -23799,7 +23579,7 @@
       </p:sp>
       <p:sp>
         <p:nvSpPr>
-          <p:cNvPr id="23" name="Oval 22"/>
+          <p:cNvPr id="22" name="Oval 21"/>
           <p:cNvSpPr/>
           <p:nvPr/>
         </p:nvSpPr>
@@ -23812,7 +23592,7 @@
             <a:avLst/>
           </a:prstGeom>
           <a:solidFill>
-            <a:srgbClr val="D5FB00"/>
+            <a:srgbClr val="0033A0"/>
           </a:solidFill>
           <a:ln>
             <a:noFill/>
@@ -23828,7 +23608,7 @@
       </p:sp>
       <p:sp>
         <p:nvSpPr>
-          <p:cNvPr id="24" name="Oval 23"/>
+          <p:cNvPr id="23" name="Oval 22"/>
           <p:cNvSpPr/>
           <p:nvPr/>
         </p:nvSpPr>
@@ -23841,13 +23621,13 @@
             <a:avLst/>
           </a:prstGeom>
           <a:solidFill>
-            <a:srgbClr val="D5FB00">
+            <a:srgbClr val="0033A0">
               <a:alpha val="35000"/>
             </a:srgbClr>
           </a:solidFill>
           <a:ln w="15875">
             <a:solidFill>
-              <a:srgbClr val="D5FB00"/>
+              <a:srgbClr val="0033A0"/>
             </a:solidFill>
           </a:ln>
         </p:spPr>
@@ -23861,7 +23641,7 @@
       </p:sp>
       <p:sp>
         <p:nvSpPr>
-          <p:cNvPr id="25" name="Oval 24"/>
+          <p:cNvPr id="24" name="Oval 23"/>
           <p:cNvSpPr/>
           <p:nvPr/>
         </p:nvSpPr>
@@ -23874,13 +23654,13 @@
             <a:avLst/>
           </a:prstGeom>
           <a:solidFill>
-            <a:srgbClr val="D5FB00">
+            <a:srgbClr val="0033A0">
               <a:alpha val="35000"/>
             </a:srgbClr>
           </a:solidFill>
           <a:ln w="15875">
             <a:solidFill>
-              <a:srgbClr val="D5FB00"/>
+              <a:srgbClr val="0033A0"/>
             </a:solidFill>
           </a:ln>
         </p:spPr>
@@ -23889,6 +23669,48 @@
           <a:lstStyle/>
           <a:p>
             <a:pPr algn="ctr"/>
+          </a:p>
+        </p:txBody>
+      </p:sp>
+      <p:sp>
+        <p:nvSpPr>
+          <p:cNvPr id="25" name="TextBox 24"/>
+          <p:cNvSpPr txBox="1"/>
+          <p:nvPr/>
+        </p:nvSpPr>
+        <p:spPr>
+          <a:xfrm>
+            <a:off x="621792" y="3419856"/>
+            <a:ext cx="457200" cy="457200"/>
+          </a:xfrm>
+          <a:prstGeom prst="rect">
+            <a:avLst/>
+          </a:prstGeom>
+          <a:noFill/>
+        </p:spPr>
+        <p:txBody>
+          <a:bodyPr wrap="square" lIns="0" rIns="0" tIns="0" bIns="0" anchor="t">
+            <a:spAutoFit/>
+          </a:bodyPr>
+          <a:lstStyle/>
+          <a:p>
+            <a:pPr algn="l">
+              <a:spcBef>
+                <a:spcPts val="0"/>
+              </a:spcBef>
+              <a:spcAft>
+                <a:spcPts val="0"/>
+              </a:spcAft>
+            </a:pPr>
+            <a:r>
+              <a:rPr sz="2400" b="1" i="0">
+                <a:solidFill>
+                  <a:srgbClr val="0033A0"/>
+                </a:solidFill>
+                <a:latin typeface="Segoe UI"/>
+              </a:rPr>
+              <a:t>U</a:t>
+            </a:r>
           </a:p>
         </p:txBody>
       </p:sp>
@@ -23900,8 +23722,8 @@
         </p:nvSpPr>
         <p:spPr>
           <a:xfrm>
-            <a:off x="621792" y="3419856"/>
-            <a:ext cx="457200" cy="457200"/>
+            <a:off x="1115568" y="3465576"/>
+            <a:ext cx="2011680" cy="274320"/>
           </a:xfrm>
           <a:prstGeom prst="rect">
             <a:avLst/>
@@ -23923,13 +23745,13 @@
               </a:spcAft>
             </a:pPr>
             <a:r>
-              <a:rPr sz="2400" b="1" i="0">
-                <a:solidFill>
-                  <a:srgbClr val="D5FB00"/>
+              <a:rPr sz="1300" b="1" i="0">
+                <a:solidFill>
+                  <a:srgbClr val="051C2C"/>
                 </a:solidFill>
                 <a:latin typeface="Segoe UI"/>
               </a:rPr>
-              <a:t>U</a:t>
+              <a:t>Alone</a:t>
             </a:r>
           </a:p>
         </p:txBody>
@@ -23942,7 +23764,7 @@
         </p:nvSpPr>
         <p:spPr>
           <a:xfrm>
-            <a:off x="1115568" y="3465576"/>
+            <a:off x="1115568" y="3712463"/>
             <a:ext cx="2011680" cy="274320"/>
           </a:xfrm>
           <a:prstGeom prst="rect">
@@ -23965,51 +23787,9 @@
               </a:spcAft>
             </a:pPr>
             <a:r>
-              <a:rPr sz="1300" b="1" i="0">
-                <a:solidFill>
-                  <a:srgbClr val="FFFFFF"/>
-                </a:solidFill>
-                <a:latin typeface="Segoe UI"/>
-              </a:rPr>
-              <a:t>Alone</a:t>
-            </a:r>
-          </a:p>
-        </p:txBody>
-      </p:sp>
-      <p:sp>
-        <p:nvSpPr>
-          <p:cNvPr id="28" name="TextBox 27"/>
-          <p:cNvSpPr txBox="1"/>
-          <p:nvPr/>
-        </p:nvSpPr>
-        <p:spPr>
-          <a:xfrm>
-            <a:off x="1115568" y="3712463"/>
-            <a:ext cx="2011680" cy="274320"/>
-          </a:xfrm>
-          <a:prstGeom prst="rect">
-            <a:avLst/>
-          </a:prstGeom>
-          <a:noFill/>
-        </p:spPr>
-        <p:txBody>
-          <a:bodyPr wrap="square" lIns="0" rIns="0" tIns="0" bIns="0" anchor="t">
-            <a:spAutoFit/>
-          </a:bodyPr>
-          <a:lstStyle/>
-          <a:p>
-            <a:pPr algn="l">
-              <a:spcBef>
-                <a:spcPts val="0"/>
-              </a:spcBef>
-              <a:spcAft>
-                <a:spcPts val="0"/>
-              </a:spcAft>
-            </a:pPr>
-            <a:r>
               <a:rPr sz="1100" b="0" i="0">
                 <a:solidFill>
-                  <a:srgbClr val="8A9BA8"/>
+                  <a:srgbClr val="6B7A83"/>
                 </a:solidFill>
                 <a:latin typeface="Segoe UI"/>
               </a:rPr>
@@ -24020,7 +23800,7 @@
       </p:sp>
       <p:sp>
         <p:nvSpPr>
-          <p:cNvPr id="29" name="Oval 28"/>
+          <p:cNvPr id="28" name="Oval 27"/>
           <p:cNvSpPr/>
           <p:nvPr/>
         </p:nvSpPr>
@@ -24033,13 +23813,13 @@
             <a:avLst/>
           </a:prstGeom>
           <a:solidFill>
-            <a:srgbClr val="D5FB00">
+            <a:srgbClr val="0033A0">
               <a:alpha val="35000"/>
             </a:srgbClr>
           </a:solidFill>
           <a:ln w="15875">
             <a:solidFill>
-              <a:srgbClr val="D5FB00"/>
+              <a:srgbClr val="0033A0"/>
             </a:solidFill>
           </a:ln>
         </p:spPr>
@@ -24053,7 +23833,7 @@
       </p:sp>
       <p:sp>
         <p:nvSpPr>
-          <p:cNvPr id="30" name="Oval 29"/>
+          <p:cNvPr id="29" name="Oval 28"/>
           <p:cNvSpPr/>
           <p:nvPr/>
         </p:nvSpPr>
@@ -24068,7 +23848,7 @@
           <a:noFill/>
           <a:ln w="12700">
             <a:solidFill>
-              <a:srgbClr val="C6CDD1">
+              <a:srgbClr val="6B7A83">
                 <a:alpha val="60000"/>
               </a:srgbClr>
             </a:solidFill>
@@ -24084,7 +23864,7 @@
       </p:sp>
       <p:sp>
         <p:nvSpPr>
-          <p:cNvPr id="31" name="Oval 30"/>
+          <p:cNvPr id="30" name="Oval 29"/>
           <p:cNvSpPr/>
           <p:nvPr/>
         </p:nvSpPr>
@@ -24099,7 +23879,7 @@
           <a:noFill/>
           <a:ln w="12700">
             <a:solidFill>
-              <a:srgbClr val="C6CDD1">
+              <a:srgbClr val="6B7A83">
                 <a:alpha val="60000"/>
               </a:srgbClr>
             </a:solidFill>
@@ -24115,14 +23895,56 @@
       </p:sp>
       <p:sp>
         <p:nvSpPr>
+          <p:cNvPr id="31" name="TextBox 30"/>
+          <p:cNvSpPr txBox="1"/>
+          <p:nvPr/>
+        </p:nvSpPr>
+        <p:spPr>
+          <a:xfrm>
+            <a:off x="621792" y="4187952"/>
+            <a:ext cx="457200" cy="457200"/>
+          </a:xfrm>
+          <a:prstGeom prst="rect">
+            <a:avLst/>
+          </a:prstGeom>
+          <a:noFill/>
+        </p:spPr>
+        <p:txBody>
+          <a:bodyPr wrap="square" lIns="0" rIns="0" tIns="0" bIns="0" anchor="t">
+            <a:spAutoFit/>
+          </a:bodyPr>
+          <a:lstStyle/>
+          <a:p>
+            <a:pPr algn="l">
+              <a:spcBef>
+                <a:spcPts val="0"/>
+              </a:spcBef>
+              <a:spcAft>
+                <a:spcPts val="0"/>
+              </a:spcAft>
+            </a:pPr>
+            <a:r>
+              <a:rPr sz="2400" b="1" i="0">
+                <a:solidFill>
+                  <a:srgbClr val="0033A0"/>
+                </a:solidFill>
+                <a:latin typeface="Segoe UI"/>
+              </a:rPr>
+              <a:t>O</a:t>
+            </a:r>
+          </a:p>
+        </p:txBody>
+      </p:sp>
+      <p:sp>
+        <p:nvSpPr>
           <p:cNvPr id="32" name="TextBox 31"/>
           <p:cNvSpPr txBox="1"/>
           <p:nvPr/>
         </p:nvSpPr>
         <p:spPr>
           <a:xfrm>
-            <a:off x="621792" y="4187952"/>
-            <a:ext cx="457200" cy="457200"/>
+            <a:off x="1115568" y="4233672"/>
+            <a:ext cx="2011680" cy="274320"/>
           </a:xfrm>
           <a:prstGeom prst="rect">
             <a:avLst/>
@@ -24144,13 +23966,13 @@
               </a:spcAft>
             </a:pPr>
             <a:r>
-              <a:rPr sz="2400" b="1" i="0">
-                <a:solidFill>
-                  <a:srgbClr val="D5FB00"/>
+              <a:rPr sz="1300" b="1" i="0">
+                <a:solidFill>
+                  <a:srgbClr val="051C2C"/>
                 </a:solidFill>
                 <a:latin typeface="Segoe UI"/>
               </a:rPr>
-              <a:t>O</a:t>
+              <a:t>Improves</a:t>
             </a:r>
           </a:p>
         </p:txBody>
@@ -24163,7 +23985,7 @@
         </p:nvSpPr>
         <p:spPr>
           <a:xfrm>
-            <a:off x="1115568" y="4233672"/>
+            <a:off x="1115568" y="4480560"/>
             <a:ext cx="2011680" cy="274320"/>
           </a:xfrm>
           <a:prstGeom prst="rect">
@@ -24186,51 +24008,9 @@
               </a:spcAft>
             </a:pPr>
             <a:r>
-              <a:rPr sz="1300" b="1" i="0">
-                <a:solidFill>
-                  <a:srgbClr val="FFFFFF"/>
-                </a:solidFill>
-                <a:latin typeface="Segoe UI"/>
-              </a:rPr>
-              <a:t>Improves</a:t>
-            </a:r>
-          </a:p>
-        </p:txBody>
-      </p:sp>
-      <p:sp>
-        <p:nvSpPr>
-          <p:cNvPr id="34" name="TextBox 33"/>
-          <p:cNvSpPr txBox="1"/>
-          <p:nvPr/>
-        </p:nvSpPr>
-        <p:spPr>
-          <a:xfrm>
-            <a:off x="1115568" y="4480560"/>
-            <a:ext cx="2011680" cy="274320"/>
-          </a:xfrm>
-          <a:prstGeom prst="rect">
-            <a:avLst/>
-          </a:prstGeom>
-          <a:noFill/>
-        </p:spPr>
-        <p:txBody>
-          <a:bodyPr wrap="square" lIns="0" rIns="0" tIns="0" bIns="0" anchor="t">
-            <a:spAutoFit/>
-          </a:bodyPr>
-          <a:lstStyle/>
-          <a:p>
-            <a:pPr algn="l">
-              <a:spcBef>
-                <a:spcPts val="0"/>
-              </a:spcBef>
-              <a:spcAft>
-                <a:spcPts val="0"/>
-              </a:spcAft>
-            </a:pPr>
-            <a:r>
               <a:rPr sz="1100" b="0" i="0">
                 <a:solidFill>
-                  <a:srgbClr val="8A9BA8"/>
+                  <a:srgbClr val="6B7A83"/>
                 </a:solidFill>
                 <a:latin typeface="Segoe UI"/>
               </a:rPr>
@@ -24241,7 +24021,7 @@
       </p:sp>
       <p:sp>
         <p:nvSpPr>
-          <p:cNvPr id="35" name="Oval 34"/>
+          <p:cNvPr id="34" name="Oval 33"/>
           <p:cNvSpPr/>
           <p:nvPr/>
         </p:nvSpPr>
@@ -24254,7 +24034,7 @@
             <a:avLst/>
           </a:prstGeom>
           <a:solidFill>
-            <a:srgbClr val="D5FB00"/>
+            <a:srgbClr val="0033A0"/>
           </a:solidFill>
           <a:ln>
             <a:noFill/>
@@ -24270,7 +24050,7 @@
       </p:sp>
       <p:sp>
         <p:nvSpPr>
-          <p:cNvPr id="36" name="Oval 35"/>
+          <p:cNvPr id="35" name="Oval 34"/>
           <p:cNvSpPr/>
           <p:nvPr/>
         </p:nvSpPr>
@@ -24283,13 +24063,13 @@
             <a:avLst/>
           </a:prstGeom>
           <a:solidFill>
-            <a:srgbClr val="D5FB00">
+            <a:srgbClr val="0033A0">
               <a:alpha val="35000"/>
             </a:srgbClr>
           </a:solidFill>
           <a:ln w="15875">
             <a:solidFill>
-              <a:srgbClr val="D5FB00"/>
+              <a:srgbClr val="0033A0"/>
             </a:solidFill>
           </a:ln>
         </p:spPr>
@@ -24303,7 +24083,7 @@
       </p:sp>
       <p:sp>
         <p:nvSpPr>
-          <p:cNvPr id="37" name="Oval 36"/>
+          <p:cNvPr id="36" name="Oval 35"/>
           <p:cNvSpPr/>
           <p:nvPr/>
         </p:nvSpPr>
@@ -24318,7 +24098,7 @@
           <a:noFill/>
           <a:ln w="12700">
             <a:solidFill>
-              <a:srgbClr val="C6CDD1">
+              <a:srgbClr val="6B7A83">
                 <a:alpha val="60000"/>
               </a:srgbClr>
             </a:solidFill>
@@ -24334,7 +24114,7 @@
       </p:sp>
       <p:sp>
         <p:nvSpPr>
-          <p:cNvPr id="38" name="Oval 37"/>
+          <p:cNvPr id="37" name="Oval 36"/>
           <p:cNvSpPr/>
           <p:nvPr/>
         </p:nvSpPr>
@@ -24349,7 +24129,7 @@
           <a:noFill/>
           <a:ln w="12700">
             <a:solidFill>
-              <a:srgbClr val="C6CDD1">
+              <a:srgbClr val="6B7A83">
                 <a:alpha val="60000"/>
               </a:srgbClr>
             </a:solidFill>
@@ -24365,7 +24145,7 @@
       </p:sp>
       <p:sp>
         <p:nvSpPr>
-          <p:cNvPr id="39" name="Oval 38"/>
+          <p:cNvPr id="38" name="Oval 37"/>
           <p:cNvSpPr/>
           <p:nvPr/>
         </p:nvSpPr>
@@ -24380,7 +24160,7 @@
           <a:noFill/>
           <a:ln w="12700">
             <a:solidFill>
-              <a:srgbClr val="C6CDD1">
+              <a:srgbClr val="6B7A83">
                 <a:alpha val="60000"/>
               </a:srgbClr>
             </a:solidFill>
@@ -24396,7 +24176,7 @@
       </p:sp>
       <p:sp>
         <p:nvSpPr>
-          <p:cNvPr id="40" name="Oval 39"/>
+          <p:cNvPr id="39" name="Oval 38"/>
           <p:cNvSpPr/>
           <p:nvPr/>
         </p:nvSpPr>
@@ -24411,7 +24191,7 @@
           <a:noFill/>
           <a:ln w="12700">
             <a:solidFill>
-              <a:srgbClr val="C6CDD1">
+              <a:srgbClr val="6B7A83">
                 <a:alpha val="60000"/>
               </a:srgbClr>
             </a:solidFill>
@@ -24427,7 +24207,7 @@
       </p:sp>
       <p:sp>
         <p:nvSpPr>
-          <p:cNvPr id="41" name="Oval 40"/>
+          <p:cNvPr id="40" name="Oval 39"/>
           <p:cNvSpPr/>
           <p:nvPr/>
         </p:nvSpPr>
@@ -24440,7 +24220,7 @@
             <a:avLst/>
           </a:prstGeom>
           <a:solidFill>
-            <a:srgbClr val="D5FB00"/>
+            <a:srgbClr val="0033A0"/>
           </a:solidFill>
           <a:ln>
             <a:noFill/>
@@ -24456,7 +24236,7 @@
       </p:sp>
       <p:sp>
         <p:nvSpPr>
-          <p:cNvPr id="42" name="TextBox 41"/>
+          <p:cNvPr id="41" name="TextBox 40"/>
           <p:cNvSpPr txBox="1"/>
           <p:nvPr/>
         </p:nvSpPr>
@@ -24487,7 +24267,7 @@
             <a:r>
               <a:rPr sz="1100" b="0" i="0">
                 <a:solidFill>
-                  <a:srgbClr val="C6CDD1"/>
+                  <a:srgbClr val="6B7A83"/>
                 </a:solidFill>
                 <a:latin typeface="Segoe UI"/>
               </a:rPr>
@@ -24498,7 +24278,7 @@
       </p:sp>
       <p:sp>
         <p:nvSpPr>
-          <p:cNvPr id="43" name="Oval 42"/>
+          <p:cNvPr id="42" name="Oval 41"/>
           <p:cNvSpPr/>
           <p:nvPr/>
         </p:nvSpPr>
@@ -24511,13 +24291,13 @@
             <a:avLst/>
           </a:prstGeom>
           <a:solidFill>
-            <a:srgbClr val="D5FB00">
+            <a:srgbClr val="0033A0">
               <a:alpha val="35000"/>
             </a:srgbClr>
           </a:solidFill>
           <a:ln w="15875">
             <a:solidFill>
-              <a:srgbClr val="D5FB00"/>
+              <a:srgbClr val="0033A0"/>
             </a:solidFill>
           </a:ln>
         </p:spPr>
@@ -24531,7 +24311,7 @@
       </p:sp>
       <p:sp>
         <p:nvSpPr>
-          <p:cNvPr id="44" name="TextBox 43"/>
+          <p:cNvPr id="43" name="TextBox 42"/>
           <p:cNvSpPr txBox="1"/>
           <p:nvPr/>
         </p:nvSpPr>
@@ -24562,7 +24342,7 @@
             <a:r>
               <a:rPr sz="1100" b="0" i="0">
                 <a:solidFill>
-                  <a:srgbClr val="C6CDD1"/>
+                  <a:srgbClr val="6B7A83"/>
                 </a:solidFill>
                 <a:latin typeface="Segoe UI"/>
               </a:rPr>
@@ -24573,7 +24353,7 @@
       </p:sp>
       <p:sp>
         <p:nvSpPr>
-          <p:cNvPr id="45" name="Oval 44"/>
+          <p:cNvPr id="44" name="Oval 43"/>
           <p:cNvSpPr/>
           <p:nvPr/>
         </p:nvSpPr>
@@ -24588,7 +24368,7 @@
           <a:noFill/>
           <a:ln w="12700">
             <a:solidFill>
-              <a:srgbClr val="C6CDD1">
+              <a:srgbClr val="6B7A83">
                 <a:alpha val="60000"/>
               </a:srgbClr>
             </a:solidFill>
@@ -24604,7 +24384,7 @@
       </p:sp>
       <p:sp>
         <p:nvSpPr>
-          <p:cNvPr id="46" name="TextBox 45"/>
+          <p:cNvPr id="45" name="TextBox 44"/>
           <p:cNvSpPr txBox="1"/>
           <p:nvPr/>
         </p:nvSpPr>
@@ -24635,7 +24415,7 @@
             <a:r>
               <a:rPr sz="1100" b="0" i="0">
                 <a:solidFill>
-                  <a:srgbClr val="C6CDD1"/>
+                  <a:srgbClr val="6B7A83"/>
                 </a:solidFill>
                 <a:latin typeface="Segoe UI"/>
               </a:rPr>
@@ -24644,22 +24424,12 @@
           </a:p>
         </p:txBody>
       </p:sp>
-      <p:pic>
-        <p:nvPicPr>
-          <p:cNvPr id="47" name="!! Glass B" descr="Decorative glass panel"/>
-          <p:cNvPicPr>
-            <a:picLocks noChangeAspect="1"/>
-          </p:cNvPicPr>
+      <p:sp>
+        <p:nvSpPr>
+          <p:cNvPr id="46" name="!! Glass B"/>
+          <p:cNvSpPr/>
           <p:nvPr/>
-        </p:nvPicPr>
-        <p:blipFill>
-          <a:blip r:embed="rId3">
-            <a:alphaModFix amt="50000"/>
-          </a:blip>
-          <a:stretch>
-            <a:fillRect/>
-          </a:stretch>
-        </p:blipFill>
+        </p:nvSpPr>
         <p:spPr>
           <a:xfrm>
             <a:off x="8092440" y="1600200"/>
@@ -24668,27 +24438,15 @@
           <a:prstGeom prst="rect">
             <a:avLst/>
           </a:prstGeom>
-        </p:spPr>
-      </p:pic>
-      <p:sp>
-        <p:nvSpPr>
-          <p:cNvPr id="48" name="!! Glass B rim"/>
-          <p:cNvSpPr/>
-          <p:nvPr/>
-        </p:nvSpPr>
-        <p:spPr>
-          <a:xfrm>
-            <a:off x="8092440" y="1600200"/>
-            <a:ext cx="3840480" cy="3886200"/>
-          </a:xfrm>
-          <a:prstGeom prst="rect">
-            <a:avLst/>
-          </a:prstGeom>
-          <a:noFill/>
+          <a:solidFill>
+            <a:srgbClr val="051C2C">
+              <a:alpha val="4000"/>
+            </a:srgbClr>
+          </a:solidFill>
           <a:ln w="9525">
             <a:solidFill>
-              <a:srgbClr val="FFFFFF">
-                <a:alpha val="16000"/>
+              <a:srgbClr val="051C2C">
+                <a:alpha val="12000"/>
               </a:srgbClr>
             </a:solidFill>
           </a:ln>
@@ -24703,7 +24461,7 @@
       </p:sp>
       <p:sp>
         <p:nvSpPr>
-          <p:cNvPr id="49" name="TextBox 48"/>
+          <p:cNvPr id="47" name="TextBox 46"/>
           <p:cNvSpPr txBox="1"/>
           <p:nvPr/>
         </p:nvSpPr>
@@ -24734,7 +24492,7 @@
             <a:r>
               <a:rPr sz="1600" b="1" i="0">
                 <a:solidFill>
-                  <a:srgbClr val="D5FB00"/>
+                  <a:srgbClr val="0033A0"/>
                 </a:solidFill>
                 <a:latin typeface="Segoe UI"/>
               </a:rPr>
@@ -24745,7 +24503,7 @@
       </p:sp>
       <p:sp>
         <p:nvSpPr>
-          <p:cNvPr id="50" name="Chevron 49"/>
+          <p:cNvPr id="48" name="Chevron 47"/>
           <p:cNvSpPr/>
           <p:nvPr/>
         </p:nvSpPr>
@@ -24758,7 +24516,7 @@
             <a:avLst/>
           </a:prstGeom>
           <a:solidFill>
-            <a:srgbClr val="D5FB00"/>
+            <a:srgbClr val="0033A0"/>
           </a:solidFill>
           <a:ln>
             <a:noFill/>
@@ -24774,7 +24532,7 @@
       </p:sp>
       <p:sp>
         <p:nvSpPr>
-          <p:cNvPr id="51" name="TextBox 50"/>
+          <p:cNvPr id="49" name="TextBox 48"/>
           <p:cNvSpPr txBox="1"/>
           <p:nvPr/>
         </p:nvSpPr>
@@ -24805,7 +24563,7 @@
             <a:r>
               <a:rPr sz="1400" b="0" i="0">
                 <a:solidFill>
-                  <a:srgbClr val="FFFFFF"/>
+                  <a:srgbClr val="051C2C"/>
                 </a:solidFill>
                 <a:latin typeface="Segoe UI"/>
               </a:rPr>
@@ -24816,7 +24574,7 @@
       </p:sp>
       <p:sp>
         <p:nvSpPr>
-          <p:cNvPr id="52" name="Chevron 51"/>
+          <p:cNvPr id="50" name="Chevron 49"/>
           <p:cNvSpPr/>
           <p:nvPr/>
         </p:nvSpPr>
@@ -24829,7 +24587,7 @@
             <a:avLst/>
           </a:prstGeom>
           <a:solidFill>
-            <a:srgbClr val="D5FB00"/>
+            <a:srgbClr val="0033A0"/>
           </a:solidFill>
           <a:ln>
             <a:noFill/>
@@ -24845,7 +24603,7 @@
       </p:sp>
       <p:sp>
         <p:nvSpPr>
-          <p:cNvPr id="53" name="TextBox 52"/>
+          <p:cNvPr id="51" name="TextBox 50"/>
           <p:cNvSpPr txBox="1"/>
           <p:nvPr/>
         </p:nvSpPr>
@@ -24876,7 +24634,7 @@
             <a:r>
               <a:rPr sz="1400" b="0" i="0">
                 <a:solidFill>
-                  <a:srgbClr val="FFFFFF"/>
+                  <a:srgbClr val="051C2C"/>
                 </a:solidFill>
                 <a:latin typeface="Segoe UI"/>
               </a:rPr>
@@ -24887,7 +24645,7 @@
       </p:sp>
       <p:sp>
         <p:nvSpPr>
-          <p:cNvPr id="54" name="Chevron 53"/>
+          <p:cNvPr id="52" name="Chevron 51"/>
           <p:cNvSpPr/>
           <p:nvPr/>
         </p:nvSpPr>
@@ -24900,7 +24658,7 @@
             <a:avLst/>
           </a:prstGeom>
           <a:solidFill>
-            <a:srgbClr val="D5FB00"/>
+            <a:srgbClr val="0033A0"/>
           </a:solidFill>
           <a:ln>
             <a:noFill/>
@@ -24916,7 +24674,7 @@
       </p:sp>
       <p:sp>
         <p:nvSpPr>
-          <p:cNvPr id="55" name="TextBox 54"/>
+          <p:cNvPr id="53" name="TextBox 52"/>
           <p:cNvSpPr txBox="1"/>
           <p:nvPr/>
         </p:nvSpPr>
@@ -24947,7 +24705,7 @@
             <a:r>
               <a:rPr sz="1400" b="0" i="0">
                 <a:solidFill>
-                  <a:srgbClr val="FFFFFF"/>
+                  <a:srgbClr val="051C2C"/>
                 </a:solidFill>
                 <a:latin typeface="Segoe UI"/>
               </a:rPr>
@@ -24958,7 +24716,7 @@
       </p:sp>
       <p:sp>
         <p:nvSpPr>
-          <p:cNvPr id="56" name="Chevron 55"/>
+          <p:cNvPr id="54" name="Chevron 53"/>
           <p:cNvSpPr/>
           <p:nvPr/>
         </p:nvSpPr>
@@ -24971,7 +24729,7 @@
             <a:avLst/>
           </a:prstGeom>
           <a:solidFill>
-            <a:srgbClr val="D5FB00"/>
+            <a:srgbClr val="0033A0"/>
           </a:solidFill>
           <a:ln>
             <a:noFill/>
@@ -24987,7 +24745,7 @@
       </p:sp>
       <p:sp>
         <p:nvSpPr>
-          <p:cNvPr id="57" name="TextBox 56"/>
+          <p:cNvPr id="55" name="TextBox 54"/>
           <p:cNvSpPr txBox="1"/>
           <p:nvPr/>
         </p:nvSpPr>
@@ -25018,7 +24776,7 @@
             <a:r>
               <a:rPr sz="1400" b="0" i="0">
                 <a:solidFill>
-                  <a:srgbClr val="FFFFFF"/>
+                  <a:srgbClr val="051C2C"/>
                 </a:solidFill>
                 <a:latin typeface="Segoe UI"/>
               </a:rPr>
@@ -25029,7 +24787,7 @@
       </p:sp>
       <p:sp>
         <p:nvSpPr>
-          <p:cNvPr id="58" name="TextBox 57"/>
+          <p:cNvPr id="56" name="TextBox 55"/>
           <p:cNvSpPr txBox="1"/>
           <p:nvPr/>
         </p:nvSpPr>
@@ -25060,7 +24818,7 @@
             <a:r>
               <a:rPr sz="1200" b="1" i="0">
                 <a:solidFill>
-                  <a:srgbClr val="D5FB00"/>
+                  <a:srgbClr val="0033A0"/>
                 </a:solidFill>
                 <a:latin typeface="Segoe UI"/>
               </a:rPr>
@@ -25746,7 +25504,7 @@
             <a:r>
               <a:rPr sz="2800" b="1">
                 <a:solidFill>
-                  <a:srgbClr val="FFFFFF"/>
+                  <a:srgbClr val="051C2C"/>
                 </a:solidFill>
                 <a:latin typeface="Segoe UI"/>
               </a:rPr>
@@ -25773,7 +25531,7 @@
             <a:r>
               <a:rPr sz="1300" b="0">
                 <a:solidFill>
-                  <a:srgbClr val="D5FB00"/>
+                  <a:srgbClr val="0033A0"/>
                 </a:solidFill>
                 <a:latin typeface="Segoe UI"/>
               </a:rPr>
@@ -25782,22 +25540,12 @@
           </a:p>
         </p:txBody>
       </p:sp>
-      <p:pic>
-        <p:nvPicPr>
-          <p:cNvPr id="4" name="!! Glass A" descr="Decorative glass panel"/>
-          <p:cNvPicPr>
-            <a:picLocks noChangeAspect="1"/>
-          </p:cNvPicPr>
+      <p:sp>
+        <p:nvSpPr>
+          <p:cNvPr id="4" name="!! Glass A"/>
+          <p:cNvSpPr/>
           <p:nvPr/>
-        </p:nvPicPr>
-        <p:blipFill>
-          <a:blip r:embed="rId2">
-            <a:alphaModFix amt="50000"/>
-          </a:blip>
-          <a:stretch>
-            <a:fillRect/>
-          </a:stretch>
-        </p:blipFill>
+        </p:nvSpPr>
         <p:spPr>
           <a:xfrm>
             <a:off x="256032" y="1600200"/>
@@ -25806,27 +25554,15 @@
           <a:prstGeom prst="rect">
             <a:avLst/>
           </a:prstGeom>
-        </p:spPr>
-      </p:pic>
-      <p:sp>
-        <p:nvSpPr>
-          <p:cNvPr id="5" name="!! Glass A rim"/>
-          <p:cNvSpPr/>
-          <p:nvPr/>
-        </p:nvSpPr>
-        <p:spPr>
-          <a:xfrm>
-            <a:off x="256032" y="1600200"/>
-            <a:ext cx="5806440" cy="3886200"/>
-          </a:xfrm>
-          <a:prstGeom prst="rect">
-            <a:avLst/>
-          </a:prstGeom>
-          <a:noFill/>
+          <a:solidFill>
+            <a:srgbClr val="051C2C">
+              <a:alpha val="4000"/>
+            </a:srgbClr>
+          </a:solidFill>
           <a:ln w="9525">
             <a:solidFill>
-              <a:srgbClr val="FFFFFF">
-                <a:alpha val="16000"/>
+              <a:srgbClr val="051C2C">
+                <a:alpha val="12000"/>
               </a:srgbClr>
             </a:solidFill>
           </a:ln>
@@ -25841,7 +25577,7 @@
       </p:sp>
       <p:sp>
         <p:nvSpPr>
-          <p:cNvPr id="6" name="TextBox 5"/>
+          <p:cNvPr id="5" name="TextBox 4"/>
           <p:cNvSpPr txBox="1"/>
           <p:nvPr/>
         </p:nvSpPr>
@@ -25872,7 +25608,7 @@
             <a:r>
               <a:rPr sz="1600" b="1" i="0">
                 <a:solidFill>
-                  <a:srgbClr val="D5FB00"/>
+                  <a:srgbClr val="0033A0"/>
                 </a:solidFill>
                 <a:latin typeface="Segoe UI"/>
               </a:rPr>
@@ -25883,7 +25619,7 @@
       </p:sp>
       <p:sp>
         <p:nvSpPr>
-          <p:cNvPr id="7" name="TextBox 6"/>
+          <p:cNvPr id="6" name="TextBox 5"/>
           <p:cNvSpPr txBox="1"/>
           <p:nvPr/>
         </p:nvSpPr>
@@ -25917,7 +25653,7 @@
             <a:r>
               <a:rPr sz="1400" b="0" i="0">
                 <a:solidFill>
-                  <a:srgbClr val="FFFFFF"/>
+                  <a:srgbClr val="051C2C"/>
                 </a:solidFill>
                 <a:latin typeface="Segoe UI"/>
               </a:rPr>
@@ -25928,7 +25664,7 @@
       </p:sp>
       <p:sp>
         <p:nvSpPr>
-          <p:cNvPr id="8" name="TextBox 7"/>
+          <p:cNvPr id="7" name="TextBox 6"/>
           <p:cNvSpPr txBox="1"/>
           <p:nvPr/>
         </p:nvSpPr>
@@ -25959,7 +25695,7 @@
             <a:r>
               <a:rPr sz="1600" b="1" i="0">
                 <a:solidFill>
-                  <a:srgbClr val="D5FB00"/>
+                  <a:srgbClr val="0033A0"/>
                 </a:solidFill>
                 <a:latin typeface="Segoe UI"/>
               </a:rPr>
@@ -25970,7 +25706,7 @@
       </p:sp>
       <p:sp>
         <p:nvSpPr>
-          <p:cNvPr id="9" name="TextBox 8"/>
+          <p:cNvPr id="8" name="TextBox 7"/>
           <p:cNvSpPr txBox="1"/>
           <p:nvPr/>
         </p:nvSpPr>
@@ -26004,7 +25740,7 @@
             <a:r>
               <a:rPr sz="1400" b="0" i="0">
                 <a:solidFill>
-                  <a:srgbClr val="FFFFFF"/>
+                  <a:srgbClr val="051C2C"/>
                 </a:solidFill>
                 <a:latin typeface="Segoe UI"/>
               </a:rPr>
@@ -26015,7 +25751,7 @@
       </p:sp>
       <p:sp>
         <p:nvSpPr>
-          <p:cNvPr id="10" name="Rectangle 9"/>
+          <p:cNvPr id="9" name="Rectangle 8"/>
           <p:cNvSpPr/>
           <p:nvPr/>
         </p:nvSpPr>
@@ -26028,7 +25764,7 @@
             <a:avLst/>
           </a:prstGeom>
           <a:solidFill>
-            <a:srgbClr val="D5FB00"/>
+            <a:srgbClr val="0033A0"/>
           </a:solidFill>
           <a:ln>
             <a:noFill/>
@@ -26044,7 +25780,7 @@
       </p:sp>
       <p:sp>
         <p:nvSpPr>
-          <p:cNvPr id="11" name="TextBox 10"/>
+          <p:cNvPr id="10" name="TextBox 9"/>
           <p:cNvSpPr txBox="1"/>
           <p:nvPr/>
         </p:nvSpPr>
@@ -26075,7 +25811,7 @@
             <a:r>
               <a:rPr sz="1600" b="1" i="0">
                 <a:solidFill>
-                  <a:srgbClr val="D5FB00"/>
+                  <a:srgbClr val="0033A0"/>
                 </a:solidFill>
                 <a:latin typeface="Segoe UI"/>
               </a:rPr>
@@ -26086,7 +25822,7 @@
       </p:sp>
       <p:sp>
         <p:nvSpPr>
-          <p:cNvPr id="12" name="TextBox 11"/>
+          <p:cNvPr id="11" name="TextBox 10"/>
           <p:cNvSpPr txBox="1"/>
           <p:nvPr/>
         </p:nvSpPr>
@@ -26120,7 +25856,7 @@
             <a:r>
               <a:rPr sz="1400" b="1" i="0">
                 <a:solidFill>
-                  <a:srgbClr val="D5FB00"/>
+                  <a:srgbClr val="0033A0"/>
                 </a:solidFill>
                 <a:latin typeface="Segoe UI"/>
               </a:rPr>
@@ -26129,22 +25865,12 @@
           </a:p>
         </p:txBody>
       </p:sp>
-      <p:pic>
-        <p:nvPicPr>
-          <p:cNvPr id="13" name="!! Glass B" descr="Decorative glass panel"/>
-          <p:cNvPicPr>
-            <a:picLocks noChangeAspect="1"/>
-          </p:cNvPicPr>
+      <p:sp>
+        <p:nvSpPr>
+          <p:cNvPr id="12" name="!! Glass B"/>
+          <p:cNvSpPr/>
           <p:nvPr/>
-        </p:nvPicPr>
-        <p:blipFill>
-          <a:blip r:embed="rId3">
-            <a:alphaModFix amt="50000"/>
-          </a:blip>
-          <a:stretch>
-            <a:fillRect/>
-          </a:stretch>
-        </p:blipFill>
+        </p:nvSpPr>
         <p:spPr>
           <a:xfrm>
             <a:off x="6382512" y="1600200"/>
@@ -26153,18 +25879,37 @@
           <a:prstGeom prst="rect">
             <a:avLst/>
           </a:prstGeom>
-        </p:spPr>
-      </p:pic>
-      <p:sp>
-        <p:nvSpPr>
-          <p:cNvPr id="14" name="!! Glass B rim"/>
+          <a:solidFill>
+            <a:srgbClr val="051C2C">
+              <a:alpha val="4000"/>
+            </a:srgbClr>
+          </a:solidFill>
+          <a:ln w="9525">
+            <a:solidFill>
+              <a:srgbClr val="051C2C">
+                <a:alpha val="12000"/>
+              </a:srgbClr>
+            </a:solidFill>
+          </a:ln>
+        </p:spPr>
+        <p:txBody>
+          <a:bodyPr rtlCol="0" anchor="ctr" wrap="square" lIns="0" rIns="0" tIns="0" bIns="0"/>
+          <a:lstStyle/>
+          <a:p>
+            <a:pPr algn="ctr"/>
+          </a:p>
+        </p:txBody>
+      </p:sp>
+      <p:sp>
+        <p:nvSpPr>
+          <p:cNvPr id="13" name="Rectangle 12"/>
           <p:cNvSpPr/>
           <p:nvPr/>
         </p:nvSpPr>
         <p:spPr>
           <a:xfrm>
-            <a:off x="6382512" y="1600200"/>
-            <a:ext cx="5550408" cy="1847088"/>
+            <a:off x="6547104" y="1764792"/>
+            <a:ext cx="5221224" cy="1517904"/>
           </a:xfrm>
           <a:prstGeom prst="rect">
             <a:avLst/>
@@ -26172,38 +25917,7 @@
           <a:noFill/>
           <a:ln w="9525">
             <a:solidFill>
-              <a:srgbClr val="FFFFFF">
-                <a:alpha val="16000"/>
-              </a:srgbClr>
-            </a:solidFill>
-          </a:ln>
-        </p:spPr>
-        <p:txBody>
-          <a:bodyPr rtlCol="0" anchor="ctr" wrap="square" lIns="0" rIns="0" tIns="0" bIns="0"/>
-          <a:lstStyle/>
-          <a:p>
-            <a:pPr algn="ctr"/>
-          </a:p>
-        </p:txBody>
-      </p:sp>
-      <p:sp>
-        <p:nvSpPr>
-          <p:cNvPr id="15" name="Rectangle 14"/>
-          <p:cNvSpPr/>
-          <p:nvPr/>
-        </p:nvSpPr>
-        <p:spPr>
-          <a:xfrm>
-            <a:off x="6547104" y="1764792"/>
-            <a:ext cx="5221224" cy="1517904"/>
-          </a:xfrm>
-          <a:prstGeom prst="rect">
-            <a:avLst/>
-          </a:prstGeom>
-          <a:noFill/>
-          <a:ln w="9525">
-            <a:solidFill>
-              <a:srgbClr val="C6CDD1">
+              <a:srgbClr val="6B7A83">
                 <a:alpha val="35000"/>
               </a:srgbClr>
             </a:solidFill>
@@ -26219,7 +25933,7 @@
       </p:sp>
       <p:sp>
         <p:nvSpPr>
-          <p:cNvPr id="16" name="TextBox 15"/>
+          <p:cNvPr id="14" name="TextBox 13"/>
           <p:cNvSpPr txBox="1"/>
           <p:nvPr/>
         </p:nvSpPr>
@@ -26250,7 +25964,7 @@
             <a:r>
               <a:rPr sz="1100" b="1" i="0">
                 <a:solidFill>
-                  <a:srgbClr val="D5FB00"/>
+                  <a:srgbClr val="0033A0"/>
                 </a:solidFill>
                 <a:latin typeface="Segoe UI"/>
               </a:rPr>
@@ -26269,7 +25983,7 @@
             <a:r>
               <a:rPr sz="1200" b="0" i="0">
                 <a:solidFill>
-                  <a:srgbClr val="C6CDD1"/>
+                  <a:srgbClr val="6B7A83"/>
                 </a:solidFill>
                 <a:latin typeface="Segoe UI"/>
               </a:rPr>
@@ -26278,22 +25992,12 @@
           </a:p>
         </p:txBody>
       </p:sp>
-      <p:pic>
-        <p:nvPicPr>
-          <p:cNvPr id="17" name="!! Glass C" descr="Decorative glass panel"/>
-          <p:cNvPicPr>
-            <a:picLocks noChangeAspect="1"/>
-          </p:cNvPicPr>
+      <p:sp>
+        <p:nvSpPr>
+          <p:cNvPr id="15" name="!! Glass C"/>
+          <p:cNvSpPr/>
           <p:nvPr/>
-        </p:nvPicPr>
-        <p:blipFill>
-          <a:blip r:embed="rId4">
-            <a:alphaModFix amt="50000"/>
-          </a:blip>
-          <a:stretch>
-            <a:fillRect/>
-          </a:stretch>
-        </p:blipFill>
+        </p:nvSpPr>
         <p:spPr>
           <a:xfrm>
             <a:off x="6382512" y="3639312"/>
@@ -26302,18 +26006,37 @@
           <a:prstGeom prst="rect">
             <a:avLst/>
           </a:prstGeom>
-        </p:spPr>
-      </p:pic>
-      <p:sp>
-        <p:nvSpPr>
-          <p:cNvPr id="18" name="!! Glass C rim"/>
+          <a:solidFill>
+            <a:srgbClr val="051C2C">
+              <a:alpha val="4000"/>
+            </a:srgbClr>
+          </a:solidFill>
+          <a:ln w="9525">
+            <a:solidFill>
+              <a:srgbClr val="051C2C">
+                <a:alpha val="12000"/>
+              </a:srgbClr>
+            </a:solidFill>
+          </a:ln>
+        </p:spPr>
+        <p:txBody>
+          <a:bodyPr rtlCol="0" anchor="ctr" wrap="square" lIns="0" rIns="0" tIns="0" bIns="0"/>
+          <a:lstStyle/>
+          <a:p>
+            <a:pPr algn="ctr"/>
+          </a:p>
+        </p:txBody>
+      </p:sp>
+      <p:sp>
+        <p:nvSpPr>
+          <p:cNvPr id="16" name="Rectangle 15"/>
           <p:cNvSpPr/>
           <p:nvPr/>
         </p:nvSpPr>
         <p:spPr>
           <a:xfrm>
-            <a:off x="6382512" y="3639312"/>
-            <a:ext cx="5550408" cy="1847088"/>
+            <a:off x="6547104" y="3803904"/>
+            <a:ext cx="5221224" cy="1517904"/>
           </a:xfrm>
           <a:prstGeom prst="rect">
             <a:avLst/>
@@ -26321,38 +26044,7 @@
           <a:noFill/>
           <a:ln w="9525">
             <a:solidFill>
-              <a:srgbClr val="FFFFFF">
-                <a:alpha val="16000"/>
-              </a:srgbClr>
-            </a:solidFill>
-          </a:ln>
-        </p:spPr>
-        <p:txBody>
-          <a:bodyPr rtlCol="0" anchor="ctr" wrap="square" lIns="0" rIns="0" tIns="0" bIns="0"/>
-          <a:lstStyle/>
-          <a:p>
-            <a:pPr algn="ctr"/>
-          </a:p>
-        </p:txBody>
-      </p:sp>
-      <p:sp>
-        <p:nvSpPr>
-          <p:cNvPr id="19" name="Rectangle 18"/>
-          <p:cNvSpPr/>
-          <p:nvPr/>
-        </p:nvSpPr>
-        <p:spPr>
-          <a:xfrm>
-            <a:off x="6547104" y="3803904"/>
-            <a:ext cx="5221224" cy="1517904"/>
-          </a:xfrm>
-          <a:prstGeom prst="rect">
-            <a:avLst/>
-          </a:prstGeom>
-          <a:noFill/>
-          <a:ln w="9525">
-            <a:solidFill>
-              <a:srgbClr val="C6CDD1">
+              <a:srgbClr val="6B7A83">
                 <a:alpha val="35000"/>
               </a:srgbClr>
             </a:solidFill>
@@ -26368,7 +26060,7 @@
       </p:sp>
       <p:sp>
         <p:nvSpPr>
-          <p:cNvPr id="20" name="TextBox 19"/>
+          <p:cNvPr id="17" name="TextBox 16"/>
           <p:cNvSpPr txBox="1"/>
           <p:nvPr/>
         </p:nvSpPr>
@@ -26399,7 +26091,7 @@
             <a:r>
               <a:rPr sz="1100" b="1" i="0">
                 <a:solidFill>
-                  <a:srgbClr val="D5FB00"/>
+                  <a:srgbClr val="0033A0"/>
                 </a:solidFill>
                 <a:latin typeface="Segoe UI"/>
               </a:rPr>
@@ -26418,7 +26110,7 @@
             <a:r>
               <a:rPr sz="1200" b="0" i="0">
                 <a:solidFill>
-                  <a:srgbClr val="C6CDD1"/>
+                  <a:srgbClr val="6B7A83"/>
                 </a:solidFill>
                 <a:latin typeface="Segoe UI"/>
               </a:rPr>

--- a/presentations/Tenneco_Robotics_Setter_Diego_de_Leon.pptx
+++ b/presentations/Tenneco_Robotics_Setter_Diego_de_Leon.pptx
@@ -15875,22 +15875,12 @@
           </a:p>
         </p:txBody>
       </p:sp>
-      <p:pic>
-        <p:nvPicPr>
-          <p:cNvPr id="4" name="!! Glass A" descr="Decorative glass panel"/>
-          <p:cNvPicPr>
-            <a:picLocks noChangeAspect="1"/>
-          </p:cNvPicPr>
+      <p:sp>
+        <p:nvSpPr>
+          <p:cNvPr id="4" name="!! Glass A"/>
+          <p:cNvSpPr/>
           <p:nvPr/>
-        </p:nvPicPr>
-        <p:blipFill>
-          <a:blip r:embed="rId2">
-            <a:alphaModFix amt="50000"/>
-          </a:blip>
-          <a:stretch>
-            <a:fillRect/>
-          </a:stretch>
-        </p:blipFill>
+        </p:nvSpPr>
         <p:spPr>
           <a:xfrm>
             <a:off x="256032" y="1600200"/>
@@ -15899,23 +15889,14 @@
           <a:prstGeom prst="rect">
             <a:avLst/>
           </a:prstGeom>
-        </p:spPr>
-      </p:pic>
-      <p:sp>
-        <p:nvSpPr>
-          <p:cNvPr id="5" name="!! Glass A rim"/>
-          <p:cNvSpPr/>
-          <p:nvPr/>
-        </p:nvSpPr>
-        <p:spPr>
-          <a:xfrm>
-            <a:off x="256032" y="1600200"/>
-            <a:ext cx="7543800" cy="3886200"/>
-          </a:xfrm>
-          <a:prstGeom prst="rect">
-            <a:avLst/>
-          </a:prstGeom>
-          <a:noFill/>
+          <a:blipFill rotWithShape="1">
+            <a:blip r:embed="rId2">
+              <a:alphaModFix amt="50000"/>
+            </a:blip>
+            <a:stretch>
+              <a:fillRect/>
+            </a:stretch>
+          </a:blipFill>
           <a:ln w="9525">
             <a:solidFill>
               <a:srgbClr val="FFFFFF">
@@ -15934,14 +15915,56 @@
       </p:sp>
       <p:sp>
         <p:nvSpPr>
+          <p:cNvPr id="5" name="TextBox 4"/>
+          <p:cNvSpPr txBox="1"/>
+          <p:nvPr/>
+        </p:nvSpPr>
+        <p:spPr>
+          <a:xfrm>
+            <a:off x="621792" y="1901952"/>
+            <a:ext cx="5486400" cy="274320"/>
+          </a:xfrm>
+          <a:prstGeom prst="rect">
+            <a:avLst/>
+          </a:prstGeom>
+          <a:noFill/>
+        </p:spPr>
+        <p:txBody>
+          <a:bodyPr wrap="square" lIns="0" rIns="0" tIns="0" bIns="0" anchor="t">
+            <a:spAutoFit/>
+          </a:bodyPr>
+          <a:lstStyle/>
+          <a:p>
+            <a:pPr algn="l">
+              <a:spcBef>
+                <a:spcPts val="0"/>
+              </a:spcBef>
+              <a:spcAft>
+                <a:spcPts val="0"/>
+              </a:spcAft>
+            </a:pPr>
+            <a:r>
+              <a:rPr sz="1600" b="1" i="0">
+                <a:solidFill>
+                  <a:srgbClr val="D5FB00"/>
+                </a:solidFill>
+                <a:latin typeface="Segoe UI"/>
+              </a:rPr>
+              <a:t>CYCLE TIME PER PART</a:t>
+            </a:r>
+          </a:p>
+        </p:txBody>
+      </p:sp>
+      <p:sp>
+        <p:nvSpPr>
           <p:cNvPr id="6" name="TextBox 5"/>
           <p:cNvSpPr txBox="1"/>
           <p:nvPr/>
         </p:nvSpPr>
         <p:spPr>
           <a:xfrm>
-            <a:off x="621792" y="1901952"/>
-            <a:ext cx="5486400" cy="274320"/>
+            <a:off x="621792" y="2395728"/>
+            <a:ext cx="3657600" cy="274320"/>
           </a:xfrm>
           <a:prstGeom prst="rect">
             <a:avLst/>
@@ -15963,48 +15986,6 @@
               </a:spcAft>
             </a:pPr>
             <a:r>
-              <a:rPr sz="1600" b="1" i="0">
-                <a:solidFill>
-                  <a:srgbClr val="D5FB00"/>
-                </a:solidFill>
-                <a:latin typeface="Segoe UI"/>
-              </a:rPr>
-              <a:t>CYCLE TIME PER PART</a:t>
-            </a:r>
-          </a:p>
-        </p:txBody>
-      </p:sp>
-      <p:sp>
-        <p:nvSpPr>
-          <p:cNvPr id="7" name="TextBox 6"/>
-          <p:cNvSpPr txBox="1"/>
-          <p:nvPr/>
-        </p:nvSpPr>
-        <p:spPr>
-          <a:xfrm>
-            <a:off x="621792" y="2395728"/>
-            <a:ext cx="3657600" cy="274320"/>
-          </a:xfrm>
-          <a:prstGeom prst="rect">
-            <a:avLst/>
-          </a:prstGeom>
-          <a:noFill/>
-        </p:spPr>
-        <p:txBody>
-          <a:bodyPr wrap="square" lIns="0" rIns="0" tIns="0" bIns="0" anchor="t">
-            <a:spAutoFit/>
-          </a:bodyPr>
-          <a:lstStyle/>
-          <a:p>
-            <a:pPr algn="l">
-              <a:spcBef>
-                <a:spcPts val="0"/>
-              </a:spcBef>
-              <a:spcAft>
-                <a:spcPts val="0"/>
-              </a:spcAft>
-            </a:pPr>
-            <a:r>
               <a:rPr sz="1400" b="1" i="0">
                 <a:solidFill>
                   <a:srgbClr val="FFFFFF"/>
@@ -16018,7 +15999,7 @@
       </p:sp>
       <p:sp>
         <p:nvSpPr>
-          <p:cNvPr id="8" name="Rectangle 7"/>
+          <p:cNvPr id="7" name="Rectangle 6"/>
           <p:cNvSpPr/>
           <p:nvPr/>
         </p:nvSpPr>
@@ -16065,7 +16046,7 @@
       </p:sp>
       <p:sp>
         <p:nvSpPr>
-          <p:cNvPr id="9" name="Rectangle 8"/>
+          <p:cNvPr id="8" name="Rectangle 7"/>
           <p:cNvSpPr/>
           <p:nvPr/>
         </p:nvSpPr>
@@ -16112,7 +16093,7 @@
       </p:sp>
       <p:sp>
         <p:nvSpPr>
-          <p:cNvPr id="10" name="Rectangle 9"/>
+          <p:cNvPr id="9" name="Rectangle 8"/>
           <p:cNvSpPr/>
           <p:nvPr/>
         </p:nvSpPr>
@@ -16159,14 +16140,56 @@
       </p:sp>
       <p:sp>
         <p:nvSpPr>
+          <p:cNvPr id="10" name="TextBox 9"/>
+          <p:cNvSpPr txBox="1"/>
+          <p:nvPr/>
+        </p:nvSpPr>
+        <p:spPr>
+          <a:xfrm>
+            <a:off x="6217920" y="2779776"/>
+            <a:ext cx="1188720" cy="365760"/>
+          </a:xfrm>
+          <a:prstGeom prst="rect">
+            <a:avLst/>
+          </a:prstGeom>
+          <a:noFill/>
+        </p:spPr>
+        <p:txBody>
+          <a:bodyPr wrap="square" lIns="0" rIns="0" tIns="0" bIns="0" anchor="t">
+            <a:spAutoFit/>
+          </a:bodyPr>
+          <a:lstStyle/>
+          <a:p>
+            <a:pPr algn="l">
+              <a:spcBef>
+                <a:spcPts val="0"/>
+              </a:spcBef>
+              <a:spcAft>
+                <a:spcPts val="0"/>
+              </a:spcAft>
+            </a:pPr>
+            <a:r>
+              <a:rPr sz="2000" b="1" i="0">
+                <a:solidFill>
+                  <a:srgbClr val="FFFFFF"/>
+                </a:solidFill>
+                <a:latin typeface="Segoe UI"/>
+              </a:rPr>
+              <a:t>174 s</a:t>
+            </a:r>
+          </a:p>
+        </p:txBody>
+      </p:sp>
+      <p:sp>
+        <p:nvSpPr>
           <p:cNvPr id="11" name="TextBox 10"/>
           <p:cNvSpPr txBox="1"/>
           <p:nvPr/>
         </p:nvSpPr>
         <p:spPr>
           <a:xfrm>
-            <a:off x="6217920" y="2779776"/>
-            <a:ext cx="1188720" cy="365760"/>
+            <a:off x="621792" y="3511296"/>
+            <a:ext cx="3657600" cy="274320"/>
           </a:xfrm>
           <a:prstGeom prst="rect">
             <a:avLst/>
@@ -16188,48 +16211,6 @@
               </a:spcAft>
             </a:pPr>
             <a:r>
-              <a:rPr sz="2000" b="1" i="0">
-                <a:solidFill>
-                  <a:srgbClr val="FFFFFF"/>
-                </a:solidFill>
-                <a:latin typeface="Segoe UI"/>
-              </a:rPr>
-              <a:t>174 s</a:t>
-            </a:r>
-          </a:p>
-        </p:txBody>
-      </p:sp>
-      <p:sp>
-        <p:nvSpPr>
-          <p:cNvPr id="12" name="TextBox 11"/>
-          <p:cNvSpPr txBox="1"/>
-          <p:nvPr/>
-        </p:nvSpPr>
-        <p:spPr>
-          <a:xfrm>
-            <a:off x="621792" y="3511296"/>
-            <a:ext cx="3657600" cy="274320"/>
-          </a:xfrm>
-          <a:prstGeom prst="rect">
-            <a:avLst/>
-          </a:prstGeom>
-          <a:noFill/>
-        </p:spPr>
-        <p:txBody>
-          <a:bodyPr wrap="square" lIns="0" rIns="0" tIns="0" bIns="0" anchor="t">
-            <a:spAutoFit/>
-          </a:bodyPr>
-          <a:lstStyle/>
-          <a:p>
-            <a:pPr algn="l">
-              <a:spcBef>
-                <a:spcPts val="0"/>
-              </a:spcBef>
-              <a:spcAft>
-                <a:spcPts val="0"/>
-              </a:spcAft>
-            </a:pPr>
-            <a:r>
               <a:rPr sz="1400" b="1" i="0">
                 <a:solidFill>
                   <a:srgbClr val="FFFFFF"/>
@@ -16243,7 +16224,7 @@
       </p:sp>
       <p:sp>
         <p:nvSpPr>
-          <p:cNvPr id="13" name="Rectangle 12"/>
+          <p:cNvPr id="12" name="Rectangle 11"/>
           <p:cNvSpPr/>
           <p:nvPr/>
         </p:nvSpPr>
@@ -16290,7 +16271,7 @@
       </p:sp>
       <p:sp>
         <p:nvSpPr>
-          <p:cNvPr id="14" name="Rectangle 13"/>
+          <p:cNvPr id="13" name="Rectangle 12"/>
           <p:cNvSpPr/>
           <p:nvPr/>
         </p:nvSpPr>
@@ -16335,7 +16316,7 @@
       </p:sp>
       <p:sp>
         <p:nvSpPr>
-          <p:cNvPr id="15" name="Rectangle 14"/>
+          <p:cNvPr id="14" name="Rectangle 13"/>
           <p:cNvSpPr/>
           <p:nvPr/>
         </p:nvSpPr>
@@ -16382,7 +16363,7 @@
       </p:sp>
       <p:sp>
         <p:nvSpPr>
-          <p:cNvPr id="16" name="TextBox 15"/>
+          <p:cNvPr id="15" name="TextBox 14"/>
           <p:cNvSpPr txBox="1"/>
           <p:nvPr/>
         </p:nvSpPr>
@@ -16424,7 +16405,7 @@
       </p:sp>
       <p:sp>
         <p:nvSpPr>
-          <p:cNvPr id="17" name="Rectangle 16"/>
+          <p:cNvPr id="16" name="Rectangle 15"/>
           <p:cNvSpPr/>
           <p:nvPr/>
         </p:nvSpPr>
@@ -16455,7 +16436,7 @@
       </p:sp>
       <p:sp>
         <p:nvSpPr>
-          <p:cNvPr id="18" name="TextBox 17"/>
+          <p:cNvPr id="17" name="TextBox 16"/>
           <p:cNvSpPr txBox="1"/>
           <p:nvPr/>
         </p:nvSpPr>
@@ -16497,7 +16478,7 @@
       </p:sp>
       <p:sp>
         <p:nvSpPr>
-          <p:cNvPr id="19" name="Rectangle 18"/>
+          <p:cNvPr id="18" name="Rectangle 17"/>
           <p:cNvSpPr/>
           <p:nvPr/>
         </p:nvSpPr>
@@ -16528,7 +16509,7 @@
       </p:sp>
       <p:sp>
         <p:nvSpPr>
-          <p:cNvPr id="20" name="TextBox 19"/>
+          <p:cNvPr id="19" name="TextBox 18"/>
           <p:cNvSpPr txBox="1"/>
           <p:nvPr/>
         </p:nvSpPr>
@@ -16570,7 +16551,7 @@
       </p:sp>
       <p:sp>
         <p:nvSpPr>
-          <p:cNvPr id="21" name="Rectangle 20"/>
+          <p:cNvPr id="20" name="Rectangle 19"/>
           <p:cNvSpPr/>
           <p:nvPr/>
         </p:nvSpPr>
@@ -16599,14 +16580,56 @@
       </p:sp>
       <p:sp>
         <p:nvSpPr>
+          <p:cNvPr id="21" name="TextBox 20"/>
+          <p:cNvSpPr txBox="1"/>
+          <p:nvPr/>
+        </p:nvSpPr>
+        <p:spPr>
+          <a:xfrm>
+            <a:off x="4718304" y="4654296"/>
+            <a:ext cx="1645920" cy="228600"/>
+          </a:xfrm>
+          <a:prstGeom prst="rect">
+            <a:avLst/>
+          </a:prstGeom>
+          <a:noFill/>
+        </p:spPr>
+        <p:txBody>
+          <a:bodyPr wrap="square" lIns="0" rIns="0" tIns="0" bIns="0" anchor="t">
+            <a:spAutoFit/>
+          </a:bodyPr>
+          <a:lstStyle/>
+          <a:p>
+            <a:pPr algn="l">
+              <a:spcBef>
+                <a:spcPts val="0"/>
+              </a:spcBef>
+              <a:spcAft>
+                <a:spcPts val="0"/>
+              </a:spcAft>
+            </a:pPr>
+            <a:r>
+              <a:rPr sz="1100" b="0" i="0">
+                <a:solidFill>
+                  <a:srgbClr val="C6CDD1"/>
+                </a:solidFill>
+                <a:latin typeface="Segoe UI"/>
+              </a:rPr>
+              <a:t>Welding by robot</a:t>
+            </a:r>
+          </a:p>
+        </p:txBody>
+      </p:sp>
+      <p:sp>
+        <p:nvSpPr>
           <p:cNvPr id="22" name="TextBox 21"/>
           <p:cNvSpPr txBox="1"/>
           <p:nvPr/>
         </p:nvSpPr>
         <p:spPr>
           <a:xfrm>
-            <a:off x="4718304" y="4654296"/>
-            <a:ext cx="1645920" cy="228600"/>
+            <a:off x="621792" y="5010912"/>
+            <a:ext cx="6858000" cy="274320"/>
           </a:xfrm>
           <a:prstGeom prst="rect">
             <a:avLst/>
@@ -16630,48 +16653,6 @@
             <a:r>
               <a:rPr sz="1100" b="0" i="0">
                 <a:solidFill>
-                  <a:srgbClr val="C6CDD1"/>
-                </a:solidFill>
-                <a:latin typeface="Segoe UI"/>
-              </a:rPr>
-              <a:t>Welding by robot</a:t>
-            </a:r>
-          </a:p>
-        </p:txBody>
-      </p:sp>
-      <p:sp>
-        <p:nvSpPr>
-          <p:cNvPr id="23" name="TextBox 22"/>
-          <p:cNvSpPr txBox="1"/>
-          <p:nvPr/>
-        </p:nvSpPr>
-        <p:spPr>
-          <a:xfrm>
-            <a:off x="621792" y="5010912"/>
-            <a:ext cx="6858000" cy="274320"/>
-          </a:xfrm>
-          <a:prstGeom prst="rect">
-            <a:avLst/>
-          </a:prstGeom>
-          <a:noFill/>
-        </p:spPr>
-        <p:txBody>
-          <a:bodyPr wrap="square" lIns="0" rIns="0" tIns="0" bIns="0" anchor="t">
-            <a:spAutoFit/>
-          </a:bodyPr>
-          <a:lstStyle/>
-          <a:p>
-            <a:pPr algn="l">
-              <a:spcBef>
-                <a:spcPts val="0"/>
-              </a:spcBef>
-              <a:spcAft>
-                <a:spcPts val="0"/>
-              </a:spcAft>
-            </a:pPr>
-            <a:r>
-              <a:rPr sz="1100" b="0" i="0">
-                <a:solidFill>
                   <a:srgbClr val="8A9BA8"/>
                 </a:solidFill>
                 <a:latin typeface="Segoe UI"/>
@@ -16681,22 +16662,12 @@
           </a:p>
         </p:txBody>
       </p:sp>
-      <p:pic>
-        <p:nvPicPr>
-          <p:cNvPr id="24" name="!! Glass B" descr="Decorative glass panel"/>
-          <p:cNvPicPr>
-            <a:picLocks noChangeAspect="1"/>
-          </p:cNvPicPr>
+      <p:sp>
+        <p:nvSpPr>
+          <p:cNvPr id="23" name="!! Glass B"/>
+          <p:cNvSpPr/>
           <p:nvPr/>
-        </p:nvPicPr>
-        <p:blipFill>
-          <a:blip r:embed="rId3">
-            <a:alphaModFix amt="50000"/>
-          </a:blip>
-          <a:stretch>
-            <a:fillRect/>
-          </a:stretch>
-        </p:blipFill>
+        </p:nvSpPr>
         <p:spPr>
           <a:xfrm>
             <a:off x="8092440" y="1600200"/>
@@ -16705,23 +16676,14 @@
           <a:prstGeom prst="rect">
             <a:avLst/>
           </a:prstGeom>
-        </p:spPr>
-      </p:pic>
-      <p:sp>
-        <p:nvSpPr>
-          <p:cNvPr id="25" name="!! Glass B rim"/>
-          <p:cNvSpPr/>
-          <p:nvPr/>
-        </p:nvSpPr>
-        <p:spPr>
-          <a:xfrm>
-            <a:off x="8092440" y="1600200"/>
-            <a:ext cx="3840480" cy="3886200"/>
-          </a:xfrm>
-          <a:prstGeom prst="rect">
-            <a:avLst/>
-          </a:prstGeom>
-          <a:noFill/>
+          <a:blipFill rotWithShape="1">
+            <a:blip r:embed="rId3">
+              <a:alphaModFix amt="50000"/>
+            </a:blip>
+            <a:stretch>
+              <a:fillRect/>
+            </a:stretch>
+          </a:blipFill>
           <a:ln w="9525">
             <a:solidFill>
               <a:srgbClr val="FFFFFF">
@@ -16740,13 +16702,97 @@
       </p:sp>
       <p:sp>
         <p:nvSpPr>
+          <p:cNvPr id="24" name="TextBox 23"/>
+          <p:cNvSpPr txBox="1"/>
+          <p:nvPr/>
+        </p:nvSpPr>
+        <p:spPr>
+          <a:xfrm>
+            <a:off x="8458200" y="1847088"/>
+            <a:ext cx="3291840" cy="548640"/>
+          </a:xfrm>
+          <a:prstGeom prst="rect">
+            <a:avLst/>
+          </a:prstGeom>
+          <a:noFill/>
+        </p:spPr>
+        <p:txBody>
+          <a:bodyPr wrap="square" lIns="0" rIns="0" tIns="0" bIns="0" anchor="t">
+            <a:spAutoFit/>
+          </a:bodyPr>
+          <a:lstStyle/>
+          <a:p>
+            <a:pPr algn="l">
+              <a:spcBef>
+                <a:spcPts val="0"/>
+              </a:spcBef>
+              <a:spcAft>
+                <a:spcPts val="0"/>
+              </a:spcAft>
+            </a:pPr>
+            <a:r>
+              <a:rPr sz="3200" b="1" i="0">
+                <a:solidFill>
+                  <a:srgbClr val="D5FB00"/>
+                </a:solidFill>
+                <a:latin typeface="Segoe UI"/>
+              </a:rPr>
+              <a:t>−47%</a:t>
+            </a:r>
+          </a:p>
+        </p:txBody>
+      </p:sp>
+      <p:sp>
+        <p:nvSpPr>
+          <p:cNvPr id="25" name="TextBox 24"/>
+          <p:cNvSpPr txBox="1"/>
+          <p:nvPr/>
+        </p:nvSpPr>
+        <p:spPr>
+          <a:xfrm>
+            <a:off x="8458200" y="2450592"/>
+            <a:ext cx="3291840" cy="274320"/>
+          </a:xfrm>
+          <a:prstGeom prst="rect">
+            <a:avLst/>
+          </a:prstGeom>
+          <a:noFill/>
+        </p:spPr>
+        <p:txBody>
+          <a:bodyPr wrap="square" lIns="0" rIns="0" tIns="0" bIns="0" anchor="t">
+            <a:spAutoFit/>
+          </a:bodyPr>
+          <a:lstStyle/>
+          <a:p>
+            <a:pPr algn="l">
+              <a:spcBef>
+                <a:spcPts val="0"/>
+              </a:spcBef>
+              <a:spcAft>
+                <a:spcPts val="0"/>
+              </a:spcAft>
+            </a:pPr>
+            <a:r>
+              <a:rPr sz="1200" b="0" i="0">
+                <a:solidFill>
+                  <a:srgbClr val="C6CDD1"/>
+                </a:solidFill>
+                <a:latin typeface="Segoe UI"/>
+              </a:rPr>
+              <a:t>cycle time, 174 s to 93 s</a:t>
+            </a:r>
+          </a:p>
+        </p:txBody>
+      </p:sp>
+      <p:sp>
+        <p:nvSpPr>
           <p:cNvPr id="26" name="TextBox 25"/>
           <p:cNvSpPr txBox="1"/>
           <p:nvPr/>
         </p:nvSpPr>
         <p:spPr>
           <a:xfrm>
-            <a:off x="8458200" y="1847088"/>
+            <a:off x="8458200" y="3035808"/>
             <a:ext cx="3291840" cy="548640"/>
           </a:xfrm>
           <a:prstGeom prst="rect">
@@ -16775,7 +16821,7 @@
                 </a:solidFill>
                 <a:latin typeface="Segoe UI"/>
               </a:rPr>
-              <a:t>−47%</a:t>
+              <a:t>−56%</a:t>
             </a:r>
           </a:p>
         </p:txBody>
@@ -16788,7 +16834,7 @@
         </p:nvSpPr>
         <p:spPr>
           <a:xfrm>
-            <a:off x="8458200" y="2450592"/>
+            <a:off x="8458200" y="3639312"/>
             <a:ext cx="3291840" cy="274320"/>
           </a:xfrm>
           <a:prstGeom prst="rect">
@@ -16817,7 +16863,7 @@
                 </a:solidFill>
                 <a:latin typeface="Segoe UI"/>
               </a:rPr>
-              <a:t>cycle time, 174 s to 93 s</a:t>
+              <a:t>welding time, 146 s to 65 s</a:t>
             </a:r>
           </a:p>
         </p:txBody>
@@ -16830,7 +16876,7 @@
         </p:nvSpPr>
         <p:spPr>
           <a:xfrm>
-            <a:off x="8458200" y="3035808"/>
+            <a:off x="8458200" y="4224528"/>
             <a:ext cx="3291840" cy="548640"/>
           </a:xfrm>
           <a:prstGeom prst="rect">
@@ -16859,7 +16905,7 @@
                 </a:solidFill>
                 <a:latin typeface="Segoe UI"/>
               </a:rPr>
-              <a:t>−56%</a:t>
+              <a:t>81 s</a:t>
             </a:r>
           </a:p>
         </p:txBody>
@@ -16867,90 +16913,6 @@
       <p:sp>
         <p:nvSpPr>
           <p:cNvPr id="29" name="TextBox 28"/>
-          <p:cNvSpPr txBox="1"/>
-          <p:nvPr/>
-        </p:nvSpPr>
-        <p:spPr>
-          <a:xfrm>
-            <a:off x="8458200" y="3639312"/>
-            <a:ext cx="3291840" cy="274320"/>
-          </a:xfrm>
-          <a:prstGeom prst="rect">
-            <a:avLst/>
-          </a:prstGeom>
-          <a:noFill/>
-        </p:spPr>
-        <p:txBody>
-          <a:bodyPr wrap="square" lIns="0" rIns="0" tIns="0" bIns="0" anchor="t">
-            <a:spAutoFit/>
-          </a:bodyPr>
-          <a:lstStyle/>
-          <a:p>
-            <a:pPr algn="l">
-              <a:spcBef>
-                <a:spcPts val="0"/>
-              </a:spcBef>
-              <a:spcAft>
-                <a:spcPts val="0"/>
-              </a:spcAft>
-            </a:pPr>
-            <a:r>
-              <a:rPr sz="1200" b="0" i="0">
-                <a:solidFill>
-                  <a:srgbClr val="C6CDD1"/>
-                </a:solidFill>
-                <a:latin typeface="Segoe UI"/>
-              </a:rPr>
-              <a:t>welding time, 146 s to 65 s</a:t>
-            </a:r>
-          </a:p>
-        </p:txBody>
-      </p:sp>
-      <p:sp>
-        <p:nvSpPr>
-          <p:cNvPr id="30" name="TextBox 29"/>
-          <p:cNvSpPr txBox="1"/>
-          <p:nvPr/>
-        </p:nvSpPr>
-        <p:spPr>
-          <a:xfrm>
-            <a:off x="8458200" y="4224528"/>
-            <a:ext cx="3291840" cy="548640"/>
-          </a:xfrm>
-          <a:prstGeom prst="rect">
-            <a:avLst/>
-          </a:prstGeom>
-          <a:noFill/>
-        </p:spPr>
-        <p:txBody>
-          <a:bodyPr wrap="square" lIns="0" rIns="0" tIns="0" bIns="0" anchor="t">
-            <a:spAutoFit/>
-          </a:bodyPr>
-          <a:lstStyle/>
-          <a:p>
-            <a:pPr algn="l">
-              <a:spcBef>
-                <a:spcPts val="0"/>
-              </a:spcBef>
-              <a:spcAft>
-                <a:spcPts val="0"/>
-              </a:spcAft>
-            </a:pPr>
-            <a:r>
-              <a:rPr sz="3200" b="1" i="0">
-                <a:solidFill>
-                  <a:srgbClr val="D5FB00"/>
-                </a:solidFill>
-                <a:latin typeface="Segoe UI"/>
-              </a:rPr>
-              <a:t>81 s</a:t>
-            </a:r>
-          </a:p>
-        </p:txBody>
-      </p:sp>
-      <p:sp>
-        <p:nvSpPr>
-          <p:cNvPr id="31" name="TextBox 30"/>
           <p:cNvSpPr txBox="1"/>
           <p:nvPr/>
         </p:nvSpPr>
@@ -17076,7 +17038,7 @@
       </p:sp>
       <p:sp>
         <p:nvSpPr>
-          <p:cNvPr id="4" name="!! Card 1"/>
+          <p:cNvPr id="4" name="!! Glass A"/>
           <p:cNvSpPr/>
           <p:nvPr/>
         </p:nvSpPr>
@@ -17404,7 +17366,7 @@
       </p:sp>
       <p:sp>
         <p:nvSpPr>
-          <p:cNvPr id="12" name="!! Card 3"/>
+          <p:cNvPr id="12" name="!! Glass B"/>
           <p:cNvSpPr/>
           <p:nvPr/>
         </p:nvSpPr>
@@ -17769,22 +17731,12 @@
           </a:p>
         </p:txBody>
       </p:sp>
-      <p:pic>
-        <p:nvPicPr>
-          <p:cNvPr id="4" name="!! Glass A" descr="Decorative glass panel"/>
-          <p:cNvPicPr>
-            <a:picLocks noChangeAspect="1"/>
-          </p:cNvPicPr>
+      <p:sp>
+        <p:nvSpPr>
+          <p:cNvPr id="4" name="!! Glass A"/>
+          <p:cNvSpPr/>
           <p:nvPr/>
-        </p:nvPicPr>
-        <p:blipFill>
-          <a:blip r:embed="rId2">
-            <a:alphaModFix amt="50000"/>
-          </a:blip>
-          <a:stretch>
-            <a:fillRect/>
-          </a:stretch>
-        </p:blipFill>
+        </p:nvSpPr>
         <p:spPr>
           <a:xfrm>
             <a:off x="256032" y="1600200"/>
@@ -17793,23 +17745,14 @@
           <a:prstGeom prst="rect">
             <a:avLst/>
           </a:prstGeom>
-        </p:spPr>
-      </p:pic>
-      <p:sp>
-        <p:nvSpPr>
-          <p:cNvPr id="5" name="!! Glass A rim"/>
-          <p:cNvSpPr/>
-          <p:nvPr/>
-        </p:nvSpPr>
-        <p:spPr>
-          <a:xfrm>
-            <a:off x="256032" y="1600200"/>
-            <a:ext cx="7223760" cy="3886200"/>
-          </a:xfrm>
-          <a:prstGeom prst="rect">
-            <a:avLst/>
-          </a:prstGeom>
-          <a:noFill/>
+          <a:blipFill rotWithShape="1">
+            <a:blip r:embed="rId2">
+              <a:alphaModFix amt="50000"/>
+            </a:blip>
+            <a:stretch>
+              <a:fillRect/>
+            </a:stretch>
+          </a:blipFill>
           <a:ln w="9525">
             <a:solidFill>
               <a:srgbClr val="FFFFFF">
@@ -17828,14 +17771,56 @@
       </p:sp>
       <p:sp>
         <p:nvSpPr>
+          <p:cNvPr id="5" name="TextBox 4"/>
+          <p:cNvSpPr txBox="1"/>
+          <p:nvPr/>
+        </p:nvSpPr>
+        <p:spPr>
+          <a:xfrm>
+            <a:off x="621792" y="1901952"/>
+            <a:ext cx="5486400" cy="274320"/>
+          </a:xfrm>
+          <a:prstGeom prst="rect">
+            <a:avLst/>
+          </a:prstGeom>
+          <a:noFill/>
+        </p:spPr>
+        <p:txBody>
+          <a:bodyPr wrap="square" lIns="0" rIns="0" tIns="0" bIns="0" anchor="t">
+            <a:spAutoFit/>
+          </a:bodyPr>
+          <a:lstStyle/>
+          <a:p>
+            <a:pPr algn="l">
+              <a:spcBef>
+                <a:spcPts val="0"/>
+              </a:spcBef>
+              <a:spcAft>
+                <a:spcPts val="0"/>
+              </a:spcAft>
+            </a:pPr>
+            <a:r>
+              <a:rPr sz="1600" b="1" i="0">
+                <a:solidFill>
+                  <a:srgbClr val="D5FB00"/>
+                </a:solidFill>
+                <a:latin typeface="Segoe UI"/>
+              </a:rPr>
+              <a:t>NEXT LEVELS</a:t>
+            </a:r>
+          </a:p>
+        </p:txBody>
+      </p:sp>
+      <p:sp>
+        <p:nvSpPr>
           <p:cNvPr id="6" name="TextBox 5"/>
           <p:cNvSpPr txBox="1"/>
           <p:nvPr/>
         </p:nvSpPr>
         <p:spPr>
           <a:xfrm>
-            <a:off x="621792" y="1901952"/>
-            <a:ext cx="5486400" cy="274320"/>
+            <a:off x="621792" y="2359152"/>
+            <a:ext cx="457200" cy="457200"/>
           </a:xfrm>
           <a:prstGeom prst="rect">
             <a:avLst/>
@@ -17857,13 +17842,13 @@
               </a:spcAft>
             </a:pPr>
             <a:r>
-              <a:rPr sz="1600" b="1" i="0">
+              <a:rPr sz="2400" b="1" i="0">
                 <a:solidFill>
                   <a:srgbClr val="D5FB00"/>
                 </a:solidFill>
                 <a:latin typeface="Segoe UI"/>
               </a:rPr>
-              <a:t>NEXT LEVELS</a:t>
+              <a:t>L</a:t>
             </a:r>
           </a:p>
         </p:txBody>
@@ -17876,8 +17861,8 @@
         </p:nvSpPr>
         <p:spPr>
           <a:xfrm>
-            <a:off x="621792" y="2359152"/>
-            <a:ext cx="457200" cy="457200"/>
+            <a:off x="1143000" y="2395728"/>
+            <a:ext cx="5943600" cy="320040"/>
           </a:xfrm>
           <a:prstGeom prst="rect">
             <a:avLst/>
@@ -17899,13 +17884,13 @@
               </a:spcAft>
             </a:pPr>
             <a:r>
-              <a:rPr sz="2400" b="1" i="0">
-                <a:solidFill>
-                  <a:srgbClr val="D5FB00"/>
+              <a:rPr sz="1400" b="0" i="0">
+                <a:solidFill>
+                  <a:srgbClr val="FFFFFF"/>
                 </a:solidFill>
                 <a:latin typeface="Segoe UI"/>
               </a:rPr>
-              <a:t>L</a:t>
+              <a:t>Validate settings and find defects at the cell, with support.</a:t>
             </a:r>
           </a:p>
         </p:txBody>
@@ -17918,8 +17903,8 @@
         </p:nvSpPr>
         <p:spPr>
           <a:xfrm>
-            <a:off x="1143000" y="2395728"/>
-            <a:ext cx="5943600" cy="320040"/>
+            <a:off x="1143000" y="2724912"/>
+            <a:ext cx="5943600" cy="274320"/>
           </a:xfrm>
           <a:prstGeom prst="rect">
             <a:avLst/>
@@ -17941,48 +17926,6 @@
               </a:spcAft>
             </a:pPr>
             <a:r>
-              <a:rPr sz="1400" b="0" i="0">
-                <a:solidFill>
-                  <a:srgbClr val="FFFFFF"/>
-                </a:solidFill>
-                <a:latin typeface="Segoe UI"/>
-              </a:rPr>
-              <a:t>Validate settings and find defects at the cell, with support.</a:t>
-            </a:r>
-          </a:p>
-        </p:txBody>
-      </p:sp>
-      <p:sp>
-        <p:nvSpPr>
-          <p:cNvPr id="9" name="TextBox 8"/>
-          <p:cNvSpPr txBox="1"/>
-          <p:nvPr/>
-        </p:nvSpPr>
-        <p:spPr>
-          <a:xfrm>
-            <a:off x="1143000" y="2724912"/>
-            <a:ext cx="5943600" cy="274320"/>
-          </a:xfrm>
-          <a:prstGeom prst="rect">
-            <a:avLst/>
-          </a:prstGeom>
-          <a:noFill/>
-        </p:spPr>
-        <p:txBody>
-          <a:bodyPr wrap="square" lIns="0" rIns="0" tIns="0" bIns="0" anchor="t">
-            <a:spAutoFit/>
-          </a:bodyPr>
-          <a:lstStyle/>
-          <a:p>
-            <a:pPr algn="l">
-              <a:spcBef>
-                <a:spcPts val="0"/>
-              </a:spcBef>
-              <a:spcAft>
-                <a:spcPts val="0"/>
-              </a:spcAft>
-            </a:pPr>
-            <a:r>
               <a:rPr sz="1200" b="0" i="0">
                 <a:solidFill>
                   <a:srgbClr val="C6CDD1"/>
@@ -17996,7 +17939,7 @@
       </p:sp>
       <p:sp>
         <p:nvSpPr>
-          <p:cNvPr id="10" name="Rectangle 9"/>
+          <p:cNvPr id="9" name="Rectangle 8"/>
           <p:cNvSpPr/>
           <p:nvPr/>
         </p:nvSpPr>
@@ -18027,14 +17970,56 @@
       </p:sp>
       <p:sp>
         <p:nvSpPr>
+          <p:cNvPr id="10" name="TextBox 9"/>
+          <p:cNvSpPr txBox="1"/>
+          <p:nvPr/>
+        </p:nvSpPr>
+        <p:spPr>
+          <a:xfrm>
+            <a:off x="621792" y="3319272"/>
+            <a:ext cx="457200" cy="457200"/>
+          </a:xfrm>
+          <a:prstGeom prst="rect">
+            <a:avLst/>
+          </a:prstGeom>
+          <a:noFill/>
+        </p:spPr>
+        <p:txBody>
+          <a:bodyPr wrap="square" lIns="0" rIns="0" tIns="0" bIns="0" anchor="t">
+            <a:spAutoFit/>
+          </a:bodyPr>
+          <a:lstStyle/>
+          <a:p>
+            <a:pPr algn="l">
+              <a:spcBef>
+                <a:spcPts val="0"/>
+              </a:spcBef>
+              <a:spcAft>
+                <a:spcPts val="0"/>
+              </a:spcAft>
+            </a:pPr>
+            <a:r>
+              <a:rPr sz="2400" b="1" i="0">
+                <a:solidFill>
+                  <a:srgbClr val="D5FB00"/>
+                </a:solidFill>
+                <a:latin typeface="Segoe UI"/>
+              </a:rPr>
+              <a:t>U</a:t>
+            </a:r>
+          </a:p>
+        </p:txBody>
+      </p:sp>
+      <p:sp>
+        <p:nvSpPr>
           <p:cNvPr id="11" name="TextBox 10"/>
           <p:cNvSpPr txBox="1"/>
           <p:nvPr/>
         </p:nvSpPr>
         <p:spPr>
           <a:xfrm>
-            <a:off x="621792" y="3319272"/>
-            <a:ext cx="457200" cy="457200"/>
+            <a:off x="1143000" y="3355848"/>
+            <a:ext cx="5943600" cy="320040"/>
           </a:xfrm>
           <a:prstGeom prst="rect">
             <a:avLst/>
@@ -18056,13 +18041,13 @@
               </a:spcAft>
             </a:pPr>
             <a:r>
-              <a:rPr sz="2400" b="1" i="0">
-                <a:solidFill>
-                  <a:srgbClr val="D5FB00"/>
+              <a:rPr sz="1400" b="0" i="0">
+                <a:solidFill>
+                  <a:srgbClr val="FFFFFF"/>
                 </a:solidFill>
                 <a:latin typeface="Segoe UI"/>
               </a:rPr>
-              <a:t>U</a:t>
+              <a:t>Create and set up robot programs on my own (SKS).</a:t>
             </a:r>
           </a:p>
         </p:txBody>
@@ -18075,8 +18060,8 @@
         </p:nvSpPr>
         <p:spPr>
           <a:xfrm>
-            <a:off x="1143000" y="3355848"/>
-            <a:ext cx="5943600" cy="320040"/>
+            <a:off x="1143000" y="3685032"/>
+            <a:ext cx="5943600" cy="274320"/>
           </a:xfrm>
           <a:prstGeom prst="rect">
             <a:avLst/>
@@ -18098,48 +18083,6 @@
               </a:spcAft>
             </a:pPr>
             <a:r>
-              <a:rPr sz="1400" b="0" i="0">
-                <a:solidFill>
-                  <a:srgbClr val="FFFFFF"/>
-                </a:solidFill>
-                <a:latin typeface="Segoe UI"/>
-              </a:rPr>
-              <a:t>Create and set up robot programs on my own (SKS).</a:t>
-            </a:r>
-          </a:p>
-        </p:txBody>
-      </p:sp>
-      <p:sp>
-        <p:nvSpPr>
-          <p:cNvPr id="13" name="TextBox 12"/>
-          <p:cNvSpPr txBox="1"/>
-          <p:nvPr/>
-        </p:nvSpPr>
-        <p:spPr>
-          <a:xfrm>
-            <a:off x="1143000" y="3685032"/>
-            <a:ext cx="5943600" cy="274320"/>
-          </a:xfrm>
-          <a:prstGeom prst="rect">
-            <a:avLst/>
-          </a:prstGeom>
-          <a:noFill/>
-        </p:spPr>
-        <p:txBody>
-          <a:bodyPr wrap="square" lIns="0" rIns="0" tIns="0" bIns="0" anchor="t">
-            <a:spAutoFit/>
-          </a:bodyPr>
-          <a:lstStyle/>
-          <a:p>
-            <a:pPr algn="l">
-              <a:spcBef>
-                <a:spcPts val="0"/>
-              </a:spcBef>
-              <a:spcAft>
-                <a:spcPts val="0"/>
-              </a:spcAft>
-            </a:pPr>
-            <a:r>
               <a:rPr sz="1200" b="0" i="0">
                 <a:solidFill>
                   <a:srgbClr val="C6CDD1"/>
@@ -18153,7 +18096,7 @@
       </p:sp>
       <p:sp>
         <p:nvSpPr>
-          <p:cNvPr id="14" name="Rectangle 13"/>
+          <p:cNvPr id="13" name="Rectangle 12"/>
           <p:cNvSpPr/>
           <p:nvPr/>
         </p:nvSpPr>
@@ -18184,14 +18127,56 @@
       </p:sp>
       <p:sp>
         <p:nvSpPr>
+          <p:cNvPr id="14" name="TextBox 13"/>
+          <p:cNvSpPr txBox="1"/>
+          <p:nvPr/>
+        </p:nvSpPr>
+        <p:spPr>
+          <a:xfrm>
+            <a:off x="621792" y="4279392"/>
+            <a:ext cx="457200" cy="457200"/>
+          </a:xfrm>
+          <a:prstGeom prst="rect">
+            <a:avLst/>
+          </a:prstGeom>
+          <a:noFill/>
+        </p:spPr>
+        <p:txBody>
+          <a:bodyPr wrap="square" lIns="0" rIns="0" tIns="0" bIns="0" anchor="t">
+            <a:spAutoFit/>
+          </a:bodyPr>
+          <a:lstStyle/>
+          <a:p>
+            <a:pPr algn="l">
+              <a:spcBef>
+                <a:spcPts val="0"/>
+              </a:spcBef>
+              <a:spcAft>
+                <a:spcPts val="0"/>
+              </a:spcAft>
+            </a:pPr>
+            <a:r>
+              <a:rPr sz="2400" b="1" i="0">
+                <a:solidFill>
+                  <a:srgbClr val="D5FB00"/>
+                </a:solidFill>
+                <a:latin typeface="Segoe UI"/>
+              </a:rPr>
+              <a:t>O</a:t>
+            </a:r>
+          </a:p>
+        </p:txBody>
+      </p:sp>
+      <p:sp>
+        <p:nvSpPr>
           <p:cNvPr id="15" name="TextBox 14"/>
           <p:cNvSpPr txBox="1"/>
           <p:nvPr/>
         </p:nvSpPr>
         <p:spPr>
           <a:xfrm>
-            <a:off x="621792" y="4279392"/>
-            <a:ext cx="457200" cy="457200"/>
+            <a:off x="1143000" y="4315968"/>
+            <a:ext cx="5943600" cy="320040"/>
           </a:xfrm>
           <a:prstGeom prst="rect">
             <a:avLst/>
@@ -18213,13 +18198,13 @@
               </a:spcAft>
             </a:pPr>
             <a:r>
-              <a:rPr sz="2400" b="1" i="0">
-                <a:solidFill>
-                  <a:srgbClr val="D5FB00"/>
+              <a:rPr sz="1400" b="0" i="0">
+                <a:solidFill>
+                  <a:srgbClr val="FFFFFF"/>
                 </a:solidFill>
                 <a:latin typeface="Segoe UI"/>
               </a:rPr>
-              <a:t>O</a:t>
+              <a:t>Solve problems, share what I learn, keep improving.</a:t>
             </a:r>
           </a:p>
         </p:txBody>
@@ -18232,8 +18217,8 @@
         </p:nvSpPr>
         <p:spPr>
           <a:xfrm>
-            <a:off x="1143000" y="4315968"/>
-            <a:ext cx="5943600" cy="320040"/>
+            <a:off x="1143000" y="4645152"/>
+            <a:ext cx="5943600" cy="274320"/>
           </a:xfrm>
           <a:prstGeom prst="rect">
             <a:avLst/>
@@ -18255,48 +18240,6 @@
               </a:spcAft>
             </a:pPr>
             <a:r>
-              <a:rPr sz="1400" b="0" i="0">
-                <a:solidFill>
-                  <a:srgbClr val="FFFFFF"/>
-                </a:solidFill>
-                <a:latin typeface="Segoe UI"/>
-              </a:rPr>
-              <a:t>Solve problems, share what I learn, keep improving.</a:t>
-            </a:r>
-          </a:p>
-        </p:txBody>
-      </p:sp>
-      <p:sp>
-        <p:nvSpPr>
-          <p:cNvPr id="17" name="TextBox 16"/>
-          <p:cNvSpPr txBox="1"/>
-          <p:nvPr/>
-        </p:nvSpPr>
-        <p:spPr>
-          <a:xfrm>
-            <a:off x="1143000" y="4645152"/>
-            <a:ext cx="5943600" cy="274320"/>
-          </a:xfrm>
-          <a:prstGeom prst="rect">
-            <a:avLst/>
-          </a:prstGeom>
-          <a:noFill/>
-        </p:spPr>
-        <p:txBody>
-          <a:bodyPr wrap="square" lIns="0" rIns="0" tIns="0" bIns="0" anchor="t">
-            <a:spAutoFit/>
-          </a:bodyPr>
-          <a:lstStyle/>
-          <a:p>
-            <a:pPr algn="l">
-              <a:spcBef>
-                <a:spcPts val="0"/>
-              </a:spcBef>
-              <a:spcAft>
-                <a:spcPts val="0"/>
-              </a:spcAft>
-            </a:pPr>
-            <a:r>
               <a:rPr sz="1200" b="0" i="0">
                 <a:solidFill>
                   <a:srgbClr val="C6CDD1"/>
@@ -18308,22 +18251,12 @@
           </a:p>
         </p:txBody>
       </p:sp>
-      <p:pic>
-        <p:nvPicPr>
-          <p:cNvPr id="18" name="!! Glass B" descr="Decorative glass panel"/>
-          <p:cNvPicPr>
-            <a:picLocks noChangeAspect="1"/>
-          </p:cNvPicPr>
+      <p:sp>
+        <p:nvSpPr>
+          <p:cNvPr id="17" name="!! Glass B"/>
+          <p:cNvSpPr/>
           <p:nvPr/>
-        </p:nvPicPr>
-        <p:blipFill>
-          <a:blip r:embed="rId3">
-            <a:alphaModFix amt="50000"/>
-          </a:blip>
-          <a:stretch>
-            <a:fillRect/>
-          </a:stretch>
-        </p:blipFill>
+        </p:nvSpPr>
         <p:spPr>
           <a:xfrm>
             <a:off x="7818120" y="1600200"/>
@@ -18332,23 +18265,14 @@
           <a:prstGeom prst="rect">
             <a:avLst/>
           </a:prstGeom>
-        </p:spPr>
-      </p:pic>
-      <p:sp>
-        <p:nvSpPr>
-          <p:cNvPr id="19" name="!! Glass B rim"/>
-          <p:cNvSpPr/>
-          <p:nvPr/>
-        </p:nvSpPr>
-        <p:spPr>
-          <a:xfrm>
-            <a:off x="7818120" y="1600200"/>
-            <a:ext cx="4114800" cy="3886200"/>
-          </a:xfrm>
-          <a:prstGeom prst="rect">
-            <a:avLst/>
-          </a:prstGeom>
-          <a:noFill/>
+          <a:blipFill rotWithShape="1">
+            <a:blip r:embed="rId3">
+              <a:alphaModFix amt="50000"/>
+            </a:blip>
+            <a:stretch>
+              <a:fillRect/>
+            </a:stretch>
+          </a:blipFill>
           <a:ln w="9525">
             <a:solidFill>
               <a:srgbClr val="FFFFFF">
@@ -18367,7 +18291,7 @@
       </p:sp>
       <p:sp>
         <p:nvSpPr>
-          <p:cNvPr id="20" name="TextBox 19"/>
+          <p:cNvPr id="18" name="TextBox 17"/>
           <p:cNvSpPr txBox="1"/>
           <p:nvPr/>
         </p:nvSpPr>
@@ -18409,7 +18333,7 @@
       </p:sp>
       <p:sp>
         <p:nvSpPr>
-          <p:cNvPr id="21" name="Chevron 20"/>
+          <p:cNvPr id="19" name="Chevron 18"/>
           <p:cNvSpPr/>
           <p:nvPr/>
         </p:nvSpPr>
@@ -18438,7 +18362,7 @@
       </p:sp>
       <p:sp>
         <p:nvSpPr>
-          <p:cNvPr id="22" name="TextBox 21"/>
+          <p:cNvPr id="20" name="TextBox 19"/>
           <p:cNvSpPr txBox="1"/>
           <p:nvPr/>
         </p:nvSpPr>
@@ -18480,7 +18404,7 @@
       </p:sp>
       <p:sp>
         <p:nvSpPr>
-          <p:cNvPr id="23" name="Chevron 22"/>
+          <p:cNvPr id="21" name="Chevron 20"/>
           <p:cNvSpPr/>
           <p:nvPr/>
         </p:nvSpPr>
@@ -18509,7 +18433,7 @@
       </p:sp>
       <p:sp>
         <p:nvSpPr>
-          <p:cNvPr id="24" name="TextBox 23"/>
+          <p:cNvPr id="22" name="TextBox 21"/>
           <p:cNvSpPr txBox="1"/>
           <p:nvPr/>
         </p:nvSpPr>
@@ -18551,7 +18475,7 @@
       </p:sp>
       <p:sp>
         <p:nvSpPr>
-          <p:cNvPr id="25" name="Chevron 24"/>
+          <p:cNvPr id="23" name="Chevron 22"/>
           <p:cNvSpPr/>
           <p:nvPr/>
         </p:nvSpPr>
@@ -18580,7 +18504,7 @@
       </p:sp>
       <p:sp>
         <p:nvSpPr>
-          <p:cNvPr id="26" name="TextBox 25"/>
+          <p:cNvPr id="24" name="TextBox 23"/>
           <p:cNvSpPr txBox="1"/>
           <p:nvPr/>
         </p:nvSpPr>
@@ -19296,22 +19220,12 @@
         <p:nvPr/>
       </p:nvGrpSpPr>
       <p:grpSpPr/>
-      <p:pic>
-        <p:nvPicPr>
-          <p:cNvPr id="2" name="!! Glass A" descr="Decorative glass panel"/>
-          <p:cNvPicPr>
-            <a:picLocks noChangeAspect="1"/>
-          </p:cNvPicPr>
+      <p:sp>
+        <p:nvSpPr>
+          <p:cNvPr id="2" name="!! Glass A"/>
+          <p:cNvSpPr/>
           <p:nvPr/>
-        </p:nvPicPr>
-        <p:blipFill>
-          <a:blip r:embed="rId2">
-            <a:alphaModFix amt="50000"/>
-          </a:blip>
-          <a:stretch>
-            <a:fillRect/>
-          </a:stretch>
-        </p:blipFill>
+        </p:nvSpPr>
         <p:spPr>
           <a:xfrm>
             <a:off x="841248" y="1828800"/>
@@ -19320,23 +19234,14 @@
           <a:prstGeom prst="rect">
             <a:avLst/>
           </a:prstGeom>
-        </p:spPr>
-      </p:pic>
-      <p:sp>
-        <p:nvSpPr>
-          <p:cNvPr id="3" name="!! Glass A rim"/>
-          <p:cNvSpPr/>
-          <p:nvPr/>
-        </p:nvSpPr>
-        <p:spPr>
-          <a:xfrm>
-            <a:off x="841248" y="1828800"/>
-            <a:ext cx="10515600" cy="3657600"/>
-          </a:xfrm>
-          <a:prstGeom prst="rect">
-            <a:avLst/>
-          </a:prstGeom>
-          <a:noFill/>
+          <a:blipFill rotWithShape="1">
+            <a:blip r:embed="rId2">
+              <a:alphaModFix amt="50000"/>
+            </a:blip>
+            <a:stretch>
+              <a:fillRect/>
+            </a:stretch>
+          </a:blipFill>
           <a:ln w="9525">
             <a:solidFill>
               <a:srgbClr val="FFFFFF">
@@ -19355,7 +19260,7 @@
       </p:sp>
       <p:sp>
         <p:nvSpPr>
-          <p:cNvPr id="4" name="TextBox 3"/>
+          <p:cNvPr id="3" name="TextBox 2"/>
           <p:cNvSpPr txBox="1"/>
           <p:nvPr/>
         </p:nvSpPr>
@@ -19397,7 +19302,7 @@
       </p:sp>
       <p:sp>
         <p:nvSpPr>
-          <p:cNvPr id="5" name="!! Title 1"/>
+          <p:cNvPr id="4" name="!! Title 1"/>
           <p:cNvSpPr txBox="1"/>
           <p:nvPr/>
         </p:nvSpPr>
@@ -19439,7 +19344,7 @@
       </p:sp>
       <p:sp>
         <p:nvSpPr>
-          <p:cNvPr id="6" name="Rectangle 5"/>
+          <p:cNvPr id="5" name="Rectangle 4"/>
           <p:cNvSpPr/>
           <p:nvPr/>
         </p:nvSpPr>
@@ -19468,7 +19373,7 @@
       </p:sp>
       <p:sp>
         <p:nvSpPr>
-          <p:cNvPr id="7" name="TextBox 6"/>
+          <p:cNvPr id="6" name="TextBox 5"/>
           <p:cNvSpPr txBox="1"/>
           <p:nvPr/>
         </p:nvSpPr>
@@ -20144,22 +20049,12 @@
           </a:p>
         </p:txBody>
       </p:sp>
-      <p:pic>
-        <p:nvPicPr>
-          <p:cNvPr id="4" name="!! Card 1" descr="Decorative glass panel"/>
-          <p:cNvPicPr>
-            <a:picLocks noChangeAspect="1"/>
-          </p:cNvPicPr>
+      <p:sp>
+        <p:nvSpPr>
+          <p:cNvPr id="4" name="!! Glass A"/>
+          <p:cNvSpPr/>
           <p:nvPr/>
-        </p:nvPicPr>
-        <p:blipFill>
-          <a:blip r:embed="rId2">
-            <a:alphaModFix amt="50000"/>
-          </a:blip>
-          <a:stretch>
-            <a:fillRect/>
-          </a:stretch>
-        </p:blipFill>
+        </p:nvSpPr>
         <p:spPr>
           <a:xfrm>
             <a:off x="256032" y="1691640"/>
@@ -20168,23 +20063,14 @@
           <a:prstGeom prst="rect">
             <a:avLst/>
           </a:prstGeom>
-        </p:spPr>
-      </p:pic>
-      <p:sp>
-        <p:nvSpPr>
-          <p:cNvPr id="5" name="!! Card 1 rim"/>
-          <p:cNvSpPr/>
-          <p:nvPr/>
-        </p:nvSpPr>
-        <p:spPr>
-          <a:xfrm>
-            <a:off x="256032" y="1691640"/>
-            <a:ext cx="2715768" cy="3063240"/>
-          </a:xfrm>
-          <a:prstGeom prst="rect">
-            <a:avLst/>
-          </a:prstGeom>
-          <a:noFill/>
+          <a:blipFill rotWithShape="1">
+            <a:blip r:embed="rId2">
+              <a:alphaModFix amt="50000"/>
+            </a:blip>
+            <a:stretch>
+              <a:fillRect/>
+            </a:stretch>
+          </a:blipFill>
           <a:ln w="9525">
             <a:solidFill>
               <a:srgbClr val="FFFFFF">
@@ -20203,14 +20089,56 @@
       </p:sp>
       <p:sp>
         <p:nvSpPr>
+          <p:cNvPr id="5" name="TextBox 4"/>
+          <p:cNvSpPr txBox="1"/>
+          <p:nvPr/>
+        </p:nvSpPr>
+        <p:spPr>
+          <a:xfrm>
+            <a:off x="566928" y="1965960"/>
+            <a:ext cx="2167128" cy="548640"/>
+          </a:xfrm>
+          <a:prstGeom prst="rect">
+            <a:avLst/>
+          </a:prstGeom>
+          <a:noFill/>
+        </p:spPr>
+        <p:txBody>
+          <a:bodyPr wrap="square" lIns="0" rIns="0" tIns="0" bIns="0" anchor="t">
+            <a:spAutoFit/>
+          </a:bodyPr>
+          <a:lstStyle/>
+          <a:p>
+            <a:pPr algn="l">
+              <a:spcBef>
+                <a:spcPts val="0"/>
+              </a:spcBef>
+              <a:spcAft>
+                <a:spcPts val="0"/>
+              </a:spcAft>
+            </a:pPr>
+            <a:r>
+              <a:rPr sz="3000" b="1" i="0">
+                <a:solidFill>
+                  <a:srgbClr val="D5FB00"/>
+                </a:solidFill>
+                <a:latin typeface="Segoe UI"/>
+              </a:rPr>
+              <a:t>I</a:t>
+            </a:r>
+          </a:p>
+        </p:txBody>
+      </p:sp>
+      <p:sp>
+        <p:nvSpPr>
           <p:cNvPr id="6" name="TextBox 5"/>
           <p:cNvSpPr txBox="1"/>
           <p:nvPr/>
         </p:nvSpPr>
         <p:spPr>
           <a:xfrm>
-            <a:off x="566928" y="1965960"/>
-            <a:ext cx="2167128" cy="548640"/>
+            <a:off x="566928" y="2651760"/>
+            <a:ext cx="2167128" cy="640080"/>
           </a:xfrm>
           <a:prstGeom prst="rect">
             <a:avLst/>
@@ -20232,48 +20160,6 @@
               </a:spcAft>
             </a:pPr>
             <a:r>
-              <a:rPr sz="3000" b="1" i="0">
-                <a:solidFill>
-                  <a:srgbClr val="D5FB00"/>
-                </a:solidFill>
-                <a:latin typeface="Segoe UI"/>
-              </a:rPr>
-              <a:t>I</a:t>
-            </a:r>
-          </a:p>
-        </p:txBody>
-      </p:sp>
-      <p:sp>
-        <p:nvSpPr>
-          <p:cNvPr id="7" name="TextBox 6"/>
-          <p:cNvSpPr txBox="1"/>
-          <p:nvPr/>
-        </p:nvSpPr>
-        <p:spPr>
-          <a:xfrm>
-            <a:off x="566928" y="2651760"/>
-            <a:ext cx="2167128" cy="640080"/>
-          </a:xfrm>
-          <a:prstGeom prst="rect">
-            <a:avLst/>
-          </a:prstGeom>
-          <a:noFill/>
-        </p:spPr>
-        <p:txBody>
-          <a:bodyPr wrap="square" lIns="0" rIns="0" tIns="0" bIns="0" anchor="t">
-            <a:spAutoFit/>
-          </a:bodyPr>
-          <a:lstStyle/>
-          <a:p>
-            <a:pPr algn="l">
-              <a:spcBef>
-                <a:spcPts val="0"/>
-              </a:spcBef>
-              <a:spcAft>
-                <a:spcPts val="0"/>
-              </a:spcAft>
-            </a:pPr>
-            <a:r>
               <a:rPr sz="1600" b="1" i="0">
                 <a:solidFill>
                   <a:srgbClr val="FFFFFF"/>
@@ -20287,7 +20173,7 @@
       </p:sp>
       <p:sp>
         <p:nvSpPr>
-          <p:cNvPr id="8" name="TextBox 7"/>
+          <p:cNvPr id="7" name="TextBox 6"/>
           <p:cNvSpPr txBox="1"/>
           <p:nvPr/>
         </p:nvSpPr>
@@ -20330,22 +20216,12 @@
           </a:p>
         </p:txBody>
       </p:sp>
-      <p:pic>
-        <p:nvPicPr>
-          <p:cNvPr id="9" name="!! Card 2" descr="Decorative glass panel"/>
-          <p:cNvPicPr>
-            <a:picLocks noChangeAspect="1"/>
-          </p:cNvPicPr>
+      <p:sp>
+        <p:nvSpPr>
+          <p:cNvPr id="8" name="!! Card 2"/>
+          <p:cNvSpPr/>
           <p:nvPr/>
-        </p:nvPicPr>
-        <p:blipFill>
-          <a:blip r:embed="rId3">
-            <a:alphaModFix amt="50000"/>
-          </a:blip>
-          <a:stretch>
-            <a:fillRect/>
-          </a:stretch>
-        </p:blipFill>
+        </p:nvSpPr>
         <p:spPr>
           <a:xfrm>
             <a:off x="3246120" y="1691640"/>
@@ -20354,23 +20230,14 @@
           <a:prstGeom prst="rect">
             <a:avLst/>
           </a:prstGeom>
-        </p:spPr>
-      </p:pic>
-      <p:sp>
-        <p:nvSpPr>
-          <p:cNvPr id="10" name="!! Card 2 rim"/>
-          <p:cNvSpPr/>
-          <p:nvPr/>
-        </p:nvSpPr>
-        <p:spPr>
-          <a:xfrm>
-            <a:off x="3246120" y="1691640"/>
-            <a:ext cx="2715768" cy="3063240"/>
-          </a:xfrm>
-          <a:prstGeom prst="rect">
-            <a:avLst/>
-          </a:prstGeom>
-          <a:noFill/>
+          <a:blipFill rotWithShape="1">
+            <a:blip r:embed="rId3">
+              <a:alphaModFix amt="50000"/>
+            </a:blip>
+            <a:stretch>
+              <a:fillRect/>
+            </a:stretch>
+          </a:blipFill>
           <a:ln w="9525">
             <a:solidFill>
               <a:srgbClr val="FFFFFF">
@@ -20389,7 +20256,7 @@
       </p:sp>
       <p:sp>
         <p:nvSpPr>
-          <p:cNvPr id="11" name="TextBox 10"/>
+          <p:cNvPr id="9" name="TextBox 8"/>
           <p:cNvSpPr txBox="1"/>
           <p:nvPr/>
         </p:nvSpPr>
@@ -20431,7 +20298,7 @@
       </p:sp>
       <p:sp>
         <p:nvSpPr>
-          <p:cNvPr id="12" name="TextBox 11"/>
+          <p:cNvPr id="10" name="TextBox 9"/>
           <p:cNvSpPr txBox="1"/>
           <p:nvPr/>
         </p:nvSpPr>
@@ -20473,7 +20340,7 @@
       </p:sp>
       <p:sp>
         <p:nvSpPr>
-          <p:cNvPr id="13" name="TextBox 12"/>
+          <p:cNvPr id="11" name="TextBox 10"/>
           <p:cNvSpPr txBox="1"/>
           <p:nvPr/>
         </p:nvSpPr>
@@ -20516,22 +20383,12 @@
           </a:p>
         </p:txBody>
       </p:sp>
-      <p:pic>
-        <p:nvPicPr>
-          <p:cNvPr id="14" name="!! Card 3" descr="Decorative glass panel"/>
-          <p:cNvPicPr>
-            <a:picLocks noChangeAspect="1"/>
-          </p:cNvPicPr>
+      <p:sp>
+        <p:nvSpPr>
+          <p:cNvPr id="12" name="!! Card 3"/>
+          <p:cNvSpPr/>
           <p:nvPr/>
-        </p:nvPicPr>
-        <p:blipFill>
-          <a:blip r:embed="rId4">
-            <a:alphaModFix amt="50000"/>
-          </a:blip>
-          <a:stretch>
-            <a:fillRect/>
-          </a:stretch>
-        </p:blipFill>
+        </p:nvSpPr>
         <p:spPr>
           <a:xfrm>
             <a:off x="6236208" y="1691640"/>
@@ -20540,23 +20397,14 @@
           <a:prstGeom prst="rect">
             <a:avLst/>
           </a:prstGeom>
-        </p:spPr>
-      </p:pic>
-      <p:sp>
-        <p:nvSpPr>
-          <p:cNvPr id="15" name="!! Card 3 rim"/>
-          <p:cNvSpPr/>
-          <p:nvPr/>
-        </p:nvSpPr>
-        <p:spPr>
-          <a:xfrm>
-            <a:off x="6236208" y="1691640"/>
-            <a:ext cx="2715768" cy="3063240"/>
-          </a:xfrm>
-          <a:prstGeom prst="rect">
-            <a:avLst/>
-          </a:prstGeom>
-          <a:noFill/>
+          <a:blipFill rotWithShape="1">
+            <a:blip r:embed="rId4">
+              <a:alphaModFix amt="50000"/>
+            </a:blip>
+            <a:stretch>
+              <a:fillRect/>
+            </a:stretch>
+          </a:blipFill>
           <a:ln w="9525">
             <a:solidFill>
               <a:srgbClr val="FFFFFF">
@@ -20575,7 +20423,7 @@
       </p:sp>
       <p:sp>
         <p:nvSpPr>
-          <p:cNvPr id="16" name="TextBox 15"/>
+          <p:cNvPr id="13" name="TextBox 12"/>
           <p:cNvSpPr txBox="1"/>
           <p:nvPr/>
         </p:nvSpPr>
@@ -20617,7 +20465,7 @@
       </p:sp>
       <p:sp>
         <p:nvSpPr>
-          <p:cNvPr id="17" name="TextBox 16"/>
+          <p:cNvPr id="14" name="TextBox 13"/>
           <p:cNvSpPr txBox="1"/>
           <p:nvPr/>
         </p:nvSpPr>
@@ -20659,7 +20507,7 @@
       </p:sp>
       <p:sp>
         <p:nvSpPr>
-          <p:cNvPr id="18" name="TextBox 17"/>
+          <p:cNvPr id="15" name="TextBox 14"/>
           <p:cNvSpPr txBox="1"/>
           <p:nvPr/>
         </p:nvSpPr>
@@ -20702,22 +20550,12 @@
           </a:p>
         </p:txBody>
       </p:sp>
-      <p:pic>
-        <p:nvPicPr>
-          <p:cNvPr id="19" name="!! Card 4" descr="Decorative glass panel"/>
-          <p:cNvPicPr>
-            <a:picLocks noChangeAspect="1"/>
-          </p:cNvPicPr>
+      <p:sp>
+        <p:nvSpPr>
+          <p:cNvPr id="16" name="!! Glass B"/>
+          <p:cNvSpPr/>
           <p:nvPr/>
-        </p:nvPicPr>
-        <p:blipFill>
-          <a:blip r:embed="rId5">
-            <a:alphaModFix amt="50000"/>
-          </a:blip>
-          <a:stretch>
-            <a:fillRect/>
-          </a:stretch>
-        </p:blipFill>
+        </p:nvSpPr>
         <p:spPr>
           <a:xfrm>
             <a:off x="9226296" y="1691640"/>
@@ -20726,23 +20564,14 @@
           <a:prstGeom prst="rect">
             <a:avLst/>
           </a:prstGeom>
-        </p:spPr>
-      </p:pic>
-      <p:sp>
-        <p:nvSpPr>
-          <p:cNvPr id="20" name="!! Card 4 rim"/>
-          <p:cNvSpPr/>
-          <p:nvPr/>
-        </p:nvSpPr>
-        <p:spPr>
-          <a:xfrm>
-            <a:off x="9226296" y="1691640"/>
-            <a:ext cx="2715768" cy="3063240"/>
-          </a:xfrm>
-          <a:prstGeom prst="rect">
-            <a:avLst/>
-          </a:prstGeom>
-          <a:noFill/>
+          <a:blipFill rotWithShape="1">
+            <a:blip r:embed="rId5">
+              <a:alphaModFix amt="50000"/>
+            </a:blip>
+            <a:stretch>
+              <a:fillRect/>
+            </a:stretch>
+          </a:blipFill>
           <a:ln w="9525">
             <a:solidFill>
               <a:srgbClr val="FFFFFF">
@@ -20761,7 +20590,7 @@
       </p:sp>
       <p:sp>
         <p:nvSpPr>
-          <p:cNvPr id="21" name="TextBox 20"/>
+          <p:cNvPr id="17" name="TextBox 16"/>
           <p:cNvSpPr txBox="1"/>
           <p:nvPr/>
         </p:nvSpPr>
@@ -20803,7 +20632,7 @@
       </p:sp>
       <p:sp>
         <p:nvSpPr>
-          <p:cNvPr id="22" name="TextBox 21"/>
+          <p:cNvPr id="18" name="TextBox 17"/>
           <p:cNvSpPr txBox="1"/>
           <p:nvPr/>
         </p:nvSpPr>
@@ -20845,7 +20674,7 @@
       </p:sp>
       <p:sp>
         <p:nvSpPr>
-          <p:cNvPr id="23" name="TextBox 22"/>
+          <p:cNvPr id="19" name="TextBox 18"/>
           <p:cNvSpPr txBox="1"/>
           <p:nvPr/>
         </p:nvSpPr>
@@ -20888,22 +20717,12 @@
           </a:p>
         </p:txBody>
       </p:sp>
-      <p:pic>
-        <p:nvPicPr>
-          <p:cNvPr id="24" name="!! Strip" descr="Decorative glass panel"/>
-          <p:cNvPicPr>
-            <a:picLocks noChangeAspect="1"/>
-          </p:cNvPicPr>
+      <p:sp>
+        <p:nvSpPr>
+          <p:cNvPr id="20" name="!! Strip"/>
+          <p:cNvSpPr/>
           <p:nvPr/>
-        </p:nvPicPr>
-        <p:blipFill>
-          <a:blip r:embed="rId6">
-            <a:alphaModFix amt="50000"/>
-          </a:blip>
-          <a:stretch>
-            <a:fillRect/>
-          </a:stretch>
-        </p:blipFill>
+        </p:nvSpPr>
         <p:spPr>
           <a:xfrm>
             <a:off x="256032" y="4956048"/>
@@ -20912,23 +20731,14 @@
           <a:prstGeom prst="rect">
             <a:avLst/>
           </a:prstGeom>
-        </p:spPr>
-      </p:pic>
-      <p:sp>
-        <p:nvSpPr>
-          <p:cNvPr id="25" name="!! Strip rim"/>
-          <p:cNvSpPr/>
-          <p:nvPr/>
-        </p:nvSpPr>
-        <p:spPr>
-          <a:xfrm>
-            <a:off x="256032" y="4956048"/>
-            <a:ext cx="11676888" cy="566928"/>
-          </a:xfrm>
-          <a:prstGeom prst="rect">
-            <a:avLst/>
-          </a:prstGeom>
-          <a:noFill/>
+          <a:blipFill rotWithShape="1">
+            <a:blip r:embed="rId6">
+              <a:alphaModFix amt="50000"/>
+            </a:blip>
+            <a:stretch>
+              <a:fillRect/>
+            </a:stretch>
+          </a:blipFill>
           <a:ln w="9525">
             <a:solidFill>
               <a:srgbClr val="FFFFFF">
@@ -20947,7 +20757,7 @@
       </p:sp>
       <p:sp>
         <p:nvSpPr>
-          <p:cNvPr id="26" name="TextBox 25"/>
+          <p:cNvPr id="21" name="TextBox 20"/>
           <p:cNvSpPr txBox="1"/>
           <p:nvPr/>
         </p:nvSpPr>
@@ -20989,7 +20799,7 @@
       </p:sp>
       <p:sp>
         <p:nvSpPr>
-          <p:cNvPr id="27" name="TextBox 26"/>
+          <p:cNvPr id="22" name="TextBox 21"/>
           <p:cNvSpPr txBox="1"/>
           <p:nvPr/>
         </p:nvSpPr>
@@ -21857,22 +21667,12 @@
           </a:p>
         </p:txBody>
       </p:sp>
-      <p:pic>
-        <p:nvPicPr>
-          <p:cNvPr id="4" name="!! Glass A" descr="Decorative glass panel"/>
-          <p:cNvPicPr>
-            <a:picLocks noChangeAspect="1"/>
-          </p:cNvPicPr>
+      <p:sp>
+        <p:nvSpPr>
+          <p:cNvPr id="4" name="!! Glass A"/>
+          <p:cNvSpPr/>
           <p:nvPr/>
-        </p:nvPicPr>
-        <p:blipFill>
-          <a:blip r:embed="rId2">
-            <a:alphaModFix amt="50000"/>
-          </a:blip>
-          <a:stretch>
-            <a:fillRect/>
-          </a:stretch>
-        </p:blipFill>
+        </p:nvSpPr>
         <p:spPr>
           <a:xfrm>
             <a:off x="256032" y="1600200"/>
@@ -21881,23 +21681,14 @@
           <a:prstGeom prst="rect">
             <a:avLst/>
           </a:prstGeom>
-        </p:spPr>
-      </p:pic>
-      <p:sp>
-        <p:nvSpPr>
-          <p:cNvPr id="5" name="!! Glass A rim"/>
-          <p:cNvSpPr/>
-          <p:nvPr/>
-        </p:nvSpPr>
-        <p:spPr>
-          <a:xfrm>
-            <a:off x="256032" y="1600200"/>
-            <a:ext cx="7223760" cy="3886200"/>
-          </a:xfrm>
-          <a:prstGeom prst="rect">
-            <a:avLst/>
-          </a:prstGeom>
-          <a:noFill/>
+          <a:blipFill rotWithShape="1">
+            <a:blip r:embed="rId2">
+              <a:alphaModFix amt="50000"/>
+            </a:blip>
+            <a:stretch>
+              <a:fillRect/>
+            </a:stretch>
+          </a:blipFill>
           <a:ln w="9525">
             <a:solidFill>
               <a:srgbClr val="FFFFFF">
@@ -21916,14 +21707,56 @@
       </p:sp>
       <p:sp>
         <p:nvSpPr>
+          <p:cNvPr id="5" name="TextBox 4"/>
+          <p:cNvSpPr txBox="1"/>
+          <p:nvPr/>
+        </p:nvSpPr>
+        <p:spPr>
+          <a:xfrm>
+            <a:off x="621792" y="1901952"/>
+            <a:ext cx="5486400" cy="274320"/>
+          </a:xfrm>
+          <a:prstGeom prst="rect">
+            <a:avLst/>
+          </a:prstGeom>
+          <a:noFill/>
+        </p:spPr>
+        <p:txBody>
+          <a:bodyPr wrap="square" lIns="0" rIns="0" tIns="0" bIns="0" anchor="t">
+            <a:spAutoFit/>
+          </a:bodyPr>
+          <a:lstStyle/>
+          <a:p>
+            <a:pPr algn="l">
+              <a:spcBef>
+                <a:spcPts val="0"/>
+              </a:spcBef>
+              <a:spcAft>
+                <a:spcPts val="0"/>
+              </a:spcAft>
+            </a:pPr>
+            <a:r>
+              <a:rPr sz="1600" b="1" i="0">
+                <a:solidFill>
+                  <a:srgbClr val="D5FB00"/>
+                </a:solidFill>
+                <a:latin typeface="Segoe UI"/>
+              </a:rPr>
+              <a:t>FIVE TOPICS</a:t>
+            </a:r>
+          </a:p>
+        </p:txBody>
+      </p:sp>
+      <p:sp>
+        <p:nvSpPr>
           <p:cNvPr id="6" name="TextBox 5"/>
           <p:cNvSpPr txBox="1"/>
           <p:nvPr/>
         </p:nvSpPr>
         <p:spPr>
           <a:xfrm>
-            <a:off x="621792" y="1901952"/>
-            <a:ext cx="5486400" cy="274320"/>
+            <a:off x="621792" y="2359152"/>
+            <a:ext cx="2011680" cy="320040"/>
           </a:xfrm>
           <a:prstGeom prst="rect">
             <a:avLst/>
@@ -21945,13 +21778,13 @@
               </a:spcAft>
             </a:pPr>
             <a:r>
-              <a:rPr sz="1600" b="1" i="0">
-                <a:solidFill>
-                  <a:srgbClr val="D5FB00"/>
+              <a:rPr sz="1400" b="1" i="0">
+                <a:solidFill>
+                  <a:srgbClr val="FFFFFF"/>
                 </a:solidFill>
                 <a:latin typeface="Segoe UI"/>
               </a:rPr>
-              <a:t>FIVE TOPICS</a:t>
+              <a:t>Safety</a:t>
             </a:r>
           </a:p>
         </p:txBody>
@@ -21964,8 +21797,8 @@
         </p:nvSpPr>
         <p:spPr>
           <a:xfrm>
-            <a:off x="621792" y="2359152"/>
-            <a:ext cx="2011680" cy="320040"/>
+            <a:off x="2697480" y="2368296"/>
+            <a:ext cx="4526280" cy="320040"/>
           </a:xfrm>
           <a:prstGeom prst="rect">
             <a:avLst/>
@@ -21987,48 +21820,6 @@
               </a:spcAft>
             </a:pPr>
             <a:r>
-              <a:rPr sz="1400" b="1" i="0">
-                <a:solidFill>
-                  <a:srgbClr val="FFFFFF"/>
-                </a:solidFill>
-                <a:latin typeface="Segoe UI"/>
-              </a:rPr>
-              <a:t>Safety</a:t>
-            </a:r>
-          </a:p>
-        </p:txBody>
-      </p:sp>
-      <p:sp>
-        <p:nvSpPr>
-          <p:cNvPr id="8" name="TextBox 7"/>
-          <p:cNvSpPr txBox="1"/>
-          <p:nvPr/>
-        </p:nvSpPr>
-        <p:spPr>
-          <a:xfrm>
-            <a:off x="2697480" y="2368296"/>
-            <a:ext cx="4526280" cy="320040"/>
-          </a:xfrm>
-          <a:prstGeom prst="rect">
-            <a:avLst/>
-          </a:prstGeom>
-          <a:noFill/>
-        </p:spPr>
-        <p:txBody>
-          <a:bodyPr wrap="square" lIns="0" rIns="0" tIns="0" bIns="0" anchor="t">
-            <a:spAutoFit/>
-          </a:bodyPr>
-          <a:lstStyle/>
-          <a:p>
-            <a:pPr algn="l">
-              <a:spcBef>
-                <a:spcPts val="0"/>
-              </a:spcBef>
-              <a:spcAft>
-                <a:spcPts val="0"/>
-              </a:spcAft>
-            </a:pPr>
-            <a:r>
               <a:rPr sz="1300" b="0" i="0">
                 <a:solidFill>
                   <a:srgbClr val="C6CDD1"/>
@@ -22042,7 +21833,7 @@
       </p:sp>
       <p:sp>
         <p:nvSpPr>
-          <p:cNvPr id="9" name="Rectangle 8"/>
+          <p:cNvPr id="8" name="Rectangle 7"/>
           <p:cNvSpPr/>
           <p:nvPr/>
         </p:nvSpPr>
@@ -22073,14 +21864,56 @@
       </p:sp>
       <p:sp>
         <p:nvSpPr>
+          <p:cNvPr id="9" name="TextBox 8"/>
+          <p:cNvSpPr txBox="1"/>
+          <p:nvPr/>
+        </p:nvSpPr>
+        <p:spPr>
+          <a:xfrm>
+            <a:off x="621792" y="2962656"/>
+            <a:ext cx="2011680" cy="320040"/>
+          </a:xfrm>
+          <a:prstGeom prst="rect">
+            <a:avLst/>
+          </a:prstGeom>
+          <a:noFill/>
+        </p:spPr>
+        <p:txBody>
+          <a:bodyPr wrap="square" lIns="0" rIns="0" tIns="0" bIns="0" anchor="t">
+            <a:spAutoFit/>
+          </a:bodyPr>
+          <a:lstStyle/>
+          <a:p>
+            <a:pPr algn="l">
+              <a:spcBef>
+                <a:spcPts val="0"/>
+              </a:spcBef>
+              <a:spcAft>
+                <a:spcPts val="0"/>
+              </a:spcAft>
+            </a:pPr>
+            <a:r>
+              <a:rPr sz="1400" b="1" i="0">
+                <a:solidFill>
+                  <a:srgbClr val="FFFFFF"/>
+                </a:solidFill>
+                <a:latin typeface="Segoe UI"/>
+              </a:rPr>
+              <a:t>GMAW welding</a:t>
+            </a:r>
+          </a:p>
+        </p:txBody>
+      </p:sp>
+      <p:sp>
+        <p:nvSpPr>
           <p:cNvPr id="10" name="TextBox 9"/>
           <p:cNvSpPr txBox="1"/>
           <p:nvPr/>
         </p:nvSpPr>
         <p:spPr>
           <a:xfrm>
-            <a:off x="621792" y="2962656"/>
-            <a:ext cx="2011680" cy="320040"/>
+            <a:off x="2697480" y="2971800"/>
+            <a:ext cx="4526280" cy="320040"/>
           </a:xfrm>
           <a:prstGeom prst="rect">
             <a:avLst/>
@@ -22102,48 +21935,6 @@
               </a:spcAft>
             </a:pPr>
             <a:r>
-              <a:rPr sz="1400" b="1" i="0">
-                <a:solidFill>
-                  <a:srgbClr val="FFFFFF"/>
-                </a:solidFill>
-                <a:latin typeface="Segoe UI"/>
-              </a:rPr>
-              <a:t>GMAW welding</a:t>
-            </a:r>
-          </a:p>
-        </p:txBody>
-      </p:sp>
-      <p:sp>
-        <p:nvSpPr>
-          <p:cNvPr id="11" name="TextBox 10"/>
-          <p:cNvSpPr txBox="1"/>
-          <p:nvPr/>
-        </p:nvSpPr>
-        <p:spPr>
-          <a:xfrm>
-            <a:off x="2697480" y="2971800"/>
-            <a:ext cx="4526280" cy="320040"/>
-          </a:xfrm>
-          <a:prstGeom prst="rect">
-            <a:avLst/>
-          </a:prstGeom>
-          <a:noFill/>
-        </p:spPr>
-        <p:txBody>
-          <a:bodyPr wrap="square" lIns="0" rIns="0" tIns="0" bIns="0" anchor="t">
-            <a:spAutoFit/>
-          </a:bodyPr>
-          <a:lstStyle/>
-          <a:p>
-            <a:pPr algn="l">
-              <a:spcBef>
-                <a:spcPts val="0"/>
-              </a:spcBef>
-              <a:spcAft>
-                <a:spcPts val="0"/>
-              </a:spcAft>
-            </a:pPr>
-            <a:r>
               <a:rPr sz="1300" b="0" i="0">
                 <a:solidFill>
                   <a:srgbClr val="C6CDD1"/>
@@ -22157,7 +21948,7 @@
       </p:sp>
       <p:sp>
         <p:nvSpPr>
-          <p:cNvPr id="12" name="Rectangle 11"/>
+          <p:cNvPr id="11" name="Rectangle 10"/>
           <p:cNvSpPr/>
           <p:nvPr/>
         </p:nvSpPr>
@@ -22188,14 +21979,56 @@
       </p:sp>
       <p:sp>
         <p:nvSpPr>
+          <p:cNvPr id="12" name="TextBox 11"/>
+          <p:cNvSpPr txBox="1"/>
+          <p:nvPr/>
+        </p:nvSpPr>
+        <p:spPr>
+          <a:xfrm>
+            <a:off x="621792" y="3566160"/>
+            <a:ext cx="2011680" cy="320040"/>
+          </a:xfrm>
+          <a:prstGeom prst="rect">
+            <a:avLst/>
+          </a:prstGeom>
+          <a:noFill/>
+        </p:spPr>
+        <p:txBody>
+          <a:bodyPr wrap="square" lIns="0" rIns="0" tIns="0" bIns="0" anchor="t">
+            <a:spAutoFit/>
+          </a:bodyPr>
+          <a:lstStyle/>
+          <a:p>
+            <a:pPr algn="l">
+              <a:spcBef>
+                <a:spcPts val="0"/>
+              </a:spcBef>
+              <a:spcAft>
+                <a:spcPts val="0"/>
+              </a:spcAft>
+            </a:pPr>
+            <a:r>
+              <a:rPr sz="1400" b="1" i="0">
+                <a:solidFill>
+                  <a:srgbClr val="FFFFFF"/>
+                </a:solidFill>
+                <a:latin typeface="Segoe UI"/>
+              </a:rPr>
+              <a:t>The WPS</a:t>
+            </a:r>
+          </a:p>
+        </p:txBody>
+      </p:sp>
+      <p:sp>
+        <p:nvSpPr>
           <p:cNvPr id="13" name="TextBox 12"/>
           <p:cNvSpPr txBox="1"/>
           <p:nvPr/>
         </p:nvSpPr>
         <p:spPr>
           <a:xfrm>
-            <a:off x="621792" y="3566160"/>
-            <a:ext cx="2011680" cy="320040"/>
+            <a:off x="2697480" y="3575304"/>
+            <a:ext cx="4526280" cy="320040"/>
           </a:xfrm>
           <a:prstGeom prst="rect">
             <a:avLst/>
@@ -22217,48 +22050,6 @@
               </a:spcAft>
             </a:pPr>
             <a:r>
-              <a:rPr sz="1400" b="1" i="0">
-                <a:solidFill>
-                  <a:srgbClr val="FFFFFF"/>
-                </a:solidFill>
-                <a:latin typeface="Segoe UI"/>
-              </a:rPr>
-              <a:t>The WPS</a:t>
-            </a:r>
-          </a:p>
-        </p:txBody>
-      </p:sp>
-      <p:sp>
-        <p:nvSpPr>
-          <p:cNvPr id="14" name="TextBox 13"/>
-          <p:cNvSpPr txBox="1"/>
-          <p:nvPr/>
-        </p:nvSpPr>
-        <p:spPr>
-          <a:xfrm>
-            <a:off x="2697480" y="3575304"/>
-            <a:ext cx="4526280" cy="320040"/>
-          </a:xfrm>
-          <a:prstGeom prst="rect">
-            <a:avLst/>
-          </a:prstGeom>
-          <a:noFill/>
-        </p:spPr>
-        <p:txBody>
-          <a:bodyPr wrap="square" lIns="0" rIns="0" tIns="0" bIns="0" anchor="t">
-            <a:spAutoFit/>
-          </a:bodyPr>
-          <a:lstStyle/>
-          <a:p>
-            <a:pPr algn="l">
-              <a:spcBef>
-                <a:spcPts val="0"/>
-              </a:spcBef>
-              <a:spcAft>
-                <a:spcPts val="0"/>
-              </a:spcAft>
-            </a:pPr>
-            <a:r>
               <a:rPr sz="1300" b="0" i="0">
                 <a:solidFill>
                   <a:srgbClr val="C6CDD1"/>
@@ -22272,7 +22063,7 @@
       </p:sp>
       <p:sp>
         <p:nvSpPr>
-          <p:cNvPr id="15" name="Rectangle 14"/>
+          <p:cNvPr id="14" name="Rectangle 13"/>
           <p:cNvSpPr/>
           <p:nvPr/>
         </p:nvSpPr>
@@ -22303,14 +22094,56 @@
       </p:sp>
       <p:sp>
         <p:nvSpPr>
+          <p:cNvPr id="15" name="TextBox 14"/>
+          <p:cNvSpPr txBox="1"/>
+          <p:nvPr/>
+        </p:nvSpPr>
+        <p:spPr>
+          <a:xfrm>
+            <a:off x="621792" y="4169664"/>
+            <a:ext cx="2011680" cy="320040"/>
+          </a:xfrm>
+          <a:prstGeom prst="rect">
+            <a:avLst/>
+          </a:prstGeom>
+          <a:noFill/>
+        </p:spPr>
+        <p:txBody>
+          <a:bodyPr wrap="square" lIns="0" rIns="0" tIns="0" bIns="0" anchor="t">
+            <a:spAutoFit/>
+          </a:bodyPr>
+          <a:lstStyle/>
+          <a:p>
+            <a:pPr algn="l">
+              <a:spcBef>
+                <a:spcPts val="0"/>
+              </a:spcBef>
+              <a:spcAft>
+                <a:spcPts val="0"/>
+              </a:spcAft>
+            </a:pPr>
+            <a:r>
+              <a:rPr sz="1400" b="1" i="0">
+                <a:solidFill>
+                  <a:srgbClr val="FFFFFF"/>
+                </a:solidFill>
+                <a:latin typeface="Segoe UI"/>
+              </a:rPr>
+              <a:t>Defects</a:t>
+            </a:r>
+          </a:p>
+        </p:txBody>
+      </p:sp>
+      <p:sp>
+        <p:nvSpPr>
           <p:cNvPr id="16" name="TextBox 15"/>
           <p:cNvSpPr txBox="1"/>
           <p:nvPr/>
         </p:nvSpPr>
         <p:spPr>
           <a:xfrm>
-            <a:off x="621792" y="4169664"/>
-            <a:ext cx="2011680" cy="320040"/>
+            <a:off x="2697480" y="4178808"/>
+            <a:ext cx="4526280" cy="320040"/>
           </a:xfrm>
           <a:prstGeom prst="rect">
             <a:avLst/>
@@ -22332,48 +22165,6 @@
               </a:spcAft>
             </a:pPr>
             <a:r>
-              <a:rPr sz="1400" b="1" i="0">
-                <a:solidFill>
-                  <a:srgbClr val="FFFFFF"/>
-                </a:solidFill>
-                <a:latin typeface="Segoe UI"/>
-              </a:rPr>
-              <a:t>Defects</a:t>
-            </a:r>
-          </a:p>
-        </p:txBody>
-      </p:sp>
-      <p:sp>
-        <p:nvSpPr>
-          <p:cNvPr id="17" name="TextBox 16"/>
-          <p:cNvSpPr txBox="1"/>
-          <p:nvPr/>
-        </p:nvSpPr>
-        <p:spPr>
-          <a:xfrm>
-            <a:off x="2697480" y="4178808"/>
-            <a:ext cx="4526280" cy="320040"/>
-          </a:xfrm>
-          <a:prstGeom prst="rect">
-            <a:avLst/>
-          </a:prstGeom>
-          <a:noFill/>
-        </p:spPr>
-        <p:txBody>
-          <a:bodyPr wrap="square" lIns="0" rIns="0" tIns="0" bIns="0" anchor="t">
-            <a:spAutoFit/>
-          </a:bodyPr>
-          <a:lstStyle/>
-          <a:p>
-            <a:pPr algn="l">
-              <a:spcBef>
-                <a:spcPts val="0"/>
-              </a:spcBef>
-              <a:spcAft>
-                <a:spcPts val="0"/>
-              </a:spcAft>
-            </a:pPr>
-            <a:r>
               <a:rPr sz="1300" b="0" i="0">
                 <a:solidFill>
                   <a:srgbClr val="C6CDD1"/>
@@ -22387,7 +22178,7 @@
       </p:sp>
       <p:sp>
         <p:nvSpPr>
-          <p:cNvPr id="18" name="Rectangle 17"/>
+          <p:cNvPr id="17" name="Rectangle 16"/>
           <p:cNvSpPr/>
           <p:nvPr/>
         </p:nvSpPr>
@@ -22418,14 +22209,56 @@
       </p:sp>
       <p:sp>
         <p:nvSpPr>
+          <p:cNvPr id="18" name="TextBox 17"/>
+          <p:cNvSpPr txBox="1"/>
+          <p:nvPr/>
+        </p:nvSpPr>
+        <p:spPr>
+          <a:xfrm>
+            <a:off x="621792" y="4773168"/>
+            <a:ext cx="2011680" cy="320040"/>
+          </a:xfrm>
+          <a:prstGeom prst="rect">
+            <a:avLst/>
+          </a:prstGeom>
+          <a:noFill/>
+        </p:spPr>
+        <p:txBody>
+          <a:bodyPr wrap="square" lIns="0" rIns="0" tIns="0" bIns="0" anchor="t">
+            <a:spAutoFit/>
+          </a:bodyPr>
+          <a:lstStyle/>
+          <a:p>
+            <a:pPr algn="l">
+              <a:spcBef>
+                <a:spcPts val="0"/>
+              </a:spcBef>
+              <a:spcAft>
+                <a:spcPts val="0"/>
+              </a:spcAft>
+            </a:pPr>
+            <a:r>
+              <a:rPr sz="1400" b="1" i="0">
+                <a:solidFill>
+                  <a:srgbClr val="FFFFFF"/>
+                </a:solidFill>
+                <a:latin typeface="Segoe UI"/>
+              </a:rPr>
+              <a:t>Parameters</a:t>
+            </a:r>
+          </a:p>
+        </p:txBody>
+      </p:sp>
+      <p:sp>
+        <p:nvSpPr>
           <p:cNvPr id="19" name="TextBox 18"/>
           <p:cNvSpPr txBox="1"/>
           <p:nvPr/>
         </p:nvSpPr>
         <p:spPr>
           <a:xfrm>
-            <a:off x="621792" y="4773168"/>
-            <a:ext cx="2011680" cy="320040"/>
+            <a:off x="2697480" y="4782312"/>
+            <a:ext cx="4526280" cy="320040"/>
           </a:xfrm>
           <a:prstGeom prst="rect">
             <a:avLst/>
@@ -22447,48 +22280,6 @@
               </a:spcAft>
             </a:pPr>
             <a:r>
-              <a:rPr sz="1400" b="1" i="0">
-                <a:solidFill>
-                  <a:srgbClr val="FFFFFF"/>
-                </a:solidFill>
-                <a:latin typeface="Segoe UI"/>
-              </a:rPr>
-              <a:t>Parameters</a:t>
-            </a:r>
-          </a:p>
-        </p:txBody>
-      </p:sp>
-      <p:sp>
-        <p:nvSpPr>
-          <p:cNvPr id="20" name="TextBox 19"/>
-          <p:cNvSpPr txBox="1"/>
-          <p:nvPr/>
-        </p:nvSpPr>
-        <p:spPr>
-          <a:xfrm>
-            <a:off x="2697480" y="4782312"/>
-            <a:ext cx="4526280" cy="320040"/>
-          </a:xfrm>
-          <a:prstGeom prst="rect">
-            <a:avLst/>
-          </a:prstGeom>
-          <a:noFill/>
-        </p:spPr>
-        <p:txBody>
-          <a:bodyPr wrap="square" lIns="0" rIns="0" tIns="0" bIns="0" anchor="t">
-            <a:spAutoFit/>
-          </a:bodyPr>
-          <a:lstStyle/>
-          <a:p>
-            <a:pPr algn="l">
-              <a:spcBef>
-                <a:spcPts val="0"/>
-              </a:spcBef>
-              <a:spcAft>
-                <a:spcPts val="0"/>
-              </a:spcAft>
-            </a:pPr>
-            <a:r>
               <a:rPr sz="1300" b="0" i="0">
                 <a:solidFill>
                   <a:srgbClr val="C6CDD1"/>
@@ -22500,22 +22291,12 @@
           </a:p>
         </p:txBody>
       </p:sp>
-      <p:pic>
-        <p:nvPicPr>
-          <p:cNvPr id="21" name="!! Glass B" descr="Decorative glass panel"/>
-          <p:cNvPicPr>
-            <a:picLocks noChangeAspect="1"/>
-          </p:cNvPicPr>
+      <p:sp>
+        <p:nvSpPr>
+          <p:cNvPr id="20" name="!! Glass B"/>
+          <p:cNvSpPr/>
           <p:nvPr/>
-        </p:nvPicPr>
-        <p:blipFill>
-          <a:blip r:embed="rId3">
-            <a:alphaModFix amt="50000"/>
-          </a:blip>
-          <a:stretch>
-            <a:fillRect/>
-          </a:stretch>
-        </p:blipFill>
+        </p:nvSpPr>
         <p:spPr>
           <a:xfrm>
             <a:off x="7818120" y="1600200"/>
@@ -22524,23 +22305,14 @@
           <a:prstGeom prst="rect">
             <a:avLst/>
           </a:prstGeom>
-        </p:spPr>
-      </p:pic>
-      <p:sp>
-        <p:nvSpPr>
-          <p:cNvPr id="22" name="!! Glass B rim"/>
-          <p:cNvSpPr/>
-          <p:nvPr/>
-        </p:nvSpPr>
-        <p:spPr>
-          <a:xfrm>
-            <a:off x="7818120" y="1600200"/>
-            <a:ext cx="4114800" cy="3886200"/>
-          </a:xfrm>
-          <a:prstGeom prst="rect">
-            <a:avLst/>
-          </a:prstGeom>
-          <a:noFill/>
+          <a:blipFill rotWithShape="1">
+            <a:blip r:embed="rId3">
+              <a:alphaModFix amt="50000"/>
+            </a:blip>
+            <a:stretch>
+              <a:fillRect/>
+            </a:stretch>
+          </a:blipFill>
           <a:ln w="9525">
             <a:solidFill>
               <a:srgbClr val="FFFFFF">
@@ -22559,14 +22331,98 @@
       </p:sp>
       <p:sp>
         <p:nvSpPr>
+          <p:cNvPr id="21" name="TextBox 20"/>
+          <p:cNvSpPr txBox="1"/>
+          <p:nvPr/>
+        </p:nvSpPr>
+        <p:spPr>
+          <a:xfrm>
+            <a:off x="8183879" y="1901952"/>
+            <a:ext cx="5486400" cy="274320"/>
+          </a:xfrm>
+          <a:prstGeom prst="rect">
+            <a:avLst/>
+          </a:prstGeom>
+          <a:noFill/>
+        </p:spPr>
+        <p:txBody>
+          <a:bodyPr wrap="square" lIns="0" rIns="0" tIns="0" bIns="0" anchor="t">
+            <a:spAutoFit/>
+          </a:bodyPr>
+          <a:lstStyle/>
+          <a:p>
+            <a:pPr algn="l">
+              <a:spcBef>
+                <a:spcPts val="0"/>
+              </a:spcBef>
+              <a:spcAft>
+                <a:spcPts val="0"/>
+              </a:spcAft>
+            </a:pPr>
+            <a:r>
+              <a:rPr sz="1600" b="1" i="0">
+                <a:solidFill>
+                  <a:srgbClr val="D5FB00"/>
+                </a:solidFill>
+                <a:latin typeface="Segoe UI"/>
+              </a:rPr>
+              <a:t>HOW I LEARNED IT</a:t>
+            </a:r>
+          </a:p>
+        </p:txBody>
+      </p:sp>
+      <p:sp>
+        <p:nvSpPr>
+          <p:cNvPr id="22" name="TextBox 21"/>
+          <p:cNvSpPr txBox="1"/>
+          <p:nvPr/>
+        </p:nvSpPr>
+        <p:spPr>
+          <a:xfrm>
+            <a:off x="8183879" y="2331720"/>
+            <a:ext cx="3474720" cy="457200"/>
+          </a:xfrm>
+          <a:prstGeom prst="rect">
+            <a:avLst/>
+          </a:prstGeom>
+          <a:noFill/>
+        </p:spPr>
+        <p:txBody>
+          <a:bodyPr wrap="square" lIns="0" rIns="0" tIns="0" bIns="0" anchor="t">
+            <a:spAutoFit/>
+          </a:bodyPr>
+          <a:lstStyle/>
+          <a:p>
+            <a:pPr algn="l">
+              <a:spcBef>
+                <a:spcPts val="0"/>
+              </a:spcBef>
+              <a:spcAft>
+                <a:spcPts val="0"/>
+              </a:spcAft>
+            </a:pPr>
+            <a:r>
+              <a:rPr sz="2600" b="1" i="0">
+                <a:solidFill>
+                  <a:srgbClr val="D5FB00"/>
+                </a:solidFill>
+                <a:latin typeface="Segoe UI"/>
+              </a:rPr>
+              <a:t>616</a:t>
+            </a:r>
+          </a:p>
+        </p:txBody>
+      </p:sp>
+      <p:sp>
+        <p:nvSpPr>
           <p:cNvPr id="23" name="TextBox 22"/>
           <p:cNvSpPr txBox="1"/>
           <p:nvPr/>
         </p:nvSpPr>
         <p:spPr>
           <a:xfrm>
-            <a:off x="8183879" y="1901952"/>
-            <a:ext cx="5486400" cy="274320"/>
+            <a:off x="8183879" y="2788920"/>
+            <a:ext cx="3429000" cy="457200"/>
           </a:xfrm>
           <a:prstGeom prst="rect">
             <a:avLst/>
@@ -22588,13 +22444,13 @@
               </a:spcAft>
             </a:pPr>
             <a:r>
-              <a:rPr sz="1600" b="1" i="0">
-                <a:solidFill>
-                  <a:srgbClr val="D5FB00"/>
+              <a:rPr sz="1200" b="0" i="0">
+                <a:solidFill>
+                  <a:srgbClr val="C6CDD1"/>
                 </a:solidFill>
                 <a:latin typeface="Segoe UI"/>
               </a:rPr>
-              <a:t>HOW I LEARNED IT</a:t>
+              <a:t>pages of training manual and customer standard, read page by page.</a:t>
             </a:r>
           </a:p>
         </p:txBody>
@@ -22607,7 +22463,7 @@
         </p:nvSpPr>
         <p:spPr>
           <a:xfrm>
-            <a:off x="8183879" y="2331720"/>
+            <a:off x="8183879" y="3337560"/>
             <a:ext cx="3474720" cy="457200"/>
           </a:xfrm>
           <a:prstGeom prst="rect">
@@ -22636,7 +22492,7 @@
                 </a:solidFill>
                 <a:latin typeface="Segoe UI"/>
               </a:rPr>
-              <a:t>616</a:t>
+              <a:t>Daily</a:t>
             </a:r>
           </a:p>
         </p:txBody>
@@ -22649,7 +22505,7 @@
         </p:nvSpPr>
         <p:spPr>
           <a:xfrm>
-            <a:off x="8183879" y="2788920"/>
+            <a:off x="8183879" y="3794760"/>
             <a:ext cx="3429000" cy="457200"/>
           </a:xfrm>
           <a:prstGeom prst="rect">
@@ -22678,7 +22534,7 @@
                 </a:solidFill>
                 <a:latin typeface="Segoe UI"/>
               </a:rPr>
-              <a:t>pages of training manual and customer standard, read page by page.</a:t>
+              <a:t>at the cells, attending robot stops with the technicians.</a:t>
             </a:r>
           </a:p>
         </p:txBody>
@@ -22691,7 +22547,7 @@
         </p:nvSpPr>
         <p:spPr>
           <a:xfrm>
-            <a:off x="8183879" y="3337560"/>
+            <a:off x="8183879" y="4343400"/>
             <a:ext cx="3474720" cy="457200"/>
           </a:xfrm>
           <a:prstGeom prst="rect">
@@ -22720,7 +22576,7 @@
                 </a:solidFill>
                 <a:latin typeface="Segoe UI"/>
               </a:rPr>
-              <a:t>Daily</a:t>
+              <a:t>25</a:t>
             </a:r>
           </a:p>
         </p:txBody>
@@ -22728,90 +22584,6 @@
       <p:sp>
         <p:nvSpPr>
           <p:cNvPr id="27" name="TextBox 26"/>
-          <p:cNvSpPr txBox="1"/>
-          <p:nvPr/>
-        </p:nvSpPr>
-        <p:spPr>
-          <a:xfrm>
-            <a:off x="8183879" y="3794760"/>
-            <a:ext cx="3429000" cy="457200"/>
-          </a:xfrm>
-          <a:prstGeom prst="rect">
-            <a:avLst/>
-          </a:prstGeom>
-          <a:noFill/>
-        </p:spPr>
-        <p:txBody>
-          <a:bodyPr wrap="square" lIns="0" rIns="0" tIns="0" bIns="0" anchor="t">
-            <a:spAutoFit/>
-          </a:bodyPr>
-          <a:lstStyle/>
-          <a:p>
-            <a:pPr algn="l">
-              <a:spcBef>
-                <a:spcPts val="0"/>
-              </a:spcBef>
-              <a:spcAft>
-                <a:spcPts val="0"/>
-              </a:spcAft>
-            </a:pPr>
-            <a:r>
-              <a:rPr sz="1200" b="0" i="0">
-                <a:solidFill>
-                  <a:srgbClr val="C6CDD1"/>
-                </a:solidFill>
-                <a:latin typeface="Segoe UI"/>
-              </a:rPr>
-              <a:t>at the cells, attending robot stops with the technicians.</a:t>
-            </a:r>
-          </a:p>
-        </p:txBody>
-      </p:sp>
-      <p:sp>
-        <p:nvSpPr>
-          <p:cNvPr id="28" name="TextBox 27"/>
-          <p:cNvSpPr txBox="1"/>
-          <p:nvPr/>
-        </p:nvSpPr>
-        <p:spPr>
-          <a:xfrm>
-            <a:off x="8183879" y="4343400"/>
-            <a:ext cx="3474720" cy="457200"/>
-          </a:xfrm>
-          <a:prstGeom prst="rect">
-            <a:avLst/>
-          </a:prstGeom>
-          <a:noFill/>
-        </p:spPr>
-        <p:txBody>
-          <a:bodyPr wrap="square" lIns="0" rIns="0" tIns="0" bIns="0" anchor="t">
-            <a:spAutoFit/>
-          </a:bodyPr>
-          <a:lstStyle/>
-          <a:p>
-            <a:pPr algn="l">
-              <a:spcBef>
-                <a:spcPts val="0"/>
-              </a:spcBef>
-              <a:spcAft>
-                <a:spcPts val="0"/>
-              </a:spcAft>
-            </a:pPr>
-            <a:r>
-              <a:rPr sz="2600" b="1" i="0">
-                <a:solidFill>
-                  <a:srgbClr val="D5FB00"/>
-                </a:solidFill>
-                <a:latin typeface="Segoe UI"/>
-              </a:rPr>
-              <a:t>25</a:t>
-            </a:r>
-          </a:p>
-        </p:txBody>
-      </p:sp>
-      <p:sp>
-        <p:nvSpPr>
-          <p:cNvPr id="29" name="TextBox 28"/>
           <p:cNvSpPr txBox="1"/>
           <p:nvPr/>
         </p:nvSpPr>
@@ -24911,22 +24683,12 @@
           </a:p>
         </p:txBody>
       </p:sp>
-      <p:pic>
-        <p:nvPicPr>
-          <p:cNvPr id="4" name="!! Glass A" descr="Decorative glass panel"/>
-          <p:cNvPicPr>
-            <a:picLocks noChangeAspect="1"/>
-          </p:cNvPicPr>
+      <p:sp>
+        <p:nvSpPr>
+          <p:cNvPr id="4" name="!! Glass A"/>
+          <p:cNvSpPr/>
           <p:nvPr/>
-        </p:nvPicPr>
-        <p:blipFill>
-          <a:blip r:embed="rId2">
-            <a:alphaModFix amt="50000"/>
-          </a:blip>
-          <a:stretch>
-            <a:fillRect/>
-          </a:stretch>
-        </p:blipFill>
+        </p:nvSpPr>
         <p:spPr>
           <a:xfrm>
             <a:off x="256032" y="1600200"/>
@@ -24935,23 +24697,14 @@
           <a:prstGeom prst="rect">
             <a:avLst/>
           </a:prstGeom>
-        </p:spPr>
-      </p:pic>
-      <p:sp>
-        <p:nvSpPr>
-          <p:cNvPr id="5" name="!! Glass A rim"/>
-          <p:cNvSpPr/>
-          <p:nvPr/>
-        </p:nvSpPr>
-        <p:spPr>
-          <a:xfrm>
-            <a:off x="256032" y="1600200"/>
-            <a:ext cx="4754880" cy="3886200"/>
-          </a:xfrm>
-          <a:prstGeom prst="rect">
-            <a:avLst/>
-          </a:prstGeom>
-          <a:noFill/>
+          <a:blipFill rotWithShape="1">
+            <a:blip r:embed="rId2">
+              <a:alphaModFix amt="50000"/>
+            </a:blip>
+            <a:stretch>
+              <a:fillRect/>
+            </a:stretch>
+          </a:blipFill>
           <a:ln w="9525">
             <a:solidFill>
               <a:srgbClr val="FFFFFF">
@@ -24970,14 +24723,56 @@
       </p:sp>
       <p:sp>
         <p:nvSpPr>
+          <p:cNvPr id="5" name="TextBox 4"/>
+          <p:cNvSpPr txBox="1"/>
+          <p:nvPr/>
+        </p:nvSpPr>
+        <p:spPr>
+          <a:xfrm>
+            <a:off x="621792" y="1828800"/>
+            <a:ext cx="4023360" cy="822960"/>
+          </a:xfrm>
+          <a:prstGeom prst="rect">
+            <a:avLst/>
+          </a:prstGeom>
+          <a:noFill/>
+        </p:spPr>
+        <p:txBody>
+          <a:bodyPr wrap="square" lIns="0" rIns="0" tIns="0" bIns="0" anchor="t">
+            <a:spAutoFit/>
+          </a:bodyPr>
+          <a:lstStyle/>
+          <a:p>
+            <a:pPr algn="l">
+              <a:spcBef>
+                <a:spcPts val="0"/>
+              </a:spcBef>
+              <a:spcAft>
+                <a:spcPts val="0"/>
+              </a:spcAft>
+            </a:pPr>
+            <a:r>
+              <a:rPr sz="5400" b="1" i="0">
+                <a:solidFill>
+                  <a:srgbClr val="D5FB00"/>
+                </a:solidFill>
+                <a:latin typeface="Segoe UI"/>
+              </a:rPr>
+              <a:t>60%</a:t>
+            </a:r>
+          </a:p>
+        </p:txBody>
+      </p:sp>
+      <p:sp>
+        <p:nvSpPr>
           <p:cNvPr id="6" name="TextBox 5"/>
           <p:cNvSpPr txBox="1"/>
           <p:nvPr/>
         </p:nvSpPr>
         <p:spPr>
           <a:xfrm>
-            <a:off x="621792" y="1828800"/>
-            <a:ext cx="4023360" cy="822960"/>
+            <a:off x="621792" y="2697480"/>
+            <a:ext cx="4023360" cy="548640"/>
           </a:xfrm>
           <a:prstGeom prst="rect">
             <a:avLst/>
@@ -24999,48 +24794,6 @@
               </a:spcAft>
             </a:pPr>
             <a:r>
-              <a:rPr sz="5400" b="1" i="0">
-                <a:solidFill>
-                  <a:srgbClr val="D5FB00"/>
-                </a:solidFill>
-                <a:latin typeface="Segoe UI"/>
-              </a:rPr>
-              <a:t>60%</a:t>
-            </a:r>
-          </a:p>
-        </p:txBody>
-      </p:sp>
-      <p:sp>
-        <p:nvSpPr>
-          <p:cNvPr id="7" name="TextBox 6"/>
-          <p:cNvSpPr txBox="1"/>
-          <p:nvPr/>
-        </p:nvSpPr>
-        <p:spPr>
-          <a:xfrm>
-            <a:off x="621792" y="2697480"/>
-            <a:ext cx="4023360" cy="548640"/>
-          </a:xfrm>
-          <a:prstGeom prst="rect">
-            <a:avLst/>
-          </a:prstGeom>
-          <a:noFill/>
-        </p:spPr>
-        <p:txBody>
-          <a:bodyPr wrap="square" lIns="0" rIns="0" tIns="0" bIns="0" anchor="t">
-            <a:spAutoFit/>
-          </a:bodyPr>
-          <a:lstStyle/>
-          <a:p>
-            <a:pPr algn="l">
-              <a:spcBef>
-                <a:spcPts val="0"/>
-              </a:spcBef>
-              <a:spcAft>
-                <a:spcPts val="0"/>
-              </a:spcAft>
-            </a:pPr>
-            <a:r>
               <a:rPr sz="1400" b="1" i="0">
                 <a:solidFill>
                   <a:srgbClr val="FFFFFF"/>
@@ -25054,7 +24807,7 @@
       </p:sp>
       <p:sp>
         <p:nvSpPr>
-          <p:cNvPr id="8" name="Rectangle 7"/>
+          <p:cNvPr id="7" name="Rectangle 6"/>
           <p:cNvSpPr/>
           <p:nvPr/>
         </p:nvSpPr>
@@ -25085,7 +24838,7 @@
       </p:sp>
       <p:sp>
         <p:nvSpPr>
-          <p:cNvPr id="9" name="Rectangle 8"/>
+          <p:cNvPr id="8" name="Rectangle 7"/>
           <p:cNvSpPr/>
           <p:nvPr/>
         </p:nvSpPr>
@@ -25114,14 +24867,56 @@
       </p:sp>
       <p:sp>
         <p:nvSpPr>
+          <p:cNvPr id="9" name="TextBox 8"/>
+          <p:cNvSpPr txBox="1"/>
+          <p:nvPr/>
+        </p:nvSpPr>
+        <p:spPr>
+          <a:xfrm>
+            <a:off x="621792" y="3886200"/>
+            <a:ext cx="4023360" cy="548640"/>
+          </a:xfrm>
+          <a:prstGeom prst="rect">
+            <a:avLst/>
+          </a:prstGeom>
+          <a:noFill/>
+        </p:spPr>
+        <p:txBody>
+          <a:bodyPr wrap="square" lIns="0" rIns="0" tIns="0" bIns="0" anchor="t">
+            <a:spAutoFit/>
+          </a:bodyPr>
+          <a:lstStyle/>
+          <a:p>
+            <a:pPr algn="l">
+              <a:spcBef>
+                <a:spcPts val="0"/>
+              </a:spcBef>
+              <a:spcAft>
+                <a:spcPts val="0"/>
+              </a:spcAft>
+            </a:pPr>
+            <a:r>
+              <a:rPr sz="3000" b="1" i="0">
+                <a:solidFill>
+                  <a:srgbClr val="FFFFFF"/>
+                </a:solidFill>
+                <a:latin typeface="Segoe UI"/>
+              </a:rPr>
+              <a:t>40%</a:t>
+            </a:r>
+          </a:p>
+        </p:txBody>
+      </p:sp>
+      <p:sp>
+        <p:nvSpPr>
           <p:cNvPr id="10" name="TextBox 9"/>
           <p:cNvSpPr txBox="1"/>
           <p:nvPr/>
         </p:nvSpPr>
         <p:spPr>
           <a:xfrm>
-            <a:off x="621792" y="3886200"/>
-            <a:ext cx="4023360" cy="548640"/>
+            <a:off x="621792" y="4434840"/>
+            <a:ext cx="4023360" cy="822960"/>
           </a:xfrm>
           <a:prstGeom prst="rect">
             <a:avLst/>
@@ -25143,48 +24938,6 @@
               </a:spcAft>
             </a:pPr>
             <a:r>
-              <a:rPr sz="3000" b="1" i="0">
-                <a:solidFill>
-                  <a:srgbClr val="FFFFFF"/>
-                </a:solidFill>
-                <a:latin typeface="Segoe UI"/>
-              </a:rPr>
-              <a:t>40%</a:t>
-            </a:r>
-          </a:p>
-        </p:txBody>
-      </p:sp>
-      <p:sp>
-        <p:nvSpPr>
-          <p:cNvPr id="11" name="TextBox 10"/>
-          <p:cNvSpPr txBox="1"/>
-          <p:nvPr/>
-        </p:nvSpPr>
-        <p:spPr>
-          <a:xfrm>
-            <a:off x="621792" y="4434840"/>
-            <a:ext cx="4023360" cy="822960"/>
-          </a:xfrm>
-          <a:prstGeom prst="rect">
-            <a:avLst/>
-          </a:prstGeom>
-          <a:noFill/>
-        </p:spPr>
-        <p:txBody>
-          <a:bodyPr wrap="square" lIns="0" rIns="0" tIns="0" bIns="0" anchor="t">
-            <a:spAutoFit/>
-          </a:bodyPr>
-          <a:lstStyle/>
-          <a:p>
-            <a:pPr algn="l">
-              <a:spcBef>
-                <a:spcPts val="0"/>
-              </a:spcBef>
-              <a:spcAft>
-                <a:spcPts val="0"/>
-              </a:spcAft>
-            </a:pPr>
-            <a:r>
               <a:rPr sz="1200" b="0" i="0">
                 <a:solidFill>
                   <a:srgbClr val="C6CDD1"/>
@@ -25196,22 +24949,12 @@
           </a:p>
         </p:txBody>
       </p:sp>
-      <p:pic>
-        <p:nvPicPr>
-          <p:cNvPr id="12" name="!! Glass B" descr="Decorative glass panel"/>
-          <p:cNvPicPr>
-            <a:picLocks noChangeAspect="1"/>
-          </p:cNvPicPr>
+      <p:sp>
+        <p:nvSpPr>
+          <p:cNvPr id="11" name="!! Glass B"/>
+          <p:cNvSpPr/>
           <p:nvPr/>
-        </p:nvPicPr>
-        <p:blipFill>
-          <a:blip r:embed="rId3">
-            <a:alphaModFix amt="50000"/>
-          </a:blip>
-          <a:stretch>
-            <a:fillRect/>
-          </a:stretch>
-        </p:blipFill>
+        </p:nvSpPr>
         <p:spPr>
           <a:xfrm>
             <a:off x="5303520" y="1600200"/>
@@ -25220,23 +24963,14 @@
           <a:prstGeom prst="rect">
             <a:avLst/>
           </a:prstGeom>
-        </p:spPr>
-      </p:pic>
-      <p:sp>
-        <p:nvSpPr>
-          <p:cNvPr id="13" name="!! Glass B rim"/>
-          <p:cNvSpPr/>
-          <p:nvPr/>
-        </p:nvSpPr>
-        <p:spPr>
-          <a:xfrm>
-            <a:off x="5303520" y="1600200"/>
-            <a:ext cx="6629400" cy="3886200"/>
-          </a:xfrm>
-          <a:prstGeom prst="rect">
-            <a:avLst/>
-          </a:prstGeom>
-          <a:noFill/>
+          <a:blipFill rotWithShape="1">
+            <a:blip r:embed="rId3">
+              <a:alphaModFix amt="50000"/>
+            </a:blip>
+            <a:stretch>
+              <a:fillRect/>
+            </a:stretch>
+          </a:blipFill>
           <a:ln w="9525">
             <a:solidFill>
               <a:srgbClr val="FFFFFF">
@@ -25255,7 +24989,7 @@
       </p:sp>
       <p:sp>
         <p:nvSpPr>
-          <p:cNvPr id="14" name="TextBox 13"/>
+          <p:cNvPr id="12" name="TextBox 11"/>
           <p:cNvSpPr txBox="1"/>
           <p:nvPr/>
         </p:nvSpPr>
@@ -25297,7 +25031,7 @@
       </p:sp>
       <p:sp>
         <p:nvSpPr>
-          <p:cNvPr id="15" name="TextBox 14"/>
+          <p:cNvPr id="13" name="TextBox 12"/>
           <p:cNvSpPr txBox="1"/>
           <p:nvPr/>
         </p:nvSpPr>
@@ -25342,7 +25076,7 @@
       </p:sp>
       <p:sp>
         <p:nvSpPr>
-          <p:cNvPr id="16" name="Rectangle 15"/>
+          <p:cNvPr id="14" name="Rectangle 13"/>
           <p:cNvSpPr/>
           <p:nvPr/>
         </p:nvSpPr>
@@ -25371,7 +25105,7 @@
       </p:sp>
       <p:sp>
         <p:nvSpPr>
-          <p:cNvPr id="17" name="TextBox 16"/>
+          <p:cNvPr id="15" name="TextBox 14"/>
           <p:cNvSpPr txBox="1"/>
           <p:nvPr/>
         </p:nvSpPr>
@@ -25413,7 +25147,7 @@
       </p:sp>
       <p:sp>
         <p:nvSpPr>
-          <p:cNvPr id="18" name="TextBox 17"/>
+          <p:cNvPr id="16" name="TextBox 15"/>
           <p:cNvSpPr txBox="1"/>
           <p:nvPr/>
         </p:nvSpPr>
